--- a/军民融合/ppt/2A.pptx
+++ b/军民融合/ppt/2A.pptx
@@ -5,10 +5,13 @@
     <p:sldMasterId id="2147483648" r:id="rId1"/>
   </p:sldMasterIdLst>
   <p:sldIdLst>
-    <p:sldId id="256" r:id="rId3"/>
+    <p:sldId id="257" r:id="rId3"/>
   </p:sldIdLst>
   <p:sldSz cx="12192000" cy="6858000"/>
   <p:notesSz cx="6858000" cy="9144000"/>
+  <p:custDataLst>
+    <p:tags r:id="rId7"/>
+  </p:custDataLst>
   <p:defaultTextStyle>
     <a:defPPr>
       <a:defRPr lang="zh-CN"/>
@@ -107,12 +110,12 @@
   <p:extLst>
     <p:ext uri="{EFAFB233-063F-42B5-8137-9DF3F51BA10A}">
       <p15:sldGuideLst xmlns:p15="http://schemas.microsoft.com/office/powerpoint/2012/main">
-        <p15:guide id="1" orient="horz" pos="2180" userDrawn="1">
+        <p15:guide id="1" orient="horz" pos="2220" userDrawn="1">
           <p15:clr>
             <a:srgbClr val="A4A3A4"/>
           </p15:clr>
         </p15:guide>
-        <p15:guide id="2" pos="3823" userDrawn="1">
+        <p15:guide id="2" pos="3897" userDrawn="1">
           <p15:clr>
             <a:srgbClr val="A4A3A4"/>
           </p15:clr>
@@ -3071,39 +3074,24 @@
         <p:cNvGrpSpPr/>
         <p:nvPr/>
       </p:nvGrpSpPr>
-      <p:grpSpPr>
-        <a:xfrm>
-          <a:off x="0" y="0"/>
-          <a:ext cx="0" cy="0"/>
-          <a:chOff x="0" y="0"/>
-          <a:chExt cx="0" cy="0"/>
-        </a:xfrm>
-      </p:grpSpPr>
-      <p:sp>
-        <p:nvSpPr>
-          <p:cNvPr id="81" name="圆角矩形 80"/>
+      <p:grpSpPr/>
+      <p:sp>
+        <p:nvSpPr>
+          <p:cNvPr id="32" name="矩形 31"/>
           <p:cNvSpPr/>
           <p:nvPr/>
         </p:nvSpPr>
         <p:spPr>
           <a:xfrm>
-            <a:off x="1118870" y="199390"/>
-            <a:ext cx="9996170" cy="6202045"/>
-          </a:xfrm>
-          <a:prstGeom prst="roundRect">
-            <a:avLst>
-              <a:gd name="adj" fmla="val 3556"/>
-            </a:avLst>
-          </a:prstGeom>
-          <a:noFill/>
-          <a:ln w="25400" cmpd="sng">
-            <a:solidFill>
-              <a:schemeClr val="accent1">
-                <a:shade val="50000"/>
-              </a:schemeClr>
-            </a:solidFill>
-            <a:prstDash val="dash"/>
-          </a:ln>
+            <a:off x="8581465" y="1902460"/>
+            <a:ext cx="2447925" cy="3217545"/>
+          </a:xfrm>
+          <a:prstGeom prst="rect">
+            <a:avLst/>
+          </a:prstGeom>
+          <a:solidFill>
+            <a:srgbClr val="FADBDF"/>
+          </a:solidFill>
         </p:spPr>
         <p:style>
           <a:lnRef idx="2">
@@ -3123,7 +3111,6 @@
         </p:style>
         <p:txBody>
           <a:bodyPr rtlCol="0" anchor="ctr"/>
-          <a:lstStyle/>
           <a:p>
             <a:pPr algn="ctr"/>
             <a:endParaRPr lang="zh-CN" altLang="en-US"/>
@@ -3132,30 +3119,27 @@
       </p:sp>
       <p:sp>
         <p:nvSpPr>
-          <p:cNvPr id="10" name="矩形 9"/>
+          <p:cNvPr id="40" name="圆角矩形 39"/>
           <p:cNvSpPr/>
           <p:nvPr/>
         </p:nvSpPr>
         <p:spPr>
           <a:xfrm>
-            <a:off x="1282700" y="1097915"/>
-            <a:ext cx="6120765" cy="2365200"/>
-          </a:xfrm>
-          <a:prstGeom prst="rect">
+            <a:off x="8767203" y="3709670"/>
+            <a:ext cx="2076450" cy="1260000"/>
+          </a:xfrm>
+          <a:prstGeom prst="roundRect">
             <a:avLst/>
           </a:prstGeom>
           <a:solidFill>
-            <a:srgbClr val="DAE3F5"/>
+            <a:schemeClr val="bg1"/>
           </a:solidFill>
-          <a:extLst>
-            <a:ext uri="{909E8E84-426E-40DD-AFC4-6F175D3DCCD1}">
-              <a14:hiddenFill xmlns:a14="http://schemas.microsoft.com/office/drawing/2010/main">
-                <a:solidFill>
-                  <a:schemeClr val="accent1"/>
-                </a:solidFill>
-              </a14:hiddenFill>
-            </a:ext>
-          </a:extLst>
+          <a:ln w="34925" cmpd="sng">
+            <a:solidFill>
+              <a:srgbClr val="C00000"/>
+            </a:solidFill>
+            <a:prstDash val="solid"/>
+          </a:ln>
         </p:spPr>
         <p:style>
           <a:lnRef idx="2">
@@ -3183,13 +3167,114 @@
       </p:sp>
       <p:sp>
         <p:nvSpPr>
+          <p:cNvPr id="124" name="文本框 123"/>
+          <p:cNvSpPr txBox="1"/>
+          <p:nvPr/>
+        </p:nvSpPr>
+        <p:spPr>
+          <a:xfrm>
+            <a:off x="9495790" y="4064635"/>
+            <a:ext cx="638175" cy="706755"/>
+          </a:xfrm>
+          <a:prstGeom prst="rect">
+            <a:avLst/>
+          </a:prstGeom>
+          <a:noFill/>
+        </p:spPr>
+        <p:txBody>
+          <a:bodyPr wrap="square" rtlCol="0">
+            <a:spAutoFit/>
+          </a:bodyPr>
+          <a:p>
+            <a:pPr algn="ctr"/>
+            <a:r>
+              <a:rPr lang="zh-CN" altLang="en-US" sz="1000" b="1"/>
+              <a:t>流式</a:t>
+            </a:r>
+            <a:endParaRPr lang="zh-CN" altLang="en-US" sz="1000" b="1"/>
+          </a:p>
+          <a:p>
+            <a:pPr algn="ctr"/>
+            <a:endParaRPr lang="zh-CN" altLang="en-US" sz="1000" b="1"/>
+          </a:p>
+          <a:p>
+            <a:pPr algn="ctr"/>
+            <a:r>
+              <a:rPr lang="zh-CN" altLang="en-US" sz="1000" b="1"/>
+              <a:t>贪心</a:t>
+            </a:r>
+            <a:endParaRPr lang="zh-CN" altLang="en-US" sz="1000" b="1"/>
+          </a:p>
+          <a:p>
+            <a:pPr algn="ctr"/>
+            <a:r>
+              <a:rPr lang="zh-CN" altLang="en-US" sz="1000" b="1"/>
+              <a:t>策略</a:t>
+            </a:r>
+            <a:endParaRPr lang="zh-CN" altLang="en-US" sz="1000" b="1"/>
+          </a:p>
+        </p:txBody>
+      </p:sp>
+      <p:sp>
+        <p:nvSpPr>
+          <p:cNvPr id="81" name="圆角矩形 80"/>
+          <p:cNvSpPr/>
+          <p:nvPr/>
+        </p:nvSpPr>
+        <p:spPr>
+          <a:xfrm>
+            <a:off x="1158875" y="645160"/>
+            <a:ext cx="10075545" cy="5528945"/>
+          </a:xfrm>
+          <a:prstGeom prst="roundRect">
+            <a:avLst>
+              <a:gd name="adj" fmla="val 3556"/>
+            </a:avLst>
+          </a:prstGeom>
+          <a:noFill/>
+          <a:ln w="25400" cmpd="sng">
+            <a:solidFill>
+              <a:schemeClr val="accent1">
+                <a:shade val="50000"/>
+              </a:schemeClr>
+            </a:solidFill>
+            <a:prstDash val="dash"/>
+          </a:ln>
+        </p:spPr>
+        <p:style>
+          <a:lnRef idx="2">
+            <a:schemeClr val="accent1">
+              <a:lumMod val="75000"/>
+            </a:schemeClr>
+          </a:lnRef>
+          <a:fillRef idx="1">
+            <a:schemeClr val="accent1"/>
+          </a:fillRef>
+          <a:effectRef idx="0">
+            <a:srgbClr val="FFFFFF"/>
+          </a:effectRef>
+          <a:fontRef idx="minor">
+            <a:schemeClr val="lt1"/>
+          </a:fontRef>
+        </p:style>
+        <p:txBody>
+          <a:bodyPr rtlCol="0" anchor="ctr"/>
+          <a:lstStyle/>
+          <a:p>
+            <a:pPr algn="ctr"/>
+            <a:endParaRPr lang="zh-CN" altLang="en-US"/>
+          </a:p>
+        </p:txBody>
+      </p:sp>
+      <p:sp>
+        <p:nvSpPr>
           <p:cNvPr id="8" name="矩形: 圆角 3"/>
           <p:cNvSpPr/>
           <p:nvPr/>
         </p:nvSpPr>
         <p:spPr>
           <a:xfrm>
-            <a:off x="2731453" y="-70485"/>
+            <a:off x="2731453" y="375285"/>
             <a:ext cx="6729095" cy="477520"/>
           </a:xfrm>
           <a:prstGeom prst="roundRect">
@@ -3247,7 +3332,7 @@
                 <a:ea typeface="微软雅黑" panose="020B0503020204020204" charset="-122"/>
                 <a:cs typeface="微软雅黑" panose="020B0503020204020204" charset="-122"/>
               </a:rPr>
-              <a:t>面向端地协同的频谱数据存传耦合价值评估方法</a:t>
+              <a:t>事件窗口驱动的频谱数据价值评估模型</a:t>
             </a:r>
             <a:endParaRPr lang="zh-CN" altLang="en-US" b="1" i="0" dirty="0">
               <a:effectLst/>
@@ -3260,14 +3345,14 @@
       </p:sp>
       <p:sp>
         <p:nvSpPr>
-          <p:cNvPr id="11" name="矩形 10"/>
+          <p:cNvPr id="10" name="矩形 9"/>
           <p:cNvSpPr/>
           <p:nvPr/>
         </p:nvSpPr>
         <p:spPr>
           <a:xfrm>
-            <a:off x="1268730" y="3541395"/>
-            <a:ext cx="6106795" cy="2682240"/>
+            <a:off x="1282700" y="1069340"/>
+            <a:ext cx="1287145" cy="4862195"/>
           </a:xfrm>
           <a:prstGeom prst="rect">
             <a:avLst/>
@@ -3309,16 +3394,301 @@
           </a:p>
         </p:txBody>
       </p:sp>
-      <p:sp>
-        <p:nvSpPr>
-          <p:cNvPr id="12" name="矩形 11"/>
+      <p:grpSp>
+        <p:nvGrpSpPr>
+          <p:cNvPr id="19" name="组合 18"/>
+          <p:cNvGrpSpPr/>
+          <p:nvPr/>
+        </p:nvGrpSpPr>
+        <p:grpSpPr>
+          <a:xfrm>
+            <a:off x="1230630" y="1712595"/>
+            <a:ext cx="1391920" cy="3743325"/>
+            <a:chOff x="1938" y="2937"/>
+            <a:chExt cx="2192" cy="4802"/>
+          </a:xfrm>
+        </p:grpSpPr>
+        <p:sp>
+          <p:nvSpPr>
+            <p:cNvPr id="6" name="圆角矩形 5"/>
+            <p:cNvSpPr/>
+            <p:nvPr/>
+          </p:nvSpPr>
+          <p:spPr>
+            <a:xfrm>
+              <a:off x="2193" y="2937"/>
+              <a:ext cx="1682" cy="4802"/>
+            </a:xfrm>
+            <a:prstGeom prst="roundRect">
+              <a:avLst/>
+            </a:prstGeom>
+            <a:solidFill>
+              <a:schemeClr val="bg1"/>
+            </a:solidFill>
+          </p:spPr>
+          <p:style>
+            <a:lnRef idx="2">
+              <a:schemeClr val="accent1">
+                <a:lumMod val="75000"/>
+              </a:schemeClr>
+            </a:lnRef>
+            <a:fillRef idx="1">
+              <a:schemeClr val="accent1"/>
+            </a:fillRef>
+            <a:effectRef idx="0">
+              <a:srgbClr val="FFFFFF"/>
+            </a:effectRef>
+            <a:fontRef idx="minor">
+              <a:schemeClr val="lt1"/>
+            </a:fontRef>
+          </p:style>
+          <p:txBody>
+            <a:bodyPr rtlCol="0" anchor="ctr"/>
+            <a:p>
+              <a:pPr algn="ctr"/>
+              <a:endParaRPr lang="zh-CN" altLang="en-US"/>
+            </a:p>
+          </p:txBody>
+        </p:sp>
+        <p:sp>
+          <p:nvSpPr>
+            <p:cNvPr id="17" name="文本框 16"/>
+            <p:cNvSpPr txBox="1"/>
+            <p:nvPr/>
+          </p:nvSpPr>
+          <p:spPr>
+            <a:xfrm>
+              <a:off x="1938" y="3094"/>
+              <a:ext cx="2192" cy="1065"/>
+            </a:xfrm>
+            <a:prstGeom prst="rect">
+              <a:avLst/>
+            </a:prstGeom>
+            <a:noFill/>
+          </p:spPr>
+          <p:txBody>
+            <a:bodyPr wrap="square" rtlCol="0">
+              <a:spAutoFit/>
+            </a:bodyPr>
+            <a:p>
+              <a:pPr algn="ctr"/>
+              <a:r>
+                <a:rPr lang="zh-CN" altLang="en-US" sz="1600" b="1"/>
+                <a:t>连续监测</a:t>
+              </a:r>
+              <a:endParaRPr lang="zh-CN" altLang="en-US" sz="1600" b="1"/>
+            </a:p>
+            <a:p>
+              <a:pPr algn="ctr"/>
+              <a:r>
+                <a:rPr lang="zh-CN" altLang="en-US" sz="1600" b="1"/>
+                <a:t>宽频段</a:t>
+              </a:r>
+              <a:endParaRPr lang="zh-CN" altLang="en-US" sz="1600" b="1"/>
+            </a:p>
+            <a:p>
+              <a:pPr algn="ctr"/>
+              <a:r>
+                <a:rPr lang="zh-CN" altLang="en-US" sz="1600" b="1"/>
+                <a:t>频谱流</a:t>
+              </a:r>
+              <a:endParaRPr lang="zh-CN" altLang="en-US" sz="1600" b="1"/>
+            </a:p>
+          </p:txBody>
+        </p:sp>
+        <p:pic>
+          <p:nvPicPr>
+            <p:cNvPr id="5" name="图片 4"/>
+            <p:cNvPicPr/>
+            <p:nvPr/>
+          </p:nvPicPr>
+          <p:blipFill>
+            <a:blip r:embed="rId1"/>
+            <a:stretch>
+              <a:fillRect/>
+            </a:stretch>
+          </p:blipFill>
+          <p:spPr>
+            <a:xfrm>
+              <a:off x="2375" y="4271"/>
+              <a:ext cx="1317" cy="623"/>
+            </a:xfrm>
+            <a:prstGeom prst="rect">
+              <a:avLst/>
+            </a:prstGeom>
+          </p:spPr>
+        </p:pic>
+        <p:pic>
+          <p:nvPicPr>
+            <p:cNvPr id="7" name="图片 6"/>
+            <p:cNvPicPr/>
+            <p:nvPr/>
+          </p:nvPicPr>
+          <p:blipFill>
+            <a:blip r:embed="rId2"/>
+            <a:stretch>
+              <a:fillRect/>
+            </a:stretch>
+          </p:blipFill>
+          <p:spPr>
+            <a:xfrm>
+              <a:off x="2375" y="5438"/>
+              <a:ext cx="1315" cy="623"/>
+            </a:xfrm>
+            <a:prstGeom prst="rect">
+              <a:avLst/>
+            </a:prstGeom>
+          </p:spPr>
+        </p:pic>
+        <p:pic>
+          <p:nvPicPr>
+            <p:cNvPr id="9" name="图片 8"/>
+            <p:cNvPicPr/>
+            <p:nvPr/>
+          </p:nvPicPr>
+          <p:blipFill>
+            <a:blip r:embed="rId3"/>
+            <a:stretch>
+              <a:fillRect/>
+            </a:stretch>
+          </p:blipFill>
+          <p:spPr>
+            <a:xfrm>
+              <a:off x="2375" y="6605"/>
+              <a:ext cx="1315" cy="623"/>
+            </a:xfrm>
+            <a:prstGeom prst="rect">
+              <a:avLst/>
+            </a:prstGeom>
+          </p:spPr>
+        </p:pic>
+        <p:sp>
+          <p:nvSpPr>
+            <p:cNvPr id="12" name="文本框 11"/>
+            <p:cNvSpPr txBox="1"/>
+            <p:nvPr/>
+          </p:nvSpPr>
+          <p:spPr>
+            <a:xfrm>
+              <a:off x="2670" y="5045"/>
+              <a:ext cx="452" cy="363"/>
+            </a:xfrm>
+            <a:prstGeom prst="rect">
+              <a:avLst/>
+            </a:prstGeom>
+            <a:noFill/>
+          </p:spPr>
+          <p:txBody>
+            <a:bodyPr wrap="square" rtlCol="0">
+              <a:spAutoFit/>
+            </a:bodyPr>
+            <a:p>
+              <a:pPr indent="0" fontAlgn="auto">
+                <a:lnSpc>
+                  <a:spcPts val="500"/>
+                </a:lnSpc>
+              </a:pPr>
+              <a:r>
+                <a:rPr lang="en-US" altLang="zh-CN"/>
+                <a:t>.</a:t>
+              </a:r>
+              <a:endParaRPr lang="en-US" altLang="zh-CN"/>
+            </a:p>
+            <a:p>
+              <a:pPr indent="0" fontAlgn="auto">
+                <a:lnSpc>
+                  <a:spcPts val="500"/>
+                </a:lnSpc>
+              </a:pPr>
+              <a:r>
+                <a:rPr lang="en-US" altLang="zh-CN"/>
+                <a:t>.</a:t>
+              </a:r>
+              <a:endParaRPr lang="en-US" altLang="zh-CN"/>
+            </a:p>
+            <a:p>
+              <a:pPr indent="0" fontAlgn="auto">
+                <a:lnSpc>
+                  <a:spcPts val="500"/>
+                </a:lnSpc>
+              </a:pPr>
+              <a:r>
+                <a:rPr lang="en-US" altLang="zh-CN"/>
+                <a:t>.</a:t>
+              </a:r>
+              <a:endParaRPr lang="en-US" altLang="zh-CN"/>
+            </a:p>
+          </p:txBody>
+        </p:sp>
+        <p:sp>
+          <p:nvSpPr>
+            <p:cNvPr id="13" name="文本框 12"/>
+            <p:cNvSpPr txBox="1"/>
+            <p:nvPr/>
+          </p:nvSpPr>
+          <p:spPr>
+            <a:xfrm>
+              <a:off x="2670" y="6159"/>
+              <a:ext cx="452" cy="363"/>
+            </a:xfrm>
+            <a:prstGeom prst="rect">
+              <a:avLst/>
+            </a:prstGeom>
+            <a:noFill/>
+          </p:spPr>
+          <p:txBody>
+            <a:bodyPr wrap="square" rtlCol="0">
+              <a:spAutoFit/>
+            </a:bodyPr>
+            <a:p>
+              <a:pPr indent="0" fontAlgn="auto">
+                <a:lnSpc>
+                  <a:spcPts val="500"/>
+                </a:lnSpc>
+              </a:pPr>
+              <a:r>
+                <a:rPr lang="en-US" altLang="zh-CN"/>
+                <a:t>.</a:t>
+              </a:r>
+              <a:endParaRPr lang="en-US" altLang="zh-CN"/>
+            </a:p>
+            <a:p>
+              <a:pPr indent="0" fontAlgn="auto">
+                <a:lnSpc>
+                  <a:spcPts val="500"/>
+                </a:lnSpc>
+              </a:pPr>
+              <a:r>
+                <a:rPr lang="en-US" altLang="zh-CN"/>
+                <a:t>.</a:t>
+              </a:r>
+              <a:endParaRPr lang="en-US" altLang="zh-CN"/>
+            </a:p>
+            <a:p>
+              <a:pPr indent="0" fontAlgn="auto">
+                <a:lnSpc>
+                  <a:spcPts val="500"/>
+                </a:lnSpc>
+              </a:pPr>
+              <a:r>
+                <a:rPr lang="en-US" altLang="zh-CN"/>
+                <a:t>.</a:t>
+              </a:r>
+              <a:endParaRPr lang="en-US" altLang="zh-CN"/>
+            </a:p>
+          </p:txBody>
+        </p:sp>
+      </p:grpSp>
+      <p:sp>
+        <p:nvSpPr>
+          <p:cNvPr id="15" name="矩形 14"/>
           <p:cNvSpPr/>
           <p:nvPr/>
         </p:nvSpPr>
         <p:spPr>
           <a:xfrm>
-            <a:off x="7993380" y="578485"/>
-            <a:ext cx="2955925" cy="439420"/>
+            <a:off x="2957830" y="1069975"/>
+            <a:ext cx="2448000" cy="833120"/>
           </a:xfrm>
           <a:prstGeom prst="rect">
             <a:avLst/>
@@ -3349,11 +3719,7 @@
             <a:pPr algn="ctr"/>
             <a:r>
               <a:rPr lang="zh-CN" altLang="en-US"/>
-              <a:t>地面</a:t>
-            </a:r>
-            <a:r>
-              <a:rPr lang="zh-CN" altLang="en-US"/>
-              <a:t>端</a:t>
+              <a:t>基于流式变点检测的事件证据窗口构建</a:t>
             </a:r>
             <a:endParaRPr lang="zh-CN" altLang="en-US"/>
           </a:p>
@@ -3361,14 +3727,14 @@
       </p:sp>
       <p:sp>
         <p:nvSpPr>
-          <p:cNvPr id="13" name="矩形 12"/>
+          <p:cNvPr id="16" name="矩形 15"/>
           <p:cNvSpPr/>
           <p:nvPr/>
         </p:nvSpPr>
         <p:spPr>
           <a:xfrm>
-            <a:off x="7993380" y="1097280"/>
-            <a:ext cx="2955925" cy="2364740"/>
+            <a:off x="2957830" y="1903095"/>
+            <a:ext cx="2448000" cy="3217545"/>
           </a:xfrm>
           <a:prstGeom prst="rect">
             <a:avLst/>
@@ -3403,21 +3769,30 @@
       </p:sp>
       <p:sp>
         <p:nvSpPr>
-          <p:cNvPr id="14" name="矩形 13"/>
+          <p:cNvPr id="18" name="矩形 17"/>
           <p:cNvSpPr/>
           <p:nvPr/>
         </p:nvSpPr>
         <p:spPr>
           <a:xfrm>
-            <a:off x="7993380" y="3859530"/>
-            <a:ext cx="2955290" cy="568325"/>
+            <a:off x="2957830" y="5236845"/>
+            <a:ext cx="8067675" cy="694690"/>
           </a:xfrm>
           <a:prstGeom prst="rect">
             <a:avLst/>
           </a:prstGeom>
           <a:solidFill>
-            <a:srgbClr val="C00000"/>
+            <a:srgbClr val="DAE3F5"/>
           </a:solidFill>
+          <a:extLst>
+            <a:ext uri="{909E8E84-426E-40DD-AFC4-6F175D3DCCD1}">
+              <a14:hiddenFill xmlns:a14="http://schemas.microsoft.com/office/drawing/2010/main">
+                <a:solidFill>
+                  <a:schemeClr val="accent1"/>
+                </a:solidFill>
+              </a14:hiddenFill>
+            </a:ext>
+          </a:extLst>
         </p:spPr>
         <p:style>
           <a:lnRef idx="2">
@@ -3439,35 +3814,32 @@
           <a:bodyPr rtlCol="0" anchor="ctr"/>
           <a:p>
             <a:pPr algn="ctr"/>
-            <a:r>
-              <a:rPr lang="zh-CN" altLang="en-US" sz="1400"/>
-              <a:t>端地协同反馈驱动的价值动态</a:t>
-            </a:r>
-            <a:r>
-              <a:rPr lang="zh-CN" altLang="en-US" sz="1400"/>
-              <a:t>校准</a:t>
-            </a:r>
-            <a:endParaRPr lang="zh-CN" altLang="en-US" sz="1400"/>
-          </a:p>
-        </p:txBody>
-      </p:sp>
-      <p:sp>
-        <p:nvSpPr>
-          <p:cNvPr id="15" name="矩形 14"/>
+            <a:endParaRPr lang="zh-CN" altLang="en-US"/>
+          </a:p>
+        </p:txBody>
+      </p:sp>
+      <p:sp>
+        <p:nvSpPr>
+          <p:cNvPr id="29" name="矩形 28"/>
           <p:cNvSpPr/>
           <p:nvPr/>
         </p:nvSpPr>
         <p:spPr>
           <a:xfrm>
-            <a:off x="7993380" y="4428490"/>
-            <a:ext cx="2955600" cy="1795145"/>
+            <a:off x="5768415" y="1069340"/>
+            <a:ext cx="2447925" cy="833120"/>
           </a:xfrm>
           <a:prstGeom prst="rect">
             <a:avLst/>
           </a:prstGeom>
           <a:solidFill>
-            <a:srgbClr val="FADBDF"/>
+            <a:srgbClr val="2E54A1"/>
           </a:solidFill>
+          <a:ln>
+            <a:solidFill>
+              <a:srgbClr val="2E54A1"/>
+            </a:solidFill>
+          </a:ln>
         </p:spPr>
         <p:style>
           <a:lnRef idx="2">
@@ -3489,26 +3861,42 @@
           <a:bodyPr rtlCol="0" anchor="ctr"/>
           <a:p>
             <a:pPr algn="ctr"/>
+            <a:r>
+              <a:rPr lang="zh-CN" altLang="en-US"/>
+              <a:t>基于</a:t>
+            </a:r>
+            <a:r>
+              <a:rPr lang="en-US" altLang="zh-CN"/>
+              <a:t> PU </a:t>
+            </a:r>
+            <a:r>
+              <a:rPr lang="zh-CN" altLang="en-US"/>
+              <a:t>风险估计的高召回</a:t>
+            </a:r>
+            <a:r>
+              <a:rPr lang="zh-CN" altLang="en-US"/>
+              <a:t>频谱事件识别</a:t>
+            </a:r>
             <a:endParaRPr lang="zh-CN" altLang="en-US"/>
           </a:p>
         </p:txBody>
       </p:sp>
       <p:sp>
         <p:nvSpPr>
-          <p:cNvPr id="16" name="矩形 15"/>
+          <p:cNvPr id="30" name="矩形 29"/>
           <p:cNvSpPr/>
           <p:nvPr/>
         </p:nvSpPr>
         <p:spPr>
           <a:xfrm>
-            <a:off x="1275715" y="580390"/>
-            <a:ext cx="6120765" cy="439420"/>
+            <a:off x="5769685" y="1902460"/>
+            <a:ext cx="2447925" cy="3217545"/>
           </a:xfrm>
           <a:prstGeom prst="rect">
             <a:avLst/>
           </a:prstGeom>
           <a:solidFill>
-            <a:srgbClr val="2E54A1"/>
+            <a:srgbClr val="DAE3F5"/>
           </a:solidFill>
         </p:spPr>
         <p:style>
@@ -3531,156 +3919,27 @@
           <a:bodyPr rtlCol="0" anchor="ctr"/>
           <a:p>
             <a:pPr algn="ctr"/>
-            <a:r>
-              <a:rPr lang="zh-CN" altLang="en-US"/>
-              <a:t>无人机</a:t>
-            </a:r>
-            <a:r>
-              <a:rPr lang="zh-CN" altLang="en-US"/>
-              <a:t>端</a:t>
-            </a:r>
             <a:endParaRPr lang="zh-CN" altLang="en-US"/>
           </a:p>
         </p:txBody>
       </p:sp>
       <p:sp>
         <p:nvSpPr>
-          <p:cNvPr id="17" name="文本框 16"/>
-          <p:cNvSpPr txBox="1"/>
-          <p:nvPr/>
-        </p:nvSpPr>
-        <p:spPr>
-          <a:xfrm>
-            <a:off x="2277110" y="1129665"/>
-            <a:ext cx="4117975" cy="306705"/>
+          <p:cNvPr id="31" name="矩形 30"/>
+          <p:cNvSpPr/>
+          <p:nvPr/>
+        </p:nvSpPr>
+        <p:spPr>
+          <a:xfrm>
+            <a:off x="8578925" y="1069340"/>
+            <a:ext cx="2447925" cy="833120"/>
           </a:xfrm>
           <a:prstGeom prst="rect">
             <a:avLst/>
           </a:prstGeom>
-          <a:noFill/>
-        </p:spPr>
-        <p:txBody>
-          <a:bodyPr wrap="square" rtlCol="0">
-            <a:spAutoFit/>
-          </a:bodyPr>
-          <a:p>
-            <a:pPr algn="ctr"/>
-            <a:r>
-              <a:rPr lang="zh-CN" altLang="en-US" sz="1400" b="1"/>
-              <a:t>面向事件证据窗口的多维价值表征方法</a:t>
-            </a:r>
-            <a:endParaRPr lang="zh-CN" altLang="en-US" sz="1400" b="1"/>
-          </a:p>
-        </p:txBody>
-      </p:sp>
-      <p:sp>
-        <p:nvSpPr>
-          <p:cNvPr id="18" name="文本框 17"/>
-          <p:cNvSpPr txBox="1"/>
-          <p:nvPr/>
-        </p:nvSpPr>
-        <p:spPr>
-          <a:xfrm>
-            <a:off x="2277110" y="3560445"/>
-            <a:ext cx="4117975" cy="306705"/>
-          </a:xfrm>
-          <a:prstGeom prst="rect">
-            <a:avLst/>
-          </a:prstGeom>
-          <a:noFill/>
-        </p:spPr>
-        <p:txBody>
-          <a:bodyPr wrap="square" rtlCol="0">
-            <a:spAutoFit/>
-          </a:bodyPr>
-          <a:p>
-            <a:pPr algn="ctr"/>
-            <a:r>
-              <a:rPr lang="zh-CN" altLang="en-US" sz="1400" b="1"/>
-              <a:t>存传耦合驱动的轻量化频谱价值计算方法</a:t>
-            </a:r>
-            <a:endParaRPr lang="zh-CN" altLang="en-US" sz="1400" b="1"/>
-          </a:p>
-        </p:txBody>
-      </p:sp>
-      <p:pic>
-        <p:nvPicPr>
-          <p:cNvPr id="19" name="图片 18"/>
-          <p:cNvPicPr/>
-          <p:nvPr/>
-        </p:nvPicPr>
-        <p:blipFill>
-          <a:blip r:embed="rId1"/>
-          <a:stretch>
-            <a:fillRect/>
-          </a:stretch>
-        </p:blipFill>
-        <p:spPr>
-          <a:xfrm>
-            <a:off x="1407478" y="1955800"/>
-            <a:ext cx="615950" cy="559435"/>
-          </a:xfrm>
-          <a:prstGeom prst="rect">
-            <a:avLst/>
-          </a:prstGeom>
-        </p:spPr>
-      </p:pic>
-      <p:sp>
-        <p:nvSpPr>
-          <p:cNvPr id="20" name="文本框 19"/>
-          <p:cNvSpPr txBox="1"/>
-          <p:nvPr/>
-        </p:nvSpPr>
-        <p:spPr>
-          <a:xfrm>
-            <a:off x="1240155" y="2538730"/>
-            <a:ext cx="950595" cy="275590"/>
-          </a:xfrm>
-          <a:prstGeom prst="rect">
-            <a:avLst/>
-          </a:prstGeom>
-          <a:noFill/>
-        </p:spPr>
-        <p:txBody>
-          <a:bodyPr wrap="square" rtlCol="0">
-            <a:spAutoFit/>
-          </a:bodyPr>
-          <a:p>
-            <a:pPr algn="ctr"/>
-            <a:r>
-              <a:rPr lang="zh-CN" altLang="en-US" sz="1200" b="1"/>
-              <a:t>连续频谱流</a:t>
-            </a:r>
-            <a:endParaRPr lang="zh-CN" altLang="en-US" sz="1200" b="1"/>
-          </a:p>
-        </p:txBody>
-      </p:sp>
-      <p:sp>
-        <p:nvSpPr>
-          <p:cNvPr id="21" name="圆角矩形 20"/>
-          <p:cNvSpPr/>
-          <p:nvPr/>
-        </p:nvSpPr>
-        <p:spPr>
-          <a:xfrm>
-            <a:off x="2299176" y="1499235"/>
-            <a:ext cx="1290955" cy="1802130"/>
-          </a:xfrm>
-          <a:prstGeom prst="roundRect">
-            <a:avLst/>
-          </a:prstGeom>
           <a:solidFill>
-            <a:schemeClr val="bg1"/>
+            <a:srgbClr val="C00000"/>
           </a:solidFill>
-          <a:extLst>
-            <a:ext uri="{909E8E84-426E-40DD-AFC4-6F175D3DCCD1}">
-              <a14:hiddenFill xmlns:a14="http://schemas.microsoft.com/office/drawing/2010/main">
-                <a:solidFill>
-                  <a:srgbClr val="2E54A1"/>
-                </a:solidFill>
-              </a14:hiddenFill>
-            </a:ext>
-          </a:extLst>
         </p:spPr>
         <p:style>
           <a:lnRef idx="2">
@@ -3702,339 +3961,14 @@
           <a:bodyPr rtlCol="0" anchor="ctr"/>
           <a:p>
             <a:pPr algn="ctr"/>
+            <a:r>
+              <a:rPr lang="zh-CN" altLang="en-US"/>
+              <a:t>基于子模覆盖增益的频谱事件入库判别</a:t>
+            </a:r>
             <a:endParaRPr lang="zh-CN" altLang="en-US"/>
           </a:p>
         </p:txBody>
       </p:sp>
-      <p:sp>
-        <p:nvSpPr>
-          <p:cNvPr id="22" name="文本框 21"/>
-          <p:cNvSpPr txBox="1"/>
-          <p:nvPr/>
-        </p:nvSpPr>
-        <p:spPr>
-          <a:xfrm>
-            <a:off x="2544604" y="1499235"/>
-            <a:ext cx="800100" cy="275590"/>
-          </a:xfrm>
-          <a:prstGeom prst="rect">
-            <a:avLst/>
-          </a:prstGeom>
-          <a:noFill/>
-        </p:spPr>
-        <p:txBody>
-          <a:bodyPr wrap="square" rtlCol="0">
-            <a:spAutoFit/>
-          </a:bodyPr>
-          <a:p>
-            <a:pPr algn="ctr"/>
-            <a:r>
-              <a:rPr lang="zh-CN" altLang="en-US" sz="1200" b="1">
-                <a:solidFill>
-                  <a:srgbClr val="C00000"/>
-                </a:solidFill>
-                <a:sym typeface="+mn-ea"/>
-              </a:rPr>
-              <a:t>证据单元</a:t>
-            </a:r>
-            <a:endParaRPr lang="zh-CN" altLang="en-US" sz="1200" b="1">
-              <a:solidFill>
-                <a:srgbClr val="C00000"/>
-              </a:solidFill>
-            </a:endParaRPr>
-          </a:p>
-        </p:txBody>
-      </p:sp>
-      <p:sp>
-        <p:nvSpPr>
-          <p:cNvPr id="23" name="文本框 22"/>
-          <p:cNvSpPr txBox="1"/>
-          <p:nvPr/>
-        </p:nvSpPr>
-        <p:spPr>
-          <a:xfrm>
-            <a:off x="2690495" y="2056130"/>
-            <a:ext cx="993140" cy="275590"/>
-          </a:xfrm>
-          <a:prstGeom prst="rect">
-            <a:avLst/>
-          </a:prstGeom>
-          <a:noFill/>
-        </p:spPr>
-        <p:txBody>
-          <a:bodyPr wrap="square" rtlCol="0">
-            <a:spAutoFit/>
-          </a:bodyPr>
-          <a:p>
-            <a:pPr algn="l"/>
-            <a:r>
-              <a:rPr lang="zh-CN" altLang="en-US" sz="1200" b="1"/>
-              <a:t>触发</a:t>
-            </a:r>
-            <a:r>
-              <a:rPr lang="zh-CN" altLang="en-US" sz="1200" b="1"/>
-              <a:t>前上文</a:t>
-            </a:r>
-            <a:endParaRPr lang="zh-CN" altLang="en-US" sz="1200" b="1"/>
-          </a:p>
-        </p:txBody>
-      </p:sp>
-      <p:sp>
-        <p:nvSpPr>
-          <p:cNvPr id="24" name="文本框 23"/>
-          <p:cNvSpPr txBox="1"/>
-          <p:nvPr/>
-        </p:nvSpPr>
-        <p:spPr>
-          <a:xfrm>
-            <a:off x="2690178" y="1744345"/>
-            <a:ext cx="800100" cy="275590"/>
-          </a:xfrm>
-          <a:prstGeom prst="rect">
-            <a:avLst/>
-          </a:prstGeom>
-          <a:noFill/>
-        </p:spPr>
-        <p:txBody>
-          <a:bodyPr wrap="square" rtlCol="0">
-            <a:spAutoFit/>
-          </a:bodyPr>
-          <a:p>
-            <a:pPr algn="l"/>
-            <a:r>
-              <a:rPr lang="zh-CN" altLang="en-US" sz="1200" b="1"/>
-              <a:t>事件</a:t>
-            </a:r>
-            <a:r>
-              <a:rPr lang="zh-CN" altLang="en-US" sz="1200" b="1"/>
-              <a:t>主体</a:t>
-            </a:r>
-            <a:endParaRPr lang="zh-CN" altLang="en-US" sz="1200" b="1"/>
-          </a:p>
-        </p:txBody>
-      </p:sp>
-      <p:sp>
-        <p:nvSpPr>
-          <p:cNvPr id="25" name="文本框 24"/>
-          <p:cNvSpPr txBox="1"/>
-          <p:nvPr/>
-        </p:nvSpPr>
-        <p:spPr>
-          <a:xfrm>
-            <a:off x="2690178" y="2679700"/>
-            <a:ext cx="800100" cy="275590"/>
-          </a:xfrm>
-          <a:prstGeom prst="rect">
-            <a:avLst/>
-          </a:prstGeom>
-          <a:noFill/>
-        </p:spPr>
-        <p:txBody>
-          <a:bodyPr wrap="square" rtlCol="0">
-            <a:spAutoFit/>
-          </a:bodyPr>
-          <a:p>
-            <a:pPr algn="l"/>
-            <a:r>
-              <a:rPr lang="zh-CN" altLang="en-US" sz="1200" b="1"/>
-              <a:t>频域</a:t>
-            </a:r>
-            <a:r>
-              <a:rPr lang="zh-CN" altLang="en-US" sz="1200" b="1"/>
-              <a:t>领域</a:t>
-            </a:r>
-            <a:endParaRPr lang="zh-CN" altLang="en-US" sz="1200" b="1"/>
-          </a:p>
-        </p:txBody>
-      </p:sp>
-      <p:sp>
-        <p:nvSpPr>
-          <p:cNvPr id="26" name="文本框 25"/>
-          <p:cNvSpPr txBox="1"/>
-          <p:nvPr/>
-        </p:nvSpPr>
-        <p:spPr>
-          <a:xfrm>
-            <a:off x="2690495" y="2367915"/>
-            <a:ext cx="993140" cy="275590"/>
-          </a:xfrm>
-          <a:prstGeom prst="rect">
-            <a:avLst/>
-          </a:prstGeom>
-          <a:noFill/>
-        </p:spPr>
-        <p:txBody>
-          <a:bodyPr wrap="square" rtlCol="0">
-            <a:spAutoFit/>
-          </a:bodyPr>
-          <a:p>
-            <a:pPr algn="l"/>
-            <a:r>
-              <a:rPr lang="zh-CN" altLang="en-US" sz="1200" b="1"/>
-              <a:t>触发</a:t>
-            </a:r>
-            <a:r>
-              <a:rPr lang="zh-CN" altLang="en-US" sz="1200" b="1"/>
-              <a:t>后下文</a:t>
-            </a:r>
-            <a:endParaRPr lang="zh-CN" altLang="en-US" sz="1200" b="1"/>
-          </a:p>
-        </p:txBody>
-      </p:sp>
-      <p:sp>
-        <p:nvSpPr>
-          <p:cNvPr id="27" name="文本框 26"/>
-          <p:cNvSpPr txBox="1"/>
-          <p:nvPr/>
-        </p:nvSpPr>
-        <p:spPr>
-          <a:xfrm>
-            <a:off x="2690178" y="2991485"/>
-            <a:ext cx="800100" cy="275590"/>
-          </a:xfrm>
-          <a:prstGeom prst="rect">
-            <a:avLst/>
-          </a:prstGeom>
-          <a:noFill/>
-        </p:spPr>
-        <p:txBody>
-          <a:bodyPr wrap="square" rtlCol="0">
-            <a:spAutoFit/>
-          </a:bodyPr>
-          <a:p>
-            <a:pPr algn="l"/>
-            <a:r>
-              <a:rPr lang="zh-CN" altLang="en-US" sz="1200" b="1"/>
-              <a:t>任务</a:t>
-            </a:r>
-            <a:r>
-              <a:rPr lang="zh-CN" altLang="en-US" sz="1200" b="1"/>
-              <a:t>语境</a:t>
-            </a:r>
-            <a:endParaRPr lang="zh-CN" altLang="en-US" sz="1200" b="1"/>
-          </a:p>
-        </p:txBody>
-      </p:sp>
-      <p:pic>
-        <p:nvPicPr>
-          <p:cNvPr id="31" name="图片 30" descr="-ontology_mode"/>
-          <p:cNvPicPr>
-            <a:picLocks noChangeAspect="1"/>
-          </p:cNvPicPr>
-          <p:nvPr/>
-        </p:nvPicPr>
-        <p:blipFill>
-          <a:blip r:embed="rId2"/>
-          <a:stretch>
-            <a:fillRect/>
-          </a:stretch>
-        </p:blipFill>
-        <p:spPr>
-          <a:xfrm>
-            <a:off x="2362200" y="1760855"/>
-            <a:ext cx="252000" cy="252000"/>
-          </a:xfrm>
-          <a:prstGeom prst="rect">
-            <a:avLst/>
-          </a:prstGeom>
-        </p:spPr>
-      </p:pic>
-      <p:pic>
-        <p:nvPicPr>
-          <p:cNvPr id="32" name="图片 31" descr="绩效考核"/>
-          <p:cNvPicPr>
-            <a:picLocks noChangeAspect="1"/>
-          </p:cNvPicPr>
-          <p:nvPr/>
-        </p:nvPicPr>
-        <p:blipFill>
-          <a:blip r:embed="rId3"/>
-          <a:stretch>
-            <a:fillRect/>
-          </a:stretch>
-        </p:blipFill>
-        <p:spPr>
-          <a:xfrm>
-            <a:off x="2362200" y="2061750"/>
-            <a:ext cx="252000" cy="251460"/>
-          </a:xfrm>
-          <a:prstGeom prst="rect">
-            <a:avLst/>
-          </a:prstGeom>
-        </p:spPr>
-      </p:pic>
-      <p:pic>
-        <p:nvPicPr>
-          <p:cNvPr id="33" name="图片 32" descr="图表数据_走向_下降"/>
-          <p:cNvPicPr>
-            <a:picLocks noChangeAspect="1"/>
-          </p:cNvPicPr>
-          <p:nvPr/>
-        </p:nvPicPr>
-        <p:blipFill>
-          <a:blip r:embed="rId4"/>
-          <a:stretch>
-            <a:fillRect/>
-          </a:stretch>
-        </p:blipFill>
-        <p:spPr>
-          <a:xfrm>
-            <a:off x="2362200" y="2362105"/>
-            <a:ext cx="252000" cy="251460"/>
-          </a:xfrm>
-          <a:prstGeom prst="rect">
-            <a:avLst/>
-          </a:prstGeom>
-        </p:spPr>
-      </p:pic>
-      <p:pic>
-        <p:nvPicPr>
-          <p:cNvPr id="34" name="图片 33" descr="neighborhood"/>
-          <p:cNvPicPr>
-            <a:picLocks noChangeAspect="1"/>
-          </p:cNvPicPr>
-          <p:nvPr/>
-        </p:nvPicPr>
-        <p:blipFill>
-          <a:blip r:embed="rId5"/>
-          <a:stretch>
-            <a:fillRect/>
-          </a:stretch>
-        </p:blipFill>
-        <p:spPr>
-          <a:xfrm>
-            <a:off x="2362200" y="2662460"/>
-            <a:ext cx="252000" cy="251460"/>
-          </a:xfrm>
-          <a:prstGeom prst="rect">
-            <a:avLst/>
-          </a:prstGeom>
-        </p:spPr>
-      </p:pic>
-      <p:pic>
-        <p:nvPicPr>
-          <p:cNvPr id="35" name="图片 34"/>
-          <p:cNvPicPr>
-            <a:picLocks noChangeAspect="1"/>
-          </p:cNvPicPr>
-          <p:nvPr/>
-        </p:nvPicPr>
-        <p:blipFill>
-          <a:blip r:embed="rId6"/>
-          <a:stretch>
-            <a:fillRect/>
-          </a:stretch>
-        </p:blipFill>
-        <p:spPr>
-          <a:xfrm>
-            <a:off x="2362200" y="2962815"/>
-            <a:ext cx="252000" cy="251460"/>
-          </a:xfrm>
-          <a:prstGeom prst="rect">
-            <a:avLst/>
-          </a:prstGeom>
-        </p:spPr>
-      </p:pic>
       <p:sp>
         <p:nvSpPr>
           <p:cNvPr id="1072" name="箭头: 燕尾形 1071"/>
@@ -4043,8 +3977,8 @@
         </p:nvSpPr>
         <p:spPr>
           <a:xfrm>
-            <a:off x="1995170" y="2084388"/>
-            <a:ext cx="276860" cy="392430"/>
+            <a:off x="2570480" y="3162300"/>
+            <a:ext cx="375920" cy="443230"/>
           </a:xfrm>
           <a:prstGeom prst="notchedRightArrow">
             <a:avLst>
@@ -4101,281 +4035,14 @@
       </p:sp>
       <p:sp>
         <p:nvSpPr>
-          <p:cNvPr id="38" name="圆角矩形 37"/>
+          <p:cNvPr id="33" name="箭头: 燕尾形 1071"/>
           <p:cNvSpPr/>
           <p:nvPr/>
         </p:nvSpPr>
         <p:spPr>
           <a:xfrm>
-            <a:off x="3886835" y="1499235"/>
-            <a:ext cx="1463675" cy="1802130"/>
-          </a:xfrm>
-          <a:prstGeom prst="roundRect">
-            <a:avLst/>
-          </a:prstGeom>
-          <a:solidFill>
-            <a:schemeClr val="bg1"/>
-          </a:solidFill>
-          <a:extLst>
-            <a:ext uri="{909E8E84-426E-40DD-AFC4-6F175D3DCCD1}">
-              <a14:hiddenFill xmlns:a14="http://schemas.microsoft.com/office/drawing/2010/main">
-                <a:solidFill>
-                  <a:srgbClr val="2E54A1"/>
-                </a:solidFill>
-              </a14:hiddenFill>
-            </a:ext>
-          </a:extLst>
-        </p:spPr>
-        <p:style>
-          <a:lnRef idx="2">
-            <a:schemeClr val="accent1">
-              <a:lumMod val="75000"/>
-            </a:schemeClr>
-          </a:lnRef>
-          <a:fillRef idx="1">
-            <a:schemeClr val="accent1"/>
-          </a:fillRef>
-          <a:effectRef idx="0">
-            <a:srgbClr val="FFFFFF"/>
-          </a:effectRef>
-          <a:fontRef idx="minor">
-            <a:schemeClr val="lt1"/>
-          </a:fontRef>
-        </p:style>
-        <p:txBody>
-          <a:bodyPr rtlCol="0" anchor="ctr"/>
-          <a:p>
-            <a:pPr algn="ctr"/>
-            <a:endParaRPr lang="zh-CN" altLang="en-US"/>
-          </a:p>
-        </p:txBody>
-      </p:sp>
-      <p:sp>
-        <p:nvSpPr>
-          <p:cNvPr id="39" name="文本框 38"/>
-          <p:cNvSpPr txBox="1"/>
-          <p:nvPr/>
-        </p:nvSpPr>
-        <p:spPr>
-          <a:xfrm>
-            <a:off x="4144645" y="1499235"/>
-            <a:ext cx="948055" cy="275590"/>
-          </a:xfrm>
-          <a:prstGeom prst="rect">
-            <a:avLst/>
-          </a:prstGeom>
-          <a:noFill/>
-        </p:spPr>
-        <p:txBody>
-          <a:bodyPr wrap="square" rtlCol="0">
-            <a:spAutoFit/>
-          </a:bodyPr>
-          <a:p>
-            <a:pPr algn="ctr"/>
-            <a:r>
-              <a:rPr lang="zh-CN" altLang="en-US" sz="1200" b="1">
-                <a:solidFill>
-                  <a:srgbClr val="C00000"/>
-                </a:solidFill>
-              </a:rPr>
-              <a:t>端侧</a:t>
-            </a:r>
-            <a:r>
-              <a:rPr lang="zh-CN" altLang="en-US" sz="1200" b="1">
-                <a:solidFill>
-                  <a:srgbClr val="C00000"/>
-                </a:solidFill>
-              </a:rPr>
-              <a:t>知识库</a:t>
-            </a:r>
-            <a:endParaRPr lang="zh-CN" altLang="en-US" sz="1200" b="1">
-              <a:solidFill>
-                <a:srgbClr val="C00000"/>
-              </a:solidFill>
-            </a:endParaRPr>
-          </a:p>
-        </p:txBody>
-      </p:sp>
-      <p:sp>
-        <p:nvSpPr>
-          <p:cNvPr id="40" name="文本框 39"/>
-          <p:cNvSpPr txBox="1"/>
-          <p:nvPr/>
-        </p:nvSpPr>
-        <p:spPr>
-          <a:xfrm>
-            <a:off x="4277995" y="2056130"/>
-            <a:ext cx="1259205" cy="275590"/>
-          </a:xfrm>
-          <a:prstGeom prst="rect">
-            <a:avLst/>
-          </a:prstGeom>
-          <a:noFill/>
-        </p:spPr>
-        <p:txBody>
-          <a:bodyPr wrap="square" rtlCol="0">
-            <a:spAutoFit/>
-          </a:bodyPr>
-          <a:p>
-            <a:pPr algn="l"/>
-            <a:r>
-              <a:rPr lang="zh-CN" altLang="en-US" sz="1200" b="1"/>
-              <a:t>历史背景</a:t>
-            </a:r>
-            <a:r>
-              <a:rPr lang="zh-CN" altLang="en-US" sz="1200" b="1"/>
-              <a:t>基线</a:t>
-            </a:r>
-            <a:endParaRPr lang="zh-CN" altLang="en-US" sz="1200" b="1"/>
-          </a:p>
-        </p:txBody>
-      </p:sp>
-      <p:sp>
-        <p:nvSpPr>
-          <p:cNvPr id="41" name="文本框 40"/>
-          <p:cNvSpPr txBox="1"/>
-          <p:nvPr/>
-        </p:nvSpPr>
-        <p:spPr>
-          <a:xfrm>
-            <a:off x="4277678" y="1744345"/>
-            <a:ext cx="800100" cy="275590"/>
-          </a:xfrm>
-          <a:prstGeom prst="rect">
-            <a:avLst/>
-          </a:prstGeom>
-          <a:noFill/>
-        </p:spPr>
-        <p:txBody>
-          <a:bodyPr wrap="square" rtlCol="0">
-            <a:spAutoFit/>
-          </a:bodyPr>
-          <a:p>
-            <a:pPr algn="l"/>
-            <a:r>
-              <a:rPr lang="zh-CN" altLang="en-US" sz="1200" b="1"/>
-              <a:t>任务</a:t>
-            </a:r>
-            <a:r>
-              <a:rPr lang="zh-CN" altLang="en-US" sz="1200" b="1"/>
-              <a:t>频段</a:t>
-            </a:r>
-            <a:endParaRPr lang="zh-CN" altLang="en-US" sz="1200" b="1"/>
-          </a:p>
-        </p:txBody>
-      </p:sp>
-      <p:sp>
-        <p:nvSpPr>
-          <p:cNvPr id="42" name="文本框 41"/>
-          <p:cNvSpPr txBox="1"/>
-          <p:nvPr/>
-        </p:nvSpPr>
-        <p:spPr>
-          <a:xfrm>
-            <a:off x="4277995" y="2679700"/>
-            <a:ext cx="1179830" cy="275590"/>
-          </a:xfrm>
-          <a:prstGeom prst="rect">
-            <a:avLst/>
-          </a:prstGeom>
-          <a:noFill/>
-        </p:spPr>
-        <p:txBody>
-          <a:bodyPr wrap="square" rtlCol="0">
-            <a:spAutoFit/>
-          </a:bodyPr>
-          <a:p>
-            <a:pPr algn="l"/>
-            <a:r>
-              <a:rPr lang="zh-CN" altLang="en-US" sz="1200" b="1"/>
-              <a:t>已知信号</a:t>
-            </a:r>
-            <a:r>
-              <a:rPr lang="zh-CN" altLang="en-US" sz="1200" b="1"/>
-              <a:t>模式</a:t>
-            </a:r>
-            <a:endParaRPr lang="zh-CN" altLang="en-US" sz="1200" b="1"/>
-          </a:p>
-        </p:txBody>
-      </p:sp>
-      <p:sp>
-        <p:nvSpPr>
-          <p:cNvPr id="43" name="文本框 42"/>
-          <p:cNvSpPr txBox="1"/>
-          <p:nvPr/>
-        </p:nvSpPr>
-        <p:spPr>
-          <a:xfrm>
-            <a:off x="4277995" y="2367915"/>
-            <a:ext cx="1115695" cy="275590"/>
-          </a:xfrm>
-          <a:prstGeom prst="rect">
-            <a:avLst/>
-          </a:prstGeom>
-          <a:noFill/>
-        </p:spPr>
-        <p:txBody>
-          <a:bodyPr wrap="square" rtlCol="0">
-            <a:spAutoFit/>
-          </a:bodyPr>
-          <a:p>
-            <a:pPr algn="l"/>
-            <a:r>
-              <a:rPr lang="zh-CN" altLang="en-US" sz="1200" b="1"/>
-              <a:t>常见干扰</a:t>
-            </a:r>
-            <a:r>
-              <a:rPr lang="zh-CN" altLang="en-US" sz="1200" b="1"/>
-              <a:t>模板</a:t>
-            </a:r>
-            <a:endParaRPr lang="zh-CN" altLang="en-US" sz="1200" b="1"/>
-          </a:p>
-        </p:txBody>
-      </p:sp>
-      <p:sp>
-        <p:nvSpPr>
-          <p:cNvPr id="44" name="文本框 43"/>
-          <p:cNvSpPr txBox="1"/>
-          <p:nvPr/>
-        </p:nvSpPr>
-        <p:spPr>
-          <a:xfrm>
-            <a:off x="4277995" y="2991485"/>
-            <a:ext cx="958850" cy="275590"/>
-          </a:xfrm>
-          <a:prstGeom prst="rect">
-            <a:avLst/>
-          </a:prstGeom>
-          <a:noFill/>
-        </p:spPr>
-        <p:txBody>
-          <a:bodyPr wrap="square" rtlCol="0">
-            <a:spAutoFit/>
-          </a:bodyPr>
-          <a:p>
-            <a:pPr algn="l"/>
-            <a:r>
-              <a:rPr lang="zh-CN" altLang="en-US" sz="1200" b="1"/>
-              <a:t>已</a:t>
-            </a:r>
-            <a:r>
-              <a:rPr lang="zh-CN" altLang="en-US" sz="1200" b="1"/>
-              <a:t>复核原型</a:t>
-            </a:r>
-            <a:endParaRPr lang="zh-CN" altLang="en-US" sz="1200" b="1"/>
-          </a:p>
-        </p:txBody>
-      </p:sp>
-      <p:sp>
-        <p:nvSpPr>
-          <p:cNvPr id="50" name="箭头: 燕尾形 1071"/>
-          <p:cNvSpPr/>
-          <p:nvPr/>
-        </p:nvSpPr>
-        <p:spPr>
-          <a:xfrm>
-            <a:off x="3582670" y="2084388"/>
-            <a:ext cx="276860" cy="392430"/>
+            <a:off x="5371465" y="3162300"/>
+            <a:ext cx="374400" cy="443230"/>
           </a:xfrm>
           <a:prstGeom prst="notchedRightArrow">
             <a:avLst>
@@ -4432,277 +4099,14 @@
       </p:sp>
       <p:sp>
         <p:nvSpPr>
-          <p:cNvPr id="51" name="圆角矩形 50"/>
+          <p:cNvPr id="34" name="箭头: 燕尾形 1071"/>
           <p:cNvSpPr/>
           <p:nvPr/>
         </p:nvSpPr>
         <p:spPr>
           <a:xfrm>
-            <a:off x="5626735" y="1499235"/>
-            <a:ext cx="1463675" cy="1802130"/>
-          </a:xfrm>
-          <a:prstGeom prst="roundRect">
-            <a:avLst/>
-          </a:prstGeom>
-          <a:solidFill>
-            <a:schemeClr val="bg1"/>
-          </a:solidFill>
-          <a:extLst>
-            <a:ext uri="{909E8E84-426E-40DD-AFC4-6F175D3DCCD1}">
-              <a14:hiddenFill xmlns:a14="http://schemas.microsoft.com/office/drawing/2010/main">
-                <a:solidFill>
-                  <a:srgbClr val="2E54A1"/>
-                </a:solidFill>
-              </a14:hiddenFill>
-            </a:ext>
-          </a:extLst>
-        </p:spPr>
-        <p:style>
-          <a:lnRef idx="2">
-            <a:schemeClr val="accent1">
-              <a:lumMod val="75000"/>
-            </a:schemeClr>
-          </a:lnRef>
-          <a:fillRef idx="1">
-            <a:schemeClr val="accent1"/>
-          </a:fillRef>
-          <a:effectRef idx="0">
-            <a:srgbClr val="FFFFFF"/>
-          </a:effectRef>
-          <a:fontRef idx="minor">
-            <a:schemeClr val="lt1"/>
-          </a:fontRef>
-        </p:style>
-        <p:txBody>
-          <a:bodyPr rtlCol="0" anchor="ctr"/>
-          <a:p>
-            <a:pPr algn="ctr"/>
-            <a:endParaRPr lang="zh-CN" altLang="en-US"/>
-          </a:p>
-        </p:txBody>
-      </p:sp>
-      <p:sp>
-        <p:nvSpPr>
-          <p:cNvPr id="52" name="文本框 51"/>
-          <p:cNvSpPr txBox="1"/>
-          <p:nvPr/>
-        </p:nvSpPr>
-        <p:spPr>
-          <a:xfrm>
-            <a:off x="5798185" y="1499235"/>
-            <a:ext cx="1178560" cy="275590"/>
-          </a:xfrm>
-          <a:prstGeom prst="rect">
-            <a:avLst/>
-          </a:prstGeom>
-          <a:noFill/>
-        </p:spPr>
-        <p:txBody>
-          <a:bodyPr wrap="square" rtlCol="0">
-            <a:spAutoFit/>
-          </a:bodyPr>
-          <a:p>
-            <a:pPr algn="ctr"/>
-            <a:r>
-              <a:rPr lang="zh-CN" altLang="en-US" sz="1200" b="1">
-                <a:solidFill>
-                  <a:srgbClr val="C00000"/>
-                </a:solidFill>
-              </a:rPr>
-              <a:t>多维价值</a:t>
-            </a:r>
-            <a:r>
-              <a:rPr lang="zh-CN" altLang="en-US" sz="1200" b="1">
-                <a:solidFill>
-                  <a:srgbClr val="C00000"/>
-                </a:solidFill>
-              </a:rPr>
-              <a:t>刻画</a:t>
-            </a:r>
-            <a:endParaRPr lang="zh-CN" altLang="en-US" sz="1200" b="1">
-              <a:solidFill>
-                <a:srgbClr val="C00000"/>
-              </a:solidFill>
-            </a:endParaRPr>
-          </a:p>
-        </p:txBody>
-      </p:sp>
-      <p:sp>
-        <p:nvSpPr>
-          <p:cNvPr id="53" name="文本框 52"/>
-          <p:cNvSpPr txBox="1"/>
-          <p:nvPr/>
-        </p:nvSpPr>
-        <p:spPr>
-          <a:xfrm>
-            <a:off x="6017895" y="2056130"/>
-            <a:ext cx="1259205" cy="275590"/>
-          </a:xfrm>
-          <a:prstGeom prst="rect">
-            <a:avLst/>
-          </a:prstGeom>
-          <a:noFill/>
-        </p:spPr>
-        <p:txBody>
-          <a:bodyPr wrap="square" rtlCol="0">
-            <a:spAutoFit/>
-          </a:bodyPr>
-          <a:p>
-            <a:pPr algn="l"/>
-            <a:r>
-              <a:rPr lang="zh-CN" altLang="en-US" sz="1200" b="1"/>
-              <a:t>任务相关</a:t>
-            </a:r>
-            <a:r>
-              <a:rPr lang="zh-CN" altLang="en-US" sz="1200" b="1"/>
-              <a:t>性</a:t>
-            </a:r>
-            <a:endParaRPr lang="zh-CN" altLang="en-US" sz="1200" b="1"/>
-          </a:p>
-        </p:txBody>
-      </p:sp>
-      <p:sp>
-        <p:nvSpPr>
-          <p:cNvPr id="54" name="文本框 53"/>
-          <p:cNvSpPr txBox="1"/>
-          <p:nvPr/>
-        </p:nvSpPr>
-        <p:spPr>
-          <a:xfrm>
-            <a:off x="6017895" y="1744345"/>
-            <a:ext cx="958850" cy="275590"/>
-          </a:xfrm>
-          <a:prstGeom prst="rect">
-            <a:avLst/>
-          </a:prstGeom>
-          <a:noFill/>
-        </p:spPr>
-        <p:txBody>
-          <a:bodyPr wrap="square" rtlCol="0">
-            <a:spAutoFit/>
-          </a:bodyPr>
-          <a:p>
-            <a:pPr algn="l"/>
-            <a:r>
-              <a:rPr lang="zh-CN" altLang="en-US" sz="1200" b="1"/>
-              <a:t>电磁异常</a:t>
-            </a:r>
-            <a:r>
-              <a:rPr lang="zh-CN" altLang="en-US" sz="1200" b="1"/>
-              <a:t>性</a:t>
-            </a:r>
-            <a:endParaRPr lang="zh-CN" altLang="en-US" sz="1200" b="1"/>
-          </a:p>
-        </p:txBody>
-      </p:sp>
-      <p:sp>
-        <p:nvSpPr>
-          <p:cNvPr id="55" name="文本框 54"/>
-          <p:cNvSpPr txBox="1"/>
-          <p:nvPr/>
-        </p:nvSpPr>
-        <p:spPr>
-          <a:xfrm>
-            <a:off x="6017895" y="2679700"/>
-            <a:ext cx="1179830" cy="275590"/>
-          </a:xfrm>
-          <a:prstGeom prst="rect">
-            <a:avLst/>
-          </a:prstGeom>
-          <a:noFill/>
-        </p:spPr>
-        <p:txBody>
-          <a:bodyPr wrap="square" rtlCol="0">
-            <a:spAutoFit/>
-          </a:bodyPr>
-          <a:p>
-            <a:pPr algn="l"/>
-            <a:r>
-              <a:rPr lang="zh-CN" altLang="en-US" sz="1200" b="1"/>
-              <a:t>证据</a:t>
-            </a:r>
-            <a:r>
-              <a:rPr lang="zh-CN" altLang="en-US" sz="1200" b="1"/>
-              <a:t>完整性</a:t>
-            </a:r>
-            <a:endParaRPr lang="zh-CN" altLang="en-US" sz="1200" b="1"/>
-          </a:p>
-        </p:txBody>
-      </p:sp>
-      <p:sp>
-        <p:nvSpPr>
-          <p:cNvPr id="56" name="文本框 55"/>
-          <p:cNvSpPr txBox="1"/>
-          <p:nvPr/>
-        </p:nvSpPr>
-        <p:spPr>
-          <a:xfrm>
-            <a:off x="6017895" y="2367915"/>
-            <a:ext cx="1115695" cy="275590"/>
-          </a:xfrm>
-          <a:prstGeom prst="rect">
-            <a:avLst/>
-          </a:prstGeom>
-          <a:noFill/>
-        </p:spPr>
-        <p:txBody>
-          <a:bodyPr wrap="square" rtlCol="0">
-            <a:spAutoFit/>
-          </a:bodyPr>
-          <a:p>
-            <a:pPr algn="l"/>
-            <a:r>
-              <a:rPr lang="zh-CN" altLang="en-US" sz="1200" b="1"/>
-              <a:t>历史稀缺</a:t>
-            </a:r>
-            <a:r>
-              <a:rPr lang="zh-CN" altLang="en-US" sz="1200" b="1"/>
-              <a:t>性</a:t>
-            </a:r>
-            <a:endParaRPr lang="zh-CN" altLang="en-US" sz="1200" b="1"/>
-          </a:p>
-        </p:txBody>
-      </p:sp>
-      <p:sp>
-        <p:nvSpPr>
-          <p:cNvPr id="57" name="文本框 56"/>
-          <p:cNvSpPr txBox="1"/>
-          <p:nvPr/>
-        </p:nvSpPr>
-        <p:spPr>
-          <a:xfrm>
-            <a:off x="6017895" y="2991485"/>
-            <a:ext cx="958850" cy="275590"/>
-          </a:xfrm>
-          <a:prstGeom prst="rect">
-            <a:avLst/>
-          </a:prstGeom>
-          <a:noFill/>
-        </p:spPr>
-        <p:txBody>
-          <a:bodyPr wrap="square" rtlCol="0">
-            <a:spAutoFit/>
-          </a:bodyPr>
-          <a:p>
-            <a:pPr algn="l"/>
-            <a:r>
-              <a:rPr lang="zh-CN" altLang="en-US" sz="1200" b="1"/>
-              <a:t>时效敏感性</a:t>
-            </a:r>
-            <a:endParaRPr lang="zh-CN" altLang="en-US" sz="1200" b="1"/>
-          </a:p>
-        </p:txBody>
-      </p:sp>
-      <p:sp>
-        <p:nvSpPr>
-          <p:cNvPr id="63" name="箭头: 燕尾形 1071"/>
-          <p:cNvSpPr/>
-          <p:nvPr/>
-        </p:nvSpPr>
-        <p:spPr>
-          <a:xfrm>
-            <a:off x="5322570" y="2084388"/>
-            <a:ext cx="276860" cy="392430"/>
+            <a:off x="8204200" y="3162300"/>
+            <a:ext cx="374400" cy="443230"/>
           </a:xfrm>
           <a:prstGeom prst="notchedRightArrow">
             <a:avLst>
@@ -4757,256 +4161,16 @@
           </a:p>
         </p:txBody>
       </p:sp>
-      <p:pic>
-        <p:nvPicPr>
-          <p:cNvPr id="64" name="图片 63"/>
-          <p:cNvPicPr>
-            <a:picLocks noChangeAspect="1"/>
-          </p:cNvPicPr>
-          <p:nvPr/>
-        </p:nvPicPr>
-        <p:blipFill>
-          <a:blip r:embed="rId7"/>
-          <a:stretch>
-            <a:fillRect/>
-          </a:stretch>
-        </p:blipFill>
-        <p:spPr>
-          <a:xfrm>
-            <a:off x="3949700" y="1774825"/>
-            <a:ext cx="252000" cy="252000"/>
-          </a:xfrm>
-          <a:prstGeom prst="rect">
-            <a:avLst/>
-          </a:prstGeom>
-        </p:spPr>
-      </p:pic>
-      <p:pic>
-        <p:nvPicPr>
-          <p:cNvPr id="65" name="图片 64"/>
-          <p:cNvPicPr>
-            <a:picLocks noChangeAspect="1"/>
-          </p:cNvPicPr>
-          <p:nvPr/>
-        </p:nvPicPr>
-        <p:blipFill>
-          <a:blip r:embed="rId8"/>
-          <a:stretch>
-            <a:fillRect/>
-          </a:stretch>
-        </p:blipFill>
-        <p:spPr>
-          <a:xfrm>
-            <a:off x="3949840" y="2097545"/>
-            <a:ext cx="252000" cy="252000"/>
-          </a:xfrm>
-          <a:prstGeom prst="rect">
-            <a:avLst/>
-          </a:prstGeom>
-        </p:spPr>
-      </p:pic>
-      <p:pic>
-        <p:nvPicPr>
-          <p:cNvPr id="66" name="图片 65"/>
-          <p:cNvPicPr>
-            <a:picLocks noChangeAspect="1"/>
-          </p:cNvPicPr>
-          <p:nvPr/>
-        </p:nvPicPr>
-        <p:blipFill>
-          <a:blip r:embed="rId9"/>
-          <a:stretch>
-            <a:fillRect/>
-          </a:stretch>
-        </p:blipFill>
-        <p:spPr>
-          <a:xfrm>
-            <a:off x="3949700" y="2374900"/>
-            <a:ext cx="252000" cy="252000"/>
-          </a:xfrm>
-          <a:prstGeom prst="rect">
-            <a:avLst/>
-          </a:prstGeom>
-        </p:spPr>
-      </p:pic>
-      <p:pic>
-        <p:nvPicPr>
-          <p:cNvPr id="67" name="图片 66"/>
-          <p:cNvPicPr>
-            <a:picLocks noChangeAspect="1"/>
-          </p:cNvPicPr>
-          <p:nvPr/>
-        </p:nvPicPr>
-        <p:blipFill>
-          <a:blip r:embed="rId10"/>
-          <a:stretch>
-            <a:fillRect/>
-          </a:stretch>
-        </p:blipFill>
-        <p:spPr>
-          <a:xfrm>
-            <a:off x="3949728" y="2679728"/>
-            <a:ext cx="252000" cy="252000"/>
-          </a:xfrm>
-          <a:prstGeom prst="rect">
-            <a:avLst/>
-          </a:prstGeom>
-        </p:spPr>
-      </p:pic>
-      <p:pic>
-        <p:nvPicPr>
-          <p:cNvPr id="68" name="图片 67"/>
-          <p:cNvPicPr>
-            <a:picLocks noChangeAspect="1"/>
-          </p:cNvPicPr>
-          <p:nvPr/>
-        </p:nvPicPr>
-        <p:blipFill>
-          <a:blip r:embed="rId11"/>
-          <a:stretch>
-            <a:fillRect/>
-          </a:stretch>
-        </p:blipFill>
-        <p:spPr>
-          <a:xfrm>
-            <a:off x="3949700" y="2991485"/>
-            <a:ext cx="252000" cy="252000"/>
-          </a:xfrm>
-          <a:prstGeom prst="rect">
-            <a:avLst/>
-          </a:prstGeom>
-        </p:spPr>
-      </p:pic>
-      <p:pic>
-        <p:nvPicPr>
-          <p:cNvPr id="69" name="图片 68"/>
-          <p:cNvPicPr>
-            <a:picLocks noChangeAspect="1"/>
-          </p:cNvPicPr>
-          <p:nvPr/>
-        </p:nvPicPr>
-        <p:blipFill>
-          <a:blip r:embed="rId12"/>
-          <a:stretch>
-            <a:fillRect/>
-          </a:stretch>
-        </p:blipFill>
-        <p:spPr>
-          <a:xfrm>
-            <a:off x="5702046" y="1760601"/>
-            <a:ext cx="252000" cy="252000"/>
-          </a:xfrm>
-          <a:prstGeom prst="rect">
-            <a:avLst/>
-          </a:prstGeom>
-        </p:spPr>
-      </p:pic>
-      <p:pic>
-        <p:nvPicPr>
-          <p:cNvPr id="70" name="图片 69"/>
-          <p:cNvPicPr>
-            <a:picLocks noChangeAspect="1"/>
-          </p:cNvPicPr>
-          <p:nvPr/>
-        </p:nvPicPr>
-        <p:blipFill>
-          <a:blip r:embed="rId13"/>
-          <a:stretch>
-            <a:fillRect/>
-          </a:stretch>
-        </p:blipFill>
-        <p:spPr>
-          <a:xfrm>
-            <a:off x="5702300" y="2084705"/>
-            <a:ext cx="252000" cy="252000"/>
-          </a:xfrm>
-          <a:prstGeom prst="rect">
-            <a:avLst/>
-          </a:prstGeom>
-        </p:spPr>
-      </p:pic>
-      <p:pic>
-        <p:nvPicPr>
-          <p:cNvPr id="71" name="图片 70"/>
-          <p:cNvPicPr>
-            <a:picLocks noChangeAspect="1"/>
-          </p:cNvPicPr>
-          <p:nvPr/>
-        </p:nvPicPr>
-        <p:blipFill>
-          <a:blip r:embed="rId14"/>
-          <a:stretch>
-            <a:fillRect/>
-          </a:stretch>
-        </p:blipFill>
-        <p:spPr>
-          <a:xfrm>
-            <a:off x="5702300" y="2374900"/>
-            <a:ext cx="252000" cy="252000"/>
-          </a:xfrm>
-          <a:prstGeom prst="rect">
-            <a:avLst/>
-          </a:prstGeom>
-        </p:spPr>
-      </p:pic>
-      <p:pic>
-        <p:nvPicPr>
-          <p:cNvPr id="72" name="图片 71"/>
-          <p:cNvPicPr>
-            <a:picLocks noChangeAspect="1"/>
-          </p:cNvPicPr>
-          <p:nvPr/>
-        </p:nvPicPr>
-        <p:blipFill>
-          <a:blip r:embed="rId15"/>
-          <a:stretch>
-            <a:fillRect/>
-          </a:stretch>
-        </p:blipFill>
-        <p:spPr>
-          <a:xfrm>
-            <a:off x="5701665" y="2661920"/>
-            <a:ext cx="252000" cy="252000"/>
-          </a:xfrm>
-          <a:prstGeom prst="rect">
-            <a:avLst/>
-          </a:prstGeom>
-        </p:spPr>
-      </p:pic>
-      <p:pic>
-        <p:nvPicPr>
-          <p:cNvPr id="73" name="图片 72"/>
-          <p:cNvPicPr>
-            <a:picLocks noChangeAspect="1"/>
-          </p:cNvPicPr>
-          <p:nvPr/>
-        </p:nvPicPr>
-        <p:blipFill>
-          <a:blip r:embed="rId16"/>
-          <a:stretch>
-            <a:fillRect/>
-          </a:stretch>
-        </p:blipFill>
-        <p:spPr>
-          <a:xfrm>
-            <a:off x="5702300" y="2991485"/>
-            <a:ext cx="252000" cy="252000"/>
-          </a:xfrm>
-          <a:prstGeom prst="rect">
-            <a:avLst/>
-          </a:prstGeom>
-        </p:spPr>
-      </p:pic>
-      <p:sp>
-        <p:nvSpPr>
-          <p:cNvPr id="74" name="圆角矩形 73"/>
+      <p:sp>
+        <p:nvSpPr>
+          <p:cNvPr id="35" name="圆角矩形 34"/>
           <p:cNvSpPr/>
           <p:nvPr/>
         </p:nvSpPr>
         <p:spPr>
           <a:xfrm>
-            <a:off x="1367790" y="5287010"/>
-            <a:ext cx="4805680" cy="829310"/>
+            <a:off x="3143605" y="2081530"/>
+            <a:ext cx="2076450" cy="1260000"/>
           </a:xfrm>
           <a:prstGeom prst="roundRect">
             <a:avLst/>
@@ -5014,15 +4178,12 @@
           <a:solidFill>
             <a:schemeClr val="bg1"/>
           </a:solidFill>
-          <a:extLst>
-            <a:ext uri="{909E8E84-426E-40DD-AFC4-6F175D3DCCD1}">
-              <a14:hiddenFill xmlns:a14="http://schemas.microsoft.com/office/drawing/2010/main">
-                <a:solidFill>
-                  <a:srgbClr val="2E54A1"/>
-                </a:solidFill>
-              </a14:hiddenFill>
-            </a:ext>
-          </a:extLst>
+          <a:ln w="34925" cmpd="sng">
+            <a:solidFill>
+              <a:srgbClr val="C00000"/>
+            </a:solidFill>
+            <a:prstDash val="solid"/>
+          </a:ln>
         </p:spPr>
         <p:style>
           <a:lnRef idx="2">
@@ -5050,14 +4211,14 @@
       </p:sp>
       <p:sp>
         <p:nvSpPr>
-          <p:cNvPr id="75" name="圆角矩形 74"/>
+          <p:cNvPr id="36" name="圆角矩形 35"/>
           <p:cNvSpPr/>
           <p:nvPr/>
         </p:nvSpPr>
         <p:spPr>
           <a:xfrm>
-            <a:off x="1367790" y="3964940"/>
-            <a:ext cx="2682240" cy="1246505"/>
+            <a:off x="3143605" y="3709670"/>
+            <a:ext cx="2076450" cy="1260000"/>
           </a:xfrm>
           <a:prstGeom prst="roundRect">
             <a:avLst/>
@@ -5065,15 +4226,12 @@
           <a:solidFill>
             <a:schemeClr val="bg1"/>
           </a:solidFill>
-          <a:extLst>
-            <a:ext uri="{909E8E84-426E-40DD-AFC4-6F175D3DCCD1}">
-              <a14:hiddenFill xmlns:a14="http://schemas.microsoft.com/office/drawing/2010/main">
-                <a:solidFill>
-                  <a:srgbClr val="2E54A1"/>
-                </a:solidFill>
-              </a14:hiddenFill>
-            </a:ext>
-          </a:extLst>
+          <a:ln w="34925" cmpd="sng">
+            <a:solidFill>
+              <a:srgbClr val="C00000"/>
+            </a:solidFill>
+            <a:prstDash val="solid"/>
+          </a:ln>
         </p:spPr>
         <p:style>
           <a:lnRef idx="2">
@@ -5101,14 +4259,14 @@
       </p:sp>
       <p:sp>
         <p:nvSpPr>
-          <p:cNvPr id="76" name="圆角矩形 75"/>
+          <p:cNvPr id="37" name="圆角矩形 36"/>
           <p:cNvSpPr/>
           <p:nvPr/>
         </p:nvSpPr>
         <p:spPr>
           <a:xfrm>
-            <a:off x="4278630" y="3964940"/>
-            <a:ext cx="1895475" cy="1245870"/>
+            <a:off x="5955423" y="2068830"/>
+            <a:ext cx="2076450" cy="1260000"/>
           </a:xfrm>
           <a:prstGeom prst="roundRect">
             <a:avLst/>
@@ -5116,15 +4274,12 @@
           <a:solidFill>
             <a:schemeClr val="bg1"/>
           </a:solidFill>
-          <a:extLst>
-            <a:ext uri="{909E8E84-426E-40DD-AFC4-6F175D3DCCD1}">
-              <a14:hiddenFill xmlns:a14="http://schemas.microsoft.com/office/drawing/2010/main">
-                <a:solidFill>
-                  <a:srgbClr val="2E54A1"/>
-                </a:solidFill>
-              </a14:hiddenFill>
-            </a:ext>
-          </a:extLst>
+          <a:ln w="34925" cmpd="sng">
+            <a:solidFill>
+              <a:srgbClr val="2E54A1"/>
+            </a:solidFill>
+            <a:prstDash val="solid"/>
+          </a:ln>
         </p:spPr>
         <p:style>
           <a:lnRef idx="2">
@@ -5152,41 +4307,26 @@
       </p:sp>
       <p:sp>
         <p:nvSpPr>
-          <p:cNvPr id="77" name="箭头: 燕尾形 1071"/>
+          <p:cNvPr id="38" name="圆角矩形 37"/>
           <p:cNvSpPr/>
           <p:nvPr/>
         </p:nvSpPr>
         <p:spPr>
           <a:xfrm>
-            <a:off x="4001770" y="4351973"/>
-            <a:ext cx="276860" cy="392430"/>
-          </a:xfrm>
-          <a:prstGeom prst="notchedRightArrow">
-            <a:avLst>
-              <a:gd name="adj1" fmla="val 33809"/>
-              <a:gd name="adj2" fmla="val 52390"/>
-            </a:avLst>
-          </a:prstGeom>
-          <a:gradFill>
-            <a:gsLst>
-              <a:gs pos="0">
-                <a:schemeClr val="accent1">
-                  <a:lumMod val="5000"/>
-                  <a:lumOff val="95000"/>
-                  <a:alpha val="0"/>
-                </a:schemeClr>
-              </a:gs>
-              <a:gs pos="74000">
-                <a:srgbClr val="2E54A1"/>
-              </a:gs>
-              <a:gs pos="100000">
-                <a:srgbClr val="2E54A1"/>
-              </a:gs>
-            </a:gsLst>
-            <a:lin ang="0" scaled="0"/>
-          </a:gradFill>
-          <a:ln>
-            <a:noFill/>
+            <a:off x="5955423" y="3709670"/>
+            <a:ext cx="2076450" cy="1260000"/>
+          </a:xfrm>
+          <a:prstGeom prst="roundRect">
+            <a:avLst/>
+          </a:prstGeom>
+          <a:solidFill>
+            <a:schemeClr val="bg1"/>
+          </a:solidFill>
+          <a:ln w="34925" cmpd="sng">
+            <a:solidFill>
+              <a:srgbClr val="2E54A1"/>
+            </a:solidFill>
+            <a:prstDash val="solid"/>
           </a:ln>
         </p:spPr>
         <p:style>
@@ -5207,7 +4347,6 @@
         </p:style>
         <p:txBody>
           <a:bodyPr rtlCol="0" anchor="ctr"/>
-          <a:lstStyle/>
           <a:p>
             <a:pPr algn="ctr"/>
             <a:endParaRPr lang="zh-CN" altLang="en-US"/>
@@ -5216,14 +4355,62 @@
       </p:sp>
       <p:sp>
         <p:nvSpPr>
-          <p:cNvPr id="78" name="文本框 77"/>
+          <p:cNvPr id="39" name="圆角矩形 38"/>
+          <p:cNvSpPr/>
+          <p:nvPr/>
+        </p:nvSpPr>
+        <p:spPr>
+          <a:xfrm>
+            <a:off x="8767203" y="2068830"/>
+            <a:ext cx="2076450" cy="1260000"/>
+          </a:xfrm>
+          <a:prstGeom prst="roundRect">
+            <a:avLst/>
+          </a:prstGeom>
+          <a:solidFill>
+            <a:schemeClr val="bg1"/>
+          </a:solidFill>
+          <a:ln w="34925" cmpd="sng">
+            <a:solidFill>
+              <a:srgbClr val="C00000"/>
+            </a:solidFill>
+            <a:prstDash val="solid"/>
+          </a:ln>
+        </p:spPr>
+        <p:style>
+          <a:lnRef idx="2">
+            <a:schemeClr val="accent1">
+              <a:lumMod val="75000"/>
+            </a:schemeClr>
+          </a:lnRef>
+          <a:fillRef idx="1">
+            <a:schemeClr val="accent1"/>
+          </a:fillRef>
+          <a:effectRef idx="0">
+            <a:srgbClr val="FFFFFF"/>
+          </a:effectRef>
+          <a:fontRef idx="minor">
+            <a:schemeClr val="lt1"/>
+          </a:fontRef>
+        </p:style>
+        <p:txBody>
+          <a:bodyPr rtlCol="0" anchor="ctr"/>
+          <a:p>
+            <a:pPr algn="ctr"/>
+            <a:endParaRPr lang="zh-CN" altLang="en-US"/>
+          </a:p>
+        </p:txBody>
+      </p:sp>
+      <p:sp>
+        <p:nvSpPr>
+          <p:cNvPr id="2" name="文本框 1"/>
           <p:cNvSpPr txBox="1"/>
           <p:nvPr/>
         </p:nvSpPr>
         <p:spPr>
           <a:xfrm>
-            <a:off x="1923415" y="4006215"/>
-            <a:ext cx="1470660" cy="275590"/>
+            <a:off x="5346700" y="2794635"/>
+            <a:ext cx="567055" cy="1198880"/>
           </a:xfrm>
           <a:prstGeom prst="rect">
             <a:avLst/>
@@ -5235,50 +4422,125 @@
             <a:spAutoFit/>
           </a:bodyPr>
           <a:p>
+            <a:r>
+              <a:rPr lang="zh-CN" altLang="en-US" sz="1200" b="1"/>
+              <a:t>候选事件</a:t>
+            </a:r>
+            <a:endParaRPr lang="zh-CN" altLang="en-US" sz="1200" b="1"/>
+          </a:p>
+          <a:p>
+            <a:endParaRPr lang="zh-CN" altLang="en-US" sz="1200" b="1"/>
+          </a:p>
+          <a:p>
+            <a:endParaRPr lang="zh-CN" altLang="en-US" sz="1200" b="1"/>
+          </a:p>
+          <a:p>
+            <a:r>
+              <a:rPr lang="zh-CN" altLang="en-US" sz="1200" b="1"/>
+              <a:t>证据窗口</a:t>
+            </a:r>
+            <a:endParaRPr lang="zh-CN" altLang="en-US" sz="1200" b="1"/>
+          </a:p>
+        </p:txBody>
+      </p:sp>
+      <p:sp>
+        <p:nvSpPr>
+          <p:cNvPr id="3" name="文本框 2"/>
+          <p:cNvSpPr txBox="1"/>
+          <p:nvPr/>
+        </p:nvSpPr>
+        <p:spPr>
+          <a:xfrm>
+            <a:off x="8157210" y="2794635"/>
+            <a:ext cx="567055" cy="1198880"/>
+          </a:xfrm>
+          <a:prstGeom prst="rect">
+            <a:avLst/>
+          </a:prstGeom>
+          <a:noFill/>
+        </p:spPr>
+        <p:txBody>
+          <a:bodyPr wrap="square" rtlCol="0">
+            <a:spAutoFit/>
+          </a:bodyPr>
+          <a:p>
+            <a:r>
+              <a:rPr lang="zh-CN" altLang="en-US" sz="1200" b="1"/>
+              <a:t>可疑事件</a:t>
+            </a:r>
+            <a:endParaRPr lang="zh-CN" altLang="en-US" sz="1200" b="1"/>
+          </a:p>
+          <a:p>
+            <a:endParaRPr lang="zh-CN" altLang="en-US" sz="1200" b="1"/>
+          </a:p>
+          <a:p>
+            <a:endParaRPr lang="zh-CN" altLang="en-US" sz="1200" b="1"/>
+          </a:p>
+          <a:p>
+            <a:r>
+              <a:rPr lang="zh-CN" altLang="en-US" sz="1200" b="1"/>
+              <a:t>证据窗口</a:t>
+            </a:r>
+            <a:endParaRPr lang="zh-CN" altLang="en-US" sz="1200" b="1"/>
+          </a:p>
+        </p:txBody>
+      </p:sp>
+      <p:sp>
+        <p:nvSpPr>
+          <p:cNvPr id="4" name="文本框 3"/>
+          <p:cNvSpPr txBox="1"/>
+          <p:nvPr/>
+        </p:nvSpPr>
+        <p:spPr>
+          <a:xfrm>
+            <a:off x="3030258" y="2084705"/>
+            <a:ext cx="2303145" cy="337185"/>
+          </a:xfrm>
+          <a:prstGeom prst="rect">
+            <a:avLst/>
+          </a:prstGeom>
+          <a:noFill/>
+        </p:spPr>
+        <p:txBody>
+          <a:bodyPr wrap="square" rtlCol="0">
+            <a:spAutoFit/>
+          </a:bodyPr>
+          <a:p>
             <a:pPr algn="ctr"/>
             <a:r>
-              <a:rPr lang="zh-CN" altLang="en-US" sz="1200" b="1">
+              <a:rPr lang="zh-CN" altLang="en-US" sz="1600" b="1">
                 <a:solidFill>
                   <a:srgbClr val="C00000"/>
                 </a:solidFill>
-                <a:sym typeface="+mn-ea"/>
               </a:rPr>
-              <a:t>端侧增量状态</a:t>
-            </a:r>
-            <a:r>
-              <a:rPr lang="zh-CN" altLang="en-US" sz="1200" b="1">
-                <a:solidFill>
-                  <a:srgbClr val="C00000"/>
-                </a:solidFill>
-                <a:sym typeface="+mn-ea"/>
-              </a:rPr>
-              <a:t>更新</a:t>
-            </a:r>
-            <a:endParaRPr lang="zh-CN" altLang="en-US" sz="1200" b="1">
+              <a:t>连续变点检测机制</a:t>
+            </a:r>
+            <a:endParaRPr lang="zh-CN" altLang="en-US" sz="1600" b="1">
               <a:solidFill>
                 <a:srgbClr val="C00000"/>
               </a:solidFill>
-              <a:sym typeface="+mn-ea"/>
             </a:endParaRPr>
           </a:p>
         </p:txBody>
       </p:sp>
       <p:pic>
         <p:nvPicPr>
-          <p:cNvPr id="79" name="图片 78"/>
-          <p:cNvPicPr/>
+          <p:cNvPr id="11" name="图片 10"/>
+          <p:cNvPicPr>
+            <a:picLocks noChangeAspect="1"/>
+          </p:cNvPicPr>
           <p:nvPr/>
         </p:nvPicPr>
         <p:blipFill>
-          <a:blip r:embed="rId17"/>
+          <a:blip r:embed="rId4"/>
           <a:stretch>
             <a:fillRect/>
           </a:stretch>
         </p:blipFill>
         <p:spPr>
           <a:xfrm>
-            <a:off x="2234565" y="4352290"/>
-            <a:ext cx="720000" cy="648000"/>
+            <a:off x="3232785" y="2496185"/>
+            <a:ext cx="504825" cy="504825"/>
           </a:xfrm>
           <a:prstGeom prst="rect">
             <a:avLst/>
@@ -5287,305 +4549,595 @@
       </p:pic>
       <p:sp>
         <p:nvSpPr>
-          <p:cNvPr id="82" name="文本框 81"/>
-          <p:cNvSpPr txBox="1"/>
-          <p:nvPr/>
-        </p:nvSpPr>
-        <p:spPr>
-          <a:xfrm>
-            <a:off x="1325880" y="4352290"/>
-            <a:ext cx="1253490" cy="645160"/>
+          <p:cNvPr id="14" name="右箭头 13"/>
+          <p:cNvSpPr/>
+          <p:nvPr/>
+        </p:nvSpPr>
+        <p:spPr>
+          <a:xfrm>
+            <a:off x="3979545" y="2887980"/>
+            <a:ext cx="1096645" cy="75565"/>
+          </a:xfrm>
+          <a:prstGeom prst="rightArrow">
+            <a:avLst/>
+          </a:prstGeom>
+        </p:spPr>
+        <p:style>
+          <a:lnRef idx="2">
+            <a:schemeClr val="accent1">
+              <a:lumMod val="75000"/>
+            </a:schemeClr>
+          </a:lnRef>
+          <a:fillRef idx="1">
+            <a:schemeClr val="accent1"/>
+          </a:fillRef>
+          <a:effectRef idx="0">
+            <a:srgbClr val="FFFFFF"/>
+          </a:effectRef>
+          <a:fontRef idx="minor">
+            <a:schemeClr val="lt1"/>
+          </a:fontRef>
+        </p:style>
+        <p:txBody>
+          <a:bodyPr rtlCol="0" anchor="ctr"/>
+          <a:p>
+            <a:pPr algn="ctr"/>
+            <a:endParaRPr lang="zh-CN" altLang="en-US"/>
+          </a:p>
+        </p:txBody>
+      </p:sp>
+      <p:sp>
+        <p:nvSpPr>
+          <p:cNvPr id="20" name="矩形 19"/>
+          <p:cNvSpPr/>
+          <p:nvPr/>
+        </p:nvSpPr>
+        <p:spPr>
+          <a:xfrm>
+            <a:off x="4022090" y="2832100"/>
+            <a:ext cx="36000" cy="72000"/>
           </a:xfrm>
           <a:prstGeom prst="rect">
             <a:avLst/>
           </a:prstGeom>
-          <a:noFill/>
-        </p:spPr>
-        <p:txBody>
-          <a:bodyPr wrap="square" rtlCol="0">
-            <a:spAutoFit/>
-          </a:bodyPr>
-          <a:p>
-            <a:pPr marL="171450" indent="-171450">
-              <a:buFont typeface="Wingdings" panose="05000000000000000000" charset="0"/>
-              <a:buChar char="l"/>
-            </a:pPr>
-            <a:r>
-              <a:rPr lang="zh-CN" altLang="en-US" sz="1200" b="1"/>
-              <a:t>背景基线</a:t>
-            </a:r>
-            <a:endParaRPr lang="zh-CN" altLang="en-US" sz="1200" b="1"/>
-          </a:p>
-          <a:p>
-            <a:pPr marL="171450" indent="-171450">
-              <a:buFont typeface="Wingdings" panose="05000000000000000000" charset="0"/>
-              <a:buChar char="l"/>
-            </a:pPr>
-            <a:r>
-              <a:rPr lang="zh-CN" altLang="en-US" sz="1200" b="1"/>
-              <a:t>频段占用</a:t>
-            </a:r>
-            <a:endParaRPr lang="zh-CN" altLang="en-US" sz="1200" b="1"/>
-          </a:p>
-          <a:p>
-            <a:pPr marL="171450" indent="-171450">
-              <a:buFont typeface="Wingdings" panose="05000000000000000000" charset="0"/>
-              <a:buChar char="l"/>
-            </a:pPr>
-            <a:r>
-              <a:rPr lang="zh-CN" altLang="en-US" sz="1200" b="1"/>
-              <a:t>链路状态</a:t>
-            </a:r>
-            <a:endParaRPr lang="zh-CN" altLang="en-US" sz="1200" b="1"/>
-          </a:p>
-        </p:txBody>
-      </p:sp>
-      <p:sp>
-        <p:nvSpPr>
-          <p:cNvPr id="83" name="文本框 82"/>
-          <p:cNvSpPr txBox="1"/>
-          <p:nvPr/>
-        </p:nvSpPr>
-        <p:spPr>
-          <a:xfrm>
-            <a:off x="2856865" y="4352290"/>
-            <a:ext cx="1287780" cy="645160"/>
+        </p:spPr>
+        <p:style>
+          <a:lnRef idx="2">
+            <a:schemeClr val="accent1">
+              <a:lumMod val="75000"/>
+            </a:schemeClr>
+          </a:lnRef>
+          <a:fillRef idx="1">
+            <a:schemeClr val="accent1"/>
+          </a:fillRef>
+          <a:effectRef idx="0">
+            <a:srgbClr val="FFFFFF"/>
+          </a:effectRef>
+          <a:fontRef idx="minor">
+            <a:schemeClr val="lt1"/>
+          </a:fontRef>
+        </p:style>
+        <p:txBody>
+          <a:bodyPr rtlCol="0" anchor="ctr"/>
+          <a:p>
+            <a:pPr algn="ctr"/>
+            <a:endParaRPr lang="zh-CN" altLang="en-US"/>
+          </a:p>
+        </p:txBody>
+      </p:sp>
+      <p:sp>
+        <p:nvSpPr>
+          <p:cNvPr id="21" name="矩形 20"/>
+          <p:cNvSpPr/>
+          <p:nvPr/>
+        </p:nvSpPr>
+        <p:spPr>
+          <a:xfrm>
+            <a:off x="4244340" y="2832100"/>
+            <a:ext cx="36000" cy="72000"/>
           </a:xfrm>
           <a:prstGeom prst="rect">
             <a:avLst/>
           </a:prstGeom>
-          <a:noFill/>
-        </p:spPr>
-        <p:txBody>
-          <a:bodyPr wrap="square" rtlCol="0">
-            <a:spAutoFit/>
-          </a:bodyPr>
-          <a:p>
-            <a:pPr marL="171450" indent="-171450">
-              <a:buFont typeface="Wingdings" panose="05000000000000000000" charset="0"/>
-              <a:buChar char="l"/>
-            </a:pPr>
-            <a:r>
-              <a:rPr lang="zh-CN" altLang="en-US" sz="1200" b="1"/>
-              <a:t>事件频次</a:t>
-            </a:r>
-            <a:endParaRPr lang="zh-CN" altLang="en-US" sz="1200" b="1"/>
-          </a:p>
-          <a:p>
-            <a:pPr marL="171450" indent="-171450">
-              <a:buFont typeface="Wingdings" panose="05000000000000000000" charset="0"/>
-              <a:buChar char="l"/>
-            </a:pPr>
-            <a:r>
-              <a:rPr lang="zh-CN" altLang="en-US" sz="1200" b="1"/>
-              <a:t>历史稀缺度</a:t>
-            </a:r>
-            <a:endParaRPr lang="zh-CN" altLang="en-US" sz="1200" b="1"/>
-          </a:p>
-          <a:p>
-            <a:pPr marL="171450" indent="-171450">
-              <a:buFont typeface="Wingdings" panose="05000000000000000000" charset="0"/>
-              <a:buChar char="l"/>
-            </a:pPr>
-            <a:r>
-              <a:rPr lang="zh-CN" altLang="en-US" sz="1200" b="1"/>
-              <a:t>任务频段命中</a:t>
-            </a:r>
-            <a:endParaRPr lang="zh-CN" altLang="en-US" sz="1200" b="1"/>
+        </p:spPr>
+        <p:style>
+          <a:lnRef idx="2">
+            <a:schemeClr val="accent1">
+              <a:lumMod val="75000"/>
+            </a:schemeClr>
+          </a:lnRef>
+          <a:fillRef idx="1">
+            <a:schemeClr val="accent1"/>
+          </a:fillRef>
+          <a:effectRef idx="0">
+            <a:srgbClr val="FFFFFF"/>
+          </a:effectRef>
+          <a:fontRef idx="minor">
+            <a:schemeClr val="lt1"/>
+          </a:fontRef>
+        </p:style>
+        <p:txBody>
+          <a:bodyPr rtlCol="0" anchor="ctr"/>
+          <a:p>
+            <a:pPr algn="ctr"/>
+            <a:endParaRPr lang="zh-CN" altLang="en-US"/>
+          </a:p>
+        </p:txBody>
+      </p:sp>
+      <p:sp>
+        <p:nvSpPr>
+          <p:cNvPr id="22" name="矩形 21"/>
+          <p:cNvSpPr/>
+          <p:nvPr/>
+        </p:nvSpPr>
+        <p:spPr>
+          <a:xfrm>
+            <a:off x="4466590" y="2832100"/>
+            <a:ext cx="36000" cy="72000"/>
+          </a:xfrm>
+          <a:prstGeom prst="rect">
+            <a:avLst/>
+          </a:prstGeom>
+        </p:spPr>
+        <p:style>
+          <a:lnRef idx="2">
+            <a:schemeClr val="accent1">
+              <a:lumMod val="75000"/>
+            </a:schemeClr>
+          </a:lnRef>
+          <a:fillRef idx="1">
+            <a:schemeClr val="accent1"/>
+          </a:fillRef>
+          <a:effectRef idx="0">
+            <a:srgbClr val="FFFFFF"/>
+          </a:effectRef>
+          <a:fontRef idx="minor">
+            <a:schemeClr val="lt1"/>
+          </a:fontRef>
+        </p:style>
+        <p:txBody>
+          <a:bodyPr rtlCol="0" anchor="ctr"/>
+          <a:p>
+            <a:pPr algn="ctr"/>
+            <a:endParaRPr lang="zh-CN" altLang="en-US"/>
+          </a:p>
+        </p:txBody>
+      </p:sp>
+      <p:sp>
+        <p:nvSpPr>
+          <p:cNvPr id="23" name="矩形 22"/>
+          <p:cNvSpPr/>
+          <p:nvPr/>
+        </p:nvSpPr>
+        <p:spPr>
+          <a:xfrm>
+            <a:off x="4676873" y="2724150"/>
+            <a:ext cx="36000" cy="180000"/>
+          </a:xfrm>
+          <a:prstGeom prst="rect">
+            <a:avLst/>
+          </a:prstGeom>
+          <a:solidFill>
+            <a:srgbClr val="4874CB"/>
+          </a:solidFill>
+          <a:ln w="12700" cmpd="sng">
+            <a:solidFill>
+              <a:schemeClr val="accent1">
+                <a:shade val="50000"/>
+              </a:schemeClr>
+            </a:solidFill>
+            <a:prstDash val="solid"/>
+          </a:ln>
+        </p:spPr>
+        <p:style>
+          <a:lnRef idx="2">
+            <a:schemeClr val="accent1">
+              <a:lumMod val="75000"/>
+            </a:schemeClr>
+          </a:lnRef>
+          <a:fillRef idx="1">
+            <a:schemeClr val="accent1"/>
+          </a:fillRef>
+          <a:effectRef idx="0">
+            <a:srgbClr val="FFFFFF"/>
+          </a:effectRef>
+          <a:fontRef idx="minor">
+            <a:schemeClr val="lt1"/>
+          </a:fontRef>
+        </p:style>
+        <p:txBody>
+          <a:bodyPr rtlCol="0" anchor="ctr"/>
+          <a:p>
+            <a:pPr algn="ctr"/>
+            <a:endParaRPr lang="zh-CN" altLang="en-US"/>
+          </a:p>
+        </p:txBody>
+      </p:sp>
+      <p:sp>
+        <p:nvSpPr>
+          <p:cNvPr id="24" name="矩形 23"/>
+          <p:cNvSpPr/>
+          <p:nvPr/>
+        </p:nvSpPr>
+        <p:spPr>
+          <a:xfrm>
+            <a:off x="4882515" y="2724150"/>
+            <a:ext cx="36000" cy="180000"/>
+          </a:xfrm>
+          <a:prstGeom prst="rect">
+            <a:avLst/>
+          </a:prstGeom>
+          <a:solidFill>
+            <a:srgbClr val="4874CB"/>
+          </a:solidFill>
+          <a:ln w="12700" cmpd="sng">
+            <a:solidFill>
+              <a:schemeClr val="accent1">
+                <a:shade val="50000"/>
+              </a:schemeClr>
+            </a:solidFill>
+            <a:prstDash val="solid"/>
+          </a:ln>
+        </p:spPr>
+        <p:style>
+          <a:lnRef idx="2">
+            <a:schemeClr val="accent1">
+              <a:lumMod val="75000"/>
+            </a:schemeClr>
+          </a:lnRef>
+          <a:fillRef idx="1">
+            <a:schemeClr val="accent1"/>
+          </a:fillRef>
+          <a:effectRef idx="0">
+            <a:srgbClr val="FFFFFF"/>
+          </a:effectRef>
+          <a:fontRef idx="minor">
+            <a:schemeClr val="lt1"/>
+          </a:fontRef>
+        </p:style>
+        <p:txBody>
+          <a:bodyPr rtlCol="0" anchor="ctr"/>
+          <a:p>
+            <a:pPr algn="ctr"/>
+            <a:endParaRPr lang="zh-CN" altLang="en-US"/>
+          </a:p>
+        </p:txBody>
+      </p:sp>
+      <p:sp>
+        <p:nvSpPr>
+          <p:cNvPr id="25" name="上箭头 24"/>
+          <p:cNvSpPr/>
+          <p:nvPr/>
+        </p:nvSpPr>
+        <p:spPr>
+          <a:xfrm>
+            <a:off x="4669790" y="3001010"/>
+            <a:ext cx="54000" cy="221615"/>
+          </a:xfrm>
+          <a:prstGeom prst="upArrow">
+            <a:avLst/>
+          </a:prstGeom>
+          <a:solidFill>
+            <a:srgbClr val="C00000"/>
+          </a:solidFill>
+          <a:ln>
+            <a:solidFill>
+              <a:srgbClr val="C00000"/>
+            </a:solidFill>
+          </a:ln>
+        </p:spPr>
+        <p:style>
+          <a:lnRef idx="2">
+            <a:schemeClr val="accent1">
+              <a:lumMod val="75000"/>
+            </a:schemeClr>
+          </a:lnRef>
+          <a:fillRef idx="1">
+            <a:schemeClr val="accent1"/>
+          </a:fillRef>
+          <a:effectRef idx="0">
+            <a:srgbClr val="FFFFFF"/>
+          </a:effectRef>
+          <a:fontRef idx="minor">
+            <a:schemeClr val="lt1"/>
+          </a:fontRef>
+        </p:style>
+        <p:txBody>
+          <a:bodyPr rtlCol="0" anchor="ctr"/>
+          <a:p>
+            <a:pPr algn="ctr"/>
+            <a:endParaRPr lang="zh-CN" altLang="en-US"/>
           </a:p>
         </p:txBody>
       </p:sp>
       <p:pic>
         <p:nvPicPr>
-          <p:cNvPr id="84" name="图片 83"/>
+          <p:cNvPr id="26" name="图片 25"/>
           <p:cNvPicPr/>
           <p:nvPr/>
         </p:nvPicPr>
         <p:blipFill>
-          <a:blip r:embed="rId18"/>
+          <a:blip r:embed="rId5"/>
           <a:stretch>
             <a:fillRect/>
           </a:stretch>
         </p:blipFill>
         <p:spPr>
           <a:xfrm>
-            <a:off x="4829810" y="4401185"/>
-            <a:ext cx="793115" cy="556260"/>
+            <a:off x="3923030" y="2483485"/>
+            <a:ext cx="234000" cy="234000"/>
           </a:xfrm>
           <a:prstGeom prst="rect">
             <a:avLst/>
           </a:prstGeom>
         </p:spPr>
       </p:pic>
-      <p:sp>
-        <p:nvSpPr>
-          <p:cNvPr id="85" name="文本框 84"/>
-          <p:cNvSpPr txBox="1"/>
-          <p:nvPr/>
-        </p:nvSpPr>
-        <p:spPr>
-          <a:xfrm>
-            <a:off x="4491038" y="4006215"/>
-            <a:ext cx="1470660" cy="275590"/>
-          </a:xfrm>
-          <a:prstGeom prst="rect">
-            <a:avLst/>
-          </a:prstGeom>
-          <a:noFill/>
-        </p:spPr>
-        <p:txBody>
-          <a:bodyPr wrap="square" rtlCol="0">
-            <a:spAutoFit/>
-          </a:bodyPr>
-          <a:p>
-            <a:pPr algn="ctr"/>
-            <a:r>
-              <a:rPr lang="zh-CN" altLang="en-US" sz="1200" b="1">
-                <a:solidFill>
-                  <a:srgbClr val="C00000"/>
-                </a:solidFill>
-                <a:sym typeface="+mn-ea"/>
-              </a:rPr>
-              <a:t>价值计算</a:t>
-            </a:r>
-            <a:endParaRPr lang="zh-CN" altLang="en-US" sz="1200" b="1">
-              <a:solidFill>
-                <a:srgbClr val="C00000"/>
-              </a:solidFill>
-              <a:sym typeface="+mn-ea"/>
-            </a:endParaRPr>
-          </a:p>
-        </p:txBody>
-      </p:sp>
-      <p:sp>
-        <p:nvSpPr>
-          <p:cNvPr id="86" name="文本框 85"/>
-          <p:cNvSpPr txBox="1"/>
-          <p:nvPr/>
-        </p:nvSpPr>
-        <p:spPr>
-          <a:xfrm>
-            <a:off x="4301490" y="4744720"/>
-            <a:ext cx="514350" cy="460375"/>
-          </a:xfrm>
-          <a:prstGeom prst="rect">
-            <a:avLst/>
-          </a:prstGeom>
-          <a:noFill/>
-        </p:spPr>
-        <p:txBody>
-          <a:bodyPr wrap="square" rtlCol="0">
-            <a:spAutoFit/>
-          </a:bodyPr>
-          <a:p>
-            <a:pPr algn="ctr"/>
-            <a:r>
-              <a:rPr lang="zh-CN" altLang="en-US" sz="1200" b="1"/>
-              <a:t>预期</a:t>
-            </a:r>
-            <a:endParaRPr lang="zh-CN" altLang="en-US" sz="1200" b="1"/>
-          </a:p>
-          <a:p>
-            <a:pPr algn="ctr"/>
-            <a:r>
-              <a:rPr lang="zh-CN" altLang="en-US" sz="1200" b="1"/>
-              <a:t>收益</a:t>
-            </a:r>
-            <a:endParaRPr lang="zh-CN" altLang="en-US" sz="1200" b="1"/>
-          </a:p>
-        </p:txBody>
-      </p:sp>
-      <p:sp>
-        <p:nvSpPr>
-          <p:cNvPr id="87" name="文本框 86"/>
-          <p:cNvSpPr txBox="1"/>
-          <p:nvPr/>
-        </p:nvSpPr>
-        <p:spPr>
-          <a:xfrm>
-            <a:off x="5659755" y="4744720"/>
-            <a:ext cx="496570" cy="460375"/>
-          </a:xfrm>
-          <a:prstGeom prst="rect">
-            <a:avLst/>
-          </a:prstGeom>
-          <a:noFill/>
-        </p:spPr>
-        <p:txBody>
-          <a:bodyPr wrap="square" rtlCol="0">
-            <a:spAutoFit/>
-          </a:bodyPr>
-          <a:p>
-            <a:r>
-              <a:rPr lang="zh-CN" altLang="en-US" sz="1200" b="1"/>
-              <a:t>新增</a:t>
-            </a:r>
-            <a:r>
-              <a:rPr lang="zh-CN" altLang="en-US" sz="1200" b="1"/>
-              <a:t>开销</a:t>
-            </a:r>
-            <a:endParaRPr lang="zh-CN" altLang="en-US" sz="1200" b="1"/>
-          </a:p>
-        </p:txBody>
-      </p:sp>
       <p:pic>
         <p:nvPicPr>
-          <p:cNvPr id="89" name="图片 88"/>
-          <p:cNvPicPr>
-            <a:picLocks noChangeAspect="1"/>
-          </p:cNvPicPr>
+          <p:cNvPr id="27" name="图片 26"/>
+          <p:cNvPicPr/>
           <p:nvPr/>
         </p:nvPicPr>
         <p:blipFill>
-          <a:blip r:embed="rId19"/>
+          <a:blip r:embed="rId5"/>
           <a:stretch>
             <a:fillRect/>
           </a:stretch>
         </p:blipFill>
         <p:spPr>
           <a:xfrm>
-            <a:off x="4396665" y="4338320"/>
-            <a:ext cx="324000" cy="324000"/>
+            <a:off x="4577715" y="2483485"/>
+            <a:ext cx="234000" cy="234000"/>
           </a:xfrm>
           <a:prstGeom prst="rect">
             <a:avLst/>
           </a:prstGeom>
         </p:spPr>
       </p:pic>
+      <p:sp>
+        <p:nvSpPr>
+          <p:cNvPr id="28" name="文本框 27"/>
+          <p:cNvSpPr txBox="1"/>
+          <p:nvPr/>
+        </p:nvSpPr>
+        <p:spPr>
+          <a:xfrm rot="5400000">
+            <a:off x="4244340" y="2455545"/>
+            <a:ext cx="268605" cy="283210"/>
+          </a:xfrm>
+          <a:prstGeom prst="rect">
+            <a:avLst/>
+          </a:prstGeom>
+          <a:noFill/>
+        </p:spPr>
+        <p:txBody>
+          <a:bodyPr wrap="square" rtlCol="0">
+            <a:spAutoFit/>
+          </a:bodyPr>
+          <a:p>
+            <a:pPr indent="0" fontAlgn="auto">
+              <a:lnSpc>
+                <a:spcPts val="500"/>
+              </a:lnSpc>
+            </a:pPr>
+            <a:r>
+              <a:rPr lang="en-US" altLang="zh-CN"/>
+              <a:t>.</a:t>
+            </a:r>
+            <a:endParaRPr lang="en-US" altLang="zh-CN"/>
+          </a:p>
+          <a:p>
+            <a:pPr indent="0" fontAlgn="auto">
+              <a:lnSpc>
+                <a:spcPts val="500"/>
+              </a:lnSpc>
+            </a:pPr>
+            <a:r>
+              <a:rPr lang="en-US" altLang="zh-CN"/>
+              <a:t>.</a:t>
+            </a:r>
+            <a:endParaRPr lang="en-US" altLang="zh-CN"/>
+          </a:p>
+          <a:p>
+            <a:pPr indent="0" fontAlgn="auto">
+              <a:lnSpc>
+                <a:spcPts val="500"/>
+              </a:lnSpc>
+            </a:pPr>
+            <a:r>
+              <a:rPr lang="en-US" altLang="zh-CN"/>
+              <a:t>.</a:t>
+            </a:r>
+            <a:endParaRPr lang="en-US" altLang="zh-CN"/>
+          </a:p>
+        </p:txBody>
+      </p:sp>
+      <p:sp>
+        <p:nvSpPr>
+          <p:cNvPr id="41" name="文本框 40"/>
+          <p:cNvSpPr txBox="1"/>
+          <p:nvPr/>
+        </p:nvSpPr>
+        <p:spPr>
+          <a:xfrm>
+            <a:off x="4237355" y="3001010"/>
+            <a:ext cx="541020" cy="275590"/>
+          </a:xfrm>
+          <a:prstGeom prst="rect">
+            <a:avLst/>
+          </a:prstGeom>
+          <a:noFill/>
+        </p:spPr>
+        <p:txBody>
+          <a:bodyPr wrap="square" rtlCol="0">
+            <a:spAutoFit/>
+          </a:bodyPr>
+          <a:p>
+            <a:r>
+              <a:rPr lang="zh-CN" altLang="en-US" sz="1200" b="1"/>
+              <a:t>变点</a:t>
+            </a:r>
+            <a:endParaRPr lang="zh-CN" altLang="en-US" sz="1200" b="1"/>
+          </a:p>
+        </p:txBody>
+      </p:sp>
+      <p:sp>
+        <p:nvSpPr>
+          <p:cNvPr id="42" name="文本框 41"/>
+          <p:cNvSpPr txBox="1"/>
+          <p:nvPr/>
+        </p:nvSpPr>
+        <p:spPr>
+          <a:xfrm>
+            <a:off x="3232785" y="3001010"/>
+            <a:ext cx="541020" cy="275590"/>
+          </a:xfrm>
+          <a:prstGeom prst="rect">
+            <a:avLst/>
+          </a:prstGeom>
+          <a:noFill/>
+        </p:spPr>
+        <p:txBody>
+          <a:bodyPr wrap="square" rtlCol="0">
+            <a:spAutoFit/>
+          </a:bodyPr>
+          <a:p>
+            <a:r>
+              <a:rPr lang="zh-CN" altLang="en-US" sz="1200" b="1"/>
+              <a:t>时序</a:t>
+            </a:r>
+            <a:endParaRPr lang="zh-CN" altLang="en-US" sz="1200" b="1"/>
+          </a:p>
+        </p:txBody>
+      </p:sp>
+      <p:sp>
+        <p:nvSpPr>
+          <p:cNvPr id="43" name="文本框 42"/>
+          <p:cNvSpPr txBox="1"/>
+          <p:nvPr/>
+        </p:nvSpPr>
+        <p:spPr>
+          <a:xfrm>
+            <a:off x="3030258" y="3709670"/>
+            <a:ext cx="2303145" cy="337185"/>
+          </a:xfrm>
+          <a:prstGeom prst="rect">
+            <a:avLst/>
+          </a:prstGeom>
+          <a:noFill/>
+        </p:spPr>
+        <p:txBody>
+          <a:bodyPr wrap="square" rtlCol="0">
+            <a:spAutoFit/>
+          </a:bodyPr>
+          <a:p>
+            <a:pPr algn="ctr"/>
+            <a:r>
+              <a:rPr lang="zh-CN" altLang="en-US" sz="1600" b="1">
+                <a:solidFill>
+                  <a:srgbClr val="C00000"/>
+                </a:solidFill>
+              </a:rPr>
+              <a:t>自适应窗口</a:t>
+            </a:r>
+            <a:r>
+              <a:rPr lang="zh-CN" altLang="en-US" sz="1600" b="1">
+                <a:solidFill>
+                  <a:srgbClr val="C00000"/>
+                </a:solidFill>
+              </a:rPr>
+              <a:t>生成</a:t>
+            </a:r>
+            <a:endParaRPr lang="zh-CN" altLang="en-US" sz="1600" b="1">
+              <a:solidFill>
+                <a:srgbClr val="C00000"/>
+              </a:solidFill>
+            </a:endParaRPr>
+          </a:p>
+        </p:txBody>
+      </p:sp>
       <p:pic>
         <p:nvPicPr>
-          <p:cNvPr id="90" name="图片 89"/>
+          <p:cNvPr id="45" name="图片 44"/>
           <p:cNvPicPr>
             <a:picLocks noChangeAspect="1"/>
           </p:cNvPicPr>
           <p:nvPr/>
         </p:nvPicPr>
         <p:blipFill>
-          <a:blip r:embed="rId20"/>
+          <a:blip r:embed="rId6"/>
           <a:stretch>
             <a:fillRect/>
           </a:stretch>
         </p:blipFill>
         <p:spPr>
           <a:xfrm>
-            <a:off x="5746115" y="4338320"/>
-            <a:ext cx="324000" cy="324000"/>
+            <a:off x="3892550" y="4046855"/>
+            <a:ext cx="288000" cy="288000"/>
           </a:xfrm>
           <a:prstGeom prst="rect">
             <a:avLst/>
           </a:prstGeom>
         </p:spPr>
       </p:pic>
-      <p:sp>
-        <p:nvSpPr>
-          <p:cNvPr id="91" name="文本框 90"/>
+      <p:pic>
+        <p:nvPicPr>
+          <p:cNvPr id="47" name="图片 46"/>
+          <p:cNvPicPr>
+            <a:picLocks noChangeAspect="1"/>
+          </p:cNvPicPr>
+          <p:nvPr/>
+        </p:nvPicPr>
+        <p:blipFill>
+          <a:blip r:embed="rId7"/>
+          <a:stretch>
+            <a:fillRect/>
+          </a:stretch>
+        </p:blipFill>
+        <p:spPr>
+          <a:xfrm>
+            <a:off x="3874135" y="4341985"/>
+            <a:ext cx="288000" cy="287655"/>
+          </a:xfrm>
+          <a:prstGeom prst="rect">
+            <a:avLst/>
+          </a:prstGeom>
+        </p:spPr>
+      </p:pic>
+      <p:pic>
+        <p:nvPicPr>
+          <p:cNvPr id="48" name="图片 47"/>
+          <p:cNvPicPr>
+            <a:picLocks noChangeAspect="1"/>
+          </p:cNvPicPr>
+          <p:nvPr/>
+        </p:nvPicPr>
+        <p:blipFill>
+          <a:blip r:embed="rId8"/>
+          <a:stretch>
+            <a:fillRect/>
+          </a:stretch>
+        </p:blipFill>
+        <p:spPr>
+          <a:xfrm>
+            <a:off x="3874135" y="4623925"/>
+            <a:ext cx="288000" cy="287655"/>
+          </a:xfrm>
+          <a:prstGeom prst="rect">
+            <a:avLst/>
+          </a:prstGeom>
+        </p:spPr>
+      </p:pic>
+      <p:sp>
+        <p:nvSpPr>
+          <p:cNvPr id="49" name="文本框 48"/>
           <p:cNvSpPr txBox="1"/>
           <p:nvPr/>
         </p:nvSpPr>
         <p:spPr>
           <a:xfrm>
-            <a:off x="2887663" y="5297170"/>
-            <a:ext cx="1765935" cy="275590"/>
+            <a:off x="3096895" y="4053205"/>
+            <a:ext cx="806450" cy="275590"/>
           </a:xfrm>
           <a:prstGeom prst="rect">
             <a:avLst/>
@@ -5599,35 +5151,3258 @@
           <a:p>
             <a:pPr algn="ctr"/>
             <a:r>
-              <a:rPr lang="zh-CN" altLang="en-US" sz="1200" b="1">
+              <a:rPr lang="zh-CN" altLang="en-US" sz="1200" b="1"/>
+              <a:t>持续时间</a:t>
+            </a:r>
+            <a:endParaRPr lang="zh-CN" altLang="en-US" sz="1200" b="1"/>
+          </a:p>
+        </p:txBody>
+      </p:sp>
+      <p:sp>
+        <p:nvSpPr>
+          <p:cNvPr id="50" name="文本框 49"/>
+          <p:cNvSpPr txBox="1"/>
+          <p:nvPr/>
+        </p:nvSpPr>
+        <p:spPr>
+          <a:xfrm>
+            <a:off x="3059430" y="4347845"/>
+            <a:ext cx="881380" cy="275590"/>
+          </a:xfrm>
+          <a:prstGeom prst="rect">
+            <a:avLst/>
+          </a:prstGeom>
+          <a:noFill/>
+        </p:spPr>
+        <p:txBody>
+          <a:bodyPr wrap="square" rtlCol="0">
+            <a:spAutoFit/>
+          </a:bodyPr>
+          <a:p>
+            <a:pPr algn="ctr"/>
+            <a:r>
+              <a:rPr lang="zh-CN" altLang="en-US" sz="1200" b="1"/>
+              <a:t>漂移范围</a:t>
+            </a:r>
+            <a:endParaRPr lang="zh-CN" altLang="en-US" sz="1200" b="1"/>
+          </a:p>
+        </p:txBody>
+      </p:sp>
+      <p:sp>
+        <p:nvSpPr>
+          <p:cNvPr id="51" name="文本框 50"/>
+          <p:cNvSpPr txBox="1"/>
+          <p:nvPr/>
+        </p:nvSpPr>
+        <p:spPr>
+          <a:xfrm>
+            <a:off x="3177540" y="4629785"/>
+            <a:ext cx="645160" cy="275590"/>
+          </a:xfrm>
+          <a:prstGeom prst="rect">
+            <a:avLst/>
+          </a:prstGeom>
+          <a:noFill/>
+        </p:spPr>
+        <p:txBody>
+          <a:bodyPr wrap="square" rtlCol="0">
+            <a:spAutoFit/>
+          </a:bodyPr>
+          <a:p>
+            <a:pPr algn="ctr"/>
+            <a:r>
+              <a:rPr lang="zh-CN" altLang="en-US" sz="1200" b="1"/>
+              <a:t>稳定性</a:t>
+            </a:r>
+            <a:endParaRPr lang="zh-CN" altLang="en-US" sz="1200" b="1"/>
+          </a:p>
+        </p:txBody>
+      </p:sp>
+      <p:sp>
+        <p:nvSpPr>
+          <p:cNvPr id="52" name="文本框 51"/>
+          <p:cNvSpPr txBox="1"/>
+          <p:nvPr/>
+        </p:nvSpPr>
+        <p:spPr>
+          <a:xfrm>
+            <a:off x="4471670" y="4035425"/>
+            <a:ext cx="837565" cy="275590"/>
+          </a:xfrm>
+          <a:prstGeom prst="rect">
+            <a:avLst/>
+          </a:prstGeom>
+          <a:noFill/>
+        </p:spPr>
+        <p:txBody>
+          <a:bodyPr wrap="square" rtlCol="0">
+            <a:spAutoFit/>
+          </a:bodyPr>
+          <a:p>
+            <a:r>
+              <a:rPr lang="zh-CN" altLang="en-US" sz="1200" b="1"/>
+              <a:t>短时突发</a:t>
+            </a:r>
+            <a:endParaRPr lang="zh-CN" altLang="en-US" sz="1200" b="1"/>
+          </a:p>
+        </p:txBody>
+      </p:sp>
+      <p:sp>
+        <p:nvSpPr>
+          <p:cNvPr id="53" name="文本框 52"/>
+          <p:cNvSpPr txBox="1"/>
+          <p:nvPr/>
+        </p:nvSpPr>
+        <p:spPr>
+          <a:xfrm>
+            <a:off x="4471670" y="4236720"/>
+            <a:ext cx="837565" cy="275590"/>
+          </a:xfrm>
+          <a:prstGeom prst="rect">
+            <a:avLst/>
+          </a:prstGeom>
+          <a:noFill/>
+        </p:spPr>
+        <p:txBody>
+          <a:bodyPr wrap="square" rtlCol="0">
+            <a:spAutoFit/>
+          </a:bodyPr>
+          <a:p>
+            <a:r>
+              <a:rPr lang="zh-CN" altLang="en-US" sz="1200" b="1"/>
+              <a:t>窄带持续</a:t>
+            </a:r>
+            <a:endParaRPr lang="zh-CN" altLang="en-US" sz="1200" b="1"/>
+          </a:p>
+        </p:txBody>
+      </p:sp>
+      <p:sp>
+        <p:nvSpPr>
+          <p:cNvPr id="54" name="文本框 53"/>
+          <p:cNvSpPr txBox="1"/>
+          <p:nvPr/>
+        </p:nvSpPr>
+        <p:spPr>
+          <a:xfrm>
+            <a:off x="4471670" y="4438015"/>
+            <a:ext cx="837565" cy="275590"/>
+          </a:xfrm>
+          <a:prstGeom prst="rect">
+            <a:avLst/>
+          </a:prstGeom>
+          <a:noFill/>
+        </p:spPr>
+        <p:txBody>
+          <a:bodyPr wrap="square" rtlCol="0">
+            <a:spAutoFit/>
+          </a:bodyPr>
+          <a:p>
+            <a:r>
+              <a:rPr lang="zh-CN" altLang="en-US" sz="1200" b="1"/>
+              <a:t>间歇重复</a:t>
+            </a:r>
+            <a:endParaRPr lang="zh-CN" altLang="en-US" sz="1200" b="1"/>
+          </a:p>
+        </p:txBody>
+      </p:sp>
+      <p:sp>
+        <p:nvSpPr>
+          <p:cNvPr id="55" name="文本框 54"/>
+          <p:cNvSpPr txBox="1"/>
+          <p:nvPr/>
+        </p:nvSpPr>
+        <p:spPr>
+          <a:xfrm>
+            <a:off x="4471670" y="4639310"/>
+            <a:ext cx="837565" cy="275590"/>
+          </a:xfrm>
+          <a:prstGeom prst="rect">
+            <a:avLst/>
+          </a:prstGeom>
+          <a:noFill/>
+        </p:spPr>
+        <p:txBody>
+          <a:bodyPr wrap="square" rtlCol="0">
+            <a:spAutoFit/>
+          </a:bodyPr>
+          <a:p>
+            <a:r>
+              <a:rPr lang="zh-CN" altLang="en-US" sz="1200" b="1"/>
+              <a:t>频点迁移</a:t>
+            </a:r>
+            <a:endParaRPr lang="zh-CN" altLang="en-US" sz="1200" b="1"/>
+          </a:p>
+        </p:txBody>
+      </p:sp>
+      <p:cxnSp>
+        <p:nvCxnSpPr>
+          <p:cNvPr id="56" name="直接箭头连接符 55"/>
+          <p:cNvCxnSpPr/>
+          <p:nvPr/>
+        </p:nvCxnSpPr>
+        <p:spPr>
+          <a:xfrm flipV="1">
+            <a:off x="4218305" y="4150360"/>
+            <a:ext cx="266700" cy="304800"/>
+          </a:xfrm>
+          <a:prstGeom prst="straightConnector1">
+            <a:avLst/>
+          </a:prstGeom>
+          <a:ln>
+            <a:bevel/>
+            <a:tailEnd type="triangle"/>
+          </a:ln>
+        </p:spPr>
+        <p:style>
+          <a:lnRef idx="2">
+            <a:schemeClr val="accent1"/>
+          </a:lnRef>
+          <a:fillRef idx="0">
+            <a:srgbClr val="FFFFFF"/>
+          </a:fillRef>
+          <a:effectRef idx="0">
+            <a:srgbClr val="FFFFFF"/>
+          </a:effectRef>
+          <a:fontRef idx="minor">
+            <a:schemeClr val="tx1"/>
+          </a:fontRef>
+        </p:style>
+      </p:cxnSp>
+      <p:cxnSp>
+        <p:nvCxnSpPr>
+          <p:cNvPr id="57" name="直接箭头连接符 56"/>
+          <p:cNvCxnSpPr/>
+          <p:nvPr/>
+        </p:nvCxnSpPr>
+        <p:spPr>
+          <a:xfrm>
+            <a:off x="4218305" y="4467225"/>
+            <a:ext cx="266700" cy="304800"/>
+          </a:xfrm>
+          <a:prstGeom prst="straightConnector1">
+            <a:avLst/>
+          </a:prstGeom>
+          <a:ln>
+            <a:bevel/>
+            <a:tailEnd type="triangle"/>
+          </a:ln>
+        </p:spPr>
+        <p:style>
+          <a:lnRef idx="2">
+            <a:schemeClr val="accent1"/>
+          </a:lnRef>
+          <a:fillRef idx="0">
+            <a:srgbClr val="FFFFFF"/>
+          </a:fillRef>
+          <a:effectRef idx="0">
+            <a:srgbClr val="FFFFFF"/>
+          </a:effectRef>
+          <a:fontRef idx="minor">
+            <a:schemeClr val="tx1"/>
+          </a:fontRef>
+        </p:style>
+      </p:cxnSp>
+      <p:sp>
+        <p:nvSpPr>
+          <p:cNvPr id="58" name="圆角矩形 57"/>
+          <p:cNvSpPr/>
+          <p:nvPr/>
+        </p:nvSpPr>
+        <p:spPr>
+          <a:xfrm>
+            <a:off x="3420428" y="5315585"/>
+            <a:ext cx="7142480" cy="537210"/>
+          </a:xfrm>
+          <a:prstGeom prst="roundRect">
+            <a:avLst/>
+          </a:prstGeom>
+          <a:solidFill>
+            <a:schemeClr val="bg1"/>
+          </a:solidFill>
+        </p:spPr>
+        <p:style>
+          <a:lnRef idx="2">
+            <a:schemeClr val="accent1">
+              <a:lumMod val="75000"/>
+            </a:schemeClr>
+          </a:lnRef>
+          <a:fillRef idx="1">
+            <a:schemeClr val="accent1"/>
+          </a:fillRef>
+          <a:effectRef idx="0">
+            <a:srgbClr val="FFFFFF"/>
+          </a:effectRef>
+          <a:fontRef idx="minor">
+            <a:schemeClr val="lt1"/>
+          </a:fontRef>
+        </p:style>
+        <p:txBody>
+          <a:bodyPr rtlCol="0" anchor="ctr"/>
+          <a:p>
+            <a:pPr algn="ctr"/>
+            <a:r>
+              <a:rPr lang="zh-CN" altLang="en-US" b="1">
+                <a:solidFill>
+                  <a:schemeClr val="tx1"/>
+                </a:solidFill>
+              </a:rPr>
+              <a:t>面向高价值频谱事件的精判触发和相似检索支撑</a:t>
+            </a:r>
+            <a:endParaRPr lang="zh-CN" altLang="en-US" b="1">
+              <a:solidFill>
+                <a:schemeClr val="tx1"/>
+              </a:solidFill>
+            </a:endParaRPr>
+          </a:p>
+        </p:txBody>
+      </p:sp>
+      <p:sp>
+        <p:nvSpPr>
+          <p:cNvPr id="59" name="下箭头 58"/>
+          <p:cNvSpPr/>
+          <p:nvPr/>
+        </p:nvSpPr>
+        <p:spPr>
+          <a:xfrm>
+            <a:off x="4127855" y="3341370"/>
+            <a:ext cx="107950" cy="320040"/>
+          </a:xfrm>
+          <a:prstGeom prst="downArrow">
+            <a:avLst>
+              <a:gd name="adj1" fmla="val 31764"/>
+              <a:gd name="adj2" fmla="val 80588"/>
+            </a:avLst>
+          </a:prstGeom>
+          <a:solidFill>
+            <a:srgbClr val="C00000"/>
+          </a:solidFill>
+          <a:ln>
+            <a:solidFill>
+              <a:srgbClr val="C00000"/>
+            </a:solidFill>
+          </a:ln>
+        </p:spPr>
+        <p:style>
+          <a:lnRef idx="2">
+            <a:schemeClr val="accent1">
+              <a:lumMod val="75000"/>
+            </a:schemeClr>
+          </a:lnRef>
+          <a:fillRef idx="1">
+            <a:schemeClr val="accent1"/>
+          </a:fillRef>
+          <a:effectRef idx="0">
+            <a:srgbClr val="FFFFFF"/>
+          </a:effectRef>
+          <a:fontRef idx="minor">
+            <a:schemeClr val="lt1"/>
+          </a:fontRef>
+        </p:style>
+        <p:txBody>
+          <a:bodyPr rtlCol="0" anchor="ctr"/>
+          <a:p>
+            <a:pPr algn="ctr"/>
+            <a:endParaRPr lang="zh-CN" altLang="en-US"/>
+          </a:p>
+        </p:txBody>
+      </p:sp>
+      <p:sp>
+        <p:nvSpPr>
+          <p:cNvPr id="60" name="文本框 59"/>
+          <p:cNvSpPr txBox="1"/>
+          <p:nvPr/>
+        </p:nvSpPr>
+        <p:spPr>
+          <a:xfrm>
+            <a:off x="5842075" y="2084705"/>
+            <a:ext cx="2303145" cy="337185"/>
+          </a:xfrm>
+          <a:prstGeom prst="rect">
+            <a:avLst/>
+          </a:prstGeom>
+          <a:noFill/>
+        </p:spPr>
+        <p:txBody>
+          <a:bodyPr wrap="square" rtlCol="0">
+            <a:spAutoFit/>
+          </a:bodyPr>
+          <a:p>
+            <a:pPr algn="ctr"/>
+            <a:r>
+              <a:rPr lang="zh-CN" altLang="en-US" sz="1600" b="1">
                 <a:solidFill>
                   <a:srgbClr val="C00000"/>
                 </a:solidFill>
-                <a:sym typeface="+mn-ea"/>
               </a:rPr>
-              <a:t>有限动作集快速</a:t>
-            </a:r>
-            <a:r>
-              <a:rPr lang="zh-CN" altLang="en-US" sz="1200" b="1">
+              <a:t>轻量视频编码</a:t>
+            </a:r>
+            <a:r>
+              <a:rPr lang="zh-CN" altLang="en-US" sz="1600" b="1">
                 <a:solidFill>
                   <a:srgbClr val="C00000"/>
                 </a:solidFill>
-                <a:sym typeface="+mn-ea"/>
               </a:rPr>
-              <a:t>决策</a:t>
-            </a:r>
-            <a:endParaRPr lang="zh-CN" altLang="en-US" sz="1200" b="1">
+              <a:t>器</a:t>
+            </a:r>
+            <a:endParaRPr lang="zh-CN" altLang="en-US" sz="1600" b="1">
               <a:solidFill>
                 <a:srgbClr val="C00000"/>
               </a:solidFill>
-              <a:sym typeface="+mn-ea"/>
             </a:endParaRPr>
+          </a:p>
+        </p:txBody>
+      </p:sp>
+      <p:pic>
+        <p:nvPicPr>
+          <p:cNvPr id="61" name="图片 60"/>
+          <p:cNvPicPr>
+            <a:picLocks noChangeAspect="1"/>
+          </p:cNvPicPr>
+          <p:nvPr/>
+        </p:nvPicPr>
+        <p:blipFill>
+          <a:blip r:embed="rId9"/>
+          <a:stretch>
+            <a:fillRect/>
+          </a:stretch>
+        </p:blipFill>
+        <p:spPr>
+          <a:xfrm>
+            <a:off x="6029960" y="2414270"/>
+            <a:ext cx="459988" cy="414000"/>
+          </a:xfrm>
+          <a:prstGeom prst="rect">
+            <a:avLst/>
+          </a:prstGeom>
+        </p:spPr>
+      </p:pic>
+      <p:pic>
+        <p:nvPicPr>
+          <p:cNvPr id="63" name="图片 62"/>
+          <p:cNvPicPr>
+            <a:picLocks noChangeAspect="1"/>
+          </p:cNvPicPr>
+          <p:nvPr/>
+        </p:nvPicPr>
+        <p:blipFill>
+          <a:blip r:embed="rId9"/>
+          <a:stretch>
+            <a:fillRect/>
+          </a:stretch>
+        </p:blipFill>
+        <p:spPr>
+          <a:xfrm>
+            <a:off x="6136005" y="2520315"/>
+            <a:ext cx="459988" cy="414000"/>
+          </a:xfrm>
+          <a:prstGeom prst="rect">
+            <a:avLst/>
+          </a:prstGeom>
+        </p:spPr>
+      </p:pic>
+      <p:pic>
+        <p:nvPicPr>
+          <p:cNvPr id="64" name="图片 63"/>
+          <p:cNvPicPr>
+            <a:picLocks noChangeAspect="1"/>
+          </p:cNvPicPr>
+          <p:nvPr/>
+        </p:nvPicPr>
+        <p:blipFill>
+          <a:blip r:embed="rId9"/>
+          <a:stretch>
+            <a:fillRect/>
+          </a:stretch>
+        </p:blipFill>
+        <p:spPr>
+          <a:xfrm>
+            <a:off x="6242050" y="2626360"/>
+            <a:ext cx="459988" cy="414000"/>
+          </a:xfrm>
+          <a:prstGeom prst="rect">
+            <a:avLst/>
+          </a:prstGeom>
+        </p:spPr>
+      </p:pic>
+      <p:sp>
+        <p:nvSpPr>
+          <p:cNvPr id="65" name="文本框 64"/>
+          <p:cNvSpPr txBox="1"/>
+          <p:nvPr/>
+        </p:nvSpPr>
+        <p:spPr>
+          <a:xfrm>
+            <a:off x="5981065" y="3046095"/>
+            <a:ext cx="876935" cy="275590"/>
+          </a:xfrm>
+          <a:prstGeom prst="rect">
+            <a:avLst/>
+          </a:prstGeom>
+          <a:noFill/>
+        </p:spPr>
+        <p:txBody>
+          <a:bodyPr wrap="square" rtlCol="0">
+            <a:spAutoFit/>
+          </a:bodyPr>
+          <a:p>
+            <a:r>
+              <a:rPr lang="zh-CN" altLang="en-US" sz="1200" b="1"/>
+              <a:t>证据</a:t>
+            </a:r>
+            <a:r>
+              <a:rPr lang="zh-CN" altLang="en-US" sz="1200" b="1"/>
+              <a:t>窗口</a:t>
+            </a:r>
+            <a:endParaRPr lang="zh-CN" altLang="en-US" sz="1200" b="1"/>
+          </a:p>
+        </p:txBody>
+      </p:sp>
+      <p:sp>
+        <p:nvSpPr>
+          <p:cNvPr id="66" name="梯形 65"/>
+          <p:cNvSpPr/>
+          <p:nvPr/>
+        </p:nvSpPr>
+        <p:spPr>
+          <a:xfrm rot="5400000">
+            <a:off x="6882130" y="2590800"/>
+            <a:ext cx="511810" cy="321945"/>
+          </a:xfrm>
+          <a:prstGeom prst="trapezoid">
+            <a:avLst/>
+          </a:prstGeom>
+        </p:spPr>
+        <p:style>
+          <a:lnRef idx="2">
+            <a:schemeClr val="accent1">
+              <a:lumMod val="75000"/>
+            </a:schemeClr>
+          </a:lnRef>
+          <a:fillRef idx="1">
+            <a:schemeClr val="accent1"/>
+          </a:fillRef>
+          <a:effectRef idx="0">
+            <a:srgbClr val="FFFFFF"/>
+          </a:effectRef>
+          <a:fontRef idx="minor">
+            <a:schemeClr val="lt1"/>
+          </a:fontRef>
+        </p:style>
+        <p:txBody>
+          <a:bodyPr rtlCol="0" anchor="ctr"/>
+          <a:p>
+            <a:pPr algn="ctr"/>
+            <a:endParaRPr lang="zh-CN" altLang="en-US"/>
+          </a:p>
+        </p:txBody>
+      </p:sp>
+      <p:grpSp>
+        <p:nvGrpSpPr>
+          <p:cNvPr id="80" name="组合 79"/>
+          <p:cNvGrpSpPr/>
+          <p:nvPr/>
+        </p:nvGrpSpPr>
+        <p:grpSpPr>
+          <a:xfrm>
+            <a:off x="7562850" y="2463165"/>
+            <a:ext cx="408183" cy="546662"/>
+            <a:chOff x="11770" y="3305"/>
+            <a:chExt cx="795" cy="973"/>
+          </a:xfrm>
+        </p:grpSpPr>
+        <p:sp>
+          <p:nvSpPr>
+            <p:cNvPr id="67" name="矩形 66"/>
+            <p:cNvSpPr/>
+            <p:nvPr/>
+          </p:nvSpPr>
+          <p:spPr>
+            <a:xfrm>
+              <a:off x="11770" y="3305"/>
+              <a:ext cx="265" cy="119"/>
+            </a:xfrm>
+            <a:prstGeom prst="rect">
+              <a:avLst/>
+            </a:prstGeom>
+            <a:solidFill>
+              <a:schemeClr val="accent2">
+                <a:lumMod val="60000"/>
+                <a:lumOff val="40000"/>
+              </a:schemeClr>
+            </a:solidFill>
+          </p:spPr>
+          <p:style>
+            <a:lnRef idx="2">
+              <a:schemeClr val="accent1">
+                <a:lumMod val="75000"/>
+              </a:schemeClr>
+            </a:lnRef>
+            <a:fillRef idx="1">
+              <a:schemeClr val="accent1"/>
+            </a:fillRef>
+            <a:effectRef idx="0">
+              <a:srgbClr val="FFFFFF"/>
+            </a:effectRef>
+            <a:fontRef idx="minor">
+              <a:schemeClr val="lt1"/>
+            </a:fontRef>
+          </p:style>
+          <p:txBody>
+            <a:bodyPr rtlCol="0" anchor="ctr"/>
+            <a:p>
+              <a:pPr algn="ctr"/>
+              <a:endParaRPr lang="zh-CN" altLang="en-US"/>
+            </a:p>
+          </p:txBody>
+        </p:sp>
+        <p:sp>
+          <p:nvSpPr>
+            <p:cNvPr id="69" name="矩形 68"/>
+            <p:cNvSpPr/>
+            <p:nvPr/>
+          </p:nvSpPr>
+          <p:spPr>
+            <a:xfrm>
+              <a:off x="12035" y="3305"/>
+              <a:ext cx="265" cy="119"/>
+            </a:xfrm>
+            <a:prstGeom prst="rect">
+              <a:avLst/>
+            </a:prstGeom>
+            <a:solidFill>
+              <a:schemeClr val="accent4">
+                <a:lumMod val="60000"/>
+                <a:lumOff val="40000"/>
+              </a:schemeClr>
+            </a:solidFill>
+          </p:spPr>
+          <p:style>
+            <a:lnRef idx="2">
+              <a:schemeClr val="accent1">
+                <a:lumMod val="75000"/>
+              </a:schemeClr>
+            </a:lnRef>
+            <a:fillRef idx="1">
+              <a:schemeClr val="accent1"/>
+            </a:fillRef>
+            <a:effectRef idx="0">
+              <a:srgbClr val="FFFFFF"/>
+            </a:effectRef>
+            <a:fontRef idx="minor">
+              <a:schemeClr val="lt1"/>
+            </a:fontRef>
+          </p:style>
+          <p:txBody>
+            <a:bodyPr rtlCol="0" anchor="ctr"/>
+            <a:p>
+              <a:pPr algn="ctr"/>
+              <a:endParaRPr lang="zh-CN" altLang="en-US"/>
+            </a:p>
+          </p:txBody>
+        </p:sp>
+        <p:sp>
+          <p:nvSpPr>
+            <p:cNvPr id="70" name="矩形 69"/>
+            <p:cNvSpPr/>
+            <p:nvPr/>
+          </p:nvSpPr>
+          <p:spPr>
+            <a:xfrm>
+              <a:off x="12300" y="3305"/>
+              <a:ext cx="265" cy="119"/>
+            </a:xfrm>
+            <a:prstGeom prst="rect">
+              <a:avLst/>
+            </a:prstGeom>
+            <a:solidFill>
+              <a:schemeClr val="accent1">
+                <a:lumMod val="60000"/>
+                <a:lumOff val="40000"/>
+              </a:schemeClr>
+            </a:solidFill>
+          </p:spPr>
+          <p:style>
+            <a:lnRef idx="2">
+              <a:schemeClr val="accent1">
+                <a:lumMod val="75000"/>
+              </a:schemeClr>
+            </a:lnRef>
+            <a:fillRef idx="1">
+              <a:schemeClr val="accent1"/>
+            </a:fillRef>
+            <a:effectRef idx="0">
+              <a:srgbClr val="FFFFFF"/>
+            </a:effectRef>
+            <a:fontRef idx="minor">
+              <a:schemeClr val="lt1"/>
+            </a:fontRef>
+          </p:style>
+          <p:txBody>
+            <a:bodyPr rtlCol="0" anchor="ctr"/>
+            <a:p>
+              <a:pPr algn="ctr"/>
+              <a:endParaRPr lang="zh-CN" altLang="en-US"/>
+            </a:p>
+          </p:txBody>
+        </p:sp>
+        <p:sp>
+          <p:nvSpPr>
+            <p:cNvPr id="71" name="矩形 70"/>
+            <p:cNvSpPr/>
+            <p:nvPr/>
+          </p:nvSpPr>
+          <p:spPr>
+            <a:xfrm>
+              <a:off x="11770" y="3639"/>
+              <a:ext cx="265" cy="119"/>
+            </a:xfrm>
+            <a:prstGeom prst="rect">
+              <a:avLst/>
+            </a:prstGeom>
+            <a:solidFill>
+              <a:schemeClr val="accent4">
+                <a:lumMod val="60000"/>
+                <a:lumOff val="40000"/>
+              </a:schemeClr>
+            </a:solidFill>
+          </p:spPr>
+          <p:style>
+            <a:lnRef idx="2">
+              <a:schemeClr val="accent1">
+                <a:lumMod val="75000"/>
+              </a:schemeClr>
+            </a:lnRef>
+            <a:fillRef idx="1">
+              <a:schemeClr val="accent1"/>
+            </a:fillRef>
+            <a:effectRef idx="0">
+              <a:srgbClr val="FFFFFF"/>
+            </a:effectRef>
+            <a:fontRef idx="minor">
+              <a:schemeClr val="lt1"/>
+            </a:fontRef>
+          </p:style>
+          <p:txBody>
+            <a:bodyPr rtlCol="0" anchor="ctr"/>
+            <a:p>
+              <a:pPr algn="ctr"/>
+              <a:endParaRPr lang="zh-CN" altLang="en-US"/>
+            </a:p>
+          </p:txBody>
+        </p:sp>
+        <p:sp>
+          <p:nvSpPr>
+            <p:cNvPr id="72" name="矩形 71"/>
+            <p:cNvSpPr/>
+            <p:nvPr/>
+          </p:nvSpPr>
+          <p:spPr>
+            <a:xfrm>
+              <a:off x="12035" y="3639"/>
+              <a:ext cx="265" cy="119"/>
+            </a:xfrm>
+            <a:prstGeom prst="rect">
+              <a:avLst/>
+            </a:prstGeom>
+            <a:solidFill>
+              <a:schemeClr val="accent5">
+                <a:lumMod val="60000"/>
+                <a:lumOff val="40000"/>
+              </a:schemeClr>
+            </a:solidFill>
+          </p:spPr>
+          <p:style>
+            <a:lnRef idx="2">
+              <a:schemeClr val="accent1">
+                <a:lumMod val="75000"/>
+              </a:schemeClr>
+            </a:lnRef>
+            <a:fillRef idx="1">
+              <a:schemeClr val="accent1"/>
+            </a:fillRef>
+            <a:effectRef idx="0">
+              <a:srgbClr val="FFFFFF"/>
+            </a:effectRef>
+            <a:fontRef idx="minor">
+              <a:schemeClr val="lt1"/>
+            </a:fontRef>
+          </p:style>
+          <p:txBody>
+            <a:bodyPr rtlCol="0" anchor="ctr"/>
+            <a:p>
+              <a:pPr algn="ctr"/>
+              <a:endParaRPr lang="zh-CN" altLang="en-US"/>
+            </a:p>
+          </p:txBody>
+        </p:sp>
+        <p:sp>
+          <p:nvSpPr>
+            <p:cNvPr id="73" name="矩形 72"/>
+            <p:cNvSpPr/>
+            <p:nvPr/>
+          </p:nvSpPr>
+          <p:spPr>
+            <a:xfrm>
+              <a:off x="12300" y="3639"/>
+              <a:ext cx="265" cy="119"/>
+            </a:xfrm>
+            <a:prstGeom prst="rect">
+              <a:avLst/>
+            </a:prstGeom>
+            <a:solidFill>
+              <a:schemeClr val="accent6">
+                <a:lumMod val="60000"/>
+                <a:lumOff val="40000"/>
+              </a:schemeClr>
+            </a:solidFill>
+          </p:spPr>
+          <p:style>
+            <a:lnRef idx="2">
+              <a:schemeClr val="accent1">
+                <a:lumMod val="75000"/>
+              </a:schemeClr>
+            </a:lnRef>
+            <a:fillRef idx="1">
+              <a:schemeClr val="accent1"/>
+            </a:fillRef>
+            <a:effectRef idx="0">
+              <a:srgbClr val="FFFFFF"/>
+            </a:effectRef>
+            <a:fontRef idx="minor">
+              <a:schemeClr val="lt1"/>
+            </a:fontRef>
+          </p:style>
+          <p:txBody>
+            <a:bodyPr rtlCol="0" anchor="ctr"/>
+            <a:p>
+              <a:pPr algn="ctr"/>
+              <a:endParaRPr lang="zh-CN" altLang="en-US"/>
+            </a:p>
+          </p:txBody>
+        </p:sp>
+        <p:sp>
+          <p:nvSpPr>
+            <p:cNvPr id="74" name="矩形 73"/>
+            <p:cNvSpPr/>
+            <p:nvPr/>
+          </p:nvSpPr>
+          <p:spPr>
+            <a:xfrm>
+              <a:off x="11770" y="4159"/>
+              <a:ext cx="265" cy="119"/>
+            </a:xfrm>
+            <a:prstGeom prst="rect">
+              <a:avLst/>
+            </a:prstGeom>
+            <a:solidFill>
+              <a:schemeClr val="tx2">
+                <a:lumMod val="60000"/>
+                <a:lumOff val="40000"/>
+              </a:schemeClr>
+            </a:solidFill>
+          </p:spPr>
+          <p:style>
+            <a:lnRef idx="2">
+              <a:schemeClr val="accent1">
+                <a:lumMod val="75000"/>
+              </a:schemeClr>
+            </a:lnRef>
+            <a:fillRef idx="1">
+              <a:schemeClr val="accent1"/>
+            </a:fillRef>
+            <a:effectRef idx="0">
+              <a:srgbClr val="FFFFFF"/>
+            </a:effectRef>
+            <a:fontRef idx="minor">
+              <a:schemeClr val="lt1"/>
+            </a:fontRef>
+          </p:style>
+          <p:txBody>
+            <a:bodyPr rtlCol="0" anchor="ctr"/>
+            <a:p>
+              <a:pPr algn="ctr"/>
+              <a:endParaRPr lang="zh-CN" altLang="en-US"/>
+            </a:p>
+          </p:txBody>
+        </p:sp>
+        <p:sp>
+          <p:nvSpPr>
+            <p:cNvPr id="75" name="矩形 74"/>
+            <p:cNvSpPr/>
+            <p:nvPr/>
+          </p:nvSpPr>
+          <p:spPr>
+            <a:xfrm>
+              <a:off x="12035" y="4159"/>
+              <a:ext cx="265" cy="119"/>
+            </a:xfrm>
+            <a:prstGeom prst="rect">
+              <a:avLst/>
+            </a:prstGeom>
+            <a:solidFill>
+              <a:schemeClr val="accent4">
+                <a:lumMod val="60000"/>
+                <a:lumOff val="40000"/>
+              </a:schemeClr>
+            </a:solidFill>
+          </p:spPr>
+          <p:style>
+            <a:lnRef idx="2">
+              <a:schemeClr val="accent1">
+                <a:lumMod val="75000"/>
+              </a:schemeClr>
+            </a:lnRef>
+            <a:fillRef idx="1">
+              <a:schemeClr val="accent1"/>
+            </a:fillRef>
+            <a:effectRef idx="0">
+              <a:srgbClr val="FFFFFF"/>
+            </a:effectRef>
+            <a:fontRef idx="minor">
+              <a:schemeClr val="lt1"/>
+            </a:fontRef>
+          </p:style>
+          <p:txBody>
+            <a:bodyPr rtlCol="0" anchor="ctr"/>
+            <a:p>
+              <a:pPr algn="ctr"/>
+              <a:endParaRPr lang="zh-CN" altLang="en-US"/>
+            </a:p>
+          </p:txBody>
+        </p:sp>
+        <p:sp>
+          <p:nvSpPr>
+            <p:cNvPr id="76" name="矩形 75"/>
+            <p:cNvSpPr/>
+            <p:nvPr/>
+          </p:nvSpPr>
+          <p:spPr>
+            <a:xfrm>
+              <a:off x="12300" y="4159"/>
+              <a:ext cx="265" cy="119"/>
+            </a:xfrm>
+            <a:prstGeom prst="rect">
+              <a:avLst/>
+            </a:prstGeom>
+            <a:solidFill>
+              <a:schemeClr val="accent4">
+                <a:lumMod val="60000"/>
+                <a:lumOff val="40000"/>
+              </a:schemeClr>
+            </a:solidFill>
+          </p:spPr>
+          <p:style>
+            <a:lnRef idx="2">
+              <a:schemeClr val="accent1">
+                <a:lumMod val="75000"/>
+              </a:schemeClr>
+            </a:lnRef>
+            <a:fillRef idx="1">
+              <a:schemeClr val="accent1"/>
+            </a:fillRef>
+            <a:effectRef idx="0">
+              <a:srgbClr val="FFFFFF"/>
+            </a:effectRef>
+            <a:fontRef idx="minor">
+              <a:schemeClr val="lt1"/>
+            </a:fontRef>
+          </p:style>
+          <p:txBody>
+            <a:bodyPr rtlCol="0" anchor="ctr"/>
+            <a:p>
+              <a:pPr algn="ctr"/>
+              <a:endParaRPr lang="zh-CN" altLang="en-US"/>
+            </a:p>
+          </p:txBody>
+        </p:sp>
+        <p:sp>
+          <p:nvSpPr>
+            <p:cNvPr id="77" name="文本框 76"/>
+            <p:cNvSpPr txBox="1"/>
+            <p:nvPr/>
+          </p:nvSpPr>
+          <p:spPr>
+            <a:xfrm>
+              <a:off x="11941" y="3731"/>
+              <a:ext cx="452" cy="504"/>
+            </a:xfrm>
+            <a:prstGeom prst="rect">
+              <a:avLst/>
+            </a:prstGeom>
+            <a:noFill/>
+          </p:spPr>
+          <p:txBody>
+            <a:bodyPr wrap="square" rtlCol="0">
+              <a:spAutoFit/>
+            </a:bodyPr>
+            <a:p>
+              <a:pPr indent="0" algn="ctr" fontAlgn="auto">
+                <a:lnSpc>
+                  <a:spcPts val="500"/>
+                </a:lnSpc>
+              </a:pPr>
+              <a:r>
+                <a:rPr lang="en-US" altLang="zh-CN"/>
+                <a:t>.</a:t>
+              </a:r>
+              <a:endParaRPr lang="en-US" altLang="zh-CN"/>
+            </a:p>
+            <a:p>
+              <a:pPr indent="0" algn="ctr" fontAlgn="auto">
+                <a:lnSpc>
+                  <a:spcPts val="500"/>
+                </a:lnSpc>
+              </a:pPr>
+              <a:r>
+                <a:rPr lang="en-US" altLang="zh-CN"/>
+                <a:t>.</a:t>
+              </a:r>
+              <a:endParaRPr lang="en-US" altLang="zh-CN"/>
+            </a:p>
+            <a:p>
+              <a:pPr indent="0" algn="ctr" fontAlgn="auto">
+                <a:lnSpc>
+                  <a:spcPts val="500"/>
+                </a:lnSpc>
+              </a:pPr>
+              <a:r>
+                <a:rPr lang="en-US" altLang="zh-CN"/>
+                <a:t>.</a:t>
+              </a:r>
+              <a:endParaRPr lang="en-US" altLang="zh-CN"/>
+            </a:p>
+          </p:txBody>
+        </p:sp>
+      </p:grpSp>
+      <p:sp>
+        <p:nvSpPr>
+          <p:cNvPr id="78" name="文本框 77"/>
+          <p:cNvSpPr txBox="1"/>
+          <p:nvPr/>
+        </p:nvSpPr>
+        <p:spPr>
+          <a:xfrm>
+            <a:off x="6797040" y="3053080"/>
+            <a:ext cx="651510" cy="275590"/>
+          </a:xfrm>
+          <a:prstGeom prst="rect">
+            <a:avLst/>
+          </a:prstGeom>
+          <a:noFill/>
+        </p:spPr>
+        <p:txBody>
+          <a:bodyPr wrap="square" rtlCol="0">
+            <a:spAutoFit/>
+          </a:bodyPr>
+          <a:p>
+            <a:r>
+              <a:rPr lang="zh-CN" altLang="en-US" sz="1200" b="1"/>
+              <a:t>编码器</a:t>
+            </a:r>
+            <a:endParaRPr lang="zh-CN" altLang="en-US" sz="1200" b="1"/>
+          </a:p>
+        </p:txBody>
+      </p:sp>
+      <p:sp>
+        <p:nvSpPr>
+          <p:cNvPr id="79" name="文本框 78"/>
+          <p:cNvSpPr txBox="1"/>
+          <p:nvPr/>
+        </p:nvSpPr>
+        <p:spPr>
+          <a:xfrm>
+            <a:off x="7472680" y="3046095"/>
+            <a:ext cx="601980" cy="275590"/>
+          </a:xfrm>
+          <a:prstGeom prst="rect">
+            <a:avLst/>
+          </a:prstGeom>
+          <a:noFill/>
+        </p:spPr>
+        <p:txBody>
+          <a:bodyPr wrap="square" rtlCol="0">
+            <a:spAutoFit/>
+          </a:bodyPr>
+          <a:p>
+            <a:r>
+              <a:rPr lang="zh-CN" altLang="en-US" sz="1200" b="1"/>
+              <a:t>向量</a:t>
+            </a:r>
+            <a:endParaRPr lang="zh-CN" altLang="en-US" sz="1200" b="1"/>
+          </a:p>
+        </p:txBody>
+      </p:sp>
+      <p:sp>
+        <p:nvSpPr>
+          <p:cNvPr id="82" name="下箭头 81"/>
+          <p:cNvSpPr/>
+          <p:nvPr/>
+        </p:nvSpPr>
+        <p:spPr>
+          <a:xfrm rot="16200000">
+            <a:off x="6800815" y="2659525"/>
+            <a:ext cx="72000" cy="216000"/>
+          </a:xfrm>
+          <a:prstGeom prst="downArrow">
+            <a:avLst>
+              <a:gd name="adj1" fmla="val 31764"/>
+              <a:gd name="adj2" fmla="val 80588"/>
+            </a:avLst>
+          </a:prstGeom>
+          <a:solidFill>
+            <a:schemeClr val="tx1"/>
+          </a:solidFill>
+          <a:ln>
+            <a:solidFill>
+              <a:schemeClr val="tx1"/>
+            </a:solidFill>
+          </a:ln>
+        </p:spPr>
+        <p:style>
+          <a:lnRef idx="2">
+            <a:schemeClr val="accent1">
+              <a:lumMod val="75000"/>
+            </a:schemeClr>
+          </a:lnRef>
+          <a:fillRef idx="1">
+            <a:schemeClr val="accent1"/>
+          </a:fillRef>
+          <a:effectRef idx="0">
+            <a:srgbClr val="FFFFFF"/>
+          </a:effectRef>
+          <a:fontRef idx="minor">
+            <a:schemeClr val="lt1"/>
+          </a:fontRef>
+        </p:style>
+        <p:txBody>
+          <a:bodyPr rtlCol="0" anchor="ctr"/>
+          <a:p>
+            <a:pPr algn="ctr"/>
+            <a:endParaRPr lang="zh-CN" altLang="en-US"/>
+          </a:p>
+        </p:txBody>
+      </p:sp>
+      <p:sp>
+        <p:nvSpPr>
+          <p:cNvPr id="83" name="下箭头 82"/>
+          <p:cNvSpPr/>
+          <p:nvPr/>
+        </p:nvSpPr>
+        <p:spPr>
+          <a:xfrm rot="16200000">
+            <a:off x="7397715" y="2659525"/>
+            <a:ext cx="72000" cy="216000"/>
+          </a:xfrm>
+          <a:prstGeom prst="downArrow">
+            <a:avLst>
+              <a:gd name="adj1" fmla="val 31764"/>
+              <a:gd name="adj2" fmla="val 80588"/>
+            </a:avLst>
+          </a:prstGeom>
+          <a:solidFill>
+            <a:schemeClr val="tx1"/>
+          </a:solidFill>
+          <a:ln>
+            <a:solidFill>
+              <a:schemeClr val="tx1"/>
+            </a:solidFill>
+          </a:ln>
+        </p:spPr>
+        <p:style>
+          <a:lnRef idx="2">
+            <a:schemeClr val="accent1">
+              <a:lumMod val="75000"/>
+            </a:schemeClr>
+          </a:lnRef>
+          <a:fillRef idx="1">
+            <a:schemeClr val="accent1"/>
+          </a:fillRef>
+          <a:effectRef idx="0">
+            <a:srgbClr val="FFFFFF"/>
+          </a:effectRef>
+          <a:fontRef idx="minor">
+            <a:schemeClr val="lt1"/>
+          </a:fontRef>
+        </p:style>
+        <p:txBody>
+          <a:bodyPr rtlCol="0" anchor="ctr"/>
+          <a:p>
+            <a:pPr algn="ctr"/>
+            <a:endParaRPr lang="zh-CN" altLang="en-US"/>
+          </a:p>
+        </p:txBody>
+      </p:sp>
+      <p:sp>
+        <p:nvSpPr>
+          <p:cNvPr id="84" name="下箭头 83"/>
+          <p:cNvSpPr/>
+          <p:nvPr/>
+        </p:nvSpPr>
+        <p:spPr>
+          <a:xfrm>
+            <a:off x="6939673" y="3341370"/>
+            <a:ext cx="107950" cy="320040"/>
+          </a:xfrm>
+          <a:prstGeom prst="downArrow">
+            <a:avLst>
+              <a:gd name="adj1" fmla="val 31764"/>
+              <a:gd name="adj2" fmla="val 80588"/>
+            </a:avLst>
+          </a:prstGeom>
+          <a:solidFill>
+            <a:srgbClr val="2E54A1"/>
+          </a:solidFill>
+          <a:ln>
+            <a:solidFill>
+              <a:srgbClr val="2E54A1"/>
+            </a:solidFill>
+          </a:ln>
+        </p:spPr>
+        <p:style>
+          <a:lnRef idx="2">
+            <a:schemeClr val="accent1">
+              <a:lumMod val="75000"/>
+            </a:schemeClr>
+          </a:lnRef>
+          <a:fillRef idx="1">
+            <a:schemeClr val="accent1"/>
+          </a:fillRef>
+          <a:effectRef idx="0">
+            <a:srgbClr val="FFFFFF"/>
+          </a:effectRef>
+          <a:fontRef idx="minor">
+            <a:schemeClr val="lt1"/>
+          </a:fontRef>
+        </p:style>
+        <p:txBody>
+          <a:bodyPr rtlCol="0" anchor="ctr"/>
+          <a:p>
+            <a:pPr algn="ctr"/>
+            <a:endParaRPr lang="zh-CN" altLang="en-US"/>
+          </a:p>
+        </p:txBody>
+      </p:sp>
+      <p:sp>
+        <p:nvSpPr>
+          <p:cNvPr id="85" name="文本框 84"/>
+          <p:cNvSpPr txBox="1"/>
+          <p:nvPr/>
+        </p:nvSpPr>
+        <p:spPr>
+          <a:xfrm>
+            <a:off x="5842075" y="3709670"/>
+            <a:ext cx="2303145" cy="337185"/>
+          </a:xfrm>
+          <a:prstGeom prst="rect">
+            <a:avLst/>
+          </a:prstGeom>
+          <a:noFill/>
+        </p:spPr>
+        <p:txBody>
+          <a:bodyPr wrap="square" rtlCol="0">
+            <a:spAutoFit/>
+          </a:bodyPr>
+          <a:p>
+            <a:pPr algn="ctr"/>
+            <a:r>
+              <a:rPr lang="zh-CN" altLang="en-US" sz="1600" b="1">
+                <a:solidFill>
+                  <a:srgbClr val="C00000"/>
+                </a:solidFill>
+              </a:rPr>
+              <a:t>非负</a:t>
+            </a:r>
+            <a:r>
+              <a:rPr lang="en-US" altLang="zh-CN" sz="1600" b="1">
+                <a:solidFill>
+                  <a:srgbClr val="C00000"/>
+                </a:solidFill>
+              </a:rPr>
+              <a:t>PU</a:t>
+            </a:r>
+            <a:r>
+              <a:rPr lang="zh-CN" altLang="en-US" sz="1600" b="1">
+                <a:solidFill>
+                  <a:srgbClr val="C00000"/>
+                </a:solidFill>
+              </a:rPr>
+              <a:t>风险学</a:t>
+            </a:r>
+            <a:r>
+              <a:rPr lang="zh-CN" altLang="en-US" sz="1600" b="1">
+                <a:solidFill>
+                  <a:srgbClr val="C00000"/>
+                </a:solidFill>
+              </a:rPr>
+              <a:t>习</a:t>
+            </a:r>
+            <a:endParaRPr lang="zh-CN" altLang="en-US" sz="1600" b="1">
+              <a:solidFill>
+                <a:srgbClr val="C00000"/>
+              </a:solidFill>
+            </a:endParaRPr>
+          </a:p>
+        </p:txBody>
+      </p:sp>
+      <p:sp>
+        <p:nvSpPr>
+          <p:cNvPr id="86" name="圆角矩形 85"/>
+          <p:cNvSpPr>
+            <a:spLocks noChangeAspect="1"/>
+          </p:cNvSpPr>
+          <p:nvPr/>
+        </p:nvSpPr>
+        <p:spPr>
+          <a:xfrm>
+            <a:off x="6170930" y="4050665"/>
+            <a:ext cx="666000" cy="666000"/>
+          </a:xfrm>
+          <a:prstGeom prst="roundRect">
+            <a:avLst/>
+          </a:prstGeom>
+          <a:solidFill>
+            <a:schemeClr val="bg1"/>
+          </a:solidFill>
+          <a:ln w="22225"/>
+        </p:spPr>
+        <p:style>
+          <a:lnRef idx="2">
+            <a:schemeClr val="accent1">
+              <a:lumMod val="75000"/>
+            </a:schemeClr>
+          </a:lnRef>
+          <a:fillRef idx="1">
+            <a:schemeClr val="accent1"/>
+          </a:fillRef>
+          <a:effectRef idx="0">
+            <a:srgbClr val="FFFFFF"/>
+          </a:effectRef>
+          <a:fontRef idx="minor">
+            <a:schemeClr val="lt1"/>
+          </a:fontRef>
+        </p:style>
+        <p:txBody>
+          <a:bodyPr rtlCol="0" anchor="ctr"/>
+          <a:p>
+            <a:pPr algn="ctr"/>
+            <a:endParaRPr lang="zh-CN" altLang="en-US"/>
+          </a:p>
+        </p:txBody>
+      </p:sp>
+      <p:sp>
+        <p:nvSpPr>
+          <p:cNvPr id="87" name="圆角矩形 86"/>
+          <p:cNvSpPr>
+            <a:spLocks noChangeAspect="1"/>
+          </p:cNvSpPr>
+          <p:nvPr/>
+        </p:nvSpPr>
+        <p:spPr>
+          <a:xfrm>
+            <a:off x="6220460" y="4107180"/>
+            <a:ext cx="216000" cy="216000"/>
+          </a:xfrm>
+          <a:prstGeom prst="roundRect">
+            <a:avLst/>
+          </a:prstGeom>
+          <a:solidFill>
+            <a:schemeClr val="accent2">
+              <a:lumMod val="60000"/>
+              <a:lumOff val="40000"/>
+            </a:schemeClr>
+          </a:solidFill>
+        </p:spPr>
+        <p:style>
+          <a:lnRef idx="2">
+            <a:schemeClr val="accent1">
+              <a:lumMod val="75000"/>
+            </a:schemeClr>
+          </a:lnRef>
+          <a:fillRef idx="1">
+            <a:schemeClr val="accent1"/>
+          </a:fillRef>
+          <a:effectRef idx="0">
+            <a:srgbClr val="FFFFFF"/>
+          </a:effectRef>
+          <a:fontRef idx="minor">
+            <a:schemeClr val="lt1"/>
+          </a:fontRef>
+        </p:style>
+        <p:txBody>
+          <a:bodyPr rtlCol="0" anchor="ctr"/>
+          <a:p>
+            <a:pPr algn="ctr"/>
+            <a:r>
+              <a:rPr lang="en-US" altLang="zh-CN" sz="1200">
+                <a:solidFill>
+                  <a:schemeClr val="tx1"/>
+                </a:solidFill>
+              </a:rPr>
+              <a:t>P</a:t>
+            </a:r>
+            <a:endParaRPr lang="en-US" altLang="zh-CN" sz="1200">
+              <a:solidFill>
+                <a:schemeClr val="tx1"/>
+              </a:solidFill>
+            </a:endParaRPr>
+          </a:p>
+        </p:txBody>
+      </p:sp>
+      <p:sp>
+        <p:nvSpPr>
+          <p:cNvPr id="88" name="圆角矩形 87"/>
+          <p:cNvSpPr>
+            <a:spLocks noChangeAspect="1"/>
+          </p:cNvSpPr>
+          <p:nvPr/>
+        </p:nvSpPr>
+        <p:spPr>
+          <a:xfrm>
+            <a:off x="6563360" y="4107180"/>
+            <a:ext cx="216000" cy="216000"/>
+          </a:xfrm>
+          <a:prstGeom prst="roundRect">
+            <a:avLst/>
+          </a:prstGeom>
+          <a:solidFill>
+            <a:schemeClr val="accent4">
+              <a:lumMod val="60000"/>
+              <a:lumOff val="40000"/>
+            </a:schemeClr>
+          </a:solidFill>
+        </p:spPr>
+        <p:style>
+          <a:lnRef idx="2">
+            <a:schemeClr val="accent1">
+              <a:lumMod val="75000"/>
+            </a:schemeClr>
+          </a:lnRef>
+          <a:fillRef idx="1">
+            <a:schemeClr val="accent1"/>
+          </a:fillRef>
+          <a:effectRef idx="0">
+            <a:srgbClr val="FFFFFF"/>
+          </a:effectRef>
+          <a:fontRef idx="minor">
+            <a:schemeClr val="lt1"/>
+          </a:fontRef>
+        </p:style>
+        <p:txBody>
+          <a:bodyPr rtlCol="0" anchor="ctr"/>
+          <a:p>
+            <a:pPr algn="ctr"/>
+            <a:r>
+              <a:rPr lang="en-US" altLang="zh-CN" sz="1200">
+                <a:solidFill>
+                  <a:schemeClr val="tx1"/>
+                </a:solidFill>
+              </a:rPr>
+              <a:t>U</a:t>
+            </a:r>
+            <a:endParaRPr lang="en-US" altLang="zh-CN" sz="1200">
+              <a:solidFill>
+                <a:schemeClr val="tx1"/>
+              </a:solidFill>
+            </a:endParaRPr>
+          </a:p>
+        </p:txBody>
+      </p:sp>
+      <p:sp>
+        <p:nvSpPr>
+          <p:cNvPr id="89" name="圆角矩形 88"/>
+          <p:cNvSpPr>
+            <a:spLocks noChangeAspect="1"/>
+          </p:cNvSpPr>
+          <p:nvPr/>
+        </p:nvSpPr>
+        <p:spPr>
+          <a:xfrm>
+            <a:off x="6220460" y="4448175"/>
+            <a:ext cx="216000" cy="216000"/>
+          </a:xfrm>
+          <a:prstGeom prst="roundRect">
+            <a:avLst/>
+          </a:prstGeom>
+          <a:solidFill>
+            <a:schemeClr val="tx2">
+              <a:lumMod val="60000"/>
+              <a:lumOff val="40000"/>
+            </a:schemeClr>
+          </a:solidFill>
+        </p:spPr>
+        <p:style>
+          <a:lnRef idx="2">
+            <a:schemeClr val="accent1">
+              <a:lumMod val="75000"/>
+            </a:schemeClr>
+          </a:lnRef>
+          <a:fillRef idx="1">
+            <a:schemeClr val="accent1"/>
+          </a:fillRef>
+          <a:effectRef idx="0">
+            <a:srgbClr val="FFFFFF"/>
+          </a:effectRef>
+          <a:fontRef idx="minor">
+            <a:schemeClr val="lt1"/>
+          </a:fontRef>
+        </p:style>
+        <p:txBody>
+          <a:bodyPr rtlCol="0" anchor="ctr"/>
+          <a:p>
+            <a:pPr algn="ctr"/>
+            <a:endParaRPr lang="zh-CN" altLang="en-US"/>
+          </a:p>
+        </p:txBody>
+      </p:sp>
+      <p:sp>
+        <p:nvSpPr>
+          <p:cNvPr id="90" name="圆角矩形 89"/>
+          <p:cNvSpPr>
+            <a:spLocks noChangeAspect="1"/>
+          </p:cNvSpPr>
+          <p:nvPr/>
+        </p:nvSpPr>
+        <p:spPr>
+          <a:xfrm>
+            <a:off x="6563360" y="4448175"/>
+            <a:ext cx="216000" cy="216000"/>
+          </a:xfrm>
+          <a:prstGeom prst="roundRect">
+            <a:avLst/>
+          </a:prstGeom>
+          <a:solidFill>
+            <a:schemeClr val="bg1">
+              <a:lumMod val="75000"/>
+            </a:schemeClr>
+          </a:solidFill>
+        </p:spPr>
+        <p:style>
+          <a:lnRef idx="2">
+            <a:schemeClr val="accent1">
+              <a:lumMod val="75000"/>
+            </a:schemeClr>
+          </a:lnRef>
+          <a:fillRef idx="1">
+            <a:schemeClr val="accent1"/>
+          </a:fillRef>
+          <a:effectRef idx="0">
+            <a:srgbClr val="FFFFFF"/>
+          </a:effectRef>
+          <a:fontRef idx="minor">
+            <a:schemeClr val="lt1"/>
+          </a:fontRef>
+        </p:style>
+        <p:txBody>
+          <a:bodyPr rtlCol="0" anchor="ctr"/>
+          <a:p>
+            <a:pPr algn="ctr"/>
+            <a:endParaRPr lang="zh-CN" altLang="en-US"/>
+          </a:p>
+        </p:txBody>
+      </p:sp>
+      <p:sp>
+        <p:nvSpPr>
+          <p:cNvPr id="91" name="文本框 90"/>
+          <p:cNvSpPr txBox="1"/>
+          <p:nvPr/>
+        </p:nvSpPr>
+        <p:spPr>
+          <a:xfrm>
+            <a:off x="6186170" y="4309624"/>
+            <a:ext cx="287020" cy="168275"/>
+          </a:xfrm>
+          <a:prstGeom prst="rect">
+            <a:avLst/>
+          </a:prstGeom>
+          <a:noFill/>
+        </p:spPr>
+        <p:txBody>
+          <a:bodyPr wrap="square" rtlCol="0">
+            <a:spAutoFit/>
+          </a:bodyPr>
+          <a:p>
+            <a:pPr indent="0" algn="ctr" fontAlgn="auto">
+              <a:lnSpc>
+                <a:spcPts val="200"/>
+              </a:lnSpc>
+            </a:pPr>
+            <a:r>
+              <a:rPr lang="en-US" altLang="zh-CN" sz="1000" b="1"/>
+              <a:t>.</a:t>
+            </a:r>
+            <a:endParaRPr lang="en-US" altLang="zh-CN" sz="1000" b="1"/>
+          </a:p>
+          <a:p>
+            <a:pPr indent="0" algn="ctr" fontAlgn="auto">
+              <a:lnSpc>
+                <a:spcPts val="200"/>
+              </a:lnSpc>
+            </a:pPr>
+            <a:r>
+              <a:rPr lang="en-US" altLang="zh-CN" sz="1000" b="1"/>
+              <a:t>.</a:t>
+            </a:r>
+            <a:endParaRPr lang="en-US" altLang="zh-CN" sz="1000" b="1"/>
+          </a:p>
+          <a:p>
+            <a:pPr indent="0" algn="ctr" fontAlgn="auto">
+              <a:lnSpc>
+                <a:spcPts val="200"/>
+              </a:lnSpc>
+            </a:pPr>
+            <a:r>
+              <a:rPr lang="en-US" altLang="zh-CN" sz="1000" b="1"/>
+              <a:t>.</a:t>
+            </a:r>
+            <a:endParaRPr lang="en-US" altLang="zh-CN" sz="1000" b="1"/>
+          </a:p>
+        </p:txBody>
+      </p:sp>
+      <p:sp>
+        <p:nvSpPr>
+          <p:cNvPr id="92" name="文本框 91"/>
+          <p:cNvSpPr txBox="1"/>
+          <p:nvPr/>
+        </p:nvSpPr>
+        <p:spPr>
+          <a:xfrm>
+            <a:off x="6527800" y="4309624"/>
+            <a:ext cx="287020" cy="168275"/>
+          </a:xfrm>
+          <a:prstGeom prst="rect">
+            <a:avLst/>
+          </a:prstGeom>
+          <a:noFill/>
+        </p:spPr>
+        <p:txBody>
+          <a:bodyPr wrap="square" rtlCol="0">
+            <a:spAutoFit/>
+          </a:bodyPr>
+          <a:p>
+            <a:pPr indent="0" algn="ctr" fontAlgn="auto">
+              <a:lnSpc>
+                <a:spcPts val="200"/>
+              </a:lnSpc>
+            </a:pPr>
+            <a:r>
+              <a:rPr lang="en-US" altLang="zh-CN" sz="1000" b="1"/>
+              <a:t>.</a:t>
+            </a:r>
+            <a:endParaRPr lang="en-US" altLang="zh-CN" sz="1000" b="1"/>
+          </a:p>
+          <a:p>
+            <a:pPr indent="0" algn="ctr" fontAlgn="auto">
+              <a:lnSpc>
+                <a:spcPts val="200"/>
+              </a:lnSpc>
+            </a:pPr>
+            <a:r>
+              <a:rPr lang="en-US" altLang="zh-CN" sz="1000" b="1"/>
+              <a:t>.</a:t>
+            </a:r>
+            <a:endParaRPr lang="en-US" altLang="zh-CN" sz="1000" b="1"/>
+          </a:p>
+          <a:p>
+            <a:pPr indent="0" algn="ctr" fontAlgn="auto">
+              <a:lnSpc>
+                <a:spcPts val="200"/>
+              </a:lnSpc>
+            </a:pPr>
+            <a:r>
+              <a:rPr lang="en-US" altLang="zh-CN" sz="1000" b="1"/>
+              <a:t>.</a:t>
+            </a:r>
+            <a:endParaRPr lang="en-US" altLang="zh-CN" sz="1000" b="1"/>
+          </a:p>
+        </p:txBody>
+      </p:sp>
+      <p:sp>
+        <p:nvSpPr>
+          <p:cNvPr id="93" name="文本框 92"/>
+          <p:cNvSpPr txBox="1"/>
+          <p:nvPr/>
+        </p:nvSpPr>
+        <p:spPr>
+          <a:xfrm rot="5400000">
+            <a:off x="6348730" y="4473454"/>
+            <a:ext cx="287020" cy="168275"/>
+          </a:xfrm>
+          <a:prstGeom prst="rect">
+            <a:avLst/>
+          </a:prstGeom>
+          <a:noFill/>
+        </p:spPr>
+        <p:txBody>
+          <a:bodyPr wrap="square" rtlCol="0">
+            <a:spAutoFit/>
+          </a:bodyPr>
+          <a:p>
+            <a:pPr indent="0" algn="ctr" fontAlgn="auto">
+              <a:lnSpc>
+                <a:spcPts val="200"/>
+              </a:lnSpc>
+            </a:pPr>
+            <a:r>
+              <a:rPr lang="en-US" altLang="zh-CN" sz="1000" b="1"/>
+              <a:t>.</a:t>
+            </a:r>
+            <a:endParaRPr lang="en-US" altLang="zh-CN" sz="1000" b="1"/>
+          </a:p>
+          <a:p>
+            <a:pPr indent="0" algn="ctr" fontAlgn="auto">
+              <a:lnSpc>
+                <a:spcPts val="200"/>
+              </a:lnSpc>
+            </a:pPr>
+            <a:r>
+              <a:rPr lang="en-US" altLang="zh-CN" sz="1000" b="1"/>
+              <a:t>.</a:t>
+            </a:r>
+            <a:endParaRPr lang="en-US" altLang="zh-CN" sz="1000" b="1"/>
+          </a:p>
+          <a:p>
+            <a:pPr indent="0" algn="ctr" fontAlgn="auto">
+              <a:lnSpc>
+                <a:spcPts val="200"/>
+              </a:lnSpc>
+            </a:pPr>
+            <a:r>
+              <a:rPr lang="en-US" altLang="zh-CN" sz="1000" b="1"/>
+              <a:t>.</a:t>
+            </a:r>
+            <a:endParaRPr lang="en-US" altLang="zh-CN" sz="1000" b="1"/>
+          </a:p>
+        </p:txBody>
+      </p:sp>
+      <p:sp>
+        <p:nvSpPr>
+          <p:cNvPr id="94" name="文本框 93"/>
+          <p:cNvSpPr txBox="1"/>
+          <p:nvPr/>
+        </p:nvSpPr>
+        <p:spPr>
+          <a:xfrm>
+            <a:off x="6068060" y="4686935"/>
+            <a:ext cx="876935" cy="275590"/>
+          </a:xfrm>
+          <a:prstGeom prst="rect">
+            <a:avLst/>
+          </a:prstGeom>
+          <a:noFill/>
+        </p:spPr>
+        <p:txBody>
+          <a:bodyPr wrap="square" rtlCol="0">
+            <a:spAutoFit/>
+          </a:bodyPr>
+          <a:p>
+            <a:pPr algn="ctr"/>
+            <a:r>
+              <a:rPr lang="en-US" altLang="zh-CN" sz="1200" b="1"/>
+              <a:t>PU</a:t>
+            </a:r>
+            <a:r>
+              <a:rPr lang="zh-CN" altLang="en-US" sz="1200" b="1"/>
+              <a:t>对数</a:t>
+            </a:r>
+            <a:endParaRPr lang="zh-CN" altLang="en-US" sz="1200" b="1"/>
+          </a:p>
+        </p:txBody>
+      </p:sp>
+      <p:sp>
+        <p:nvSpPr>
+          <p:cNvPr id="95" name="下箭头 94"/>
+          <p:cNvSpPr/>
+          <p:nvPr/>
+        </p:nvSpPr>
+        <p:spPr>
+          <a:xfrm rot="16200000">
+            <a:off x="7001695" y="4250175"/>
+            <a:ext cx="108000" cy="288000"/>
+          </a:xfrm>
+          <a:prstGeom prst="downArrow">
+            <a:avLst>
+              <a:gd name="adj1" fmla="val 31764"/>
+              <a:gd name="adj2" fmla="val 80588"/>
+            </a:avLst>
+          </a:prstGeom>
+          <a:solidFill>
+            <a:schemeClr val="tx1"/>
+          </a:solidFill>
+          <a:ln>
+            <a:solidFill>
+              <a:schemeClr val="tx1"/>
+            </a:solidFill>
+          </a:ln>
+        </p:spPr>
+        <p:style>
+          <a:lnRef idx="2">
+            <a:schemeClr val="accent1">
+              <a:lumMod val="75000"/>
+            </a:schemeClr>
+          </a:lnRef>
+          <a:fillRef idx="1">
+            <a:schemeClr val="accent1"/>
+          </a:fillRef>
+          <a:effectRef idx="0">
+            <a:srgbClr val="FFFFFF"/>
+          </a:effectRef>
+          <a:fontRef idx="minor">
+            <a:schemeClr val="lt1"/>
+          </a:fontRef>
+        </p:style>
+        <p:txBody>
+          <a:bodyPr rtlCol="0" anchor="ctr"/>
+          <a:p>
+            <a:pPr algn="ctr"/>
+            <a:endParaRPr lang="zh-CN" altLang="en-US"/>
+          </a:p>
+        </p:txBody>
+      </p:sp>
+      <p:graphicFrame>
+        <p:nvGraphicFramePr>
+          <p:cNvPr id="96" name="表格 95"/>
+          <p:cNvGraphicFramePr/>
+          <p:nvPr>
+            <p:custDataLst>
+              <p:tags r:id="rId10"/>
+            </p:custDataLst>
+          </p:nvPr>
+        </p:nvGraphicFramePr>
+        <p:xfrm>
+          <a:off x="7237095" y="4036060"/>
+          <a:ext cx="673735" cy="665480"/>
+        </p:xfrm>
+        <a:graphic>
+          <a:graphicData uri="http://schemas.openxmlformats.org/drawingml/2006/table">
+            <a:tbl>
+              <a:tblPr firstRow="1" bandRow="1">
+                <a:tableStyleId>{5C22544A-7EE6-4342-B048-85BDC9FD1C3A}</a:tableStyleId>
+              </a:tblPr>
+              <a:tblGrid>
+                <a:gridCol w="177165"/>
+                <a:gridCol w="496570"/>
+              </a:tblGrid>
+              <a:tr h="166370">
+                <a:tc>
+                  <a:txBody>
+                    <a:bodyPr/>
+                    <a:p>
+                      <a:pPr algn="ctr">
+                        <a:buNone/>
+                      </a:pPr>
+                      <a:r>
+                        <a:rPr lang="en-US" altLang="zh-CN" sz="600"/>
+                        <a:t>1</a:t>
+                      </a:r>
+                      <a:endParaRPr lang="en-US" altLang="zh-CN" sz="600"/>
+                    </a:p>
+                  </a:txBody>
+                  <a:tcPr marL="0" marR="0" marT="0" marB="0" anchor="ctr" anchorCtr="0"/>
+                </a:tc>
+                <a:tc>
+                  <a:txBody>
+                    <a:bodyPr/>
+                    <a:p>
+                      <a:pPr algn="ctr">
+                        <a:buNone/>
+                      </a:pPr>
+                      <a:r>
+                        <a:rPr lang="zh-CN" altLang="en-US" sz="600"/>
+                        <a:t>候选事件</a:t>
+                      </a:r>
+                      <a:endParaRPr lang="zh-CN" altLang="en-US" sz="600"/>
+                    </a:p>
+                  </a:txBody>
+                  <a:tcPr marL="0" marR="0" marT="0" marB="0" anchor="ctr" anchorCtr="0"/>
+                </a:tc>
+              </a:tr>
+              <a:tr h="166370">
+                <a:tc>
+                  <a:txBody>
+                    <a:bodyPr/>
+                    <a:p>
+                      <a:pPr algn="ctr">
+                        <a:buNone/>
+                      </a:pPr>
+                      <a:r>
+                        <a:rPr lang="en-US" altLang="zh-CN" sz="600"/>
+                        <a:t>2</a:t>
+                      </a:r>
+                      <a:endParaRPr lang="en-US" altLang="zh-CN" sz="600"/>
+                    </a:p>
+                  </a:txBody>
+                  <a:tcPr marL="0" marR="0" marT="0" marB="0" anchor="ctr" anchorCtr="0"/>
+                </a:tc>
+                <a:tc>
+                  <a:txBody>
+                    <a:bodyPr/>
+                    <a:p>
+                      <a:pPr algn="ctr">
+                        <a:buNone/>
+                      </a:pPr>
+                      <a:r>
+                        <a:rPr lang="zh-CN" altLang="en-US" sz="600"/>
+                        <a:t>候选事件</a:t>
+                      </a:r>
+                      <a:endParaRPr lang="zh-CN" altLang="en-US" sz="600"/>
+                    </a:p>
+                  </a:txBody>
+                  <a:tcPr marL="0" marR="0" marT="0" marB="0" anchor="ctr" anchorCtr="0"/>
+                </a:tc>
+              </a:tr>
+              <a:tr h="166370">
+                <a:tc>
+                  <a:txBody>
+                    <a:bodyPr/>
+                    <a:p>
+                      <a:pPr algn="ctr">
+                        <a:buNone/>
+                      </a:pPr>
+                      <a:r>
+                        <a:rPr lang="en-US" altLang="zh-CN" sz="600"/>
+                        <a:t>3</a:t>
+                      </a:r>
+                      <a:endParaRPr lang="en-US" altLang="zh-CN" sz="600"/>
+                    </a:p>
+                  </a:txBody>
+                  <a:tcPr marL="0" marR="0" marT="0" marB="0" anchor="ctr" anchorCtr="0"/>
+                </a:tc>
+                <a:tc>
+                  <a:txBody>
+                    <a:bodyPr/>
+                    <a:p>
+                      <a:pPr algn="ctr">
+                        <a:buNone/>
+                      </a:pPr>
+                      <a:r>
+                        <a:rPr lang="en-US" altLang="zh-CN" sz="600"/>
+                        <a:t>...</a:t>
+                      </a:r>
+                      <a:endParaRPr lang="en-US" altLang="zh-CN" sz="600"/>
+                    </a:p>
+                  </a:txBody>
+                  <a:tcPr marL="0" marR="0" marT="0" marB="0" anchor="ctr" anchorCtr="0"/>
+                </a:tc>
+              </a:tr>
+              <a:tr h="166370">
+                <a:tc>
+                  <a:txBody>
+                    <a:bodyPr/>
+                    <a:p>
+                      <a:pPr algn="ctr">
+                        <a:buNone/>
+                      </a:pPr>
+                      <a:r>
+                        <a:rPr lang="en-US" altLang="zh-CN" sz="600"/>
+                        <a:t>4</a:t>
+                      </a:r>
+                      <a:endParaRPr lang="en-US" altLang="zh-CN" sz="600"/>
+                    </a:p>
+                  </a:txBody>
+                  <a:tcPr marL="0" marR="0" marT="0" marB="0" anchor="ctr" anchorCtr="0"/>
+                </a:tc>
+                <a:tc>
+                  <a:txBody>
+                    <a:bodyPr/>
+                    <a:p>
+                      <a:pPr algn="ctr">
+                        <a:buNone/>
+                      </a:pPr>
+                      <a:r>
+                        <a:rPr lang="en-US" altLang="zh-CN" sz="600"/>
+                        <a:t>...</a:t>
+                      </a:r>
+                      <a:endParaRPr lang="en-US" altLang="zh-CN" sz="600"/>
+                    </a:p>
+                  </a:txBody>
+                  <a:tcPr marL="0" marR="0" marT="0" marB="0" anchor="ctr" anchorCtr="0"/>
+                </a:tc>
+              </a:tr>
+            </a:tbl>
+          </a:graphicData>
+        </a:graphic>
+      </p:graphicFrame>
+      <p:sp>
+        <p:nvSpPr>
+          <p:cNvPr id="97" name="文本框 96"/>
+          <p:cNvSpPr txBox="1"/>
+          <p:nvPr/>
+        </p:nvSpPr>
+        <p:spPr>
+          <a:xfrm>
+            <a:off x="7141210" y="4686935"/>
+            <a:ext cx="876935" cy="275590"/>
+          </a:xfrm>
+          <a:prstGeom prst="rect">
+            <a:avLst/>
+          </a:prstGeom>
+          <a:noFill/>
+        </p:spPr>
+        <p:txBody>
+          <a:bodyPr wrap="square" rtlCol="0">
+            <a:spAutoFit/>
+          </a:bodyPr>
+          <a:p>
+            <a:pPr algn="ctr"/>
+            <a:r>
+              <a:rPr lang="en-US" altLang="zh-CN" sz="1200" b="1"/>
+              <a:t>TopK</a:t>
+            </a:r>
+            <a:r>
+              <a:rPr lang="zh-CN" altLang="en-US" sz="1200" b="1"/>
+              <a:t>过滤</a:t>
+            </a:r>
+            <a:endParaRPr lang="zh-CN" altLang="en-US" sz="1200" b="1"/>
+          </a:p>
+        </p:txBody>
+      </p:sp>
+      <p:sp>
+        <p:nvSpPr>
+          <p:cNvPr id="99" name="文本框 98"/>
+          <p:cNvSpPr txBox="1"/>
+          <p:nvPr/>
+        </p:nvSpPr>
+        <p:spPr>
+          <a:xfrm>
+            <a:off x="8654490" y="2068830"/>
+            <a:ext cx="2303145" cy="337185"/>
+          </a:xfrm>
+          <a:prstGeom prst="rect">
+            <a:avLst/>
+          </a:prstGeom>
+          <a:noFill/>
+        </p:spPr>
+        <p:txBody>
+          <a:bodyPr wrap="square" rtlCol="0">
+            <a:spAutoFit/>
+          </a:bodyPr>
+          <a:p>
+            <a:pPr algn="ctr"/>
+            <a:r>
+              <a:rPr lang="zh-CN" altLang="en-US" sz="1600" b="1">
+                <a:solidFill>
+                  <a:srgbClr val="C00000"/>
+                </a:solidFill>
+              </a:rPr>
+              <a:t>覆盖增益</a:t>
+            </a:r>
+            <a:r>
+              <a:rPr lang="zh-CN" altLang="en-US" sz="1600" b="1">
+                <a:solidFill>
+                  <a:srgbClr val="C00000"/>
+                </a:solidFill>
+              </a:rPr>
+              <a:t>评估</a:t>
+            </a:r>
+            <a:endParaRPr lang="zh-CN" altLang="en-US" sz="1600" b="1">
+              <a:solidFill>
+                <a:srgbClr val="C00000"/>
+              </a:solidFill>
+            </a:endParaRPr>
+          </a:p>
+        </p:txBody>
+      </p:sp>
+      <p:sp>
+        <p:nvSpPr>
+          <p:cNvPr id="100" name="文本框 99"/>
+          <p:cNvSpPr txBox="1"/>
+          <p:nvPr/>
+        </p:nvSpPr>
+        <p:spPr>
+          <a:xfrm>
+            <a:off x="8773160" y="3022600"/>
+            <a:ext cx="966470" cy="275590"/>
+          </a:xfrm>
+          <a:prstGeom prst="rect">
+            <a:avLst/>
+          </a:prstGeom>
+          <a:noFill/>
+        </p:spPr>
+        <p:txBody>
+          <a:bodyPr wrap="square" rtlCol="0">
+            <a:spAutoFit/>
+          </a:bodyPr>
+          <a:p>
+            <a:r>
+              <a:rPr lang="zh-CN" altLang="en-US" sz="1200" b="1"/>
+              <a:t>向量</a:t>
+            </a:r>
+            <a:r>
+              <a:rPr lang="zh-CN" altLang="en-US" sz="1200" b="1"/>
+              <a:t>数据库</a:t>
+            </a:r>
+            <a:endParaRPr lang="zh-CN" altLang="en-US" sz="1200" b="1"/>
+          </a:p>
+        </p:txBody>
+      </p:sp>
+      <p:pic>
+        <p:nvPicPr>
+          <p:cNvPr id="101" name="图片 100" descr="数据库"/>
+          <p:cNvPicPr>
+            <a:picLocks noChangeAspect="1"/>
+          </p:cNvPicPr>
+          <p:nvPr>
+            <p:custDataLst>
+              <p:tags r:id="rId11"/>
+            </p:custDataLst>
+          </p:nvPr>
+        </p:nvPicPr>
+        <p:blipFill>
+          <a:blip r:embed="rId12">
+            <a:extLst>
+              <a:ext uri="{96DAC541-7B7A-43D3-8B79-37D633B846F1}">
+                <asvg:svgBlip xmlns:asvg="http://schemas.microsoft.com/office/drawing/2016/SVG/main" r:embed="rId13"/>
+              </a:ext>
+            </a:extLst>
+          </a:blip>
+          <a:stretch>
+            <a:fillRect/>
+          </a:stretch>
+        </p:blipFill>
+        <p:spPr>
+          <a:xfrm>
+            <a:off x="8833485" y="2440940"/>
+            <a:ext cx="777600" cy="572701"/>
+          </a:xfrm>
+          <a:prstGeom prst="rect">
+            <a:avLst/>
+          </a:prstGeom>
+        </p:spPr>
+      </p:pic>
+      <p:pic>
+        <p:nvPicPr>
+          <p:cNvPr id="102" name="图片 101"/>
+          <p:cNvPicPr>
+            <a:picLocks noChangeAspect="1"/>
+          </p:cNvPicPr>
+          <p:nvPr/>
+        </p:nvPicPr>
+        <p:blipFill>
+          <a:blip r:embed="rId14"/>
+          <a:stretch>
+            <a:fillRect/>
+          </a:stretch>
+        </p:blipFill>
+        <p:spPr>
+          <a:xfrm>
+            <a:off x="9789160" y="2376805"/>
+            <a:ext cx="252000" cy="252000"/>
+          </a:xfrm>
+          <a:prstGeom prst="rect">
+            <a:avLst/>
+          </a:prstGeom>
+        </p:spPr>
+      </p:pic>
+      <p:pic>
+        <p:nvPicPr>
+          <p:cNvPr id="103" name="图片 102"/>
+          <p:cNvPicPr>
+            <a:picLocks noChangeAspect="1"/>
+          </p:cNvPicPr>
+          <p:nvPr/>
+        </p:nvPicPr>
+        <p:blipFill>
+          <a:blip r:embed="rId15"/>
+          <a:stretch>
+            <a:fillRect/>
+          </a:stretch>
+        </p:blipFill>
+        <p:spPr>
+          <a:xfrm>
+            <a:off x="9789160" y="2689765"/>
+            <a:ext cx="252000" cy="251460"/>
+          </a:xfrm>
+          <a:prstGeom prst="rect">
+            <a:avLst/>
+          </a:prstGeom>
+        </p:spPr>
+      </p:pic>
+      <p:pic>
+        <p:nvPicPr>
+          <p:cNvPr id="104" name="图片 103"/>
+          <p:cNvPicPr>
+            <a:picLocks noChangeAspect="1"/>
+          </p:cNvPicPr>
+          <p:nvPr/>
+        </p:nvPicPr>
+        <p:blipFill>
+          <a:blip r:embed="rId16"/>
+          <a:stretch>
+            <a:fillRect/>
+          </a:stretch>
+        </p:blipFill>
+        <p:spPr>
+          <a:xfrm>
+            <a:off x="9789160" y="3002185"/>
+            <a:ext cx="252000" cy="251460"/>
+          </a:xfrm>
+          <a:prstGeom prst="rect">
+            <a:avLst/>
+          </a:prstGeom>
+        </p:spPr>
+      </p:pic>
+      <p:sp>
+        <p:nvSpPr>
+          <p:cNvPr id="105" name="文本框 104"/>
+          <p:cNvSpPr txBox="1"/>
+          <p:nvPr/>
+        </p:nvSpPr>
+        <p:spPr>
+          <a:xfrm>
+            <a:off x="9916795" y="4683125"/>
+            <a:ext cx="1040765" cy="275590"/>
+          </a:xfrm>
+          <a:prstGeom prst="rect">
+            <a:avLst/>
+          </a:prstGeom>
+          <a:noFill/>
+        </p:spPr>
+        <p:txBody>
+          <a:bodyPr wrap="square" rtlCol="0">
+            <a:spAutoFit/>
+          </a:bodyPr>
+          <a:p>
+            <a:r>
+              <a:rPr lang="zh-CN" altLang="en-US" sz="1200" b="1"/>
+              <a:t>向量</a:t>
+            </a:r>
+            <a:r>
+              <a:rPr lang="zh-CN" altLang="en-US" sz="1200" b="1"/>
+              <a:t>数据库</a:t>
+            </a:r>
+            <a:endParaRPr lang="zh-CN" altLang="en-US" sz="1200" b="1"/>
+          </a:p>
+        </p:txBody>
+      </p:sp>
+      <p:sp>
+        <p:nvSpPr>
+          <p:cNvPr id="106" name="文本框 105"/>
+          <p:cNvSpPr txBox="1"/>
+          <p:nvPr/>
+        </p:nvSpPr>
+        <p:spPr>
+          <a:xfrm>
+            <a:off x="10040620" y="2371725"/>
+            <a:ext cx="803275" cy="275590"/>
+          </a:xfrm>
+          <a:prstGeom prst="rect">
+            <a:avLst/>
+          </a:prstGeom>
+          <a:noFill/>
+        </p:spPr>
+        <p:txBody>
+          <a:bodyPr wrap="square" rtlCol="0">
+            <a:spAutoFit/>
+          </a:bodyPr>
+          <a:p>
+            <a:r>
+              <a:rPr lang="zh-CN" altLang="en-US" sz="1200" b="1"/>
+              <a:t>空间</a:t>
+            </a:r>
+            <a:r>
+              <a:rPr lang="zh-CN" altLang="en-US" sz="1200" b="1"/>
+              <a:t>覆盖</a:t>
+            </a:r>
+            <a:endParaRPr lang="zh-CN" altLang="en-US" sz="1200" b="1"/>
+          </a:p>
+        </p:txBody>
+      </p:sp>
+      <p:sp>
+        <p:nvSpPr>
+          <p:cNvPr id="107" name="文本框 106"/>
+          <p:cNvSpPr txBox="1"/>
+          <p:nvPr/>
+        </p:nvSpPr>
+        <p:spPr>
+          <a:xfrm>
+            <a:off x="10040620" y="2684145"/>
+            <a:ext cx="803275" cy="275590"/>
+          </a:xfrm>
+          <a:prstGeom prst="rect">
+            <a:avLst/>
+          </a:prstGeom>
+          <a:noFill/>
+        </p:spPr>
+        <p:txBody>
+          <a:bodyPr wrap="square" rtlCol="0">
+            <a:spAutoFit/>
+          </a:bodyPr>
+          <a:p>
+            <a:r>
+              <a:rPr lang="zh-CN" altLang="en-US" sz="1200" b="1"/>
+              <a:t>稀缺波形</a:t>
+            </a:r>
+            <a:endParaRPr lang="zh-CN" altLang="en-US" sz="1200" b="1"/>
+          </a:p>
+        </p:txBody>
+      </p:sp>
+      <p:sp>
+        <p:nvSpPr>
+          <p:cNvPr id="108" name="文本框 107"/>
+          <p:cNvSpPr txBox="1"/>
+          <p:nvPr/>
+        </p:nvSpPr>
+        <p:spPr>
+          <a:xfrm>
+            <a:off x="10041890" y="2996565"/>
+            <a:ext cx="802005" cy="275590"/>
+          </a:xfrm>
+          <a:prstGeom prst="rect">
+            <a:avLst/>
+          </a:prstGeom>
+          <a:noFill/>
+        </p:spPr>
+        <p:txBody>
+          <a:bodyPr wrap="square" rtlCol="0">
+            <a:spAutoFit/>
+          </a:bodyPr>
+          <a:p>
+            <a:r>
+              <a:rPr lang="zh-CN" altLang="en-US" sz="1200" b="1"/>
+              <a:t>边界</a:t>
+            </a:r>
+            <a:r>
+              <a:rPr lang="zh-CN" altLang="en-US" sz="1200" b="1"/>
+              <a:t>扩展</a:t>
+            </a:r>
+            <a:endParaRPr lang="zh-CN" altLang="en-US" sz="1200" b="1"/>
+          </a:p>
+        </p:txBody>
+      </p:sp>
+      <p:sp>
+        <p:nvSpPr>
+          <p:cNvPr id="109" name="下箭头 108"/>
+          <p:cNvSpPr/>
+          <p:nvPr/>
+        </p:nvSpPr>
+        <p:spPr>
+          <a:xfrm>
+            <a:off x="9751453" y="3341370"/>
+            <a:ext cx="107950" cy="320040"/>
+          </a:xfrm>
+          <a:prstGeom prst="downArrow">
+            <a:avLst>
+              <a:gd name="adj1" fmla="val 31764"/>
+              <a:gd name="adj2" fmla="val 80588"/>
+            </a:avLst>
+          </a:prstGeom>
+          <a:solidFill>
+            <a:srgbClr val="C00000"/>
+          </a:solidFill>
+          <a:ln>
+            <a:solidFill>
+              <a:srgbClr val="C00000"/>
+            </a:solidFill>
+          </a:ln>
+        </p:spPr>
+        <p:style>
+          <a:lnRef idx="2">
+            <a:schemeClr val="accent1">
+              <a:lumMod val="75000"/>
+            </a:schemeClr>
+          </a:lnRef>
+          <a:fillRef idx="1">
+            <a:schemeClr val="accent1"/>
+          </a:fillRef>
+          <a:effectRef idx="0">
+            <a:srgbClr val="FFFFFF"/>
+          </a:effectRef>
+          <a:fontRef idx="minor">
+            <a:schemeClr val="lt1"/>
+          </a:fontRef>
+        </p:style>
+        <p:txBody>
+          <a:bodyPr rtlCol="0" anchor="ctr"/>
+          <a:p>
+            <a:pPr algn="ctr"/>
+            <a:endParaRPr lang="zh-CN" altLang="en-US"/>
+          </a:p>
+        </p:txBody>
+      </p:sp>
+      <p:sp>
+        <p:nvSpPr>
+          <p:cNvPr id="110" name="文本框 109"/>
+          <p:cNvSpPr txBox="1"/>
+          <p:nvPr/>
+        </p:nvSpPr>
+        <p:spPr>
+          <a:xfrm>
+            <a:off x="8578925" y="3733800"/>
+            <a:ext cx="2303145" cy="337185"/>
+          </a:xfrm>
+          <a:prstGeom prst="rect">
+            <a:avLst/>
+          </a:prstGeom>
+          <a:noFill/>
+        </p:spPr>
+        <p:txBody>
+          <a:bodyPr wrap="square" rtlCol="0">
+            <a:spAutoFit/>
+          </a:bodyPr>
+          <a:p>
+            <a:pPr algn="ctr"/>
+            <a:r>
+              <a:rPr lang="zh-CN" altLang="en-US" sz="1600" b="1">
+                <a:solidFill>
+                  <a:srgbClr val="C00000"/>
+                </a:solidFill>
+              </a:rPr>
+              <a:t>索引约束</a:t>
+            </a:r>
+            <a:r>
+              <a:rPr lang="zh-CN" altLang="en-US" sz="1600" b="1">
+                <a:solidFill>
+                  <a:srgbClr val="C00000"/>
+                </a:solidFill>
+              </a:rPr>
+              <a:t>优化</a:t>
+            </a:r>
+            <a:endParaRPr lang="zh-CN" altLang="en-US" sz="1600" b="1">
+              <a:solidFill>
+                <a:srgbClr val="C00000"/>
+              </a:solidFill>
+            </a:endParaRPr>
+          </a:p>
+        </p:txBody>
+      </p:sp>
+      <p:sp>
+        <p:nvSpPr>
+          <p:cNvPr id="111" name="圆角矩形 110"/>
+          <p:cNvSpPr>
+            <a:spLocks noChangeAspect="1"/>
+          </p:cNvSpPr>
+          <p:nvPr/>
+        </p:nvSpPr>
+        <p:spPr>
+          <a:xfrm>
+            <a:off x="8929370" y="4070985"/>
+            <a:ext cx="666000" cy="666000"/>
+          </a:xfrm>
+          <a:prstGeom prst="roundRect">
+            <a:avLst/>
+          </a:prstGeom>
+          <a:solidFill>
+            <a:schemeClr val="bg1"/>
+          </a:solidFill>
+          <a:ln w="22225"/>
+        </p:spPr>
+        <p:style>
+          <a:lnRef idx="2">
+            <a:schemeClr val="accent1">
+              <a:lumMod val="75000"/>
+            </a:schemeClr>
+          </a:lnRef>
+          <a:fillRef idx="1">
+            <a:schemeClr val="accent1"/>
+          </a:fillRef>
+          <a:effectRef idx="0">
+            <a:srgbClr val="FFFFFF"/>
+          </a:effectRef>
+          <a:fontRef idx="minor">
+            <a:schemeClr val="lt1"/>
+          </a:fontRef>
+        </p:style>
+        <p:txBody>
+          <a:bodyPr rtlCol="0" anchor="ctr"/>
+          <a:p>
+            <a:pPr algn="ctr"/>
+            <a:endParaRPr lang="zh-CN" altLang="en-US"/>
+          </a:p>
+        </p:txBody>
+      </p:sp>
+      <p:sp>
+        <p:nvSpPr>
+          <p:cNvPr id="112" name="文本框 111"/>
+          <p:cNvSpPr txBox="1"/>
+          <p:nvPr/>
+        </p:nvSpPr>
+        <p:spPr>
+          <a:xfrm>
+            <a:off x="8836660" y="4701540"/>
+            <a:ext cx="876935" cy="275590"/>
+          </a:xfrm>
+          <a:prstGeom prst="rect">
+            <a:avLst/>
+          </a:prstGeom>
+          <a:noFill/>
+        </p:spPr>
+        <p:txBody>
+          <a:bodyPr wrap="square" rtlCol="0">
+            <a:spAutoFit/>
+          </a:bodyPr>
+          <a:p>
+            <a:pPr algn="ctr"/>
+            <a:r>
+              <a:rPr lang="zh-CN" altLang="en-US" sz="1200" b="1"/>
+              <a:t>多元</a:t>
+            </a:r>
+            <a:r>
+              <a:rPr lang="zh-CN" altLang="en-US" sz="1200" b="1"/>
+              <a:t>向量</a:t>
+            </a:r>
+            <a:endParaRPr lang="zh-CN" altLang="en-US" sz="1200" b="1"/>
+          </a:p>
+        </p:txBody>
+      </p:sp>
+      <p:sp>
+        <p:nvSpPr>
+          <p:cNvPr id="113" name="椭圆 112"/>
+          <p:cNvSpPr>
+            <a:spLocks noChangeAspect="1"/>
+          </p:cNvSpPr>
+          <p:nvPr/>
+        </p:nvSpPr>
+        <p:spPr>
+          <a:xfrm>
+            <a:off x="9039225" y="4172585"/>
+            <a:ext cx="107289" cy="108000"/>
+          </a:xfrm>
+          <a:prstGeom prst="ellipse">
+            <a:avLst/>
+          </a:prstGeom>
+        </p:spPr>
+        <p:style>
+          <a:lnRef idx="2">
+            <a:schemeClr val="accent1">
+              <a:lumMod val="75000"/>
+            </a:schemeClr>
+          </a:lnRef>
+          <a:fillRef idx="1">
+            <a:schemeClr val="accent1"/>
+          </a:fillRef>
+          <a:effectRef idx="0">
+            <a:srgbClr val="FFFFFF"/>
+          </a:effectRef>
+          <a:fontRef idx="minor">
+            <a:schemeClr val="lt1"/>
+          </a:fontRef>
+        </p:style>
+        <p:txBody>
+          <a:bodyPr rtlCol="0" anchor="ctr"/>
+          <a:p>
+            <a:pPr algn="ctr"/>
+            <a:endParaRPr lang="zh-CN" altLang="en-US"/>
+          </a:p>
+        </p:txBody>
+      </p:sp>
+      <p:sp>
+        <p:nvSpPr>
+          <p:cNvPr id="115" name="椭圆 114"/>
+          <p:cNvSpPr>
+            <a:spLocks noChangeAspect="1"/>
+          </p:cNvSpPr>
+          <p:nvPr/>
+        </p:nvSpPr>
+        <p:spPr>
+          <a:xfrm>
+            <a:off x="9353550" y="4172585"/>
+            <a:ext cx="107289" cy="108000"/>
+          </a:xfrm>
+          <a:prstGeom prst="ellipse">
+            <a:avLst/>
+          </a:prstGeom>
+          <a:solidFill>
+            <a:schemeClr val="accent3">
+              <a:lumMod val="60000"/>
+              <a:lumOff val="40000"/>
+            </a:schemeClr>
+          </a:solidFill>
+        </p:spPr>
+        <p:style>
+          <a:lnRef idx="2">
+            <a:schemeClr val="accent1">
+              <a:lumMod val="75000"/>
+            </a:schemeClr>
+          </a:lnRef>
+          <a:fillRef idx="1">
+            <a:schemeClr val="accent1"/>
+          </a:fillRef>
+          <a:effectRef idx="0">
+            <a:srgbClr val="FFFFFF"/>
+          </a:effectRef>
+          <a:fontRef idx="minor">
+            <a:schemeClr val="lt1"/>
+          </a:fontRef>
+        </p:style>
+        <p:txBody>
+          <a:bodyPr rtlCol="0" anchor="ctr"/>
+          <a:p>
+            <a:pPr algn="ctr"/>
+            <a:endParaRPr lang="zh-CN" altLang="en-US"/>
+          </a:p>
+        </p:txBody>
+      </p:sp>
+      <p:sp>
+        <p:nvSpPr>
+          <p:cNvPr id="116" name="椭圆 115"/>
+          <p:cNvSpPr>
+            <a:spLocks noChangeAspect="1"/>
+          </p:cNvSpPr>
+          <p:nvPr/>
+        </p:nvSpPr>
+        <p:spPr>
+          <a:xfrm>
+            <a:off x="9039225" y="4364673"/>
+            <a:ext cx="107289" cy="108000"/>
+          </a:xfrm>
+          <a:prstGeom prst="ellipse">
+            <a:avLst/>
+          </a:prstGeom>
+          <a:solidFill>
+            <a:schemeClr val="accent4">
+              <a:lumMod val="60000"/>
+              <a:lumOff val="40000"/>
+            </a:schemeClr>
+          </a:solidFill>
+        </p:spPr>
+        <p:style>
+          <a:lnRef idx="2">
+            <a:schemeClr val="accent1">
+              <a:lumMod val="75000"/>
+            </a:schemeClr>
+          </a:lnRef>
+          <a:fillRef idx="1">
+            <a:schemeClr val="accent1"/>
+          </a:fillRef>
+          <a:effectRef idx="0">
+            <a:srgbClr val="FFFFFF"/>
+          </a:effectRef>
+          <a:fontRef idx="minor">
+            <a:schemeClr val="lt1"/>
+          </a:fontRef>
+        </p:style>
+        <p:txBody>
+          <a:bodyPr rtlCol="0" anchor="ctr"/>
+          <a:p>
+            <a:pPr algn="ctr"/>
+            <a:endParaRPr lang="zh-CN" altLang="en-US"/>
+          </a:p>
+        </p:txBody>
+      </p:sp>
+      <p:sp>
+        <p:nvSpPr>
+          <p:cNvPr id="117" name="椭圆 116"/>
+          <p:cNvSpPr>
+            <a:spLocks noChangeAspect="1"/>
+          </p:cNvSpPr>
+          <p:nvPr/>
+        </p:nvSpPr>
+        <p:spPr>
+          <a:xfrm>
+            <a:off x="9353550" y="4364673"/>
+            <a:ext cx="107289" cy="108000"/>
+          </a:xfrm>
+          <a:prstGeom prst="ellipse">
+            <a:avLst/>
+          </a:prstGeom>
+          <a:solidFill>
+            <a:schemeClr val="accent5">
+              <a:lumMod val="60000"/>
+              <a:lumOff val="40000"/>
+            </a:schemeClr>
+          </a:solidFill>
+        </p:spPr>
+        <p:style>
+          <a:lnRef idx="2">
+            <a:schemeClr val="accent1">
+              <a:lumMod val="75000"/>
+            </a:schemeClr>
+          </a:lnRef>
+          <a:fillRef idx="1">
+            <a:schemeClr val="accent1"/>
+          </a:fillRef>
+          <a:effectRef idx="0">
+            <a:srgbClr val="FFFFFF"/>
+          </a:effectRef>
+          <a:fontRef idx="minor">
+            <a:schemeClr val="lt1"/>
+          </a:fontRef>
+        </p:style>
+        <p:txBody>
+          <a:bodyPr rtlCol="0" anchor="ctr"/>
+          <a:p>
+            <a:pPr algn="ctr"/>
+            <a:endParaRPr lang="zh-CN" altLang="en-US"/>
+          </a:p>
+        </p:txBody>
+      </p:sp>
+      <p:cxnSp>
+        <p:nvCxnSpPr>
+          <p:cNvPr id="118" name="直接箭头连接符 117"/>
+          <p:cNvCxnSpPr/>
+          <p:nvPr/>
+        </p:nvCxnSpPr>
+        <p:spPr>
+          <a:xfrm>
+            <a:off x="9139555" y="4229100"/>
+            <a:ext cx="212090" cy="1905"/>
+          </a:xfrm>
+          <a:prstGeom prst="straightConnector1">
+            <a:avLst/>
+          </a:prstGeom>
+          <a:ln>
+            <a:bevel/>
+            <a:tailEnd type="triangle" w="med" len="sm"/>
+          </a:ln>
+        </p:spPr>
+        <p:style>
+          <a:lnRef idx="2">
+            <a:schemeClr val="accent1"/>
+          </a:lnRef>
+          <a:fillRef idx="0">
+            <a:srgbClr val="FFFFFF"/>
+          </a:fillRef>
+          <a:effectRef idx="0">
+            <a:srgbClr val="FFFFFF"/>
+          </a:effectRef>
+          <a:fontRef idx="minor">
+            <a:schemeClr val="tx1"/>
+          </a:fontRef>
+        </p:style>
+      </p:cxnSp>
+      <p:cxnSp>
+        <p:nvCxnSpPr>
+          <p:cNvPr id="119" name="直接箭头连接符 118"/>
+          <p:cNvCxnSpPr/>
+          <p:nvPr/>
+        </p:nvCxnSpPr>
+        <p:spPr>
+          <a:xfrm>
+            <a:off x="9139555" y="4418965"/>
+            <a:ext cx="215265" cy="2540"/>
+          </a:xfrm>
+          <a:prstGeom prst="straightConnector1">
+            <a:avLst/>
+          </a:prstGeom>
+          <a:ln>
+            <a:bevel/>
+            <a:tailEnd type="triangle" w="med" len="sm"/>
+          </a:ln>
+        </p:spPr>
+        <p:style>
+          <a:lnRef idx="2">
+            <a:schemeClr val="accent1"/>
+          </a:lnRef>
+          <a:fillRef idx="0">
+            <a:srgbClr val="FFFFFF"/>
+          </a:fillRef>
+          <a:effectRef idx="0">
+            <a:srgbClr val="FFFFFF"/>
+          </a:effectRef>
+          <a:fontRef idx="minor">
+            <a:schemeClr val="tx1"/>
+          </a:fontRef>
+        </p:style>
+      </p:cxnSp>
+      <p:cxnSp>
+        <p:nvCxnSpPr>
+          <p:cNvPr id="120" name="直接箭头连接符 119"/>
+          <p:cNvCxnSpPr>
+            <a:endCxn id="117" idx="1"/>
+          </p:cNvCxnSpPr>
+          <p:nvPr/>
+        </p:nvCxnSpPr>
+        <p:spPr>
+          <a:xfrm>
+            <a:off x="9139555" y="4239260"/>
+            <a:ext cx="229870" cy="140970"/>
+          </a:xfrm>
+          <a:prstGeom prst="straightConnector1">
+            <a:avLst/>
+          </a:prstGeom>
+          <a:ln>
+            <a:bevel/>
+            <a:tailEnd type="triangle" w="med" len="sm"/>
+          </a:ln>
+        </p:spPr>
+        <p:style>
+          <a:lnRef idx="2">
+            <a:schemeClr val="accent1"/>
+          </a:lnRef>
+          <a:fillRef idx="0">
+            <a:srgbClr val="FFFFFF"/>
+          </a:fillRef>
+          <a:effectRef idx="0">
+            <a:srgbClr val="FFFFFF"/>
+          </a:effectRef>
+          <a:fontRef idx="minor">
+            <a:schemeClr val="tx1"/>
+          </a:fontRef>
+        </p:style>
+      </p:cxnSp>
+      <p:sp>
+        <p:nvSpPr>
+          <p:cNvPr id="121" name="文本框 120"/>
+          <p:cNvSpPr txBox="1"/>
+          <p:nvPr/>
+        </p:nvSpPr>
+        <p:spPr>
+          <a:xfrm>
+            <a:off x="9120038" y="4433515"/>
+            <a:ext cx="232074" cy="283163"/>
+          </a:xfrm>
+          <a:prstGeom prst="rect">
+            <a:avLst/>
+          </a:prstGeom>
+          <a:noFill/>
+        </p:spPr>
+        <p:txBody>
+          <a:bodyPr wrap="square" rtlCol="0">
+            <a:spAutoFit/>
+          </a:bodyPr>
+          <a:p>
+            <a:pPr indent="0" algn="ctr" fontAlgn="auto">
+              <a:lnSpc>
+                <a:spcPts val="500"/>
+              </a:lnSpc>
+            </a:pPr>
+            <a:r>
+              <a:rPr lang="en-US" altLang="zh-CN"/>
+              <a:t>.</a:t>
+            </a:r>
+            <a:endParaRPr lang="en-US" altLang="zh-CN"/>
+          </a:p>
+          <a:p>
+            <a:pPr indent="0" algn="ctr" fontAlgn="auto">
+              <a:lnSpc>
+                <a:spcPts val="500"/>
+              </a:lnSpc>
+            </a:pPr>
+            <a:r>
+              <a:rPr lang="en-US" altLang="zh-CN"/>
+              <a:t>.</a:t>
+            </a:r>
+            <a:endParaRPr lang="en-US" altLang="zh-CN"/>
+          </a:p>
+          <a:p>
+            <a:pPr indent="0" algn="ctr" fontAlgn="auto">
+              <a:lnSpc>
+                <a:spcPts val="500"/>
+              </a:lnSpc>
+            </a:pPr>
+            <a:r>
+              <a:rPr lang="en-US" altLang="zh-CN"/>
+              <a:t>.</a:t>
+            </a:r>
+            <a:endParaRPr lang="en-US" altLang="zh-CN"/>
+          </a:p>
+        </p:txBody>
+      </p:sp>
+      <p:sp>
+        <p:nvSpPr>
+          <p:cNvPr id="122" name="下箭头 121"/>
+          <p:cNvSpPr/>
+          <p:nvPr/>
+        </p:nvSpPr>
+        <p:spPr>
+          <a:xfrm rot="16200000">
+            <a:off x="9776865" y="4215030"/>
+            <a:ext cx="108000" cy="324000"/>
+          </a:xfrm>
+          <a:prstGeom prst="downArrow">
+            <a:avLst>
+              <a:gd name="adj1" fmla="val 31764"/>
+              <a:gd name="adj2" fmla="val 80588"/>
+            </a:avLst>
+          </a:prstGeom>
+          <a:solidFill>
+            <a:schemeClr val="tx1"/>
+          </a:solidFill>
+          <a:ln>
+            <a:solidFill>
+              <a:schemeClr val="tx1"/>
+            </a:solidFill>
+          </a:ln>
+        </p:spPr>
+        <p:style>
+          <a:lnRef idx="2">
+            <a:schemeClr val="accent1">
+              <a:lumMod val="75000"/>
+            </a:schemeClr>
+          </a:lnRef>
+          <a:fillRef idx="1">
+            <a:schemeClr val="accent1"/>
+          </a:fillRef>
+          <a:effectRef idx="0">
+            <a:srgbClr val="FFFFFF"/>
+          </a:effectRef>
+          <a:fontRef idx="minor">
+            <a:schemeClr val="lt1"/>
+          </a:fontRef>
+        </p:style>
+        <p:txBody>
+          <a:bodyPr rtlCol="0" anchor="ctr"/>
+          <a:p>
+            <a:pPr algn="ctr"/>
+            <a:endParaRPr lang="zh-CN" altLang="en-US"/>
+          </a:p>
+        </p:txBody>
+      </p:sp>
+      <p:pic>
+        <p:nvPicPr>
+          <p:cNvPr id="123" name="图片 122" descr="数据库"/>
+          <p:cNvPicPr>
+            <a:picLocks noChangeAspect="1"/>
+          </p:cNvPicPr>
+          <p:nvPr>
+            <p:custDataLst>
+              <p:tags r:id="rId17"/>
+            </p:custDataLst>
+          </p:nvPr>
+        </p:nvPicPr>
+        <p:blipFill>
+          <a:blip r:embed="rId12">
+            <a:extLst>
+              <a:ext uri="{96DAC541-7B7A-43D3-8B79-37D633B846F1}">
+                <asvg:svgBlip xmlns:asvg="http://schemas.microsoft.com/office/drawing/2016/SVG/main" r:embed="rId13"/>
+              </a:ext>
+            </a:extLst>
+          </a:blip>
+          <a:stretch>
+            <a:fillRect/>
+          </a:stretch>
+        </p:blipFill>
+        <p:spPr>
+          <a:xfrm>
+            <a:off x="10001250" y="4070985"/>
+            <a:ext cx="775970" cy="630555"/>
+          </a:xfrm>
+          <a:prstGeom prst="rect">
+            <a:avLst/>
+          </a:prstGeom>
+        </p:spPr>
+      </p:pic>
+      <p:sp>
+        <p:nvSpPr>
+          <p:cNvPr id="125" name="下箭头 124"/>
+          <p:cNvSpPr/>
+          <p:nvPr/>
+        </p:nvSpPr>
+        <p:spPr>
+          <a:xfrm>
+            <a:off x="6939673" y="4997450"/>
+            <a:ext cx="107950" cy="270000"/>
+          </a:xfrm>
+          <a:prstGeom prst="downArrow">
+            <a:avLst>
+              <a:gd name="adj1" fmla="val 31764"/>
+              <a:gd name="adj2" fmla="val 80588"/>
+            </a:avLst>
+          </a:prstGeom>
+          <a:solidFill>
+            <a:srgbClr val="2E54A1"/>
+          </a:solidFill>
+          <a:ln>
+            <a:solidFill>
+              <a:srgbClr val="2E54A1"/>
+            </a:solidFill>
+          </a:ln>
+        </p:spPr>
+        <p:style>
+          <a:lnRef idx="2">
+            <a:schemeClr val="accent1">
+              <a:lumMod val="75000"/>
+            </a:schemeClr>
+          </a:lnRef>
+          <a:fillRef idx="1">
+            <a:schemeClr val="accent1"/>
+          </a:fillRef>
+          <a:effectRef idx="0">
+            <a:srgbClr val="FFFFFF"/>
+          </a:effectRef>
+          <a:fontRef idx="minor">
+            <a:schemeClr val="lt1"/>
+          </a:fontRef>
+        </p:style>
+        <p:txBody>
+          <a:bodyPr rtlCol="0" anchor="ctr"/>
+          <a:p>
+            <a:pPr algn="ctr"/>
+            <a:endParaRPr lang="zh-CN" altLang="en-US"/>
+          </a:p>
+        </p:txBody>
+      </p:sp>
+      <p:sp>
+        <p:nvSpPr>
+          <p:cNvPr id="126" name="下箭头 125"/>
+          <p:cNvSpPr/>
+          <p:nvPr/>
+        </p:nvSpPr>
+        <p:spPr>
+          <a:xfrm>
+            <a:off x="9751453" y="4997450"/>
+            <a:ext cx="107950" cy="270000"/>
+          </a:xfrm>
+          <a:prstGeom prst="downArrow">
+            <a:avLst>
+              <a:gd name="adj1" fmla="val 31764"/>
+              <a:gd name="adj2" fmla="val 80588"/>
+            </a:avLst>
+          </a:prstGeom>
+          <a:solidFill>
+            <a:srgbClr val="C00000"/>
+          </a:solidFill>
+          <a:ln>
+            <a:solidFill>
+              <a:srgbClr val="C00000"/>
+            </a:solidFill>
+          </a:ln>
+        </p:spPr>
+        <p:style>
+          <a:lnRef idx="2">
+            <a:schemeClr val="accent1">
+              <a:lumMod val="75000"/>
+            </a:schemeClr>
+          </a:lnRef>
+          <a:fillRef idx="1">
+            <a:schemeClr val="accent1"/>
+          </a:fillRef>
+          <a:effectRef idx="0">
+            <a:srgbClr val="FFFFFF"/>
+          </a:effectRef>
+          <a:fontRef idx="minor">
+            <a:schemeClr val="lt1"/>
+          </a:fontRef>
+        </p:style>
+        <p:txBody>
+          <a:bodyPr rtlCol="0" anchor="ctr"/>
+          <a:p>
+            <a:pPr algn="ctr"/>
+            <a:endParaRPr lang="zh-CN" altLang="en-US"/>
+          </a:p>
+        </p:txBody>
+      </p:sp>
+      <p:sp>
+        <p:nvSpPr>
+          <p:cNvPr id="127" name="文本框 126"/>
+          <p:cNvSpPr txBox="1"/>
+          <p:nvPr/>
+        </p:nvSpPr>
+        <p:spPr>
+          <a:xfrm>
+            <a:off x="3580803" y="3362960"/>
+            <a:ext cx="1202055" cy="275590"/>
+          </a:xfrm>
+          <a:prstGeom prst="rect">
+            <a:avLst/>
+          </a:prstGeom>
+          <a:noFill/>
+        </p:spPr>
+        <p:txBody>
+          <a:bodyPr wrap="square" rtlCol="0">
+            <a:spAutoFit/>
+          </a:bodyPr>
+          <a:p>
+            <a:pPr algn="ctr"/>
+            <a:r>
+              <a:rPr lang="zh-CN" altLang="en-US" sz="1200" b="1"/>
+              <a:t>事件</a:t>
+            </a:r>
+            <a:r>
+              <a:rPr lang="en-US" altLang="zh-CN" sz="1200" b="1"/>
+              <a:t>   </a:t>
+            </a:r>
+            <a:r>
+              <a:rPr lang="zh-CN" altLang="en-US" sz="1200" b="1"/>
+              <a:t>触发</a:t>
+            </a:r>
+            <a:endParaRPr lang="zh-CN" altLang="en-US" sz="1200" b="1"/>
+          </a:p>
+        </p:txBody>
+      </p:sp>
+      <p:sp>
+        <p:nvSpPr>
+          <p:cNvPr id="128" name="文本框 127"/>
+          <p:cNvSpPr txBox="1"/>
+          <p:nvPr/>
+        </p:nvSpPr>
+        <p:spPr>
+          <a:xfrm>
+            <a:off x="6392620" y="3362960"/>
+            <a:ext cx="1202055" cy="275590"/>
+          </a:xfrm>
+          <a:prstGeom prst="rect">
+            <a:avLst/>
+          </a:prstGeom>
+          <a:noFill/>
+        </p:spPr>
+        <p:txBody>
+          <a:bodyPr wrap="square" rtlCol="0">
+            <a:spAutoFit/>
+          </a:bodyPr>
+          <a:p>
+            <a:pPr algn="ctr"/>
+            <a:r>
+              <a:rPr lang="zh-CN" altLang="en-US" sz="1200" b="1"/>
+              <a:t>候选</a:t>
+            </a:r>
+            <a:r>
+              <a:rPr lang="en-US" altLang="zh-CN" sz="1200" b="1"/>
+              <a:t>   </a:t>
+            </a:r>
+            <a:r>
+              <a:rPr lang="zh-CN" altLang="en-US" sz="1200" b="1"/>
+              <a:t>排序</a:t>
+            </a:r>
+            <a:endParaRPr lang="zh-CN" altLang="en-US" sz="1200" b="1"/>
+          </a:p>
+        </p:txBody>
+      </p:sp>
+      <p:sp>
+        <p:nvSpPr>
+          <p:cNvPr id="129" name="文本框 128"/>
+          <p:cNvSpPr txBox="1"/>
+          <p:nvPr/>
+        </p:nvSpPr>
+        <p:spPr>
+          <a:xfrm>
+            <a:off x="9204400" y="3386455"/>
+            <a:ext cx="1202055" cy="275590"/>
+          </a:xfrm>
+          <a:prstGeom prst="rect">
+            <a:avLst/>
+          </a:prstGeom>
+          <a:noFill/>
+        </p:spPr>
+        <p:txBody>
+          <a:bodyPr wrap="square" rtlCol="0">
+            <a:spAutoFit/>
+          </a:bodyPr>
+          <a:p>
+            <a:pPr algn="ctr"/>
+            <a:r>
+              <a:rPr lang="zh-CN" altLang="en-US" sz="1200" b="1"/>
+              <a:t>优化</a:t>
+            </a:r>
+            <a:r>
+              <a:rPr lang="en-US" altLang="zh-CN" sz="1200" b="1"/>
+              <a:t>   </a:t>
+            </a:r>
+            <a:r>
+              <a:rPr lang="zh-CN" altLang="en-US" sz="1200" b="1"/>
+              <a:t>求解</a:t>
+            </a:r>
+            <a:endParaRPr lang="zh-CN" altLang="en-US" sz="1200" b="1"/>
+          </a:p>
+        </p:txBody>
+      </p:sp>
+      <p:sp>
+        <p:nvSpPr>
+          <p:cNvPr id="130" name="箭头: 燕尾形 1071"/>
+          <p:cNvSpPr/>
+          <p:nvPr/>
+        </p:nvSpPr>
+        <p:spPr>
+          <a:xfrm>
+            <a:off x="5393690" y="1269365"/>
+            <a:ext cx="375920" cy="443230"/>
+          </a:xfrm>
+          <a:prstGeom prst="notchedRightArrow">
+            <a:avLst>
+              <a:gd name="adj1" fmla="val 33809"/>
+              <a:gd name="adj2" fmla="val 52390"/>
+            </a:avLst>
+          </a:prstGeom>
+          <a:gradFill>
+            <a:gsLst>
+              <a:gs pos="0">
+                <a:schemeClr val="bg1"/>
+              </a:gs>
+              <a:gs pos="99000">
+                <a:srgbClr val="C00000"/>
+              </a:gs>
+            </a:gsLst>
+            <a:lin ang="0" scaled="0"/>
+          </a:gradFill>
+          <a:ln>
+            <a:noFill/>
+          </a:ln>
+        </p:spPr>
+        <p:style>
+          <a:lnRef idx="2">
+            <a:schemeClr val="accent1">
+              <a:lumMod val="75000"/>
+            </a:schemeClr>
+          </a:lnRef>
+          <a:fillRef idx="1">
+            <a:schemeClr val="accent1"/>
+          </a:fillRef>
+          <a:effectRef idx="0">
+            <a:srgbClr val="FFFFFF"/>
+          </a:effectRef>
+          <a:fontRef idx="minor">
+            <a:schemeClr val="lt1"/>
+          </a:fontRef>
+        </p:style>
+        <p:txBody>
+          <a:bodyPr rtlCol="0" anchor="ctr"/>
+          <a:lstStyle/>
+          <a:p>
+            <a:pPr algn="ctr"/>
+            <a:endParaRPr lang="zh-CN" altLang="en-US"/>
+          </a:p>
+        </p:txBody>
+      </p:sp>
+      <p:sp>
+        <p:nvSpPr>
+          <p:cNvPr id="131" name="箭头: 燕尾形 1071"/>
+          <p:cNvSpPr/>
+          <p:nvPr/>
+        </p:nvSpPr>
+        <p:spPr>
+          <a:xfrm>
+            <a:off x="8216265" y="1269365"/>
+            <a:ext cx="375920" cy="443230"/>
+          </a:xfrm>
+          <a:prstGeom prst="notchedRightArrow">
+            <a:avLst>
+              <a:gd name="adj1" fmla="val 33809"/>
+              <a:gd name="adj2" fmla="val 52390"/>
+            </a:avLst>
+          </a:prstGeom>
+          <a:gradFill>
+            <a:gsLst>
+              <a:gs pos="0">
+                <a:schemeClr val="bg1"/>
+              </a:gs>
+              <a:gs pos="99000">
+                <a:srgbClr val="C00000"/>
+              </a:gs>
+            </a:gsLst>
+            <a:lin ang="0" scaled="0"/>
+          </a:gradFill>
+          <a:ln>
+            <a:noFill/>
+          </a:ln>
+        </p:spPr>
+        <p:style>
+          <a:lnRef idx="2">
+            <a:schemeClr val="accent1">
+              <a:lumMod val="75000"/>
+            </a:schemeClr>
+          </a:lnRef>
+          <a:fillRef idx="1">
+            <a:schemeClr val="accent1"/>
+          </a:fillRef>
+          <a:effectRef idx="0">
+            <a:srgbClr val="FFFFFF"/>
+          </a:effectRef>
+          <a:fontRef idx="minor">
+            <a:schemeClr val="lt1"/>
+          </a:fontRef>
+        </p:style>
+        <p:txBody>
+          <a:bodyPr rtlCol="0" anchor="ctr"/>
+          <a:lstStyle/>
+          <a:p>
+            <a:pPr algn="ctr"/>
+            <a:endParaRPr lang="zh-CN" altLang="en-US"/>
           </a:p>
         </p:txBody>
       </p:sp>
     </p:spTree>
     <p:custDataLst>
-      <p:tags r:id="rId21"/>
+      <p:tags r:id="rId18"/>
     </p:custDataLst>
   </p:cSld>
   <p:clrMapOvr>
@@ -6410,22 +9185,35 @@
 
 <file path=ppt/tags/tag63.xml><?xml version="1.0" encoding="utf-8"?>
 <p:tagLst xmlns:p="http://schemas.openxmlformats.org/presentationml/2006/main">
-  <p:tag name="KSO_WM_SLIDE_ID" val="custom20205081_1"/>
-  <p:tag name="KSO_WM_TEMPLATE_SUBCATEGORY" val="19"/>
-  <p:tag name="KSO_WM_TEMPLATE_MASTER_TYPE" val="0"/>
-  <p:tag name="KSO_WM_TEMPLATE_COLOR_TYPE" val="1"/>
-  <p:tag name="KSO_WM_SLIDE_TYPE" val="title"/>
-  <p:tag name="KSO_WM_SLIDE_SUBTYPE" val="defaultBlank"/>
-  <p:tag name="KSO_WM_SLIDE_ITEM_CNT" val="0"/>
-  <p:tag name="KSO_WM_SLIDE_INDEX" val="1"/>
-  <p:tag name="KSO_WM_TAG_VERSION" val="1.0"/>
+  <p:tag name="TABLE_ENDDRAG_ORIGIN_RECT" val="53*52"/>
+  <p:tag name="TABLE_ENDDRAG_RECT" val="567*282*53*52"/>
+</p:tagLst>
+</file>
+
+<file path=ppt/tags/tag64.xml><?xml version="1.0" encoding="utf-8"?>
+<p:tagLst xmlns:p="http://schemas.openxmlformats.org/presentationml/2006/main">
+  <p:tag name="KSO_DOCER_RESOURCE_TRACE_INFO" val="{&quot;id&quot;:&quot;50062581&quot;,&quot;origin&quot;:0,&quot;type&quot;:&quot;icons&quot;,&quot;user&quot;:&quot;402383365&quot;}"/>
+</p:tagLst>
+</file>
+
+<file path=ppt/tags/tag65.xml><?xml version="1.0" encoding="utf-8"?>
+<p:tagLst xmlns:p="http://schemas.openxmlformats.org/presentationml/2006/main">
+  <p:tag name="KSO_DOCER_RESOURCE_TRACE_INFO" val="{&quot;id&quot;:&quot;50062581&quot;,&quot;origin&quot;:0,&quot;type&quot;:&quot;icons&quot;,&quot;user&quot;:&quot;402383365&quot;}"/>
+</p:tagLst>
+</file>
+
+<file path=ppt/tags/tag66.xml><?xml version="1.0" encoding="utf-8"?>
+<p:tagLst xmlns:p="http://schemas.openxmlformats.org/presentationml/2006/main">
   <p:tag name="KSO_WM_BEAUTIFY_FLAG" val="#wm#"/>
   <p:tag name="KSO_WM_TEMPLATE_CATEGORY" val="custom"/>
   <p:tag name="KSO_WM_TEMPLATE_INDEX" val="20205081"/>
-  <p:tag name="KSO_WM_SLIDE_LAYOUT" val="a_b"/>
-  <p:tag name="KSO_WM_SLIDE_LAYOUT_CNT" val="1_1"/>
-  <p:tag name="KSO_WM_UNIT_SHOW_EDIT_AREA_INDICATION" val="1"/>
-  <p:tag name="KSO_WM_TEMPLATE_THUMBS_INDEX" val="1、4、7、12、13、14、15、16、17、18、20、24、25、28、33、36、40、43、44"/>
+  <p:tag name="resource_record_key" val="{&quot;10&quot;:[50062581],&quot;65&quot;:[20205081]}"/>
+</p:tagLst>
+</file>
+
+<file path=ppt/tags/tag67.xml><?xml version="1.0" encoding="utf-8"?>
+<p:tagLst xmlns:p="http://schemas.openxmlformats.org/presentationml/2006/main">
+  <p:tag name="resource_record_key" val="{&quot;10&quot;:[50062581],&quot;65&quot;:[20205081]}"/>
 </p:tagLst>
 </file>
 

--- a/军民融合/ppt/2A.pptx
+++ b/军民融合/ppt/2A.pptx
@@ -115,7 +115,7 @@
             <a:srgbClr val="A4A3A4"/>
           </p15:clr>
         </p15:guide>
-        <p15:guide id="2" pos="3897" userDrawn="1">
+        <p15:guide id="2" pos="3896" userDrawn="1">
           <p15:clr>
             <a:srgbClr val="A4A3A4"/>
           </p15:clr>
@@ -3173,7 +3173,7 @@
         </p:nvSpPr>
         <p:spPr>
           <a:xfrm>
-            <a:off x="9495790" y="4064635"/>
+            <a:off x="9509760" y="4064635"/>
             <a:ext cx="638175" cy="706755"/>
           </a:xfrm>
           <a:prstGeom prst="rect">
@@ -3209,7 +3209,7 @@
             <a:pPr algn="ctr"/>
             <a:r>
               <a:rPr lang="zh-CN" altLang="en-US" sz="1000" b="1"/>
-              <a:t>策略</a:t>
+              <a:t>选择</a:t>
             </a:r>
             <a:endParaRPr lang="zh-CN" altLang="en-US" sz="1000" b="1"/>
           </a:p>
@@ -3875,7 +3875,7 @@
             </a:r>
             <a:r>
               <a:rPr lang="zh-CN" altLang="en-US"/>
-              <a:t>频谱事件识别</a:t>
+              <a:t>可疑事件识别</a:t>
             </a:r>
             <a:endParaRPr lang="zh-CN" altLang="en-US"/>
           </a:p>
@@ -3963,7 +3963,11 @@
             <a:pPr algn="ctr"/>
             <a:r>
               <a:rPr lang="zh-CN" altLang="en-US"/>
-              <a:t>基于子模覆盖增益的频谱事件入库判别</a:t>
+              <a:t>基于子模覆盖增益的事件</a:t>
+            </a:r>
+            <a:r>
+              <a:rPr lang="zh-CN" altLang="en-US"/>
+              <a:t>向量入库判别</a:t>
             </a:r>
             <a:endParaRPr lang="zh-CN" altLang="en-US"/>
           </a:p>
@@ -4424,7 +4428,7 @@
           <a:p>
             <a:r>
               <a:rPr lang="zh-CN" altLang="en-US" sz="1200" b="1"/>
-              <a:t>候选事件</a:t>
+              <a:t>可疑事件</a:t>
             </a:r>
             <a:endParaRPr lang="zh-CN" altLang="en-US" sz="1200" b="1"/>
           </a:p>
@@ -4466,7 +4470,7 @@
           <a:p>
             <a:r>
               <a:rPr lang="zh-CN" altLang="en-US" sz="1200" b="1"/>
-              <a:t>可疑事件</a:t>
+              <a:t>候选事件</a:t>
             </a:r>
             <a:endParaRPr lang="zh-CN" altLang="en-US" sz="1200" b="1"/>
           </a:p>
@@ -5446,7 +5450,31 @@
                   <a:schemeClr val="tx1"/>
                 </a:solidFill>
               </a:rPr>
-              <a:t>面向高价值频谱事件的精判触发和相似检索支撑</a:t>
+              <a:t>面向高价值频谱事件的</a:t>
+            </a:r>
+            <a:r>
+              <a:rPr lang="en-US" altLang="zh-CN" b="1">
+                <a:solidFill>
+                  <a:schemeClr val="tx1"/>
+                </a:solidFill>
+              </a:rPr>
+              <a:t>AI</a:t>
+            </a:r>
+            <a:r>
+              <a:rPr lang="zh-CN" altLang="en-US" b="1">
+                <a:solidFill>
+                  <a:schemeClr val="tx1"/>
+                </a:solidFill>
+              </a:rPr>
+              <a:t>精判和相似</a:t>
+            </a:r>
+            <a:r>
+              <a:rPr lang="zh-CN" altLang="en-US" b="1">
+                <a:solidFill>
+                  <a:schemeClr val="tx1"/>
+                </a:solidFill>
+              </a:rPr>
+              <a:t>性检索</a:t>
             </a:r>
             <a:endParaRPr lang="zh-CN" altLang="en-US" b="1">
               <a:solidFill>
@@ -5534,15 +5562,7 @@
                   <a:srgbClr val="C00000"/>
                 </a:solidFill>
               </a:rPr>
-              <a:t>轻量视频编码</a:t>
-            </a:r>
-            <a:r>
-              <a:rPr lang="zh-CN" altLang="en-US" sz="1600" b="1">
-                <a:solidFill>
-                  <a:srgbClr val="C00000"/>
-                </a:solidFill>
-              </a:rPr>
-              <a:t>器</a:t>
+              <a:t>事件级轻量表征</a:t>
             </a:r>
             <a:endParaRPr lang="zh-CN" altLang="en-US" sz="1600" b="1">
               <a:solidFill>
@@ -6197,7 +6217,11 @@
           <a:p>
             <a:r>
               <a:rPr lang="zh-CN" altLang="en-US" sz="1200" b="1"/>
-              <a:t>编码器</a:t>
+              <a:t>表征</a:t>
+            </a:r>
+            <a:r>
+              <a:rPr lang="zh-CN" altLang="en-US" sz="1200" b="1"/>
+              <a:t>器</a:t>
             </a:r>
             <a:endParaRPr lang="zh-CN" altLang="en-US" sz="1200" b="1"/>
           </a:p>
@@ -7225,11 +7249,7 @@
           <a:p>
             <a:r>
               <a:rPr lang="zh-CN" altLang="en-US" sz="1200" b="1"/>
-              <a:t>向量</a:t>
-            </a:r>
-            <a:r>
-              <a:rPr lang="zh-CN" altLang="en-US" sz="1200" b="1"/>
-              <a:t>数据库</a:t>
+              <a:t>向量索引库</a:t>
             </a:r>
             <a:endParaRPr lang="zh-CN" altLang="en-US" sz="1200" b="1"/>
           </a:p>
@@ -7343,39 +7363,6 @@
       </p:pic>
       <p:sp>
         <p:nvSpPr>
-          <p:cNvPr id="105" name="文本框 104"/>
-          <p:cNvSpPr txBox="1"/>
-          <p:nvPr/>
-        </p:nvSpPr>
-        <p:spPr>
-          <a:xfrm>
-            <a:off x="9916795" y="4683125"/>
-            <a:ext cx="1040765" cy="275590"/>
-          </a:xfrm>
-          <a:prstGeom prst="rect">
-            <a:avLst/>
-          </a:prstGeom>
-          <a:noFill/>
-        </p:spPr>
-        <p:txBody>
-          <a:bodyPr wrap="square" rtlCol="0">
-            <a:spAutoFit/>
-          </a:bodyPr>
-          <a:p>
-            <a:r>
-              <a:rPr lang="zh-CN" altLang="en-US" sz="1200" b="1"/>
-              <a:t>向量</a:t>
-            </a:r>
-            <a:r>
-              <a:rPr lang="zh-CN" altLang="en-US" sz="1200" b="1"/>
-              <a:t>数据库</a:t>
-            </a:r>
-            <a:endParaRPr lang="zh-CN" altLang="en-US" sz="1200" b="1"/>
-          </a:p>
-        </p:txBody>
-      </p:sp>
-      <p:sp>
-        <p:nvSpPr>
           <p:cNvPr id="106" name="文本框 105"/>
           <p:cNvSpPr txBox="1"/>
           <p:nvPr/>
@@ -8038,40 +8025,6 @@
           </a:p>
         </p:txBody>
       </p:sp>
-      <p:pic>
-        <p:nvPicPr>
-          <p:cNvPr id="123" name="图片 122" descr="数据库"/>
-          <p:cNvPicPr>
-            <a:picLocks noChangeAspect="1"/>
-          </p:cNvPicPr>
-          <p:nvPr>
-            <p:custDataLst>
-              <p:tags r:id="rId17"/>
-            </p:custDataLst>
-          </p:nvPr>
-        </p:nvPicPr>
-        <p:blipFill>
-          <a:blip r:embed="rId12">
-            <a:extLst>
-              <a:ext uri="{96DAC541-7B7A-43D3-8B79-37D633B846F1}">
-                <asvg:svgBlip xmlns:asvg="http://schemas.microsoft.com/office/drawing/2016/SVG/main" r:embed="rId13"/>
-              </a:ext>
-            </a:extLst>
-          </a:blip>
-          <a:stretch>
-            <a:fillRect/>
-          </a:stretch>
-        </p:blipFill>
-        <p:spPr>
-          <a:xfrm>
-            <a:off x="10001250" y="4070985"/>
-            <a:ext cx="775970" cy="630555"/>
-          </a:xfrm>
-          <a:prstGeom prst="rect">
-            <a:avLst/>
-          </a:prstGeom>
-        </p:spPr>
-      </p:pic>
       <p:sp>
         <p:nvSpPr>
           <p:cNvPr id="125" name="下箭头 124"/>
@@ -8397,6 +8350,64 @@
           <a:p>
             <a:pPr algn="ctr"/>
             <a:endParaRPr lang="zh-CN" altLang="en-US"/>
+          </a:p>
+        </p:txBody>
+      </p:sp>
+      <p:pic>
+        <p:nvPicPr>
+          <p:cNvPr id="44" name="图片 43"/>
+          <p:cNvPicPr>
+            <a:picLocks noChangeAspect="1"/>
+          </p:cNvPicPr>
+          <p:nvPr/>
+        </p:nvPicPr>
+        <p:blipFill>
+          <a:blip r:embed="rId17"/>
+          <a:stretch>
+            <a:fillRect/>
+          </a:stretch>
+        </p:blipFill>
+        <p:spPr>
+          <a:xfrm>
+            <a:off x="10113010" y="4070985"/>
+            <a:ext cx="576000" cy="576000"/>
+          </a:xfrm>
+          <a:prstGeom prst="rect">
+            <a:avLst/>
+          </a:prstGeom>
+        </p:spPr>
+      </p:pic>
+      <p:sp>
+        <p:nvSpPr>
+          <p:cNvPr id="46" name="文本框 45"/>
+          <p:cNvSpPr txBox="1"/>
+          <p:nvPr/>
+        </p:nvSpPr>
+        <p:spPr>
+          <a:xfrm>
+            <a:off x="9838055" y="4702810"/>
+            <a:ext cx="1170305" cy="275590"/>
+          </a:xfrm>
+          <a:prstGeom prst="rect">
+            <a:avLst/>
+          </a:prstGeom>
+          <a:noFill/>
+        </p:spPr>
+        <p:txBody>
+          <a:bodyPr wrap="square" rtlCol="0">
+            <a:spAutoFit/>
+          </a:bodyPr>
+          <a:p>
+            <a:pPr algn="ctr"/>
+            <a:r>
+              <a:rPr lang="zh-CN" altLang="en-US" sz="1200" b="1"/>
+              <a:t>索引</a:t>
+            </a:r>
+            <a:r>
+              <a:rPr lang="zh-CN" altLang="en-US" sz="1200" b="1"/>
+              <a:t>子集</a:t>
+            </a:r>
+            <a:endParaRPr lang="zh-CN" altLang="en-US" sz="1200" b="1"/>
           </a:p>
         </p:txBody>
       </p:sp>
@@ -9198,12 +9209,6 @@
 
 <file path=ppt/tags/tag65.xml><?xml version="1.0" encoding="utf-8"?>
 <p:tagLst xmlns:p="http://schemas.openxmlformats.org/presentationml/2006/main">
-  <p:tag name="KSO_DOCER_RESOURCE_TRACE_INFO" val="{&quot;id&quot;:&quot;50062581&quot;,&quot;origin&quot;:0,&quot;type&quot;:&quot;icons&quot;,&quot;user&quot;:&quot;402383365&quot;}"/>
-</p:tagLst>
-</file>
-
-<file path=ppt/tags/tag66.xml><?xml version="1.0" encoding="utf-8"?>
-<p:tagLst xmlns:p="http://schemas.openxmlformats.org/presentationml/2006/main">
   <p:tag name="KSO_WM_BEAUTIFY_FLAG" val="#wm#"/>
   <p:tag name="KSO_WM_TEMPLATE_CATEGORY" val="custom"/>
   <p:tag name="KSO_WM_TEMPLATE_INDEX" val="20205081"/>
@@ -9211,7 +9216,7 @@
 </p:tagLst>
 </file>
 
-<file path=ppt/tags/tag67.xml><?xml version="1.0" encoding="utf-8"?>
+<file path=ppt/tags/tag66.xml><?xml version="1.0" encoding="utf-8"?>
 <p:tagLst xmlns:p="http://schemas.openxmlformats.org/presentationml/2006/main">
   <p:tag name="resource_record_key" val="{&quot;10&quot;:[50062581],&quot;65&quot;:[20205081]}"/>
 </p:tagLst>

--- a/军民融合/ppt/2A.pptx
+++ b/军民融合/ppt/2A.pptx
@@ -3871,11 +3871,7 @@
             </a:r>
             <a:r>
               <a:rPr lang="zh-CN" altLang="en-US"/>
-              <a:t>风险估计的高召回</a:t>
-            </a:r>
-            <a:r>
-              <a:rPr lang="zh-CN" altLang="en-US"/>
-              <a:t>可疑事件识别</a:t>
+              <a:t>风险估计的可疑事件识别</a:t>
             </a:r>
             <a:endParaRPr lang="zh-CN" altLang="en-US"/>
           </a:p>
@@ -3967,7 +3963,7 @@
             </a:r>
             <a:r>
               <a:rPr lang="zh-CN" altLang="en-US"/>
-              <a:t>向量入库判别</a:t>
+              <a:t>入库判别</a:t>
             </a:r>
             <a:endParaRPr lang="zh-CN" altLang="en-US"/>
           </a:p>
@@ -5450,15 +5446,7 @@
                   <a:schemeClr val="tx1"/>
                 </a:solidFill>
               </a:rPr>
-              <a:t>面向高价值频谱事件的</a:t>
-            </a:r>
-            <a:r>
-              <a:rPr lang="en-US" altLang="zh-CN" b="1">
-                <a:solidFill>
-                  <a:schemeClr val="tx1"/>
-                </a:solidFill>
-              </a:rPr>
-              <a:t>AI</a:t>
+              <a:t>面向高价值频谱事件的智能</a:t>
             </a:r>
             <a:r>
               <a:rPr lang="zh-CN" altLang="en-US" b="1">
@@ -5466,7 +5454,7 @@
                   <a:schemeClr val="tx1"/>
                 </a:solidFill>
               </a:rPr>
-              <a:t>精判和相似</a:t>
+              <a:t>识别和相似</a:t>
             </a:r>
             <a:r>
               <a:rPr lang="zh-CN" altLang="en-US" b="1">

--- a/军民融合/ppt/2A.pptx
+++ b/军民融合/ppt/2A.pptx
@@ -3863,15 +3863,15 @@
             <a:pPr algn="ctr"/>
             <a:r>
               <a:rPr lang="zh-CN" altLang="en-US"/>
-              <a:t>基于</a:t>
-            </a:r>
-            <a:r>
-              <a:rPr lang="en-US" altLang="zh-CN"/>
-              <a:t> PU </a:t>
-            </a:r>
+              <a:t>基于风险估计的</a:t>
+            </a:r>
+            <a:endParaRPr lang="zh-CN" altLang="en-US"/>
+          </a:p>
+          <a:p>
+            <a:pPr algn="ctr"/>
             <a:r>
               <a:rPr lang="zh-CN" altLang="en-US"/>
-              <a:t>风险估计的可疑事件识别</a:t>
+              <a:t>可疑事件识别</a:t>
             </a:r>
             <a:endParaRPr lang="zh-CN" altLang="en-US"/>
           </a:p>

--- a/军民融合/ppt/2A.pptx
+++ b/军民融合/ppt/2A.pptx
@@ -5,7 +5,7 @@
     <p:sldMasterId id="2147483648" r:id="rId1"/>
   </p:sldMasterIdLst>
   <p:sldIdLst>
-    <p:sldId id="257" r:id="rId3"/>
+    <p:sldId id="258" r:id="rId3"/>
   </p:sldIdLst>
   <p:sldSz cx="12192000" cy="6858000"/>
   <p:notesSz cx="6858000" cy="9144000"/>
@@ -110,12 +110,12 @@
   <p:extLst>
     <p:ext uri="{EFAFB233-063F-42B5-8137-9DF3F51BA10A}">
       <p15:sldGuideLst xmlns:p15="http://schemas.microsoft.com/office/powerpoint/2012/main">
-        <p15:guide id="1" orient="horz" pos="2220" userDrawn="1">
+        <p15:guide id="1" orient="horz" pos="2243" userDrawn="1">
           <p15:clr>
             <a:srgbClr val="A4A3A4"/>
           </p15:clr>
         </p15:guide>
-        <p15:guide id="2" pos="3896" userDrawn="1">
+        <p15:guide id="2" pos="3838" userDrawn="1">
           <p15:clr>
             <a:srgbClr val="A4A3A4"/>
           </p15:clr>
@@ -3077,14 +3077,14 @@
       <p:grpSpPr/>
       <p:sp>
         <p:nvSpPr>
-          <p:cNvPr id="32" name="矩形 31"/>
+          <p:cNvPr id="16" name="矩形 15"/>
           <p:cNvSpPr/>
           <p:nvPr/>
         </p:nvSpPr>
         <p:spPr>
           <a:xfrm>
-            <a:off x="8581465" y="1902460"/>
-            <a:ext cx="2447925" cy="3217545"/>
+            <a:off x="2706370" y="1069340"/>
+            <a:ext cx="7546340" cy="4860290"/>
           </a:xfrm>
           <a:prstGeom prst="rect">
             <a:avLst/>
@@ -3119,14 +3119,14 @@
       </p:sp>
       <p:sp>
         <p:nvSpPr>
-          <p:cNvPr id="40" name="圆角矩形 39"/>
+          <p:cNvPr id="39" name="圆角矩形 38"/>
           <p:cNvSpPr/>
           <p:nvPr/>
         </p:nvSpPr>
         <p:spPr>
           <a:xfrm>
-            <a:off x="8767203" y="3709670"/>
-            <a:ext cx="2076450" cy="1260000"/>
+            <a:off x="5945505" y="1351280"/>
+            <a:ext cx="3943350" cy="2051685"/>
           </a:xfrm>
           <a:prstGeom prst="roundRect">
             <a:avLst/>
@@ -3136,7 +3136,7 @@
           </a:solidFill>
           <a:ln w="34925" cmpd="sng">
             <a:solidFill>
-              <a:srgbClr val="C00000"/>
+              <a:srgbClr val="2E54A1"/>
             </a:solidFill>
             <a:prstDash val="solid"/>
           </a:ln>
@@ -3167,78 +3167,26 @@
       </p:sp>
       <p:sp>
         <p:nvSpPr>
-          <p:cNvPr id="124" name="文本框 123"/>
-          <p:cNvSpPr txBox="1"/>
+          <p:cNvPr id="133" name="圆角矩形 132"/>
+          <p:cNvSpPr/>
           <p:nvPr/>
         </p:nvSpPr>
         <p:spPr>
           <a:xfrm>
-            <a:off x="9509760" y="4064635"/>
-            <a:ext cx="638175" cy="706755"/>
-          </a:xfrm>
-          <a:prstGeom prst="rect">
+            <a:off x="5945505" y="3687445"/>
+            <a:ext cx="3943350" cy="2051685"/>
+          </a:xfrm>
+          <a:prstGeom prst="roundRect">
             <a:avLst/>
           </a:prstGeom>
-          <a:noFill/>
-        </p:spPr>
-        <p:txBody>
-          <a:bodyPr wrap="square" rtlCol="0">
-            <a:spAutoFit/>
-          </a:bodyPr>
-          <a:p>
-            <a:pPr algn="ctr"/>
-            <a:r>
-              <a:rPr lang="zh-CN" altLang="en-US" sz="1000" b="1"/>
-              <a:t>流式</a:t>
-            </a:r>
-            <a:endParaRPr lang="zh-CN" altLang="en-US" sz="1000" b="1"/>
-          </a:p>
-          <a:p>
-            <a:pPr algn="ctr"/>
-            <a:endParaRPr lang="zh-CN" altLang="en-US" sz="1000" b="1"/>
-          </a:p>
-          <a:p>
-            <a:pPr algn="ctr"/>
-            <a:r>
-              <a:rPr lang="zh-CN" altLang="en-US" sz="1000" b="1"/>
-              <a:t>贪心</a:t>
-            </a:r>
-            <a:endParaRPr lang="zh-CN" altLang="en-US" sz="1000" b="1"/>
-          </a:p>
-          <a:p>
-            <a:pPr algn="ctr"/>
-            <a:r>
-              <a:rPr lang="zh-CN" altLang="en-US" sz="1000" b="1"/>
-              <a:t>选择</a:t>
-            </a:r>
-            <a:endParaRPr lang="zh-CN" altLang="en-US" sz="1000" b="1"/>
-          </a:p>
-        </p:txBody>
-      </p:sp>
-      <p:sp>
-        <p:nvSpPr>
-          <p:cNvPr id="81" name="圆角矩形 80"/>
-          <p:cNvSpPr/>
-          <p:nvPr/>
-        </p:nvSpPr>
-        <p:spPr>
-          <a:xfrm>
-            <a:off x="1158875" y="645160"/>
-            <a:ext cx="10075545" cy="5528945"/>
-          </a:xfrm>
-          <a:prstGeom prst="roundRect">
-            <a:avLst>
-              <a:gd name="adj" fmla="val 3556"/>
-            </a:avLst>
-          </a:prstGeom>
-          <a:noFill/>
-          <a:ln w="25400" cmpd="sng">
+          <a:solidFill>
+            <a:schemeClr val="bg1"/>
+          </a:solidFill>
+          <a:ln w="34925" cmpd="sng">
             <a:solidFill>
-              <a:schemeClr val="accent1">
-                <a:shade val="50000"/>
-              </a:schemeClr>
+              <a:srgbClr val="2E54A1"/>
             </a:solidFill>
-            <a:prstDash val="dash"/>
+            <a:prstDash val="solid"/>
           </a:ln>
         </p:spPr>
         <p:style>
@@ -3259,6 +3207,104 @@
         </p:style>
         <p:txBody>
           <a:bodyPr rtlCol="0" anchor="ctr"/>
+          <a:p>
+            <a:pPr algn="ctr"/>
+            <a:endParaRPr lang="zh-CN" altLang="en-US"/>
+          </a:p>
+        </p:txBody>
+      </p:sp>
+      <p:sp>
+        <p:nvSpPr>
+          <p:cNvPr id="105" name="圆角矩形 104"/>
+          <p:cNvSpPr/>
+          <p:nvPr/>
+        </p:nvSpPr>
+        <p:spPr>
+          <a:xfrm>
+            <a:off x="3061335" y="1351280"/>
+            <a:ext cx="2505075" cy="4404360"/>
+          </a:xfrm>
+          <a:prstGeom prst="roundRect">
+            <a:avLst/>
+          </a:prstGeom>
+          <a:solidFill>
+            <a:schemeClr val="bg1"/>
+          </a:solidFill>
+          <a:ln w="34925" cmpd="sng">
+            <a:solidFill>
+              <a:srgbClr val="C00000"/>
+            </a:solidFill>
+            <a:prstDash val="solid"/>
+          </a:ln>
+        </p:spPr>
+        <p:style>
+          <a:lnRef idx="2">
+            <a:schemeClr val="accent1">
+              <a:lumMod val="75000"/>
+            </a:schemeClr>
+          </a:lnRef>
+          <a:fillRef idx="1">
+            <a:schemeClr val="accent1"/>
+          </a:fillRef>
+          <a:effectRef idx="0">
+            <a:srgbClr val="FFFFFF"/>
+          </a:effectRef>
+          <a:fontRef idx="minor">
+            <a:schemeClr val="lt1"/>
+          </a:fontRef>
+        </p:style>
+        <p:txBody>
+          <a:bodyPr rtlCol="0" anchor="ctr"/>
+          <a:p>
+            <a:pPr algn="ctr"/>
+            <a:endParaRPr lang="zh-CN" altLang="en-US"/>
+          </a:p>
+        </p:txBody>
+      </p:sp>
+      <p:sp>
+        <p:nvSpPr>
+          <p:cNvPr id="81" name="圆角矩形 80"/>
+          <p:cNvSpPr/>
+          <p:nvPr/>
+        </p:nvSpPr>
+        <p:spPr>
+          <a:xfrm>
+            <a:off x="1158875" y="645160"/>
+            <a:ext cx="10278110" cy="5528945"/>
+          </a:xfrm>
+          <a:prstGeom prst="roundRect">
+            <a:avLst>
+              <a:gd name="adj" fmla="val 3556"/>
+            </a:avLst>
+          </a:prstGeom>
+          <a:noFill/>
+          <a:ln w="25400" cmpd="sng">
+            <a:solidFill>
+              <a:schemeClr val="accent1">
+                <a:shade val="50000"/>
+              </a:schemeClr>
+            </a:solidFill>
+            <a:prstDash val="dash"/>
+          </a:ln>
+        </p:spPr>
+        <p:style>
+          <a:lnRef idx="2">
+            <a:schemeClr val="accent1">
+              <a:lumMod val="75000"/>
+            </a:schemeClr>
+          </a:lnRef>
+          <a:fillRef idx="1">
+            <a:schemeClr val="accent1"/>
+          </a:fillRef>
+          <a:effectRef idx="0">
+            <a:srgbClr val="FFFFFF"/>
+          </a:effectRef>
+          <a:fontRef idx="minor">
+            <a:schemeClr val="lt1"/>
+          </a:fontRef>
+        </p:style>
+        <p:txBody>
+          <a:bodyPr rtlCol="0" anchor="ctr"/>
           <a:lstStyle/>
           <a:p>
             <a:pPr algn="ctr"/>
@@ -3352,7 +3398,7 @@
         <p:spPr>
           <a:xfrm>
             <a:off x="1282700" y="1069340"/>
-            <a:ext cx="1287145" cy="4862195"/>
+            <a:ext cx="1260000" cy="4860000"/>
           </a:xfrm>
           <a:prstGeom prst="rect">
             <a:avLst/>
@@ -3403,7 +3449,7 @@
         <p:grpSpPr>
           <a:xfrm>
             <a:off x="1230630" y="1712595"/>
-            <a:ext cx="1391920" cy="3743325"/>
+            <a:ext cx="1404000" cy="3743325"/>
             <a:chOff x="1938" y="2937"/>
             <a:chExt cx="2192" cy="4802"/>
           </a:xfrm>
@@ -3417,7 +3463,7 @@
           <p:spPr>
             <a:xfrm>
               <a:off x="2193" y="2937"/>
-              <a:ext cx="1682" cy="4802"/>
+              <a:ext cx="1686" cy="4802"/>
             </a:xfrm>
             <a:prstGeom prst="roundRect">
               <a:avLst/>
@@ -3681,304 +3727,14 @@
       </p:grpSp>
       <p:sp>
         <p:nvSpPr>
-          <p:cNvPr id="15" name="矩形 14"/>
-          <p:cNvSpPr/>
-          <p:nvPr/>
-        </p:nvSpPr>
-        <p:spPr>
-          <a:xfrm>
-            <a:off x="2957830" y="1069975"/>
-            <a:ext cx="2448000" cy="833120"/>
-          </a:xfrm>
-          <a:prstGeom prst="rect">
-            <a:avLst/>
-          </a:prstGeom>
-          <a:solidFill>
-            <a:srgbClr val="C00000"/>
-          </a:solidFill>
-        </p:spPr>
-        <p:style>
-          <a:lnRef idx="2">
-            <a:schemeClr val="accent1">
-              <a:lumMod val="75000"/>
-            </a:schemeClr>
-          </a:lnRef>
-          <a:fillRef idx="1">
-            <a:schemeClr val="accent1"/>
-          </a:fillRef>
-          <a:effectRef idx="0">
-            <a:srgbClr val="FFFFFF"/>
-          </a:effectRef>
-          <a:fontRef idx="minor">
-            <a:schemeClr val="lt1"/>
-          </a:fontRef>
-        </p:style>
-        <p:txBody>
-          <a:bodyPr rtlCol="0" anchor="ctr"/>
-          <a:p>
-            <a:pPr algn="ctr"/>
-            <a:r>
-              <a:rPr lang="zh-CN" altLang="en-US"/>
-              <a:t>基于流式变点检测的事件证据窗口构建</a:t>
-            </a:r>
-            <a:endParaRPr lang="zh-CN" altLang="en-US"/>
-          </a:p>
-        </p:txBody>
-      </p:sp>
-      <p:sp>
-        <p:nvSpPr>
-          <p:cNvPr id="16" name="矩形 15"/>
-          <p:cNvSpPr/>
-          <p:nvPr/>
-        </p:nvSpPr>
-        <p:spPr>
-          <a:xfrm>
-            <a:off x="2957830" y="1903095"/>
-            <a:ext cx="2448000" cy="3217545"/>
-          </a:xfrm>
-          <a:prstGeom prst="rect">
-            <a:avLst/>
-          </a:prstGeom>
-          <a:solidFill>
-            <a:srgbClr val="FADBDF"/>
-          </a:solidFill>
-        </p:spPr>
-        <p:style>
-          <a:lnRef idx="2">
-            <a:schemeClr val="accent1">
-              <a:lumMod val="75000"/>
-            </a:schemeClr>
-          </a:lnRef>
-          <a:fillRef idx="1">
-            <a:schemeClr val="accent1"/>
-          </a:fillRef>
-          <a:effectRef idx="0">
-            <a:srgbClr val="FFFFFF"/>
-          </a:effectRef>
-          <a:fontRef idx="minor">
-            <a:schemeClr val="lt1"/>
-          </a:fontRef>
-        </p:style>
-        <p:txBody>
-          <a:bodyPr rtlCol="0" anchor="ctr"/>
-          <a:p>
-            <a:pPr algn="ctr"/>
-            <a:endParaRPr lang="zh-CN" altLang="en-US"/>
-          </a:p>
-        </p:txBody>
-      </p:sp>
-      <p:sp>
-        <p:nvSpPr>
-          <p:cNvPr id="18" name="矩形 17"/>
-          <p:cNvSpPr/>
-          <p:nvPr/>
-        </p:nvSpPr>
-        <p:spPr>
-          <a:xfrm>
-            <a:off x="2957830" y="5236845"/>
-            <a:ext cx="8067675" cy="694690"/>
-          </a:xfrm>
-          <a:prstGeom prst="rect">
-            <a:avLst/>
-          </a:prstGeom>
-          <a:solidFill>
-            <a:srgbClr val="DAE3F5"/>
-          </a:solidFill>
-          <a:extLst>
-            <a:ext uri="{909E8E84-426E-40DD-AFC4-6F175D3DCCD1}">
-              <a14:hiddenFill xmlns:a14="http://schemas.microsoft.com/office/drawing/2010/main">
-                <a:solidFill>
-                  <a:schemeClr val="accent1"/>
-                </a:solidFill>
-              </a14:hiddenFill>
-            </a:ext>
-          </a:extLst>
-        </p:spPr>
-        <p:style>
-          <a:lnRef idx="2">
-            <a:schemeClr val="accent1">
-              <a:lumMod val="75000"/>
-            </a:schemeClr>
-          </a:lnRef>
-          <a:fillRef idx="1">
-            <a:schemeClr val="accent1"/>
-          </a:fillRef>
-          <a:effectRef idx="0">
-            <a:srgbClr val="FFFFFF"/>
-          </a:effectRef>
-          <a:fontRef idx="minor">
-            <a:schemeClr val="lt1"/>
-          </a:fontRef>
-        </p:style>
-        <p:txBody>
-          <a:bodyPr rtlCol="0" anchor="ctr"/>
-          <a:p>
-            <a:pPr algn="ctr"/>
-            <a:endParaRPr lang="zh-CN" altLang="en-US"/>
-          </a:p>
-        </p:txBody>
-      </p:sp>
-      <p:sp>
-        <p:nvSpPr>
-          <p:cNvPr id="29" name="矩形 28"/>
-          <p:cNvSpPr/>
-          <p:nvPr/>
-        </p:nvSpPr>
-        <p:spPr>
-          <a:xfrm>
-            <a:off x="5768415" y="1069340"/>
-            <a:ext cx="2447925" cy="833120"/>
-          </a:xfrm>
-          <a:prstGeom prst="rect">
-            <a:avLst/>
-          </a:prstGeom>
-          <a:solidFill>
-            <a:srgbClr val="2E54A1"/>
-          </a:solidFill>
-          <a:ln>
-            <a:solidFill>
-              <a:srgbClr val="2E54A1"/>
-            </a:solidFill>
-          </a:ln>
-        </p:spPr>
-        <p:style>
-          <a:lnRef idx="2">
-            <a:schemeClr val="accent1">
-              <a:lumMod val="75000"/>
-            </a:schemeClr>
-          </a:lnRef>
-          <a:fillRef idx="1">
-            <a:schemeClr val="accent1"/>
-          </a:fillRef>
-          <a:effectRef idx="0">
-            <a:srgbClr val="FFFFFF"/>
-          </a:effectRef>
-          <a:fontRef idx="minor">
-            <a:schemeClr val="lt1"/>
-          </a:fontRef>
-        </p:style>
-        <p:txBody>
-          <a:bodyPr rtlCol="0" anchor="ctr"/>
-          <a:p>
-            <a:pPr algn="ctr"/>
-            <a:r>
-              <a:rPr lang="zh-CN" altLang="en-US"/>
-              <a:t>基于风险估计的</a:t>
-            </a:r>
-            <a:endParaRPr lang="zh-CN" altLang="en-US"/>
-          </a:p>
-          <a:p>
-            <a:pPr algn="ctr"/>
-            <a:r>
-              <a:rPr lang="zh-CN" altLang="en-US"/>
-              <a:t>可疑事件识别</a:t>
-            </a:r>
-            <a:endParaRPr lang="zh-CN" altLang="en-US"/>
-          </a:p>
-        </p:txBody>
-      </p:sp>
-      <p:sp>
-        <p:nvSpPr>
-          <p:cNvPr id="30" name="矩形 29"/>
-          <p:cNvSpPr/>
-          <p:nvPr/>
-        </p:nvSpPr>
-        <p:spPr>
-          <a:xfrm>
-            <a:off x="5769685" y="1902460"/>
-            <a:ext cx="2447925" cy="3217545"/>
-          </a:xfrm>
-          <a:prstGeom prst="rect">
-            <a:avLst/>
-          </a:prstGeom>
-          <a:solidFill>
-            <a:srgbClr val="DAE3F5"/>
-          </a:solidFill>
-        </p:spPr>
-        <p:style>
-          <a:lnRef idx="2">
-            <a:schemeClr val="accent1">
-              <a:lumMod val="75000"/>
-            </a:schemeClr>
-          </a:lnRef>
-          <a:fillRef idx="1">
-            <a:schemeClr val="accent1"/>
-          </a:fillRef>
-          <a:effectRef idx="0">
-            <a:srgbClr val="FFFFFF"/>
-          </a:effectRef>
-          <a:fontRef idx="minor">
-            <a:schemeClr val="lt1"/>
-          </a:fontRef>
-        </p:style>
-        <p:txBody>
-          <a:bodyPr rtlCol="0" anchor="ctr"/>
-          <a:p>
-            <a:pPr algn="ctr"/>
-            <a:endParaRPr lang="zh-CN" altLang="en-US"/>
-          </a:p>
-        </p:txBody>
-      </p:sp>
-      <p:sp>
-        <p:nvSpPr>
-          <p:cNvPr id="31" name="矩形 30"/>
-          <p:cNvSpPr/>
-          <p:nvPr/>
-        </p:nvSpPr>
-        <p:spPr>
-          <a:xfrm>
-            <a:off x="8578925" y="1069340"/>
-            <a:ext cx="2447925" cy="833120"/>
-          </a:xfrm>
-          <a:prstGeom prst="rect">
-            <a:avLst/>
-          </a:prstGeom>
-          <a:solidFill>
-            <a:srgbClr val="C00000"/>
-          </a:solidFill>
-        </p:spPr>
-        <p:style>
-          <a:lnRef idx="2">
-            <a:schemeClr val="accent1">
-              <a:lumMod val="75000"/>
-            </a:schemeClr>
-          </a:lnRef>
-          <a:fillRef idx="1">
-            <a:schemeClr val="accent1"/>
-          </a:fillRef>
-          <a:effectRef idx="0">
-            <a:srgbClr val="FFFFFF"/>
-          </a:effectRef>
-          <a:fontRef idx="minor">
-            <a:schemeClr val="lt1"/>
-          </a:fontRef>
-        </p:style>
-        <p:txBody>
-          <a:bodyPr rtlCol="0" anchor="ctr"/>
-          <a:p>
-            <a:pPr algn="ctr"/>
-            <a:r>
-              <a:rPr lang="zh-CN" altLang="en-US"/>
-              <a:t>基于子模覆盖增益的事件</a:t>
-            </a:r>
-            <a:r>
-              <a:rPr lang="zh-CN" altLang="en-US"/>
-              <a:t>入库判别</a:t>
-            </a:r>
-            <a:endParaRPr lang="zh-CN" altLang="en-US"/>
-          </a:p>
-        </p:txBody>
-      </p:sp>
-      <p:sp>
-        <p:nvSpPr>
           <p:cNvPr id="1072" name="箭头: 燕尾形 1071"/>
           <p:cNvSpPr/>
           <p:nvPr/>
         </p:nvSpPr>
         <p:spPr>
           <a:xfrm>
-            <a:off x="2570480" y="3162300"/>
-            <a:ext cx="375920" cy="443230"/>
+            <a:off x="2357120" y="3367405"/>
+            <a:ext cx="744855" cy="443230"/>
           </a:xfrm>
           <a:prstGeom prst="notchedRightArrow">
             <a:avLst>
@@ -4035,41 +3791,65 @@
       </p:sp>
       <p:sp>
         <p:nvSpPr>
-          <p:cNvPr id="33" name="箭头: 燕尾形 1071"/>
+          <p:cNvPr id="2" name="文本框 1"/>
+          <p:cNvSpPr txBox="1"/>
+          <p:nvPr/>
+        </p:nvSpPr>
+        <p:spPr>
+          <a:xfrm>
+            <a:off x="9822815" y="4205605"/>
+            <a:ext cx="567055" cy="1014730"/>
+          </a:xfrm>
+          <a:prstGeom prst="rect">
+            <a:avLst/>
+          </a:prstGeom>
+          <a:noFill/>
+        </p:spPr>
+        <p:txBody>
+          <a:bodyPr wrap="square" rtlCol="0">
+            <a:spAutoFit/>
+          </a:bodyPr>
+          <a:p>
+            <a:r>
+              <a:rPr lang="zh-CN" altLang="en-US" sz="1200" b="1"/>
+              <a:t>目标识别</a:t>
+            </a:r>
+            <a:endParaRPr lang="zh-CN" altLang="en-US" sz="1200" b="1"/>
+          </a:p>
+          <a:p>
+            <a:endParaRPr lang="zh-CN" altLang="en-US" sz="1200" b="1"/>
+          </a:p>
+          <a:p>
+            <a:r>
+              <a:rPr lang="zh-CN" altLang="en-US" sz="1200" b="1"/>
+              <a:t>证据窗口</a:t>
+            </a:r>
+            <a:endParaRPr lang="zh-CN" altLang="en-US" sz="1200" b="1"/>
+          </a:p>
+        </p:txBody>
+      </p:sp>
+      <p:sp>
+        <p:nvSpPr>
+          <p:cNvPr id="35" name="圆角矩形 34"/>
           <p:cNvSpPr/>
           <p:nvPr/>
         </p:nvSpPr>
         <p:spPr>
           <a:xfrm>
-            <a:off x="5371465" y="3162300"/>
-            <a:ext cx="374400" cy="443230"/>
-          </a:xfrm>
-          <a:prstGeom prst="notchedRightArrow">
-            <a:avLst>
-              <a:gd name="adj1" fmla="val 33809"/>
-              <a:gd name="adj2" fmla="val 52390"/>
-            </a:avLst>
+            <a:off x="3197872" y="1958340"/>
+            <a:ext cx="2232000" cy="1530000"/>
+          </a:xfrm>
+          <a:prstGeom prst="roundRect">
+            <a:avLst/>
           </a:prstGeom>
-          <a:gradFill>
-            <a:gsLst>
-              <a:gs pos="0">
-                <a:schemeClr val="accent1">
-                  <a:lumMod val="5000"/>
-                  <a:lumOff val="95000"/>
-                  <a:alpha val="0"/>
-                </a:schemeClr>
-              </a:gs>
-              <a:gs pos="74000">
-                <a:srgbClr val="2E54A1"/>
-              </a:gs>
-              <a:gs pos="100000">
-                <a:srgbClr val="2E54A1"/>
-              </a:gs>
-            </a:gsLst>
-            <a:lin ang="0" scaled="0"/>
-          </a:gradFill>
-          <a:ln>
-            <a:noFill/>
+          <a:solidFill>
+            <a:schemeClr val="bg1"/>
+          </a:solidFill>
+          <a:ln w="34925" cmpd="sng">
+            <a:solidFill>
+              <a:srgbClr val="C00000"/>
+            </a:solidFill>
+            <a:prstDash val="dash"/>
           </a:ln>
         </p:spPr>
         <p:style>
@@ -4090,7 +3870,6 @@
         </p:style>
         <p:txBody>
           <a:bodyPr rtlCol="0" anchor="ctr"/>
-          <a:lstStyle/>
           <a:p>
             <a:pPr algn="ctr"/>
             <a:endParaRPr lang="zh-CN" altLang="en-US"/>
@@ -4099,42 +3878,80 @@
       </p:sp>
       <p:sp>
         <p:nvSpPr>
-          <p:cNvPr id="34" name="箭头: 燕尾形 1071"/>
+          <p:cNvPr id="4" name="文本框 3"/>
+          <p:cNvSpPr txBox="1"/>
+          <p:nvPr/>
+        </p:nvSpPr>
+        <p:spPr>
+          <a:xfrm>
+            <a:off x="3061335" y="1962150"/>
+            <a:ext cx="2555875" cy="337185"/>
+          </a:xfrm>
+          <a:prstGeom prst="rect">
+            <a:avLst/>
+          </a:prstGeom>
+          <a:noFill/>
+        </p:spPr>
+        <p:txBody>
+          <a:bodyPr wrap="square" rtlCol="0">
+            <a:spAutoFit/>
+          </a:bodyPr>
+          <a:p>
+            <a:pPr algn="ctr"/>
+            <a:r>
+              <a:rPr lang="zh-CN" altLang="en-US" sz="1600" b="1">
+                <a:solidFill>
+                  <a:srgbClr val="C00000"/>
+                </a:solidFill>
+              </a:rPr>
+              <a:t>连续变点检测</a:t>
+            </a:r>
+            <a:endParaRPr lang="zh-CN" altLang="en-US" sz="1600" b="1">
+              <a:solidFill>
+                <a:srgbClr val="C00000"/>
+              </a:solidFill>
+            </a:endParaRPr>
+          </a:p>
+        </p:txBody>
+      </p:sp>
+      <p:pic>
+        <p:nvPicPr>
+          <p:cNvPr id="11" name="图片 10"/>
+          <p:cNvPicPr>
+            <a:picLocks noChangeAspect="1"/>
+          </p:cNvPicPr>
+          <p:nvPr/>
+        </p:nvPicPr>
+        <p:blipFill>
+          <a:blip r:embed="rId4"/>
+          <a:stretch>
+            <a:fillRect/>
+          </a:stretch>
+        </p:blipFill>
+        <p:spPr>
+          <a:xfrm>
+            <a:off x="3286125" y="2456815"/>
+            <a:ext cx="560070" cy="607060"/>
+          </a:xfrm>
+          <a:prstGeom prst="rect">
+            <a:avLst/>
+          </a:prstGeom>
+        </p:spPr>
+      </p:pic>
+      <p:sp>
+        <p:nvSpPr>
+          <p:cNvPr id="14" name="右箭头 13"/>
           <p:cNvSpPr/>
           <p:nvPr/>
         </p:nvSpPr>
         <p:spPr>
           <a:xfrm>
-            <a:off x="8204200" y="3162300"/>
-            <a:ext cx="374400" cy="443230"/>
-          </a:xfrm>
-          <a:prstGeom prst="notchedRightArrow">
-            <a:avLst>
-              <a:gd name="adj1" fmla="val 33809"/>
-              <a:gd name="adj2" fmla="val 52390"/>
-            </a:avLst>
+            <a:off x="4114800" y="2927985"/>
+            <a:ext cx="1217295" cy="90805"/>
+          </a:xfrm>
+          <a:prstGeom prst="rightArrow">
+            <a:avLst/>
           </a:prstGeom>
-          <a:gradFill>
-            <a:gsLst>
-              <a:gs pos="0">
-                <a:schemeClr val="accent1">
-                  <a:lumMod val="5000"/>
-                  <a:lumOff val="95000"/>
-                  <a:alpha val="0"/>
-                </a:schemeClr>
-              </a:gs>
-              <a:gs pos="74000">
-                <a:srgbClr val="2E54A1"/>
-              </a:gs>
-              <a:gs pos="100000">
-                <a:srgbClr val="2E54A1"/>
-              </a:gs>
-            </a:gsLst>
-            <a:lin ang="0" scaled="0"/>
-          </a:gradFill>
-          <a:ln>
-            <a:noFill/>
-          </a:ln>
         </p:spPr>
         <p:style>
           <a:lnRef idx="2">
@@ -4154,7 +3971,6 @@
         </p:style>
         <p:txBody>
           <a:bodyPr rtlCol="0" anchor="ctr"/>
-          <a:lstStyle/>
           <a:p>
             <a:pPr algn="ctr"/>
             <a:endParaRPr lang="zh-CN" altLang="en-US"/>
@@ -4163,27 +3979,18 @@
       </p:sp>
       <p:sp>
         <p:nvSpPr>
-          <p:cNvPr id="35" name="圆角矩形 34"/>
+          <p:cNvPr id="20" name="矩形 19"/>
           <p:cNvSpPr/>
           <p:nvPr/>
         </p:nvSpPr>
         <p:spPr>
           <a:xfrm>
-            <a:off x="3143605" y="2081530"/>
-            <a:ext cx="2076450" cy="1260000"/>
-          </a:xfrm>
-          <a:prstGeom prst="roundRect">
+            <a:off x="4161790" y="2860675"/>
+            <a:ext cx="40005" cy="86360"/>
+          </a:xfrm>
+          <a:prstGeom prst="rect">
             <a:avLst/>
           </a:prstGeom>
-          <a:solidFill>
-            <a:schemeClr val="bg1"/>
-          </a:solidFill>
-          <a:ln w="34925" cmpd="sng">
-            <a:solidFill>
-              <a:srgbClr val="C00000"/>
-            </a:solidFill>
-            <a:prstDash val="solid"/>
-          </a:ln>
         </p:spPr>
         <p:style>
           <a:lnRef idx="2">
@@ -4211,27 +4018,18 @@
       </p:sp>
       <p:sp>
         <p:nvSpPr>
-          <p:cNvPr id="36" name="圆角矩形 35"/>
+          <p:cNvPr id="21" name="矩形 20"/>
           <p:cNvSpPr/>
           <p:nvPr/>
         </p:nvSpPr>
         <p:spPr>
           <a:xfrm>
-            <a:off x="3143605" y="3709670"/>
-            <a:ext cx="2076450" cy="1260000"/>
-          </a:xfrm>
-          <a:prstGeom prst="roundRect">
+            <a:off x="4408805" y="2860675"/>
+            <a:ext cx="40005" cy="86360"/>
+          </a:xfrm>
+          <a:prstGeom prst="rect">
             <a:avLst/>
           </a:prstGeom>
-          <a:solidFill>
-            <a:schemeClr val="bg1"/>
-          </a:solidFill>
-          <a:ln w="34925" cmpd="sng">
-            <a:solidFill>
-              <a:srgbClr val="C00000"/>
-            </a:solidFill>
-            <a:prstDash val="solid"/>
-          </a:ln>
         </p:spPr>
         <p:style>
           <a:lnRef idx="2">
@@ -4259,27 +4057,18 @@
       </p:sp>
       <p:sp>
         <p:nvSpPr>
-          <p:cNvPr id="37" name="圆角矩形 36"/>
+          <p:cNvPr id="22" name="矩形 21"/>
           <p:cNvSpPr/>
           <p:nvPr/>
         </p:nvSpPr>
         <p:spPr>
           <a:xfrm>
-            <a:off x="5955423" y="2068830"/>
-            <a:ext cx="2076450" cy="1260000"/>
-          </a:xfrm>
-          <a:prstGeom prst="roundRect">
+            <a:off x="4655185" y="2860675"/>
+            <a:ext cx="40005" cy="86360"/>
+          </a:xfrm>
+          <a:prstGeom prst="rect">
             <a:avLst/>
           </a:prstGeom>
-          <a:solidFill>
-            <a:schemeClr val="bg1"/>
-          </a:solidFill>
-          <a:ln w="34925" cmpd="sng">
-            <a:solidFill>
-              <a:srgbClr val="2E54A1"/>
-            </a:solidFill>
-            <a:prstDash val="solid"/>
-          </a:ln>
         </p:spPr>
         <p:style>
           <a:lnRef idx="2">
@@ -4307,24 +4096,26 @@
       </p:sp>
       <p:sp>
         <p:nvSpPr>
-          <p:cNvPr id="38" name="圆角矩形 37"/>
+          <p:cNvPr id="23" name="矩形 22"/>
           <p:cNvSpPr/>
           <p:nvPr/>
         </p:nvSpPr>
         <p:spPr>
           <a:xfrm>
-            <a:off x="5955423" y="3709670"/>
-            <a:ext cx="2076450" cy="1260000"/>
-          </a:xfrm>
-          <a:prstGeom prst="roundRect">
+            <a:off x="4888865" y="2731135"/>
+            <a:ext cx="40005" cy="216535"/>
+          </a:xfrm>
+          <a:prstGeom prst="rect">
             <a:avLst/>
           </a:prstGeom>
           <a:solidFill>
-            <a:schemeClr val="bg1"/>
+            <a:srgbClr val="4874CB"/>
           </a:solidFill>
-          <a:ln w="34925" cmpd="sng">
+          <a:ln w="12700" cmpd="sng">
             <a:solidFill>
-              <a:srgbClr val="2E54A1"/>
+              <a:schemeClr val="accent1">
+                <a:shade val="50000"/>
+              </a:schemeClr>
             </a:solidFill>
             <a:prstDash val="solid"/>
           </a:ln>
@@ -4355,24 +4146,26 @@
       </p:sp>
       <p:sp>
         <p:nvSpPr>
-          <p:cNvPr id="39" name="圆角矩形 38"/>
+          <p:cNvPr id="24" name="矩形 23"/>
           <p:cNvSpPr/>
           <p:nvPr/>
         </p:nvSpPr>
         <p:spPr>
           <a:xfrm>
-            <a:off x="8767203" y="2068830"/>
-            <a:ext cx="2076450" cy="1260000"/>
-          </a:xfrm>
-          <a:prstGeom prst="roundRect">
+            <a:off x="5116830" y="2731135"/>
+            <a:ext cx="40005" cy="216535"/>
+          </a:xfrm>
+          <a:prstGeom prst="rect">
             <a:avLst/>
           </a:prstGeom>
           <a:solidFill>
-            <a:schemeClr val="bg1"/>
+            <a:srgbClr val="4874CB"/>
           </a:solidFill>
-          <a:ln w="34925" cmpd="sng">
+          <a:ln w="12700" cmpd="sng">
             <a:solidFill>
-              <a:srgbClr val="C00000"/>
+              <a:schemeClr val="accent1">
+                <a:shade val="50000"/>
+              </a:schemeClr>
             </a:solidFill>
             <a:prstDash val="solid"/>
           </a:ln>
@@ -4403,164 +4196,29 @@
       </p:sp>
       <p:sp>
         <p:nvSpPr>
-          <p:cNvPr id="2" name="文本框 1"/>
-          <p:cNvSpPr txBox="1"/>
-          <p:nvPr/>
-        </p:nvSpPr>
-        <p:spPr>
-          <a:xfrm>
-            <a:off x="5346700" y="2794635"/>
-            <a:ext cx="567055" cy="1198880"/>
-          </a:xfrm>
-          <a:prstGeom prst="rect">
-            <a:avLst/>
-          </a:prstGeom>
-          <a:noFill/>
-        </p:spPr>
-        <p:txBody>
-          <a:bodyPr wrap="square" rtlCol="0">
-            <a:spAutoFit/>
-          </a:bodyPr>
-          <a:p>
-            <a:r>
-              <a:rPr lang="zh-CN" altLang="en-US" sz="1200" b="1"/>
-              <a:t>可疑事件</a:t>
-            </a:r>
-            <a:endParaRPr lang="zh-CN" altLang="en-US" sz="1200" b="1"/>
-          </a:p>
-          <a:p>
-            <a:endParaRPr lang="zh-CN" altLang="en-US" sz="1200" b="1"/>
-          </a:p>
-          <a:p>
-            <a:endParaRPr lang="zh-CN" altLang="en-US" sz="1200" b="1"/>
-          </a:p>
-          <a:p>
-            <a:r>
-              <a:rPr lang="zh-CN" altLang="en-US" sz="1200" b="1"/>
-              <a:t>证据窗口</a:t>
-            </a:r>
-            <a:endParaRPr lang="zh-CN" altLang="en-US" sz="1200" b="1"/>
-          </a:p>
-        </p:txBody>
-      </p:sp>
-      <p:sp>
-        <p:nvSpPr>
-          <p:cNvPr id="3" name="文本框 2"/>
-          <p:cNvSpPr txBox="1"/>
-          <p:nvPr/>
-        </p:nvSpPr>
-        <p:spPr>
-          <a:xfrm>
-            <a:off x="8157210" y="2794635"/>
-            <a:ext cx="567055" cy="1198880"/>
-          </a:xfrm>
-          <a:prstGeom prst="rect">
-            <a:avLst/>
-          </a:prstGeom>
-          <a:noFill/>
-        </p:spPr>
-        <p:txBody>
-          <a:bodyPr wrap="square" rtlCol="0">
-            <a:spAutoFit/>
-          </a:bodyPr>
-          <a:p>
-            <a:r>
-              <a:rPr lang="zh-CN" altLang="en-US" sz="1200" b="1"/>
-              <a:t>候选事件</a:t>
-            </a:r>
-            <a:endParaRPr lang="zh-CN" altLang="en-US" sz="1200" b="1"/>
-          </a:p>
-          <a:p>
-            <a:endParaRPr lang="zh-CN" altLang="en-US" sz="1200" b="1"/>
-          </a:p>
-          <a:p>
-            <a:endParaRPr lang="zh-CN" altLang="en-US" sz="1200" b="1"/>
-          </a:p>
-          <a:p>
-            <a:r>
-              <a:rPr lang="zh-CN" altLang="en-US" sz="1200" b="1"/>
-              <a:t>证据窗口</a:t>
-            </a:r>
-            <a:endParaRPr lang="zh-CN" altLang="en-US" sz="1200" b="1"/>
-          </a:p>
-        </p:txBody>
-      </p:sp>
-      <p:sp>
-        <p:nvSpPr>
-          <p:cNvPr id="4" name="文本框 3"/>
-          <p:cNvSpPr txBox="1"/>
-          <p:nvPr/>
-        </p:nvSpPr>
-        <p:spPr>
-          <a:xfrm>
-            <a:off x="3030258" y="2084705"/>
-            <a:ext cx="2303145" cy="337185"/>
-          </a:xfrm>
-          <a:prstGeom prst="rect">
-            <a:avLst/>
-          </a:prstGeom>
-          <a:noFill/>
-        </p:spPr>
-        <p:txBody>
-          <a:bodyPr wrap="square" rtlCol="0">
-            <a:spAutoFit/>
-          </a:bodyPr>
-          <a:p>
-            <a:pPr algn="ctr"/>
-            <a:r>
-              <a:rPr lang="zh-CN" altLang="en-US" sz="1600" b="1">
-                <a:solidFill>
-                  <a:srgbClr val="C00000"/>
-                </a:solidFill>
-              </a:rPr>
-              <a:t>连续变点检测机制</a:t>
-            </a:r>
-            <a:endParaRPr lang="zh-CN" altLang="en-US" sz="1600" b="1">
-              <a:solidFill>
-                <a:srgbClr val="C00000"/>
-              </a:solidFill>
-            </a:endParaRPr>
-          </a:p>
-        </p:txBody>
-      </p:sp>
-      <p:pic>
-        <p:nvPicPr>
-          <p:cNvPr id="11" name="图片 10"/>
-          <p:cNvPicPr>
-            <a:picLocks noChangeAspect="1"/>
-          </p:cNvPicPr>
-          <p:nvPr/>
-        </p:nvPicPr>
-        <p:blipFill>
-          <a:blip r:embed="rId4"/>
-          <a:stretch>
-            <a:fillRect/>
-          </a:stretch>
-        </p:blipFill>
-        <p:spPr>
-          <a:xfrm>
-            <a:off x="3232785" y="2496185"/>
-            <a:ext cx="504825" cy="504825"/>
-          </a:xfrm>
-          <a:prstGeom prst="rect">
-            <a:avLst/>
-          </a:prstGeom>
-        </p:spPr>
-      </p:pic>
-      <p:sp>
-        <p:nvSpPr>
-          <p:cNvPr id="14" name="右箭头 13"/>
+          <p:cNvPr id="25" name="上箭头 24"/>
           <p:cNvSpPr/>
           <p:nvPr/>
         </p:nvSpPr>
         <p:spPr>
           <a:xfrm>
-            <a:off x="3979545" y="2887980"/>
-            <a:ext cx="1096645" cy="75565"/>
-          </a:xfrm>
-          <a:prstGeom prst="rightArrow">
-            <a:avLst/>
+            <a:off x="4880610" y="3063875"/>
+            <a:ext cx="59690" cy="266700"/>
+          </a:xfrm>
+          <a:prstGeom prst="upArrow">
+            <a:avLst>
+              <a:gd name="adj1" fmla="val 50000"/>
+              <a:gd name="adj2" fmla="val 100000"/>
+            </a:avLst>
           </a:prstGeom>
+          <a:solidFill>
+            <a:srgbClr val="C00000"/>
+          </a:solidFill>
+          <a:ln>
+            <a:solidFill>
+              <a:srgbClr val="C00000"/>
+            </a:solidFill>
+          </a:ln>
         </p:spPr>
         <p:style>
           <a:lnRef idx="2">
@@ -4586,20 +4244,189 @@
           </a:p>
         </p:txBody>
       </p:sp>
-      <p:sp>
-        <p:nvSpPr>
-          <p:cNvPr id="20" name="矩形 19"/>
-          <p:cNvSpPr/>
+      <p:pic>
+        <p:nvPicPr>
+          <p:cNvPr id="26" name="图片 25"/>
+          <p:cNvPicPr/>
           <p:nvPr/>
-        </p:nvSpPr>
-        <p:spPr>
-          <a:xfrm>
-            <a:off x="4022090" y="2832100"/>
-            <a:ext cx="36000" cy="72000"/>
+        </p:nvPicPr>
+        <p:blipFill>
+          <a:blip r:embed="rId5"/>
+          <a:stretch>
+            <a:fillRect/>
+          </a:stretch>
+        </p:blipFill>
+        <p:spPr>
+          <a:xfrm>
+            <a:off x="4051935" y="2441575"/>
+            <a:ext cx="259715" cy="281305"/>
           </a:xfrm>
           <a:prstGeom prst="rect">
             <a:avLst/>
           </a:prstGeom>
+        </p:spPr>
+      </p:pic>
+      <p:pic>
+        <p:nvPicPr>
+          <p:cNvPr id="27" name="图片 26"/>
+          <p:cNvPicPr/>
+          <p:nvPr/>
+        </p:nvPicPr>
+        <p:blipFill>
+          <a:blip r:embed="rId5"/>
+          <a:stretch>
+            <a:fillRect/>
+          </a:stretch>
+        </p:blipFill>
+        <p:spPr>
+          <a:xfrm>
+            <a:off x="4778375" y="2441575"/>
+            <a:ext cx="259715" cy="281305"/>
+          </a:xfrm>
+          <a:prstGeom prst="rect">
+            <a:avLst/>
+          </a:prstGeom>
+        </p:spPr>
+      </p:pic>
+      <p:sp>
+        <p:nvSpPr>
+          <p:cNvPr id="28" name="文本框 27"/>
+          <p:cNvSpPr txBox="1"/>
+          <p:nvPr/>
+        </p:nvSpPr>
+        <p:spPr>
+          <a:xfrm rot="5400000">
+            <a:off x="4396105" y="2422525"/>
+            <a:ext cx="323215" cy="283210"/>
+          </a:xfrm>
+          <a:prstGeom prst="rect">
+            <a:avLst/>
+          </a:prstGeom>
+          <a:noFill/>
+        </p:spPr>
+        <p:txBody>
+          <a:bodyPr wrap="square" rtlCol="0">
+            <a:spAutoFit/>
+          </a:bodyPr>
+          <a:p>
+            <a:pPr indent="0" fontAlgn="auto">
+              <a:lnSpc>
+                <a:spcPts val="500"/>
+              </a:lnSpc>
+            </a:pPr>
+            <a:r>
+              <a:rPr lang="en-US" altLang="zh-CN"/>
+              <a:t>.</a:t>
+            </a:r>
+            <a:endParaRPr lang="en-US" altLang="zh-CN"/>
+          </a:p>
+          <a:p>
+            <a:pPr indent="0" fontAlgn="auto">
+              <a:lnSpc>
+                <a:spcPts val="500"/>
+              </a:lnSpc>
+            </a:pPr>
+            <a:r>
+              <a:rPr lang="en-US" altLang="zh-CN"/>
+              <a:t>.</a:t>
+            </a:r>
+            <a:endParaRPr lang="en-US" altLang="zh-CN"/>
+          </a:p>
+          <a:p>
+            <a:pPr indent="0" fontAlgn="auto">
+              <a:lnSpc>
+                <a:spcPts val="500"/>
+              </a:lnSpc>
+            </a:pPr>
+            <a:r>
+              <a:rPr lang="en-US" altLang="zh-CN"/>
+              <a:t>.</a:t>
+            </a:r>
+            <a:endParaRPr lang="en-US" altLang="zh-CN"/>
+          </a:p>
+        </p:txBody>
+      </p:sp>
+      <p:sp>
+        <p:nvSpPr>
+          <p:cNvPr id="41" name="文本框 40"/>
+          <p:cNvSpPr txBox="1"/>
+          <p:nvPr/>
+        </p:nvSpPr>
+        <p:spPr>
+          <a:xfrm>
+            <a:off x="4401185" y="3063875"/>
+            <a:ext cx="502285" cy="275590"/>
+          </a:xfrm>
+          <a:prstGeom prst="rect">
+            <a:avLst/>
+          </a:prstGeom>
+          <a:noFill/>
+        </p:spPr>
+        <p:txBody>
+          <a:bodyPr wrap="square" rtlCol="0">
+            <a:spAutoFit/>
+          </a:bodyPr>
+          <a:p>
+            <a:r>
+              <a:rPr lang="zh-CN" altLang="en-US" sz="1200" b="1"/>
+              <a:t>变点</a:t>
+            </a:r>
+            <a:endParaRPr lang="zh-CN" altLang="en-US" sz="1200" b="1"/>
+          </a:p>
+        </p:txBody>
+      </p:sp>
+      <p:sp>
+        <p:nvSpPr>
+          <p:cNvPr id="42" name="文本框 41"/>
+          <p:cNvSpPr txBox="1"/>
+          <p:nvPr/>
+        </p:nvSpPr>
+        <p:spPr>
+          <a:xfrm>
+            <a:off x="3286125" y="3063875"/>
+            <a:ext cx="600075" cy="275590"/>
+          </a:xfrm>
+          <a:prstGeom prst="rect">
+            <a:avLst/>
+          </a:prstGeom>
+          <a:noFill/>
+        </p:spPr>
+        <p:txBody>
+          <a:bodyPr wrap="square" rtlCol="0">
+            <a:spAutoFit/>
+          </a:bodyPr>
+          <a:p>
+            <a:r>
+              <a:rPr lang="zh-CN" altLang="en-US" sz="1200" b="1"/>
+              <a:t>时序</a:t>
+            </a:r>
+            <a:endParaRPr lang="zh-CN" altLang="en-US" sz="1200" b="1"/>
+          </a:p>
+        </p:txBody>
+      </p:sp>
+      <p:sp>
+        <p:nvSpPr>
+          <p:cNvPr id="36" name="圆角矩形 35"/>
+          <p:cNvSpPr/>
+          <p:nvPr/>
+        </p:nvSpPr>
+        <p:spPr>
+          <a:xfrm>
+            <a:off x="3197872" y="4035425"/>
+            <a:ext cx="2232000" cy="1530350"/>
+          </a:xfrm>
+          <a:prstGeom prst="roundRect">
+            <a:avLst/>
+          </a:prstGeom>
+          <a:solidFill>
+            <a:schemeClr val="bg1"/>
+          </a:solidFill>
+          <a:ln w="34925" cmpd="sng">
+            <a:solidFill>
+              <a:srgbClr val="C00000"/>
+            </a:solidFill>
+            <a:prstDash val="dash"/>
+          </a:ln>
         </p:spPr>
         <p:style>
           <a:lnRef idx="2">
@@ -4627,399 +4454,14 @@
       </p:sp>
       <p:sp>
         <p:nvSpPr>
-          <p:cNvPr id="21" name="矩形 20"/>
-          <p:cNvSpPr/>
-          <p:nvPr/>
-        </p:nvSpPr>
-        <p:spPr>
-          <a:xfrm>
-            <a:off x="4244340" y="2832100"/>
-            <a:ext cx="36000" cy="72000"/>
-          </a:xfrm>
-          <a:prstGeom prst="rect">
-            <a:avLst/>
-          </a:prstGeom>
-        </p:spPr>
-        <p:style>
-          <a:lnRef idx="2">
-            <a:schemeClr val="accent1">
-              <a:lumMod val="75000"/>
-            </a:schemeClr>
-          </a:lnRef>
-          <a:fillRef idx="1">
-            <a:schemeClr val="accent1"/>
-          </a:fillRef>
-          <a:effectRef idx="0">
-            <a:srgbClr val="FFFFFF"/>
-          </a:effectRef>
-          <a:fontRef idx="minor">
-            <a:schemeClr val="lt1"/>
-          </a:fontRef>
-        </p:style>
-        <p:txBody>
-          <a:bodyPr rtlCol="0" anchor="ctr"/>
-          <a:p>
-            <a:pPr algn="ctr"/>
-            <a:endParaRPr lang="zh-CN" altLang="en-US"/>
-          </a:p>
-        </p:txBody>
-      </p:sp>
-      <p:sp>
-        <p:nvSpPr>
-          <p:cNvPr id="22" name="矩形 21"/>
-          <p:cNvSpPr/>
-          <p:nvPr/>
-        </p:nvSpPr>
-        <p:spPr>
-          <a:xfrm>
-            <a:off x="4466590" y="2832100"/>
-            <a:ext cx="36000" cy="72000"/>
-          </a:xfrm>
-          <a:prstGeom prst="rect">
-            <a:avLst/>
-          </a:prstGeom>
-        </p:spPr>
-        <p:style>
-          <a:lnRef idx="2">
-            <a:schemeClr val="accent1">
-              <a:lumMod val="75000"/>
-            </a:schemeClr>
-          </a:lnRef>
-          <a:fillRef idx="1">
-            <a:schemeClr val="accent1"/>
-          </a:fillRef>
-          <a:effectRef idx="0">
-            <a:srgbClr val="FFFFFF"/>
-          </a:effectRef>
-          <a:fontRef idx="minor">
-            <a:schemeClr val="lt1"/>
-          </a:fontRef>
-        </p:style>
-        <p:txBody>
-          <a:bodyPr rtlCol="0" anchor="ctr"/>
-          <a:p>
-            <a:pPr algn="ctr"/>
-            <a:endParaRPr lang="zh-CN" altLang="en-US"/>
-          </a:p>
-        </p:txBody>
-      </p:sp>
-      <p:sp>
-        <p:nvSpPr>
-          <p:cNvPr id="23" name="矩形 22"/>
-          <p:cNvSpPr/>
-          <p:nvPr/>
-        </p:nvSpPr>
-        <p:spPr>
-          <a:xfrm>
-            <a:off x="4676873" y="2724150"/>
-            <a:ext cx="36000" cy="180000"/>
-          </a:xfrm>
-          <a:prstGeom prst="rect">
-            <a:avLst/>
-          </a:prstGeom>
-          <a:solidFill>
-            <a:srgbClr val="4874CB"/>
-          </a:solidFill>
-          <a:ln w="12700" cmpd="sng">
-            <a:solidFill>
-              <a:schemeClr val="accent1">
-                <a:shade val="50000"/>
-              </a:schemeClr>
-            </a:solidFill>
-            <a:prstDash val="solid"/>
-          </a:ln>
-        </p:spPr>
-        <p:style>
-          <a:lnRef idx="2">
-            <a:schemeClr val="accent1">
-              <a:lumMod val="75000"/>
-            </a:schemeClr>
-          </a:lnRef>
-          <a:fillRef idx="1">
-            <a:schemeClr val="accent1"/>
-          </a:fillRef>
-          <a:effectRef idx="0">
-            <a:srgbClr val="FFFFFF"/>
-          </a:effectRef>
-          <a:fontRef idx="minor">
-            <a:schemeClr val="lt1"/>
-          </a:fontRef>
-        </p:style>
-        <p:txBody>
-          <a:bodyPr rtlCol="0" anchor="ctr"/>
-          <a:p>
-            <a:pPr algn="ctr"/>
-            <a:endParaRPr lang="zh-CN" altLang="en-US"/>
-          </a:p>
-        </p:txBody>
-      </p:sp>
-      <p:sp>
-        <p:nvSpPr>
-          <p:cNvPr id="24" name="矩形 23"/>
-          <p:cNvSpPr/>
-          <p:nvPr/>
-        </p:nvSpPr>
-        <p:spPr>
-          <a:xfrm>
-            <a:off x="4882515" y="2724150"/>
-            <a:ext cx="36000" cy="180000"/>
-          </a:xfrm>
-          <a:prstGeom prst="rect">
-            <a:avLst/>
-          </a:prstGeom>
-          <a:solidFill>
-            <a:srgbClr val="4874CB"/>
-          </a:solidFill>
-          <a:ln w="12700" cmpd="sng">
-            <a:solidFill>
-              <a:schemeClr val="accent1">
-                <a:shade val="50000"/>
-              </a:schemeClr>
-            </a:solidFill>
-            <a:prstDash val="solid"/>
-          </a:ln>
-        </p:spPr>
-        <p:style>
-          <a:lnRef idx="2">
-            <a:schemeClr val="accent1">
-              <a:lumMod val="75000"/>
-            </a:schemeClr>
-          </a:lnRef>
-          <a:fillRef idx="1">
-            <a:schemeClr val="accent1"/>
-          </a:fillRef>
-          <a:effectRef idx="0">
-            <a:srgbClr val="FFFFFF"/>
-          </a:effectRef>
-          <a:fontRef idx="minor">
-            <a:schemeClr val="lt1"/>
-          </a:fontRef>
-        </p:style>
-        <p:txBody>
-          <a:bodyPr rtlCol="0" anchor="ctr"/>
-          <a:p>
-            <a:pPr algn="ctr"/>
-            <a:endParaRPr lang="zh-CN" altLang="en-US"/>
-          </a:p>
-        </p:txBody>
-      </p:sp>
-      <p:sp>
-        <p:nvSpPr>
-          <p:cNvPr id="25" name="上箭头 24"/>
-          <p:cNvSpPr/>
-          <p:nvPr/>
-        </p:nvSpPr>
-        <p:spPr>
-          <a:xfrm>
-            <a:off x="4669790" y="3001010"/>
-            <a:ext cx="54000" cy="221615"/>
-          </a:xfrm>
-          <a:prstGeom prst="upArrow">
-            <a:avLst/>
-          </a:prstGeom>
-          <a:solidFill>
-            <a:srgbClr val="C00000"/>
-          </a:solidFill>
-          <a:ln>
-            <a:solidFill>
-              <a:srgbClr val="C00000"/>
-            </a:solidFill>
-          </a:ln>
-        </p:spPr>
-        <p:style>
-          <a:lnRef idx="2">
-            <a:schemeClr val="accent1">
-              <a:lumMod val="75000"/>
-            </a:schemeClr>
-          </a:lnRef>
-          <a:fillRef idx="1">
-            <a:schemeClr val="accent1"/>
-          </a:fillRef>
-          <a:effectRef idx="0">
-            <a:srgbClr val="FFFFFF"/>
-          </a:effectRef>
-          <a:fontRef idx="minor">
-            <a:schemeClr val="lt1"/>
-          </a:fontRef>
-        </p:style>
-        <p:txBody>
-          <a:bodyPr rtlCol="0" anchor="ctr"/>
-          <a:p>
-            <a:pPr algn="ctr"/>
-            <a:endParaRPr lang="zh-CN" altLang="en-US"/>
-          </a:p>
-        </p:txBody>
-      </p:sp>
-      <p:pic>
-        <p:nvPicPr>
-          <p:cNvPr id="26" name="图片 25"/>
-          <p:cNvPicPr/>
-          <p:nvPr/>
-        </p:nvPicPr>
-        <p:blipFill>
-          <a:blip r:embed="rId5"/>
-          <a:stretch>
-            <a:fillRect/>
-          </a:stretch>
-        </p:blipFill>
-        <p:spPr>
-          <a:xfrm>
-            <a:off x="3923030" y="2483485"/>
-            <a:ext cx="234000" cy="234000"/>
-          </a:xfrm>
-          <a:prstGeom prst="rect">
-            <a:avLst/>
-          </a:prstGeom>
-        </p:spPr>
-      </p:pic>
-      <p:pic>
-        <p:nvPicPr>
-          <p:cNvPr id="27" name="图片 26"/>
-          <p:cNvPicPr/>
-          <p:nvPr/>
-        </p:nvPicPr>
-        <p:blipFill>
-          <a:blip r:embed="rId5"/>
-          <a:stretch>
-            <a:fillRect/>
-          </a:stretch>
-        </p:blipFill>
-        <p:spPr>
-          <a:xfrm>
-            <a:off x="4577715" y="2483485"/>
-            <a:ext cx="234000" cy="234000"/>
-          </a:xfrm>
-          <a:prstGeom prst="rect">
-            <a:avLst/>
-          </a:prstGeom>
-        </p:spPr>
-      </p:pic>
-      <p:sp>
-        <p:nvSpPr>
-          <p:cNvPr id="28" name="文本框 27"/>
-          <p:cNvSpPr txBox="1"/>
-          <p:nvPr/>
-        </p:nvSpPr>
-        <p:spPr>
-          <a:xfrm rot="5400000">
-            <a:off x="4244340" y="2455545"/>
-            <a:ext cx="268605" cy="283210"/>
-          </a:xfrm>
-          <a:prstGeom prst="rect">
-            <a:avLst/>
-          </a:prstGeom>
-          <a:noFill/>
-        </p:spPr>
-        <p:txBody>
-          <a:bodyPr wrap="square" rtlCol="0">
-            <a:spAutoFit/>
-          </a:bodyPr>
-          <a:p>
-            <a:pPr indent="0" fontAlgn="auto">
-              <a:lnSpc>
-                <a:spcPts val="500"/>
-              </a:lnSpc>
-            </a:pPr>
-            <a:r>
-              <a:rPr lang="en-US" altLang="zh-CN"/>
-              <a:t>.</a:t>
-            </a:r>
-            <a:endParaRPr lang="en-US" altLang="zh-CN"/>
-          </a:p>
-          <a:p>
-            <a:pPr indent="0" fontAlgn="auto">
-              <a:lnSpc>
-                <a:spcPts val="500"/>
-              </a:lnSpc>
-            </a:pPr>
-            <a:r>
-              <a:rPr lang="en-US" altLang="zh-CN"/>
-              <a:t>.</a:t>
-            </a:r>
-            <a:endParaRPr lang="en-US" altLang="zh-CN"/>
-          </a:p>
-          <a:p>
-            <a:pPr indent="0" fontAlgn="auto">
-              <a:lnSpc>
-                <a:spcPts val="500"/>
-              </a:lnSpc>
-            </a:pPr>
-            <a:r>
-              <a:rPr lang="en-US" altLang="zh-CN"/>
-              <a:t>.</a:t>
-            </a:r>
-            <a:endParaRPr lang="en-US" altLang="zh-CN"/>
-          </a:p>
-        </p:txBody>
-      </p:sp>
-      <p:sp>
-        <p:nvSpPr>
-          <p:cNvPr id="41" name="文本框 40"/>
-          <p:cNvSpPr txBox="1"/>
-          <p:nvPr/>
-        </p:nvSpPr>
-        <p:spPr>
-          <a:xfrm>
-            <a:off x="4237355" y="3001010"/>
-            <a:ext cx="541020" cy="275590"/>
-          </a:xfrm>
-          <a:prstGeom prst="rect">
-            <a:avLst/>
-          </a:prstGeom>
-          <a:noFill/>
-        </p:spPr>
-        <p:txBody>
-          <a:bodyPr wrap="square" rtlCol="0">
-            <a:spAutoFit/>
-          </a:bodyPr>
-          <a:p>
-            <a:r>
-              <a:rPr lang="zh-CN" altLang="en-US" sz="1200" b="1"/>
-              <a:t>变点</a:t>
-            </a:r>
-            <a:endParaRPr lang="zh-CN" altLang="en-US" sz="1200" b="1"/>
-          </a:p>
-        </p:txBody>
-      </p:sp>
-      <p:sp>
-        <p:nvSpPr>
-          <p:cNvPr id="42" name="文本框 41"/>
-          <p:cNvSpPr txBox="1"/>
-          <p:nvPr/>
-        </p:nvSpPr>
-        <p:spPr>
-          <a:xfrm>
-            <a:off x="3232785" y="3001010"/>
-            <a:ext cx="541020" cy="275590"/>
-          </a:xfrm>
-          <a:prstGeom prst="rect">
-            <a:avLst/>
-          </a:prstGeom>
-          <a:noFill/>
-        </p:spPr>
-        <p:txBody>
-          <a:bodyPr wrap="square" rtlCol="0">
-            <a:spAutoFit/>
-          </a:bodyPr>
-          <a:p>
-            <a:r>
-              <a:rPr lang="zh-CN" altLang="en-US" sz="1200" b="1"/>
-              <a:t>时序</a:t>
-            </a:r>
-            <a:endParaRPr lang="zh-CN" altLang="en-US" sz="1200" b="1"/>
-          </a:p>
-        </p:txBody>
-      </p:sp>
-      <p:sp>
-        <p:nvSpPr>
           <p:cNvPr id="43" name="文本框 42"/>
           <p:cNvSpPr txBox="1"/>
           <p:nvPr/>
         </p:nvSpPr>
         <p:spPr>
           <a:xfrm>
-            <a:off x="3030258" y="3709670"/>
-            <a:ext cx="2303145" cy="337185"/>
+            <a:off x="3030220" y="4035425"/>
+            <a:ext cx="2471420" cy="337185"/>
           </a:xfrm>
           <a:prstGeom prst="rect">
             <a:avLst/>
@@ -5072,8 +4514,8 @@
         </p:blipFill>
         <p:spPr>
           <a:xfrm>
-            <a:off x="3892550" y="4046855"/>
-            <a:ext cx="288000" cy="288000"/>
+            <a:off x="3955415" y="4445000"/>
+            <a:ext cx="309245" cy="349885"/>
           </a:xfrm>
           <a:prstGeom prst="rect">
             <a:avLst/>
@@ -5096,8 +4538,8 @@
         </p:blipFill>
         <p:spPr>
           <a:xfrm>
-            <a:off x="3874135" y="4341985"/>
-            <a:ext cx="288000" cy="287655"/>
+            <a:off x="3935730" y="4803775"/>
+            <a:ext cx="309245" cy="349250"/>
           </a:xfrm>
           <a:prstGeom prst="rect">
             <a:avLst/>
@@ -5120,8 +4562,8 @@
         </p:blipFill>
         <p:spPr>
           <a:xfrm>
-            <a:off x="3874135" y="4623925"/>
-            <a:ext cx="288000" cy="287655"/>
+            <a:off x="3935730" y="5146040"/>
+            <a:ext cx="309245" cy="349250"/>
           </a:xfrm>
           <a:prstGeom prst="rect">
             <a:avLst/>
@@ -5136,8 +4578,8 @@
         </p:nvSpPr>
         <p:spPr>
           <a:xfrm>
-            <a:off x="3096895" y="4053205"/>
-            <a:ext cx="806450" cy="275590"/>
+            <a:off x="3101975" y="4452620"/>
+            <a:ext cx="865505" cy="275590"/>
           </a:xfrm>
           <a:prstGeom prst="rect">
             <a:avLst/>
@@ -5166,8 +4608,8 @@
         </p:nvSpPr>
         <p:spPr>
           <a:xfrm>
-            <a:off x="3059430" y="4347845"/>
-            <a:ext cx="881380" cy="275590"/>
+            <a:off x="3061335" y="4810760"/>
+            <a:ext cx="945515" cy="275590"/>
           </a:xfrm>
           <a:prstGeom prst="rect">
             <a:avLst/>
@@ -5196,8 +4638,8 @@
         </p:nvSpPr>
         <p:spPr>
           <a:xfrm>
-            <a:off x="3177540" y="4629785"/>
-            <a:ext cx="645160" cy="275590"/>
+            <a:off x="3188335" y="5153025"/>
+            <a:ext cx="692150" cy="275590"/>
           </a:xfrm>
           <a:prstGeom prst="rect">
             <a:avLst/>
@@ -5226,8 +4668,8 @@
         </p:nvSpPr>
         <p:spPr>
           <a:xfrm>
-            <a:off x="4471670" y="4035425"/>
-            <a:ext cx="837565" cy="275590"/>
+            <a:off x="4577080" y="4431030"/>
+            <a:ext cx="898525" cy="275590"/>
           </a:xfrm>
           <a:prstGeom prst="rect">
             <a:avLst/>
@@ -5255,8 +4697,8 @@
         </p:nvSpPr>
         <p:spPr>
           <a:xfrm>
-            <a:off x="4471670" y="4236720"/>
-            <a:ext cx="837565" cy="275590"/>
+            <a:off x="4577080" y="4675505"/>
+            <a:ext cx="898525" cy="275590"/>
           </a:xfrm>
           <a:prstGeom prst="rect">
             <a:avLst/>
@@ -5284,8 +4726,8 @@
         </p:nvSpPr>
         <p:spPr>
           <a:xfrm>
-            <a:off x="4471670" y="4438015"/>
-            <a:ext cx="837565" cy="275590"/>
+            <a:off x="4577080" y="4919980"/>
+            <a:ext cx="898525" cy="275590"/>
           </a:xfrm>
           <a:prstGeom prst="rect">
             <a:avLst/>
@@ -5313,8 +4755,8 @@
         </p:nvSpPr>
         <p:spPr>
           <a:xfrm>
-            <a:off x="4471670" y="4639310"/>
-            <a:ext cx="837565" cy="275590"/>
+            <a:off x="4577080" y="5164455"/>
+            <a:ext cx="898525" cy="275590"/>
           </a:xfrm>
           <a:prstGeom prst="rect">
             <a:avLst/>
@@ -5342,8 +4784,8 @@
         </p:nvCxnSpPr>
         <p:spPr>
           <a:xfrm flipV="1">
-            <a:off x="4218305" y="4150360"/>
-            <a:ext cx="266700" cy="304800"/>
+            <a:off x="4305300" y="4570730"/>
+            <a:ext cx="286385" cy="370205"/>
           </a:xfrm>
           <a:prstGeom prst="straightConnector1">
             <a:avLst/>
@@ -5376,8 +4818,8 @@
         </p:nvCxnSpPr>
         <p:spPr>
           <a:xfrm>
-            <a:off x="4218305" y="4467225"/>
-            <a:ext cx="266700" cy="304800"/>
+            <a:off x="4305300" y="4955540"/>
+            <a:ext cx="286385" cy="370205"/>
           </a:xfrm>
           <a:prstGeom prst="straightConnector1">
             <a:avLst/>
@@ -5404,21 +4846,30 @@
       </p:cxnSp>
       <p:sp>
         <p:nvSpPr>
-          <p:cNvPr id="58" name="圆角矩形 57"/>
+          <p:cNvPr id="18" name="矩形 17"/>
           <p:cNvSpPr/>
           <p:nvPr/>
         </p:nvSpPr>
         <p:spPr>
-          <a:xfrm>
-            <a:off x="3420428" y="5315585"/>
-            <a:ext cx="7142480" cy="537210"/>
-          </a:xfrm>
-          <a:prstGeom prst="roundRect">
+          <a:xfrm rot="5400000">
+            <a:off x="8417560" y="3044825"/>
+            <a:ext cx="4860290" cy="909320"/>
+          </a:xfrm>
+          <a:prstGeom prst="rect">
             <a:avLst/>
           </a:prstGeom>
           <a:solidFill>
-            <a:schemeClr val="bg1"/>
+            <a:srgbClr val="DAE3F5"/>
           </a:solidFill>
+          <a:extLst>
+            <a:ext uri="{909E8E84-426E-40DD-AFC4-6F175D3DCCD1}">
+              <a14:hiddenFill xmlns:a14="http://schemas.microsoft.com/office/drawing/2010/main">
+                <a:solidFill>
+                  <a:schemeClr val="accent1"/>
+                </a:solidFill>
+              </a14:hiddenFill>
+            </a:ext>
+          </a:extLst>
         </p:spPr>
         <p:style>
           <a:lnRef idx="2">
@@ -5440,63 +4891,27 @@
           <a:bodyPr rtlCol="0" anchor="ctr"/>
           <a:p>
             <a:pPr algn="ctr"/>
-            <a:r>
-              <a:rPr lang="zh-CN" altLang="en-US" b="1">
-                <a:solidFill>
-                  <a:schemeClr val="tx1"/>
-                </a:solidFill>
-              </a:rPr>
-              <a:t>面向高价值频谱事件的智能</a:t>
-            </a:r>
-            <a:r>
-              <a:rPr lang="zh-CN" altLang="en-US" b="1">
-                <a:solidFill>
-                  <a:schemeClr val="tx1"/>
-                </a:solidFill>
-              </a:rPr>
-              <a:t>识别和相似</a:t>
-            </a:r>
-            <a:r>
-              <a:rPr lang="zh-CN" altLang="en-US" b="1">
-                <a:solidFill>
-                  <a:schemeClr val="tx1"/>
-                </a:solidFill>
-              </a:rPr>
-              <a:t>性检索</a:t>
-            </a:r>
-            <a:endParaRPr lang="zh-CN" altLang="en-US" b="1">
-              <a:solidFill>
-                <a:schemeClr val="tx1"/>
-              </a:solidFill>
-            </a:endParaRPr>
-          </a:p>
-        </p:txBody>
-      </p:sp>
-      <p:sp>
-        <p:nvSpPr>
-          <p:cNvPr id="59" name="下箭头 58"/>
+            <a:endParaRPr lang="zh-CN" altLang="en-US"/>
+          </a:p>
+        </p:txBody>
+      </p:sp>
+      <p:sp>
+        <p:nvSpPr>
+          <p:cNvPr id="58" name="圆角矩形 57"/>
           <p:cNvSpPr/>
           <p:nvPr/>
         </p:nvSpPr>
         <p:spPr>
-          <a:xfrm>
-            <a:off x="4127855" y="3341370"/>
-            <a:ext cx="107950" cy="320040"/>
-          </a:xfrm>
-          <a:prstGeom prst="downArrow">
-            <a:avLst>
-              <a:gd name="adj1" fmla="val 31764"/>
-              <a:gd name="adj2" fmla="val 80588"/>
-            </a:avLst>
+          <a:xfrm rot="5400000">
+            <a:off x="8992235" y="3201398"/>
+            <a:ext cx="3710940" cy="720000"/>
+          </a:xfrm>
+          <a:prstGeom prst="roundRect">
+            <a:avLst/>
           </a:prstGeom>
           <a:solidFill>
-            <a:srgbClr val="C00000"/>
+            <a:schemeClr val="bg1"/>
           </a:solidFill>
-          <a:ln>
-            <a:solidFill>
-              <a:srgbClr val="C00000"/>
-            </a:solidFill>
-          </a:ln>
         </p:spPr>
         <p:style>
           <a:lnRef idx="2">
@@ -5515,23 +4930,252 @@
           </a:fontRef>
         </p:style>
         <p:txBody>
-          <a:bodyPr rtlCol="0" anchor="ctr"/>
+          <a:bodyPr vert="vert270" rtlCol="0" anchor="ctr"/>
           <a:p>
             <a:pPr algn="ctr"/>
-            <a:endParaRPr lang="zh-CN" altLang="en-US"/>
-          </a:p>
-        </p:txBody>
-      </p:sp>
-      <p:sp>
-        <p:nvSpPr>
-          <p:cNvPr id="60" name="文本框 59"/>
+            <a:r>
+              <a:rPr lang="zh-CN" altLang="en-US" b="1">
+                <a:solidFill>
+                  <a:schemeClr val="tx1"/>
+                </a:solidFill>
+              </a:rPr>
+              <a:t>降</a:t>
+            </a:r>
+            <a:endParaRPr lang="zh-CN" altLang="en-US" b="1">
+              <a:solidFill>
+                <a:schemeClr val="tx1"/>
+              </a:solidFill>
+            </a:endParaRPr>
+          </a:p>
+          <a:p>
+            <a:pPr algn="ctr"/>
+            <a:r>
+              <a:rPr lang="zh-CN" altLang="en-US" b="1">
+                <a:solidFill>
+                  <a:schemeClr val="tx1"/>
+                </a:solidFill>
+              </a:rPr>
+              <a:t>低</a:t>
+            </a:r>
+            <a:endParaRPr lang="zh-CN" altLang="en-US" b="1">
+              <a:solidFill>
+                <a:schemeClr val="tx1"/>
+              </a:solidFill>
+            </a:endParaRPr>
+          </a:p>
+          <a:p>
+            <a:pPr algn="ctr"/>
+            <a:r>
+              <a:rPr lang="zh-CN" altLang="en-US" b="1">
+                <a:solidFill>
+                  <a:schemeClr val="tx1"/>
+                </a:solidFill>
+              </a:rPr>
+              <a:t>推</a:t>
+            </a:r>
+            <a:endParaRPr lang="zh-CN" altLang="en-US" b="1">
+              <a:solidFill>
+                <a:schemeClr val="tx1"/>
+              </a:solidFill>
+            </a:endParaRPr>
+          </a:p>
+          <a:p>
+            <a:pPr algn="ctr"/>
+            <a:r>
+              <a:rPr lang="zh-CN" altLang="en-US" b="1">
+                <a:solidFill>
+                  <a:schemeClr val="tx1"/>
+                </a:solidFill>
+              </a:rPr>
+              <a:t>理</a:t>
+            </a:r>
+            <a:endParaRPr lang="zh-CN" altLang="en-US" b="1">
+              <a:solidFill>
+                <a:schemeClr val="tx1"/>
+              </a:solidFill>
+            </a:endParaRPr>
+          </a:p>
+          <a:p>
+            <a:pPr algn="ctr"/>
+            <a:r>
+              <a:rPr lang="zh-CN" altLang="en-US" b="1">
+                <a:solidFill>
+                  <a:schemeClr val="tx1"/>
+                </a:solidFill>
+              </a:rPr>
+              <a:t>与</a:t>
+            </a:r>
+            <a:endParaRPr lang="zh-CN" altLang="en-US" b="1">
+              <a:solidFill>
+                <a:schemeClr val="tx1"/>
+              </a:solidFill>
+            </a:endParaRPr>
+          </a:p>
+          <a:p>
+            <a:pPr algn="ctr"/>
+            <a:r>
+              <a:rPr lang="zh-CN" altLang="en-US" b="1">
+                <a:solidFill>
+                  <a:schemeClr val="tx1"/>
+                </a:solidFill>
+              </a:rPr>
+              <a:t>检</a:t>
+            </a:r>
+            <a:endParaRPr lang="zh-CN" altLang="en-US" b="1">
+              <a:solidFill>
+                <a:schemeClr val="tx1"/>
+              </a:solidFill>
+            </a:endParaRPr>
+          </a:p>
+          <a:p>
+            <a:pPr algn="ctr"/>
+            <a:r>
+              <a:rPr lang="zh-CN" altLang="en-US" b="1">
+                <a:solidFill>
+                  <a:schemeClr val="tx1"/>
+                </a:solidFill>
+              </a:rPr>
+              <a:t>索</a:t>
+            </a:r>
+            <a:endParaRPr lang="zh-CN" altLang="en-US" b="1">
+              <a:solidFill>
+                <a:schemeClr val="tx1"/>
+              </a:solidFill>
+            </a:endParaRPr>
+          </a:p>
+          <a:p>
+            <a:pPr algn="ctr"/>
+            <a:r>
+              <a:rPr lang="zh-CN" altLang="en-US" b="1">
+                <a:solidFill>
+                  <a:schemeClr val="tx1"/>
+                </a:solidFill>
+              </a:rPr>
+              <a:t>开</a:t>
+            </a:r>
+            <a:endParaRPr lang="zh-CN" altLang="en-US" b="1">
+              <a:solidFill>
+                <a:schemeClr val="tx1"/>
+              </a:solidFill>
+            </a:endParaRPr>
+          </a:p>
+          <a:p>
+            <a:pPr algn="ctr"/>
+            <a:r>
+              <a:rPr lang="zh-CN" altLang="en-US" b="1">
+                <a:solidFill>
+                  <a:schemeClr val="tx1"/>
+                </a:solidFill>
+              </a:rPr>
+              <a:t>销</a:t>
+            </a:r>
+            <a:endParaRPr lang="zh-CN" altLang="en-US" b="1">
+              <a:solidFill>
+                <a:schemeClr val="tx1"/>
+              </a:solidFill>
+            </a:endParaRPr>
+          </a:p>
+        </p:txBody>
+      </p:sp>
+      <p:grpSp>
+        <p:nvGrpSpPr>
+          <p:cNvPr id="144" name="组合 143"/>
+          <p:cNvGrpSpPr>
+            <a:grpSpLocks noChangeAspect="1"/>
+          </p:cNvGrpSpPr>
+          <p:nvPr/>
+        </p:nvGrpSpPr>
+        <p:grpSpPr>
+          <a:xfrm>
+            <a:off x="6617335" y="1931035"/>
+            <a:ext cx="544586" cy="504000"/>
+            <a:chOff x="9718" y="7273"/>
+            <a:chExt cx="1058" cy="986"/>
+          </a:xfrm>
+        </p:grpSpPr>
+        <p:pic>
+          <p:nvPicPr>
+            <p:cNvPr id="61" name="图片 60"/>
+            <p:cNvPicPr>
+              <a:picLocks noChangeAspect="1"/>
+            </p:cNvPicPr>
+            <p:nvPr/>
+          </p:nvPicPr>
+          <p:blipFill>
+            <a:blip r:embed="rId9"/>
+            <a:stretch>
+              <a:fillRect/>
+            </a:stretch>
+          </p:blipFill>
+          <p:spPr>
+            <a:xfrm>
+              <a:off x="9718" y="7273"/>
+              <a:ext cx="724" cy="652"/>
+            </a:xfrm>
+            <a:prstGeom prst="rect">
+              <a:avLst/>
+            </a:prstGeom>
+          </p:spPr>
+        </p:pic>
+        <p:pic>
+          <p:nvPicPr>
+            <p:cNvPr id="63" name="图片 62"/>
+            <p:cNvPicPr>
+              <a:picLocks noChangeAspect="1"/>
+            </p:cNvPicPr>
+            <p:nvPr/>
+          </p:nvPicPr>
+          <p:blipFill>
+            <a:blip r:embed="rId9"/>
+            <a:stretch>
+              <a:fillRect/>
+            </a:stretch>
+          </p:blipFill>
+          <p:spPr>
+            <a:xfrm>
+              <a:off x="9885" y="7440"/>
+              <a:ext cx="724" cy="652"/>
+            </a:xfrm>
+            <a:prstGeom prst="rect">
+              <a:avLst/>
+            </a:prstGeom>
+          </p:spPr>
+        </p:pic>
+        <p:pic>
+          <p:nvPicPr>
+            <p:cNvPr id="64" name="图片 63"/>
+            <p:cNvPicPr>
+              <a:picLocks noChangeAspect="1"/>
+            </p:cNvPicPr>
+            <p:nvPr/>
+          </p:nvPicPr>
+          <p:blipFill>
+            <a:blip r:embed="rId9"/>
+            <a:stretch>
+              <a:fillRect/>
+            </a:stretch>
+          </p:blipFill>
+          <p:spPr>
+            <a:xfrm>
+              <a:off x="10052" y="7607"/>
+              <a:ext cx="724" cy="652"/>
+            </a:xfrm>
+            <a:prstGeom prst="rect">
+              <a:avLst/>
+            </a:prstGeom>
+          </p:spPr>
+        </p:pic>
+      </p:grpSp>
+      <p:sp>
+        <p:nvSpPr>
+          <p:cNvPr id="65" name="文本框 64"/>
           <p:cNvSpPr txBox="1"/>
           <p:nvPr/>
         </p:nvSpPr>
         <p:spPr>
           <a:xfrm>
-            <a:off x="5842075" y="2084705"/>
-            <a:ext cx="2303145" cy="337185"/>
+            <a:off x="5948680" y="4897120"/>
+            <a:ext cx="545465" cy="460375"/>
           </a:xfrm>
           <a:prstGeom prst="rect">
             <a:avLst/>
@@ -5543,116 +5187,6 @@
             <a:spAutoFit/>
           </a:bodyPr>
           <a:p>
-            <a:pPr algn="ctr"/>
-            <a:r>
-              <a:rPr lang="zh-CN" altLang="en-US" sz="1600" b="1">
-                <a:solidFill>
-                  <a:srgbClr val="C00000"/>
-                </a:solidFill>
-              </a:rPr>
-              <a:t>事件级轻量表征</a:t>
-            </a:r>
-            <a:endParaRPr lang="zh-CN" altLang="en-US" sz="1600" b="1">
-              <a:solidFill>
-                <a:srgbClr val="C00000"/>
-              </a:solidFill>
-            </a:endParaRPr>
-          </a:p>
-        </p:txBody>
-      </p:sp>
-      <p:pic>
-        <p:nvPicPr>
-          <p:cNvPr id="61" name="图片 60"/>
-          <p:cNvPicPr>
-            <a:picLocks noChangeAspect="1"/>
-          </p:cNvPicPr>
-          <p:nvPr/>
-        </p:nvPicPr>
-        <p:blipFill>
-          <a:blip r:embed="rId9"/>
-          <a:stretch>
-            <a:fillRect/>
-          </a:stretch>
-        </p:blipFill>
-        <p:spPr>
-          <a:xfrm>
-            <a:off x="6029960" y="2414270"/>
-            <a:ext cx="459988" cy="414000"/>
-          </a:xfrm>
-          <a:prstGeom prst="rect">
-            <a:avLst/>
-          </a:prstGeom>
-        </p:spPr>
-      </p:pic>
-      <p:pic>
-        <p:nvPicPr>
-          <p:cNvPr id="63" name="图片 62"/>
-          <p:cNvPicPr>
-            <a:picLocks noChangeAspect="1"/>
-          </p:cNvPicPr>
-          <p:nvPr/>
-        </p:nvPicPr>
-        <p:blipFill>
-          <a:blip r:embed="rId9"/>
-          <a:stretch>
-            <a:fillRect/>
-          </a:stretch>
-        </p:blipFill>
-        <p:spPr>
-          <a:xfrm>
-            <a:off x="6136005" y="2520315"/>
-            <a:ext cx="459988" cy="414000"/>
-          </a:xfrm>
-          <a:prstGeom prst="rect">
-            <a:avLst/>
-          </a:prstGeom>
-        </p:spPr>
-      </p:pic>
-      <p:pic>
-        <p:nvPicPr>
-          <p:cNvPr id="64" name="图片 63"/>
-          <p:cNvPicPr>
-            <a:picLocks noChangeAspect="1"/>
-          </p:cNvPicPr>
-          <p:nvPr/>
-        </p:nvPicPr>
-        <p:blipFill>
-          <a:blip r:embed="rId9"/>
-          <a:stretch>
-            <a:fillRect/>
-          </a:stretch>
-        </p:blipFill>
-        <p:spPr>
-          <a:xfrm>
-            <a:off x="6242050" y="2626360"/>
-            <a:ext cx="459988" cy="414000"/>
-          </a:xfrm>
-          <a:prstGeom prst="rect">
-            <a:avLst/>
-          </a:prstGeom>
-        </p:spPr>
-      </p:pic>
-      <p:sp>
-        <p:nvSpPr>
-          <p:cNvPr id="65" name="文本框 64"/>
-          <p:cNvSpPr txBox="1"/>
-          <p:nvPr/>
-        </p:nvSpPr>
-        <p:spPr>
-          <a:xfrm>
-            <a:off x="5981065" y="3046095"/>
-            <a:ext cx="876935" cy="275590"/>
-          </a:xfrm>
-          <a:prstGeom prst="rect">
-            <a:avLst/>
-          </a:prstGeom>
-          <a:noFill/>
-        </p:spPr>
-        <p:txBody>
-          <a:bodyPr wrap="square" rtlCol="0">
-            <a:spAutoFit/>
-          </a:bodyPr>
-          <a:p>
             <a:r>
               <a:rPr lang="zh-CN" altLang="en-US" sz="1200" b="1"/>
               <a:t>证据</a:t>
@@ -5662,45 +5196,6 @@
               <a:t>窗口</a:t>
             </a:r>
             <a:endParaRPr lang="zh-CN" altLang="en-US" sz="1200" b="1"/>
-          </a:p>
-        </p:txBody>
-      </p:sp>
-      <p:sp>
-        <p:nvSpPr>
-          <p:cNvPr id="66" name="梯形 65"/>
-          <p:cNvSpPr/>
-          <p:nvPr/>
-        </p:nvSpPr>
-        <p:spPr>
-          <a:xfrm rot="5400000">
-            <a:off x="6882130" y="2590800"/>
-            <a:ext cx="511810" cy="321945"/>
-          </a:xfrm>
-          <a:prstGeom prst="trapezoid">
-            <a:avLst/>
-          </a:prstGeom>
-        </p:spPr>
-        <p:style>
-          <a:lnRef idx="2">
-            <a:schemeClr val="accent1">
-              <a:lumMod val="75000"/>
-            </a:schemeClr>
-          </a:lnRef>
-          <a:fillRef idx="1">
-            <a:schemeClr val="accent1"/>
-          </a:fillRef>
-          <a:effectRef idx="0">
-            <a:srgbClr val="FFFFFF"/>
-          </a:effectRef>
-          <a:fontRef idx="minor">
-            <a:schemeClr val="lt1"/>
-          </a:fontRef>
-        </p:style>
-        <p:txBody>
-          <a:bodyPr rtlCol="0" anchor="ctr"/>
-          <a:p>
-            <a:pPr algn="ctr"/>
-            <a:endParaRPr lang="zh-CN" altLang="en-US"/>
           </a:p>
         </p:txBody>
       </p:sp>
@@ -5712,10 +5207,10 @@
         </p:nvGrpSpPr>
         <p:grpSpPr>
           <a:xfrm>
-            <a:off x="7562850" y="2463165"/>
-            <a:ext cx="408183" cy="546662"/>
+            <a:off x="7570470" y="4917440"/>
+            <a:ext cx="408305" cy="450631"/>
             <a:chOff x="11770" y="3305"/>
-            <a:chExt cx="795" cy="973"/>
+            <a:chExt cx="795" cy="1147"/>
           </a:xfrm>
         </p:grpSpPr>
         <p:sp>
@@ -6132,7 +5627,7 @@
           <p:spPr>
             <a:xfrm>
               <a:off x="11941" y="3731"/>
-              <a:ext cx="452" cy="504"/>
+              <a:ext cx="452" cy="721"/>
             </a:xfrm>
             <a:prstGeom prst="rect">
               <a:avLst/>
@@ -6190,7 +5685,7 @@
         </p:nvSpPr>
         <p:spPr>
           <a:xfrm>
-            <a:off x="6797040" y="3053080"/>
+            <a:off x="7034530" y="4898708"/>
             <a:ext cx="651510" cy="275590"/>
           </a:xfrm>
           <a:prstGeom prst="rect">
@@ -6205,11 +5700,7 @@
           <a:p>
             <a:r>
               <a:rPr lang="zh-CN" altLang="en-US" sz="1200" b="1"/>
-              <a:t>表征</a:t>
-            </a:r>
-            <a:r>
-              <a:rPr lang="zh-CN" altLang="en-US" sz="1200" b="1"/>
-              <a:t>器</a:t>
+              <a:t>编码</a:t>
             </a:r>
             <a:endParaRPr lang="zh-CN" altLang="en-US" sz="1200" b="1"/>
           </a:p>
@@ -6223,7 +5714,7 @@
         </p:nvSpPr>
         <p:spPr>
           <a:xfrm>
-            <a:off x="7472680" y="3046095"/>
+            <a:off x="7506970" y="5368290"/>
             <a:ext cx="601980" cy="275590"/>
           </a:xfrm>
           <a:prstGeom prst="rect">
@@ -6246,14 +5737,14 @@
       </p:sp>
       <p:sp>
         <p:nvSpPr>
-          <p:cNvPr id="82" name="下箭头 81"/>
+          <p:cNvPr id="83" name="下箭头 82"/>
           <p:cNvSpPr/>
           <p:nvPr/>
         </p:nvSpPr>
         <p:spPr>
           <a:xfrm rot="16200000">
-            <a:off x="6800815" y="2659525"/>
-            <a:ext cx="72000" cy="216000"/>
+            <a:off x="7252312" y="5018428"/>
+            <a:ext cx="121285" cy="360000"/>
           </a:xfrm>
           <a:prstGeom prst="downArrow">
             <a:avLst>
@@ -6287,123 +5778,470 @@
           </a:fontRef>
         </p:style>
         <p:txBody>
-          <a:bodyPr rtlCol="0" anchor="ctr"/>
+          <a:bodyPr rIns="36195" rtlCol="0" anchor="ctr"/>
           <a:p>
             <a:pPr algn="ctr"/>
             <a:endParaRPr lang="zh-CN" altLang="en-US"/>
           </a:p>
         </p:txBody>
       </p:sp>
-      <p:sp>
-        <p:nvSpPr>
-          <p:cNvPr id="83" name="下箭头 82"/>
-          <p:cNvSpPr/>
+      <p:grpSp>
+        <p:nvGrpSpPr>
+          <p:cNvPr id="135" name="组合 134"/>
+          <p:cNvGrpSpPr>
+            <a:grpSpLocks noChangeAspect="1"/>
+          </p:cNvGrpSpPr>
           <p:nvPr/>
-        </p:nvSpPr>
-        <p:spPr>
-          <a:xfrm rot="16200000">
-            <a:off x="7397715" y="2659525"/>
-            <a:ext cx="72000" cy="216000"/>
-          </a:xfrm>
-          <a:prstGeom prst="downArrow">
-            <a:avLst>
-              <a:gd name="adj1" fmla="val 31764"/>
-              <a:gd name="adj2" fmla="val 80588"/>
-            </a:avLst>
-          </a:prstGeom>
-          <a:solidFill>
-            <a:schemeClr val="tx1"/>
-          </a:solidFill>
-          <a:ln>
+        </p:nvGrpSpPr>
+        <p:grpSpPr>
+          <a:xfrm>
+            <a:off x="6817995" y="4170680"/>
+            <a:ext cx="736600" cy="536202"/>
+            <a:chOff x="13654" y="7066"/>
+            <a:chExt cx="1049" cy="1049"/>
+          </a:xfrm>
+        </p:grpSpPr>
+        <p:sp>
+          <p:nvSpPr>
+            <p:cNvPr id="86" name="圆角矩形 85"/>
+            <p:cNvSpPr>
+              <a:spLocks noChangeAspect="1"/>
+            </p:cNvSpPr>
+            <p:nvPr/>
+          </p:nvSpPr>
+          <p:spPr>
+            <a:xfrm>
+              <a:off x="13654" y="7066"/>
+              <a:ext cx="1049" cy="1049"/>
+            </a:xfrm>
+            <a:prstGeom prst="roundRect">
+              <a:avLst/>
+            </a:prstGeom>
             <a:solidFill>
-              <a:schemeClr val="tx1"/>
+              <a:schemeClr val="bg1"/>
             </a:solidFill>
-          </a:ln>
-        </p:spPr>
-        <p:style>
-          <a:lnRef idx="2">
-            <a:schemeClr val="accent1">
-              <a:lumMod val="75000"/>
-            </a:schemeClr>
-          </a:lnRef>
-          <a:fillRef idx="1">
-            <a:schemeClr val="accent1"/>
-          </a:fillRef>
-          <a:effectRef idx="0">
-            <a:srgbClr val="FFFFFF"/>
-          </a:effectRef>
-          <a:fontRef idx="minor">
-            <a:schemeClr val="lt1"/>
-          </a:fontRef>
-        </p:style>
-        <p:txBody>
-          <a:bodyPr rtlCol="0" anchor="ctr"/>
-          <a:p>
-            <a:pPr algn="ctr"/>
-            <a:endParaRPr lang="zh-CN" altLang="en-US"/>
-          </a:p>
-        </p:txBody>
-      </p:sp>
-      <p:sp>
-        <p:nvSpPr>
-          <p:cNvPr id="84" name="下箭头 83"/>
-          <p:cNvSpPr/>
-          <p:nvPr/>
-        </p:nvSpPr>
-        <p:spPr>
-          <a:xfrm>
-            <a:off x="6939673" y="3341370"/>
-            <a:ext cx="107950" cy="320040"/>
-          </a:xfrm>
-          <a:prstGeom prst="downArrow">
-            <a:avLst>
-              <a:gd name="adj1" fmla="val 31764"/>
-              <a:gd name="adj2" fmla="val 80588"/>
-            </a:avLst>
-          </a:prstGeom>
-          <a:solidFill>
-            <a:srgbClr val="2E54A1"/>
-          </a:solidFill>
-          <a:ln>
+            <a:ln w="22225"/>
+          </p:spPr>
+          <p:style>
+            <a:lnRef idx="2">
+              <a:schemeClr val="accent1">
+                <a:lumMod val="75000"/>
+              </a:schemeClr>
+            </a:lnRef>
+            <a:fillRef idx="1">
+              <a:schemeClr val="accent1"/>
+            </a:fillRef>
+            <a:effectRef idx="0">
+              <a:srgbClr val="FFFFFF"/>
+            </a:effectRef>
+            <a:fontRef idx="minor">
+              <a:schemeClr val="lt1"/>
+            </a:fontRef>
+          </p:style>
+          <p:txBody>
+            <a:bodyPr rtlCol="0" anchor="ctr"/>
+            <a:p>
+              <a:pPr algn="ctr"/>
+              <a:endParaRPr lang="zh-CN" altLang="en-US"/>
+            </a:p>
+          </p:txBody>
+        </p:sp>
+        <p:sp>
+          <p:nvSpPr>
+            <p:cNvPr id="87" name="圆角矩形 86"/>
+            <p:cNvSpPr>
+              <a:spLocks noChangeAspect="1"/>
+            </p:cNvSpPr>
+            <p:nvPr/>
+          </p:nvSpPr>
+          <p:spPr>
+            <a:xfrm>
+              <a:off x="13732" y="7155"/>
+              <a:ext cx="340" cy="340"/>
+            </a:xfrm>
+            <a:prstGeom prst="roundRect">
+              <a:avLst/>
+            </a:prstGeom>
             <a:solidFill>
-              <a:srgbClr val="2E54A1"/>
+              <a:schemeClr val="accent2">
+                <a:lumMod val="60000"/>
+                <a:lumOff val="40000"/>
+              </a:schemeClr>
             </a:solidFill>
-          </a:ln>
-        </p:spPr>
-        <p:style>
-          <a:lnRef idx="2">
-            <a:schemeClr val="accent1">
-              <a:lumMod val="75000"/>
-            </a:schemeClr>
-          </a:lnRef>
-          <a:fillRef idx="1">
-            <a:schemeClr val="accent1"/>
-          </a:fillRef>
-          <a:effectRef idx="0">
-            <a:srgbClr val="FFFFFF"/>
-          </a:effectRef>
-          <a:fontRef idx="minor">
-            <a:schemeClr val="lt1"/>
-          </a:fontRef>
-        </p:style>
-        <p:txBody>
-          <a:bodyPr rtlCol="0" anchor="ctr"/>
-          <a:p>
-            <a:pPr algn="ctr"/>
-            <a:endParaRPr lang="zh-CN" altLang="en-US"/>
-          </a:p>
-        </p:txBody>
-      </p:sp>
-      <p:sp>
-        <p:nvSpPr>
-          <p:cNvPr id="85" name="文本框 84"/>
+          </p:spPr>
+          <p:style>
+            <a:lnRef idx="2">
+              <a:schemeClr val="accent1">
+                <a:lumMod val="75000"/>
+              </a:schemeClr>
+            </a:lnRef>
+            <a:fillRef idx="1">
+              <a:schemeClr val="accent1"/>
+            </a:fillRef>
+            <a:effectRef idx="0">
+              <a:srgbClr val="FFFFFF"/>
+            </a:effectRef>
+            <a:fontRef idx="minor">
+              <a:schemeClr val="lt1"/>
+            </a:fontRef>
+          </p:style>
+          <p:txBody>
+            <a:bodyPr rtlCol="0" anchor="ctr"/>
+            <a:p>
+              <a:pPr algn="ctr"/>
+              <a:r>
+                <a:rPr lang="en-US" altLang="zh-CN" sz="1200">
+                  <a:solidFill>
+                    <a:schemeClr val="tx1"/>
+                  </a:solidFill>
+                </a:rPr>
+                <a:t>P</a:t>
+              </a:r>
+              <a:endParaRPr lang="en-US" altLang="zh-CN" sz="1200">
+                <a:solidFill>
+                  <a:schemeClr val="tx1"/>
+                </a:solidFill>
+              </a:endParaRPr>
+            </a:p>
+          </p:txBody>
+        </p:sp>
+        <p:sp>
+          <p:nvSpPr>
+            <p:cNvPr id="88" name="圆角矩形 87"/>
+            <p:cNvSpPr>
+              <a:spLocks noChangeAspect="1"/>
+            </p:cNvSpPr>
+            <p:nvPr/>
+          </p:nvSpPr>
+          <p:spPr>
+            <a:xfrm>
+              <a:off x="14272" y="7155"/>
+              <a:ext cx="340" cy="340"/>
+            </a:xfrm>
+            <a:prstGeom prst="roundRect">
+              <a:avLst/>
+            </a:prstGeom>
+            <a:solidFill>
+              <a:schemeClr val="accent4">
+                <a:lumMod val="60000"/>
+                <a:lumOff val="40000"/>
+              </a:schemeClr>
+            </a:solidFill>
+          </p:spPr>
+          <p:style>
+            <a:lnRef idx="2">
+              <a:schemeClr val="accent1">
+                <a:lumMod val="75000"/>
+              </a:schemeClr>
+            </a:lnRef>
+            <a:fillRef idx="1">
+              <a:schemeClr val="accent1"/>
+            </a:fillRef>
+            <a:effectRef idx="0">
+              <a:srgbClr val="FFFFFF"/>
+            </a:effectRef>
+            <a:fontRef idx="minor">
+              <a:schemeClr val="lt1"/>
+            </a:fontRef>
+          </p:style>
+          <p:txBody>
+            <a:bodyPr rtlCol="0" anchor="ctr"/>
+            <a:p>
+              <a:pPr algn="ctr"/>
+              <a:r>
+                <a:rPr lang="en-US" altLang="zh-CN" sz="1200">
+                  <a:solidFill>
+                    <a:schemeClr val="tx1"/>
+                  </a:solidFill>
+                </a:rPr>
+                <a:t>U</a:t>
+              </a:r>
+              <a:endParaRPr lang="en-US" altLang="zh-CN" sz="1200">
+                <a:solidFill>
+                  <a:schemeClr val="tx1"/>
+                </a:solidFill>
+              </a:endParaRPr>
+            </a:p>
+          </p:txBody>
+        </p:sp>
+        <p:sp>
+          <p:nvSpPr>
+            <p:cNvPr id="89" name="圆角矩形 88"/>
+            <p:cNvSpPr>
+              <a:spLocks noChangeAspect="1"/>
+            </p:cNvSpPr>
+            <p:nvPr/>
+          </p:nvSpPr>
+          <p:spPr>
+            <a:xfrm>
+              <a:off x="13732" y="7692"/>
+              <a:ext cx="340" cy="340"/>
+            </a:xfrm>
+            <a:prstGeom prst="roundRect">
+              <a:avLst/>
+            </a:prstGeom>
+            <a:solidFill>
+              <a:schemeClr val="tx2">
+                <a:lumMod val="60000"/>
+                <a:lumOff val="40000"/>
+              </a:schemeClr>
+            </a:solidFill>
+          </p:spPr>
+          <p:style>
+            <a:lnRef idx="2">
+              <a:schemeClr val="accent1">
+                <a:lumMod val="75000"/>
+              </a:schemeClr>
+            </a:lnRef>
+            <a:fillRef idx="1">
+              <a:schemeClr val="accent1"/>
+            </a:fillRef>
+            <a:effectRef idx="0">
+              <a:srgbClr val="FFFFFF"/>
+            </a:effectRef>
+            <a:fontRef idx="minor">
+              <a:schemeClr val="lt1"/>
+            </a:fontRef>
+          </p:style>
+          <p:txBody>
+            <a:bodyPr rtlCol="0" anchor="ctr"/>
+            <a:p>
+              <a:pPr algn="ctr"/>
+              <a:endParaRPr lang="zh-CN" altLang="en-US"/>
+            </a:p>
+          </p:txBody>
+        </p:sp>
+        <p:sp>
+          <p:nvSpPr>
+            <p:cNvPr id="90" name="圆角矩形 89"/>
+            <p:cNvSpPr>
+              <a:spLocks noChangeAspect="1"/>
+            </p:cNvSpPr>
+            <p:nvPr/>
+          </p:nvSpPr>
+          <p:spPr>
+            <a:xfrm>
+              <a:off x="14272" y="7692"/>
+              <a:ext cx="340" cy="340"/>
+            </a:xfrm>
+            <a:prstGeom prst="roundRect">
+              <a:avLst/>
+            </a:prstGeom>
+            <a:solidFill>
+              <a:schemeClr val="bg1">
+                <a:lumMod val="75000"/>
+              </a:schemeClr>
+            </a:solidFill>
+          </p:spPr>
+          <p:style>
+            <a:lnRef idx="2">
+              <a:schemeClr val="accent1">
+                <a:lumMod val="75000"/>
+              </a:schemeClr>
+            </a:lnRef>
+            <a:fillRef idx="1">
+              <a:schemeClr val="accent1"/>
+            </a:fillRef>
+            <a:effectRef idx="0">
+              <a:srgbClr val="FFFFFF"/>
+            </a:effectRef>
+            <a:fontRef idx="minor">
+              <a:schemeClr val="lt1"/>
+            </a:fontRef>
+          </p:style>
+          <p:txBody>
+            <a:bodyPr rtlCol="0" anchor="ctr"/>
+            <a:p>
+              <a:pPr algn="ctr"/>
+              <a:endParaRPr lang="zh-CN" altLang="en-US"/>
+            </a:p>
+          </p:txBody>
+        </p:sp>
+        <p:sp>
+          <p:nvSpPr>
+            <p:cNvPr id="91" name="文本框 90"/>
+            <p:cNvSpPr txBox="1"/>
+            <p:nvPr/>
+          </p:nvSpPr>
+          <p:spPr>
+            <a:xfrm>
+              <a:off x="13678" y="7474"/>
+              <a:ext cx="452" cy="329"/>
+            </a:xfrm>
+            <a:prstGeom prst="rect">
+              <a:avLst/>
+            </a:prstGeom>
+            <a:noFill/>
+          </p:spPr>
+          <p:txBody>
+            <a:bodyPr wrap="square" rtlCol="0">
+              <a:spAutoFit/>
+            </a:bodyPr>
+            <a:p>
+              <a:pPr indent="0" algn="ctr" fontAlgn="auto">
+                <a:lnSpc>
+                  <a:spcPts val="200"/>
+                </a:lnSpc>
+              </a:pPr>
+              <a:r>
+                <a:rPr lang="en-US" altLang="zh-CN" sz="1000" b="1"/>
+                <a:t>.</a:t>
+              </a:r>
+              <a:endParaRPr lang="en-US" altLang="zh-CN" sz="1000" b="1"/>
+            </a:p>
+            <a:p>
+              <a:pPr indent="0" algn="ctr" fontAlgn="auto">
+                <a:lnSpc>
+                  <a:spcPts val="200"/>
+                </a:lnSpc>
+              </a:pPr>
+              <a:r>
+                <a:rPr lang="en-US" altLang="zh-CN" sz="1000" b="1"/>
+                <a:t>.</a:t>
+              </a:r>
+              <a:endParaRPr lang="en-US" altLang="zh-CN" sz="1000" b="1"/>
+            </a:p>
+            <a:p>
+              <a:pPr indent="0" algn="ctr" fontAlgn="auto">
+                <a:lnSpc>
+                  <a:spcPts val="200"/>
+                </a:lnSpc>
+              </a:pPr>
+              <a:r>
+                <a:rPr lang="en-US" altLang="zh-CN" sz="1000" b="1"/>
+                <a:t>.</a:t>
+              </a:r>
+              <a:endParaRPr lang="en-US" altLang="zh-CN" sz="1000" b="1"/>
+            </a:p>
+          </p:txBody>
+        </p:sp>
+        <p:sp>
+          <p:nvSpPr>
+            <p:cNvPr id="92" name="文本框 91"/>
+            <p:cNvSpPr txBox="1"/>
+            <p:nvPr/>
+          </p:nvSpPr>
+          <p:spPr>
+            <a:xfrm>
+              <a:off x="14216" y="7474"/>
+              <a:ext cx="452" cy="329"/>
+            </a:xfrm>
+            <a:prstGeom prst="rect">
+              <a:avLst/>
+            </a:prstGeom>
+            <a:noFill/>
+          </p:spPr>
+          <p:txBody>
+            <a:bodyPr wrap="square" rtlCol="0">
+              <a:spAutoFit/>
+            </a:bodyPr>
+            <a:p>
+              <a:pPr indent="0" algn="ctr" fontAlgn="auto">
+                <a:lnSpc>
+                  <a:spcPts val="200"/>
+                </a:lnSpc>
+              </a:pPr>
+              <a:r>
+                <a:rPr lang="en-US" altLang="zh-CN" sz="1000" b="1"/>
+                <a:t>.</a:t>
+              </a:r>
+              <a:endParaRPr lang="en-US" altLang="zh-CN" sz="1000" b="1"/>
+            </a:p>
+            <a:p>
+              <a:pPr indent="0" algn="ctr" fontAlgn="auto">
+                <a:lnSpc>
+                  <a:spcPts val="200"/>
+                </a:lnSpc>
+              </a:pPr>
+              <a:r>
+                <a:rPr lang="en-US" altLang="zh-CN" sz="1000" b="1"/>
+                <a:t>.</a:t>
+              </a:r>
+              <a:endParaRPr lang="en-US" altLang="zh-CN" sz="1000" b="1"/>
+            </a:p>
+            <a:p>
+              <a:pPr indent="0" algn="ctr" fontAlgn="auto">
+                <a:lnSpc>
+                  <a:spcPts val="200"/>
+                </a:lnSpc>
+              </a:pPr>
+              <a:r>
+                <a:rPr lang="en-US" altLang="zh-CN" sz="1000" b="1"/>
+                <a:t>.</a:t>
+              </a:r>
+              <a:endParaRPr lang="en-US" altLang="zh-CN" sz="1000" b="1"/>
+            </a:p>
+          </p:txBody>
+        </p:sp>
+        <p:sp>
+          <p:nvSpPr>
+            <p:cNvPr id="93" name="文本框 92"/>
+            <p:cNvSpPr txBox="1"/>
+            <p:nvPr/>
+          </p:nvSpPr>
+          <p:spPr>
+            <a:xfrm rot="5400000">
+              <a:off x="13934" y="7715"/>
+              <a:ext cx="452" cy="240"/>
+            </a:xfrm>
+            <a:prstGeom prst="rect">
+              <a:avLst/>
+            </a:prstGeom>
+            <a:noFill/>
+          </p:spPr>
+          <p:txBody>
+            <a:bodyPr wrap="square" rtlCol="0">
+              <a:spAutoFit/>
+            </a:bodyPr>
+            <a:p>
+              <a:pPr indent="0" algn="ctr" fontAlgn="auto">
+                <a:lnSpc>
+                  <a:spcPts val="200"/>
+                </a:lnSpc>
+              </a:pPr>
+              <a:r>
+                <a:rPr lang="en-US" altLang="zh-CN" sz="1000" b="1"/>
+                <a:t>.</a:t>
+              </a:r>
+              <a:endParaRPr lang="en-US" altLang="zh-CN" sz="1000" b="1"/>
+            </a:p>
+            <a:p>
+              <a:pPr indent="0" algn="ctr" fontAlgn="auto">
+                <a:lnSpc>
+                  <a:spcPts val="200"/>
+                </a:lnSpc>
+              </a:pPr>
+              <a:r>
+                <a:rPr lang="en-US" altLang="zh-CN" sz="1000" b="1"/>
+                <a:t>.</a:t>
+              </a:r>
+              <a:endParaRPr lang="en-US" altLang="zh-CN" sz="1000" b="1"/>
+            </a:p>
+            <a:p>
+              <a:pPr indent="0" algn="ctr" fontAlgn="auto">
+                <a:lnSpc>
+                  <a:spcPts val="200"/>
+                </a:lnSpc>
+              </a:pPr>
+              <a:r>
+                <a:rPr lang="en-US" altLang="zh-CN" sz="1000" b="1"/>
+                <a:t>.</a:t>
+              </a:r>
+              <a:endParaRPr lang="en-US" altLang="zh-CN" sz="1000" b="1"/>
+            </a:p>
+          </p:txBody>
+        </p:sp>
+      </p:grpSp>
+      <p:sp>
+        <p:nvSpPr>
+          <p:cNvPr id="100" name="文本框 99"/>
           <p:cNvSpPr txBox="1"/>
           <p:nvPr/>
         </p:nvSpPr>
         <p:spPr>
           <a:xfrm>
-            <a:off x="5842075" y="3709670"/>
-            <a:ext cx="2303145" cy="337185"/>
+            <a:off x="6036310" y="2790190"/>
+            <a:ext cx="664210" cy="275590"/>
           </a:xfrm>
           <a:prstGeom prst="rect">
             <a:avLst/>
@@ -6417,827 +6255,8 @@
           <a:p>
             <a:pPr algn="ctr"/>
             <a:r>
-              <a:rPr lang="zh-CN" altLang="en-US" sz="1600" b="1">
-                <a:solidFill>
-                  <a:srgbClr val="C00000"/>
-                </a:solidFill>
-              </a:rPr>
-              <a:t>非负</a:t>
-            </a:r>
-            <a:r>
-              <a:rPr lang="en-US" altLang="zh-CN" sz="1600" b="1">
-                <a:solidFill>
-                  <a:srgbClr val="C00000"/>
-                </a:solidFill>
-              </a:rPr>
-              <a:t>PU</a:t>
-            </a:r>
-            <a:r>
-              <a:rPr lang="zh-CN" altLang="en-US" sz="1600" b="1">
-                <a:solidFill>
-                  <a:srgbClr val="C00000"/>
-                </a:solidFill>
-              </a:rPr>
-              <a:t>风险学</a:t>
-            </a:r>
-            <a:r>
-              <a:rPr lang="zh-CN" altLang="en-US" sz="1600" b="1">
-                <a:solidFill>
-                  <a:srgbClr val="C00000"/>
-                </a:solidFill>
-              </a:rPr>
-              <a:t>习</a:t>
-            </a:r>
-            <a:endParaRPr lang="zh-CN" altLang="en-US" sz="1600" b="1">
-              <a:solidFill>
-                <a:srgbClr val="C00000"/>
-              </a:solidFill>
-            </a:endParaRPr>
-          </a:p>
-        </p:txBody>
-      </p:sp>
-      <p:sp>
-        <p:nvSpPr>
-          <p:cNvPr id="86" name="圆角矩形 85"/>
-          <p:cNvSpPr>
-            <a:spLocks noChangeAspect="1"/>
-          </p:cNvSpPr>
-          <p:nvPr/>
-        </p:nvSpPr>
-        <p:spPr>
-          <a:xfrm>
-            <a:off x="6170930" y="4050665"/>
-            <a:ext cx="666000" cy="666000"/>
-          </a:xfrm>
-          <a:prstGeom prst="roundRect">
-            <a:avLst/>
-          </a:prstGeom>
-          <a:solidFill>
-            <a:schemeClr val="bg1"/>
-          </a:solidFill>
-          <a:ln w="22225"/>
-        </p:spPr>
-        <p:style>
-          <a:lnRef idx="2">
-            <a:schemeClr val="accent1">
-              <a:lumMod val="75000"/>
-            </a:schemeClr>
-          </a:lnRef>
-          <a:fillRef idx="1">
-            <a:schemeClr val="accent1"/>
-          </a:fillRef>
-          <a:effectRef idx="0">
-            <a:srgbClr val="FFFFFF"/>
-          </a:effectRef>
-          <a:fontRef idx="minor">
-            <a:schemeClr val="lt1"/>
-          </a:fontRef>
-        </p:style>
-        <p:txBody>
-          <a:bodyPr rtlCol="0" anchor="ctr"/>
-          <a:p>
-            <a:pPr algn="ctr"/>
-            <a:endParaRPr lang="zh-CN" altLang="en-US"/>
-          </a:p>
-        </p:txBody>
-      </p:sp>
-      <p:sp>
-        <p:nvSpPr>
-          <p:cNvPr id="87" name="圆角矩形 86"/>
-          <p:cNvSpPr>
-            <a:spLocks noChangeAspect="1"/>
-          </p:cNvSpPr>
-          <p:nvPr/>
-        </p:nvSpPr>
-        <p:spPr>
-          <a:xfrm>
-            <a:off x="6220460" y="4107180"/>
-            <a:ext cx="216000" cy="216000"/>
-          </a:xfrm>
-          <a:prstGeom prst="roundRect">
-            <a:avLst/>
-          </a:prstGeom>
-          <a:solidFill>
-            <a:schemeClr val="accent2">
-              <a:lumMod val="60000"/>
-              <a:lumOff val="40000"/>
-            </a:schemeClr>
-          </a:solidFill>
-        </p:spPr>
-        <p:style>
-          <a:lnRef idx="2">
-            <a:schemeClr val="accent1">
-              <a:lumMod val="75000"/>
-            </a:schemeClr>
-          </a:lnRef>
-          <a:fillRef idx="1">
-            <a:schemeClr val="accent1"/>
-          </a:fillRef>
-          <a:effectRef idx="0">
-            <a:srgbClr val="FFFFFF"/>
-          </a:effectRef>
-          <a:fontRef idx="minor">
-            <a:schemeClr val="lt1"/>
-          </a:fontRef>
-        </p:style>
-        <p:txBody>
-          <a:bodyPr rtlCol="0" anchor="ctr"/>
-          <a:p>
-            <a:pPr algn="ctr"/>
-            <a:r>
-              <a:rPr lang="en-US" altLang="zh-CN" sz="1200">
-                <a:solidFill>
-                  <a:schemeClr val="tx1"/>
-                </a:solidFill>
-              </a:rPr>
-              <a:t>P</a:t>
-            </a:r>
-            <a:endParaRPr lang="en-US" altLang="zh-CN" sz="1200">
-              <a:solidFill>
-                <a:schemeClr val="tx1"/>
-              </a:solidFill>
-            </a:endParaRPr>
-          </a:p>
-        </p:txBody>
-      </p:sp>
-      <p:sp>
-        <p:nvSpPr>
-          <p:cNvPr id="88" name="圆角矩形 87"/>
-          <p:cNvSpPr>
-            <a:spLocks noChangeAspect="1"/>
-          </p:cNvSpPr>
-          <p:nvPr/>
-        </p:nvSpPr>
-        <p:spPr>
-          <a:xfrm>
-            <a:off x="6563360" y="4107180"/>
-            <a:ext cx="216000" cy="216000"/>
-          </a:xfrm>
-          <a:prstGeom prst="roundRect">
-            <a:avLst/>
-          </a:prstGeom>
-          <a:solidFill>
-            <a:schemeClr val="accent4">
-              <a:lumMod val="60000"/>
-              <a:lumOff val="40000"/>
-            </a:schemeClr>
-          </a:solidFill>
-        </p:spPr>
-        <p:style>
-          <a:lnRef idx="2">
-            <a:schemeClr val="accent1">
-              <a:lumMod val="75000"/>
-            </a:schemeClr>
-          </a:lnRef>
-          <a:fillRef idx="1">
-            <a:schemeClr val="accent1"/>
-          </a:fillRef>
-          <a:effectRef idx="0">
-            <a:srgbClr val="FFFFFF"/>
-          </a:effectRef>
-          <a:fontRef idx="minor">
-            <a:schemeClr val="lt1"/>
-          </a:fontRef>
-        </p:style>
-        <p:txBody>
-          <a:bodyPr rtlCol="0" anchor="ctr"/>
-          <a:p>
-            <a:pPr algn="ctr"/>
-            <a:r>
-              <a:rPr lang="en-US" altLang="zh-CN" sz="1200">
-                <a:solidFill>
-                  <a:schemeClr val="tx1"/>
-                </a:solidFill>
-              </a:rPr>
-              <a:t>U</a:t>
-            </a:r>
-            <a:endParaRPr lang="en-US" altLang="zh-CN" sz="1200">
-              <a:solidFill>
-                <a:schemeClr val="tx1"/>
-              </a:solidFill>
-            </a:endParaRPr>
-          </a:p>
-        </p:txBody>
-      </p:sp>
-      <p:sp>
-        <p:nvSpPr>
-          <p:cNvPr id="89" name="圆角矩形 88"/>
-          <p:cNvSpPr>
-            <a:spLocks noChangeAspect="1"/>
-          </p:cNvSpPr>
-          <p:nvPr/>
-        </p:nvSpPr>
-        <p:spPr>
-          <a:xfrm>
-            <a:off x="6220460" y="4448175"/>
-            <a:ext cx="216000" cy="216000"/>
-          </a:xfrm>
-          <a:prstGeom prst="roundRect">
-            <a:avLst/>
-          </a:prstGeom>
-          <a:solidFill>
-            <a:schemeClr val="tx2">
-              <a:lumMod val="60000"/>
-              <a:lumOff val="40000"/>
-            </a:schemeClr>
-          </a:solidFill>
-        </p:spPr>
-        <p:style>
-          <a:lnRef idx="2">
-            <a:schemeClr val="accent1">
-              <a:lumMod val="75000"/>
-            </a:schemeClr>
-          </a:lnRef>
-          <a:fillRef idx="1">
-            <a:schemeClr val="accent1"/>
-          </a:fillRef>
-          <a:effectRef idx="0">
-            <a:srgbClr val="FFFFFF"/>
-          </a:effectRef>
-          <a:fontRef idx="minor">
-            <a:schemeClr val="lt1"/>
-          </a:fontRef>
-        </p:style>
-        <p:txBody>
-          <a:bodyPr rtlCol="0" anchor="ctr"/>
-          <a:p>
-            <a:pPr algn="ctr"/>
-            <a:endParaRPr lang="zh-CN" altLang="en-US"/>
-          </a:p>
-        </p:txBody>
-      </p:sp>
-      <p:sp>
-        <p:nvSpPr>
-          <p:cNvPr id="90" name="圆角矩形 89"/>
-          <p:cNvSpPr>
-            <a:spLocks noChangeAspect="1"/>
-          </p:cNvSpPr>
-          <p:nvPr/>
-        </p:nvSpPr>
-        <p:spPr>
-          <a:xfrm>
-            <a:off x="6563360" y="4448175"/>
-            <a:ext cx="216000" cy="216000"/>
-          </a:xfrm>
-          <a:prstGeom prst="roundRect">
-            <a:avLst/>
-          </a:prstGeom>
-          <a:solidFill>
-            <a:schemeClr val="bg1">
-              <a:lumMod val="75000"/>
-            </a:schemeClr>
-          </a:solidFill>
-        </p:spPr>
-        <p:style>
-          <a:lnRef idx="2">
-            <a:schemeClr val="accent1">
-              <a:lumMod val="75000"/>
-            </a:schemeClr>
-          </a:lnRef>
-          <a:fillRef idx="1">
-            <a:schemeClr val="accent1"/>
-          </a:fillRef>
-          <a:effectRef idx="0">
-            <a:srgbClr val="FFFFFF"/>
-          </a:effectRef>
-          <a:fontRef idx="minor">
-            <a:schemeClr val="lt1"/>
-          </a:fontRef>
-        </p:style>
-        <p:txBody>
-          <a:bodyPr rtlCol="0" anchor="ctr"/>
-          <a:p>
-            <a:pPr algn="ctr"/>
-            <a:endParaRPr lang="zh-CN" altLang="en-US"/>
-          </a:p>
-        </p:txBody>
-      </p:sp>
-      <p:sp>
-        <p:nvSpPr>
-          <p:cNvPr id="91" name="文本框 90"/>
-          <p:cNvSpPr txBox="1"/>
-          <p:nvPr/>
-        </p:nvSpPr>
-        <p:spPr>
-          <a:xfrm>
-            <a:off x="6186170" y="4309624"/>
-            <a:ext cx="287020" cy="168275"/>
-          </a:xfrm>
-          <a:prstGeom prst="rect">
-            <a:avLst/>
-          </a:prstGeom>
-          <a:noFill/>
-        </p:spPr>
-        <p:txBody>
-          <a:bodyPr wrap="square" rtlCol="0">
-            <a:spAutoFit/>
-          </a:bodyPr>
-          <a:p>
-            <a:pPr indent="0" algn="ctr" fontAlgn="auto">
-              <a:lnSpc>
-                <a:spcPts val="200"/>
-              </a:lnSpc>
-            </a:pPr>
-            <a:r>
-              <a:rPr lang="en-US" altLang="zh-CN" sz="1000" b="1"/>
-              <a:t>.</a:t>
-            </a:r>
-            <a:endParaRPr lang="en-US" altLang="zh-CN" sz="1000" b="1"/>
-          </a:p>
-          <a:p>
-            <a:pPr indent="0" algn="ctr" fontAlgn="auto">
-              <a:lnSpc>
-                <a:spcPts val="200"/>
-              </a:lnSpc>
-            </a:pPr>
-            <a:r>
-              <a:rPr lang="en-US" altLang="zh-CN" sz="1000" b="1"/>
-              <a:t>.</a:t>
-            </a:r>
-            <a:endParaRPr lang="en-US" altLang="zh-CN" sz="1000" b="1"/>
-          </a:p>
-          <a:p>
-            <a:pPr indent="0" algn="ctr" fontAlgn="auto">
-              <a:lnSpc>
-                <a:spcPts val="200"/>
-              </a:lnSpc>
-            </a:pPr>
-            <a:r>
-              <a:rPr lang="en-US" altLang="zh-CN" sz="1000" b="1"/>
-              <a:t>.</a:t>
-            </a:r>
-            <a:endParaRPr lang="en-US" altLang="zh-CN" sz="1000" b="1"/>
-          </a:p>
-        </p:txBody>
-      </p:sp>
-      <p:sp>
-        <p:nvSpPr>
-          <p:cNvPr id="92" name="文本框 91"/>
-          <p:cNvSpPr txBox="1"/>
-          <p:nvPr/>
-        </p:nvSpPr>
-        <p:spPr>
-          <a:xfrm>
-            <a:off x="6527800" y="4309624"/>
-            <a:ext cx="287020" cy="168275"/>
-          </a:xfrm>
-          <a:prstGeom prst="rect">
-            <a:avLst/>
-          </a:prstGeom>
-          <a:noFill/>
-        </p:spPr>
-        <p:txBody>
-          <a:bodyPr wrap="square" rtlCol="0">
-            <a:spAutoFit/>
-          </a:bodyPr>
-          <a:p>
-            <a:pPr indent="0" algn="ctr" fontAlgn="auto">
-              <a:lnSpc>
-                <a:spcPts val="200"/>
-              </a:lnSpc>
-            </a:pPr>
-            <a:r>
-              <a:rPr lang="en-US" altLang="zh-CN" sz="1000" b="1"/>
-              <a:t>.</a:t>
-            </a:r>
-            <a:endParaRPr lang="en-US" altLang="zh-CN" sz="1000" b="1"/>
-          </a:p>
-          <a:p>
-            <a:pPr indent="0" algn="ctr" fontAlgn="auto">
-              <a:lnSpc>
-                <a:spcPts val="200"/>
-              </a:lnSpc>
-            </a:pPr>
-            <a:r>
-              <a:rPr lang="en-US" altLang="zh-CN" sz="1000" b="1"/>
-              <a:t>.</a:t>
-            </a:r>
-            <a:endParaRPr lang="en-US" altLang="zh-CN" sz="1000" b="1"/>
-          </a:p>
-          <a:p>
-            <a:pPr indent="0" algn="ctr" fontAlgn="auto">
-              <a:lnSpc>
-                <a:spcPts val="200"/>
-              </a:lnSpc>
-            </a:pPr>
-            <a:r>
-              <a:rPr lang="en-US" altLang="zh-CN" sz="1000" b="1"/>
-              <a:t>.</a:t>
-            </a:r>
-            <a:endParaRPr lang="en-US" altLang="zh-CN" sz="1000" b="1"/>
-          </a:p>
-        </p:txBody>
-      </p:sp>
-      <p:sp>
-        <p:nvSpPr>
-          <p:cNvPr id="93" name="文本框 92"/>
-          <p:cNvSpPr txBox="1"/>
-          <p:nvPr/>
-        </p:nvSpPr>
-        <p:spPr>
-          <a:xfrm rot="5400000">
-            <a:off x="6348730" y="4473454"/>
-            <a:ext cx="287020" cy="168275"/>
-          </a:xfrm>
-          <a:prstGeom prst="rect">
-            <a:avLst/>
-          </a:prstGeom>
-          <a:noFill/>
-        </p:spPr>
-        <p:txBody>
-          <a:bodyPr wrap="square" rtlCol="0">
-            <a:spAutoFit/>
-          </a:bodyPr>
-          <a:p>
-            <a:pPr indent="0" algn="ctr" fontAlgn="auto">
-              <a:lnSpc>
-                <a:spcPts val="200"/>
-              </a:lnSpc>
-            </a:pPr>
-            <a:r>
-              <a:rPr lang="en-US" altLang="zh-CN" sz="1000" b="1"/>
-              <a:t>.</a:t>
-            </a:r>
-            <a:endParaRPr lang="en-US" altLang="zh-CN" sz="1000" b="1"/>
-          </a:p>
-          <a:p>
-            <a:pPr indent="0" algn="ctr" fontAlgn="auto">
-              <a:lnSpc>
-                <a:spcPts val="200"/>
-              </a:lnSpc>
-            </a:pPr>
-            <a:r>
-              <a:rPr lang="en-US" altLang="zh-CN" sz="1000" b="1"/>
-              <a:t>.</a:t>
-            </a:r>
-            <a:endParaRPr lang="en-US" altLang="zh-CN" sz="1000" b="1"/>
-          </a:p>
-          <a:p>
-            <a:pPr indent="0" algn="ctr" fontAlgn="auto">
-              <a:lnSpc>
-                <a:spcPts val="200"/>
-              </a:lnSpc>
-            </a:pPr>
-            <a:r>
-              <a:rPr lang="en-US" altLang="zh-CN" sz="1000" b="1"/>
-              <a:t>.</a:t>
-            </a:r>
-            <a:endParaRPr lang="en-US" altLang="zh-CN" sz="1000" b="1"/>
-          </a:p>
-        </p:txBody>
-      </p:sp>
-      <p:sp>
-        <p:nvSpPr>
-          <p:cNvPr id="94" name="文本框 93"/>
-          <p:cNvSpPr txBox="1"/>
-          <p:nvPr/>
-        </p:nvSpPr>
-        <p:spPr>
-          <a:xfrm>
-            <a:off x="6068060" y="4686935"/>
-            <a:ext cx="876935" cy="275590"/>
-          </a:xfrm>
-          <a:prstGeom prst="rect">
-            <a:avLst/>
-          </a:prstGeom>
-          <a:noFill/>
-        </p:spPr>
-        <p:txBody>
-          <a:bodyPr wrap="square" rtlCol="0">
-            <a:spAutoFit/>
-          </a:bodyPr>
-          <a:p>
-            <a:pPr algn="ctr"/>
-            <a:r>
-              <a:rPr lang="en-US" altLang="zh-CN" sz="1200" b="1"/>
-              <a:t>PU</a:t>
-            </a:r>
-            <a:r>
               <a:rPr lang="zh-CN" altLang="en-US" sz="1200" b="1"/>
-              <a:t>对数</a:t>
-            </a:r>
-            <a:endParaRPr lang="zh-CN" altLang="en-US" sz="1200" b="1"/>
-          </a:p>
-        </p:txBody>
-      </p:sp>
-      <p:sp>
-        <p:nvSpPr>
-          <p:cNvPr id="95" name="下箭头 94"/>
-          <p:cNvSpPr/>
-          <p:nvPr/>
-        </p:nvSpPr>
-        <p:spPr>
-          <a:xfrm rot="16200000">
-            <a:off x="7001695" y="4250175"/>
-            <a:ext cx="108000" cy="288000"/>
-          </a:xfrm>
-          <a:prstGeom prst="downArrow">
-            <a:avLst>
-              <a:gd name="adj1" fmla="val 31764"/>
-              <a:gd name="adj2" fmla="val 80588"/>
-            </a:avLst>
-          </a:prstGeom>
-          <a:solidFill>
-            <a:schemeClr val="tx1"/>
-          </a:solidFill>
-          <a:ln>
-            <a:solidFill>
-              <a:schemeClr val="tx1"/>
-            </a:solidFill>
-          </a:ln>
-        </p:spPr>
-        <p:style>
-          <a:lnRef idx="2">
-            <a:schemeClr val="accent1">
-              <a:lumMod val="75000"/>
-            </a:schemeClr>
-          </a:lnRef>
-          <a:fillRef idx="1">
-            <a:schemeClr val="accent1"/>
-          </a:fillRef>
-          <a:effectRef idx="0">
-            <a:srgbClr val="FFFFFF"/>
-          </a:effectRef>
-          <a:fontRef idx="minor">
-            <a:schemeClr val="lt1"/>
-          </a:fontRef>
-        </p:style>
-        <p:txBody>
-          <a:bodyPr rtlCol="0" anchor="ctr"/>
-          <a:p>
-            <a:pPr algn="ctr"/>
-            <a:endParaRPr lang="zh-CN" altLang="en-US"/>
-          </a:p>
-        </p:txBody>
-      </p:sp>
-      <p:graphicFrame>
-        <p:nvGraphicFramePr>
-          <p:cNvPr id="96" name="表格 95"/>
-          <p:cNvGraphicFramePr/>
-          <p:nvPr>
-            <p:custDataLst>
-              <p:tags r:id="rId10"/>
-            </p:custDataLst>
-          </p:nvPr>
-        </p:nvGraphicFramePr>
-        <p:xfrm>
-          <a:off x="7237095" y="4036060"/>
-          <a:ext cx="673735" cy="665480"/>
-        </p:xfrm>
-        <a:graphic>
-          <a:graphicData uri="http://schemas.openxmlformats.org/drawingml/2006/table">
-            <a:tbl>
-              <a:tblPr firstRow="1" bandRow="1">
-                <a:tableStyleId>{5C22544A-7EE6-4342-B048-85BDC9FD1C3A}</a:tableStyleId>
-              </a:tblPr>
-              <a:tblGrid>
-                <a:gridCol w="177165"/>
-                <a:gridCol w="496570"/>
-              </a:tblGrid>
-              <a:tr h="166370">
-                <a:tc>
-                  <a:txBody>
-                    <a:bodyPr/>
-                    <a:p>
-                      <a:pPr algn="ctr">
-                        <a:buNone/>
-                      </a:pPr>
-                      <a:r>
-                        <a:rPr lang="en-US" altLang="zh-CN" sz="600"/>
-                        <a:t>1</a:t>
-                      </a:r>
-                      <a:endParaRPr lang="en-US" altLang="zh-CN" sz="600"/>
-                    </a:p>
-                  </a:txBody>
-                  <a:tcPr marL="0" marR="0" marT="0" marB="0" anchor="ctr" anchorCtr="0"/>
-                </a:tc>
-                <a:tc>
-                  <a:txBody>
-                    <a:bodyPr/>
-                    <a:p>
-                      <a:pPr algn="ctr">
-                        <a:buNone/>
-                      </a:pPr>
-                      <a:r>
-                        <a:rPr lang="zh-CN" altLang="en-US" sz="600"/>
-                        <a:t>候选事件</a:t>
-                      </a:r>
-                      <a:endParaRPr lang="zh-CN" altLang="en-US" sz="600"/>
-                    </a:p>
-                  </a:txBody>
-                  <a:tcPr marL="0" marR="0" marT="0" marB="0" anchor="ctr" anchorCtr="0"/>
-                </a:tc>
-              </a:tr>
-              <a:tr h="166370">
-                <a:tc>
-                  <a:txBody>
-                    <a:bodyPr/>
-                    <a:p>
-                      <a:pPr algn="ctr">
-                        <a:buNone/>
-                      </a:pPr>
-                      <a:r>
-                        <a:rPr lang="en-US" altLang="zh-CN" sz="600"/>
-                        <a:t>2</a:t>
-                      </a:r>
-                      <a:endParaRPr lang="en-US" altLang="zh-CN" sz="600"/>
-                    </a:p>
-                  </a:txBody>
-                  <a:tcPr marL="0" marR="0" marT="0" marB="0" anchor="ctr" anchorCtr="0"/>
-                </a:tc>
-                <a:tc>
-                  <a:txBody>
-                    <a:bodyPr/>
-                    <a:p>
-                      <a:pPr algn="ctr">
-                        <a:buNone/>
-                      </a:pPr>
-                      <a:r>
-                        <a:rPr lang="zh-CN" altLang="en-US" sz="600"/>
-                        <a:t>候选事件</a:t>
-                      </a:r>
-                      <a:endParaRPr lang="zh-CN" altLang="en-US" sz="600"/>
-                    </a:p>
-                  </a:txBody>
-                  <a:tcPr marL="0" marR="0" marT="0" marB="0" anchor="ctr" anchorCtr="0"/>
-                </a:tc>
-              </a:tr>
-              <a:tr h="166370">
-                <a:tc>
-                  <a:txBody>
-                    <a:bodyPr/>
-                    <a:p>
-                      <a:pPr algn="ctr">
-                        <a:buNone/>
-                      </a:pPr>
-                      <a:r>
-                        <a:rPr lang="en-US" altLang="zh-CN" sz="600"/>
-                        <a:t>3</a:t>
-                      </a:r>
-                      <a:endParaRPr lang="en-US" altLang="zh-CN" sz="600"/>
-                    </a:p>
-                  </a:txBody>
-                  <a:tcPr marL="0" marR="0" marT="0" marB="0" anchor="ctr" anchorCtr="0"/>
-                </a:tc>
-                <a:tc>
-                  <a:txBody>
-                    <a:bodyPr/>
-                    <a:p>
-                      <a:pPr algn="ctr">
-                        <a:buNone/>
-                      </a:pPr>
-                      <a:r>
-                        <a:rPr lang="en-US" altLang="zh-CN" sz="600"/>
-                        <a:t>...</a:t>
-                      </a:r>
-                      <a:endParaRPr lang="en-US" altLang="zh-CN" sz="600"/>
-                    </a:p>
-                  </a:txBody>
-                  <a:tcPr marL="0" marR="0" marT="0" marB="0" anchor="ctr" anchorCtr="0"/>
-                </a:tc>
-              </a:tr>
-              <a:tr h="166370">
-                <a:tc>
-                  <a:txBody>
-                    <a:bodyPr/>
-                    <a:p>
-                      <a:pPr algn="ctr">
-                        <a:buNone/>
-                      </a:pPr>
-                      <a:r>
-                        <a:rPr lang="en-US" altLang="zh-CN" sz="600"/>
-                        <a:t>4</a:t>
-                      </a:r>
-                      <a:endParaRPr lang="en-US" altLang="zh-CN" sz="600"/>
-                    </a:p>
-                  </a:txBody>
-                  <a:tcPr marL="0" marR="0" marT="0" marB="0" anchor="ctr" anchorCtr="0"/>
-                </a:tc>
-                <a:tc>
-                  <a:txBody>
-                    <a:bodyPr/>
-                    <a:p>
-                      <a:pPr algn="ctr">
-                        <a:buNone/>
-                      </a:pPr>
-                      <a:r>
-                        <a:rPr lang="en-US" altLang="zh-CN" sz="600"/>
-                        <a:t>...</a:t>
-                      </a:r>
-                      <a:endParaRPr lang="en-US" altLang="zh-CN" sz="600"/>
-                    </a:p>
-                  </a:txBody>
-                  <a:tcPr marL="0" marR="0" marT="0" marB="0" anchor="ctr" anchorCtr="0"/>
-                </a:tc>
-              </a:tr>
-            </a:tbl>
-          </a:graphicData>
-        </a:graphic>
-      </p:graphicFrame>
-      <p:sp>
-        <p:nvSpPr>
-          <p:cNvPr id="97" name="文本框 96"/>
-          <p:cNvSpPr txBox="1"/>
-          <p:nvPr/>
-        </p:nvSpPr>
-        <p:spPr>
-          <a:xfrm>
-            <a:off x="7141210" y="4686935"/>
-            <a:ext cx="876935" cy="275590"/>
-          </a:xfrm>
-          <a:prstGeom prst="rect">
-            <a:avLst/>
-          </a:prstGeom>
-          <a:noFill/>
-        </p:spPr>
-        <p:txBody>
-          <a:bodyPr wrap="square" rtlCol="0">
-            <a:spAutoFit/>
-          </a:bodyPr>
-          <a:p>
-            <a:pPr algn="ctr"/>
-            <a:r>
-              <a:rPr lang="en-US" altLang="zh-CN" sz="1200" b="1"/>
-              <a:t>TopK</a:t>
-            </a:r>
-            <a:r>
-              <a:rPr lang="zh-CN" altLang="en-US" sz="1200" b="1"/>
-              <a:t>过滤</a:t>
-            </a:r>
-            <a:endParaRPr lang="zh-CN" altLang="en-US" sz="1200" b="1"/>
-          </a:p>
-        </p:txBody>
-      </p:sp>
-      <p:sp>
-        <p:nvSpPr>
-          <p:cNvPr id="99" name="文本框 98"/>
-          <p:cNvSpPr txBox="1"/>
-          <p:nvPr/>
-        </p:nvSpPr>
-        <p:spPr>
-          <a:xfrm>
-            <a:off x="8654490" y="2068830"/>
-            <a:ext cx="2303145" cy="337185"/>
-          </a:xfrm>
-          <a:prstGeom prst="rect">
-            <a:avLst/>
-          </a:prstGeom>
-          <a:noFill/>
-        </p:spPr>
-        <p:txBody>
-          <a:bodyPr wrap="square" rtlCol="0">
-            <a:spAutoFit/>
-          </a:bodyPr>
-          <a:p>
-            <a:pPr algn="ctr"/>
-            <a:r>
-              <a:rPr lang="zh-CN" altLang="en-US" sz="1600" b="1">
-                <a:solidFill>
-                  <a:srgbClr val="C00000"/>
-                </a:solidFill>
-              </a:rPr>
-              <a:t>覆盖增益</a:t>
-            </a:r>
-            <a:r>
-              <a:rPr lang="zh-CN" altLang="en-US" sz="1600" b="1">
-                <a:solidFill>
-                  <a:srgbClr val="C00000"/>
-                </a:solidFill>
-              </a:rPr>
-              <a:t>评估</a:t>
-            </a:r>
-            <a:endParaRPr lang="zh-CN" altLang="en-US" sz="1600" b="1">
-              <a:solidFill>
-                <a:srgbClr val="C00000"/>
-              </a:solidFill>
-            </a:endParaRPr>
-          </a:p>
-        </p:txBody>
-      </p:sp>
-      <p:sp>
-        <p:nvSpPr>
-          <p:cNvPr id="100" name="文本框 99"/>
-          <p:cNvSpPr txBox="1"/>
-          <p:nvPr/>
-        </p:nvSpPr>
-        <p:spPr>
-          <a:xfrm>
-            <a:off x="8773160" y="3022600"/>
-            <a:ext cx="966470" cy="275590"/>
-          </a:xfrm>
-          <a:prstGeom prst="rect">
-            <a:avLst/>
-          </a:prstGeom>
-          <a:noFill/>
-        </p:spPr>
-        <p:txBody>
-          <a:bodyPr wrap="square" rtlCol="0">
-            <a:spAutoFit/>
-          </a:bodyPr>
-          <a:p>
-            <a:r>
-              <a:rPr lang="zh-CN" altLang="en-US" sz="1200" b="1"/>
-              <a:t>向量索引库</a:t>
+              <a:t>向量库</a:t>
             </a:r>
             <a:endParaRPr lang="zh-CN" altLang="en-US" sz="1200" b="1"/>
           </a:p>
@@ -7251,15 +6270,15 @@
           </p:cNvPicPr>
           <p:nvPr>
             <p:custDataLst>
-              <p:tags r:id="rId11"/>
+              <p:tags r:id="rId10"/>
             </p:custDataLst>
           </p:nvPr>
         </p:nvPicPr>
         <p:blipFill>
-          <a:blip r:embed="rId12">
+          <a:blip r:embed="rId11">
             <a:extLst>
               <a:ext uri="{96DAC541-7B7A-43D3-8B79-37D633B846F1}">
-                <asvg:svgBlip xmlns:asvg="http://schemas.microsoft.com/office/drawing/2016/SVG/main" r:embed="rId13"/>
+                <asvg:svgBlip xmlns:asvg="http://schemas.microsoft.com/office/drawing/2016/SVG/main" r:embed="rId12"/>
               </a:ext>
             </a:extLst>
           </a:blip>
@@ -7269,964 +6288,14 @@
         </p:blipFill>
         <p:spPr>
           <a:xfrm>
-            <a:off x="8833485" y="2440940"/>
-            <a:ext cx="777600" cy="572701"/>
+            <a:off x="6665595" y="2803525"/>
+            <a:ext cx="542290" cy="274955"/>
           </a:xfrm>
           <a:prstGeom prst="rect">
             <a:avLst/>
           </a:prstGeom>
         </p:spPr>
       </p:pic>
-      <p:pic>
-        <p:nvPicPr>
-          <p:cNvPr id="102" name="图片 101"/>
-          <p:cNvPicPr>
-            <a:picLocks noChangeAspect="1"/>
-          </p:cNvPicPr>
-          <p:nvPr/>
-        </p:nvPicPr>
-        <p:blipFill>
-          <a:blip r:embed="rId14"/>
-          <a:stretch>
-            <a:fillRect/>
-          </a:stretch>
-        </p:blipFill>
-        <p:spPr>
-          <a:xfrm>
-            <a:off x="9789160" y="2376805"/>
-            <a:ext cx="252000" cy="252000"/>
-          </a:xfrm>
-          <a:prstGeom prst="rect">
-            <a:avLst/>
-          </a:prstGeom>
-        </p:spPr>
-      </p:pic>
-      <p:pic>
-        <p:nvPicPr>
-          <p:cNvPr id="103" name="图片 102"/>
-          <p:cNvPicPr>
-            <a:picLocks noChangeAspect="1"/>
-          </p:cNvPicPr>
-          <p:nvPr/>
-        </p:nvPicPr>
-        <p:blipFill>
-          <a:blip r:embed="rId15"/>
-          <a:stretch>
-            <a:fillRect/>
-          </a:stretch>
-        </p:blipFill>
-        <p:spPr>
-          <a:xfrm>
-            <a:off x="9789160" y="2689765"/>
-            <a:ext cx="252000" cy="251460"/>
-          </a:xfrm>
-          <a:prstGeom prst="rect">
-            <a:avLst/>
-          </a:prstGeom>
-        </p:spPr>
-      </p:pic>
-      <p:pic>
-        <p:nvPicPr>
-          <p:cNvPr id="104" name="图片 103"/>
-          <p:cNvPicPr>
-            <a:picLocks noChangeAspect="1"/>
-          </p:cNvPicPr>
-          <p:nvPr/>
-        </p:nvPicPr>
-        <p:blipFill>
-          <a:blip r:embed="rId16"/>
-          <a:stretch>
-            <a:fillRect/>
-          </a:stretch>
-        </p:blipFill>
-        <p:spPr>
-          <a:xfrm>
-            <a:off x="9789160" y="3002185"/>
-            <a:ext cx="252000" cy="251460"/>
-          </a:xfrm>
-          <a:prstGeom prst="rect">
-            <a:avLst/>
-          </a:prstGeom>
-        </p:spPr>
-      </p:pic>
-      <p:sp>
-        <p:nvSpPr>
-          <p:cNvPr id="106" name="文本框 105"/>
-          <p:cNvSpPr txBox="1"/>
-          <p:nvPr/>
-        </p:nvSpPr>
-        <p:spPr>
-          <a:xfrm>
-            <a:off x="10040620" y="2371725"/>
-            <a:ext cx="803275" cy="275590"/>
-          </a:xfrm>
-          <a:prstGeom prst="rect">
-            <a:avLst/>
-          </a:prstGeom>
-          <a:noFill/>
-        </p:spPr>
-        <p:txBody>
-          <a:bodyPr wrap="square" rtlCol="0">
-            <a:spAutoFit/>
-          </a:bodyPr>
-          <a:p>
-            <a:r>
-              <a:rPr lang="zh-CN" altLang="en-US" sz="1200" b="1"/>
-              <a:t>空间</a:t>
-            </a:r>
-            <a:r>
-              <a:rPr lang="zh-CN" altLang="en-US" sz="1200" b="1"/>
-              <a:t>覆盖</a:t>
-            </a:r>
-            <a:endParaRPr lang="zh-CN" altLang="en-US" sz="1200" b="1"/>
-          </a:p>
-        </p:txBody>
-      </p:sp>
-      <p:sp>
-        <p:nvSpPr>
-          <p:cNvPr id="107" name="文本框 106"/>
-          <p:cNvSpPr txBox="1"/>
-          <p:nvPr/>
-        </p:nvSpPr>
-        <p:spPr>
-          <a:xfrm>
-            <a:off x="10040620" y="2684145"/>
-            <a:ext cx="803275" cy="275590"/>
-          </a:xfrm>
-          <a:prstGeom prst="rect">
-            <a:avLst/>
-          </a:prstGeom>
-          <a:noFill/>
-        </p:spPr>
-        <p:txBody>
-          <a:bodyPr wrap="square" rtlCol="0">
-            <a:spAutoFit/>
-          </a:bodyPr>
-          <a:p>
-            <a:r>
-              <a:rPr lang="zh-CN" altLang="en-US" sz="1200" b="1"/>
-              <a:t>稀缺波形</a:t>
-            </a:r>
-            <a:endParaRPr lang="zh-CN" altLang="en-US" sz="1200" b="1"/>
-          </a:p>
-        </p:txBody>
-      </p:sp>
-      <p:sp>
-        <p:nvSpPr>
-          <p:cNvPr id="108" name="文本框 107"/>
-          <p:cNvSpPr txBox="1"/>
-          <p:nvPr/>
-        </p:nvSpPr>
-        <p:spPr>
-          <a:xfrm>
-            <a:off x="10041890" y="2996565"/>
-            <a:ext cx="802005" cy="275590"/>
-          </a:xfrm>
-          <a:prstGeom prst="rect">
-            <a:avLst/>
-          </a:prstGeom>
-          <a:noFill/>
-        </p:spPr>
-        <p:txBody>
-          <a:bodyPr wrap="square" rtlCol="0">
-            <a:spAutoFit/>
-          </a:bodyPr>
-          <a:p>
-            <a:r>
-              <a:rPr lang="zh-CN" altLang="en-US" sz="1200" b="1"/>
-              <a:t>边界</a:t>
-            </a:r>
-            <a:r>
-              <a:rPr lang="zh-CN" altLang="en-US" sz="1200" b="1"/>
-              <a:t>扩展</a:t>
-            </a:r>
-            <a:endParaRPr lang="zh-CN" altLang="en-US" sz="1200" b="1"/>
-          </a:p>
-        </p:txBody>
-      </p:sp>
-      <p:sp>
-        <p:nvSpPr>
-          <p:cNvPr id="109" name="下箭头 108"/>
-          <p:cNvSpPr/>
-          <p:nvPr/>
-        </p:nvSpPr>
-        <p:spPr>
-          <a:xfrm>
-            <a:off x="9751453" y="3341370"/>
-            <a:ext cx="107950" cy="320040"/>
-          </a:xfrm>
-          <a:prstGeom prst="downArrow">
-            <a:avLst>
-              <a:gd name="adj1" fmla="val 31764"/>
-              <a:gd name="adj2" fmla="val 80588"/>
-            </a:avLst>
-          </a:prstGeom>
-          <a:solidFill>
-            <a:srgbClr val="C00000"/>
-          </a:solidFill>
-          <a:ln>
-            <a:solidFill>
-              <a:srgbClr val="C00000"/>
-            </a:solidFill>
-          </a:ln>
-        </p:spPr>
-        <p:style>
-          <a:lnRef idx="2">
-            <a:schemeClr val="accent1">
-              <a:lumMod val="75000"/>
-            </a:schemeClr>
-          </a:lnRef>
-          <a:fillRef idx="1">
-            <a:schemeClr val="accent1"/>
-          </a:fillRef>
-          <a:effectRef idx="0">
-            <a:srgbClr val="FFFFFF"/>
-          </a:effectRef>
-          <a:fontRef idx="minor">
-            <a:schemeClr val="lt1"/>
-          </a:fontRef>
-        </p:style>
-        <p:txBody>
-          <a:bodyPr rtlCol="0" anchor="ctr"/>
-          <a:p>
-            <a:pPr algn="ctr"/>
-            <a:endParaRPr lang="zh-CN" altLang="en-US"/>
-          </a:p>
-        </p:txBody>
-      </p:sp>
-      <p:sp>
-        <p:nvSpPr>
-          <p:cNvPr id="110" name="文本框 109"/>
-          <p:cNvSpPr txBox="1"/>
-          <p:nvPr/>
-        </p:nvSpPr>
-        <p:spPr>
-          <a:xfrm>
-            <a:off x="8578925" y="3733800"/>
-            <a:ext cx="2303145" cy="337185"/>
-          </a:xfrm>
-          <a:prstGeom prst="rect">
-            <a:avLst/>
-          </a:prstGeom>
-          <a:noFill/>
-        </p:spPr>
-        <p:txBody>
-          <a:bodyPr wrap="square" rtlCol="0">
-            <a:spAutoFit/>
-          </a:bodyPr>
-          <a:p>
-            <a:pPr algn="ctr"/>
-            <a:r>
-              <a:rPr lang="zh-CN" altLang="en-US" sz="1600" b="1">
-                <a:solidFill>
-                  <a:srgbClr val="C00000"/>
-                </a:solidFill>
-              </a:rPr>
-              <a:t>索引约束</a:t>
-            </a:r>
-            <a:r>
-              <a:rPr lang="zh-CN" altLang="en-US" sz="1600" b="1">
-                <a:solidFill>
-                  <a:srgbClr val="C00000"/>
-                </a:solidFill>
-              </a:rPr>
-              <a:t>优化</a:t>
-            </a:r>
-            <a:endParaRPr lang="zh-CN" altLang="en-US" sz="1600" b="1">
-              <a:solidFill>
-                <a:srgbClr val="C00000"/>
-              </a:solidFill>
-            </a:endParaRPr>
-          </a:p>
-        </p:txBody>
-      </p:sp>
-      <p:sp>
-        <p:nvSpPr>
-          <p:cNvPr id="111" name="圆角矩形 110"/>
-          <p:cNvSpPr>
-            <a:spLocks noChangeAspect="1"/>
-          </p:cNvSpPr>
-          <p:nvPr/>
-        </p:nvSpPr>
-        <p:spPr>
-          <a:xfrm>
-            <a:off x="8929370" y="4070985"/>
-            <a:ext cx="666000" cy="666000"/>
-          </a:xfrm>
-          <a:prstGeom prst="roundRect">
-            <a:avLst/>
-          </a:prstGeom>
-          <a:solidFill>
-            <a:schemeClr val="bg1"/>
-          </a:solidFill>
-          <a:ln w="22225"/>
-        </p:spPr>
-        <p:style>
-          <a:lnRef idx="2">
-            <a:schemeClr val="accent1">
-              <a:lumMod val="75000"/>
-            </a:schemeClr>
-          </a:lnRef>
-          <a:fillRef idx="1">
-            <a:schemeClr val="accent1"/>
-          </a:fillRef>
-          <a:effectRef idx="0">
-            <a:srgbClr val="FFFFFF"/>
-          </a:effectRef>
-          <a:fontRef idx="minor">
-            <a:schemeClr val="lt1"/>
-          </a:fontRef>
-        </p:style>
-        <p:txBody>
-          <a:bodyPr rtlCol="0" anchor="ctr"/>
-          <a:p>
-            <a:pPr algn="ctr"/>
-            <a:endParaRPr lang="zh-CN" altLang="en-US"/>
-          </a:p>
-        </p:txBody>
-      </p:sp>
-      <p:sp>
-        <p:nvSpPr>
-          <p:cNvPr id="112" name="文本框 111"/>
-          <p:cNvSpPr txBox="1"/>
-          <p:nvPr/>
-        </p:nvSpPr>
-        <p:spPr>
-          <a:xfrm>
-            <a:off x="8836660" y="4701540"/>
-            <a:ext cx="876935" cy="275590"/>
-          </a:xfrm>
-          <a:prstGeom prst="rect">
-            <a:avLst/>
-          </a:prstGeom>
-          <a:noFill/>
-        </p:spPr>
-        <p:txBody>
-          <a:bodyPr wrap="square" rtlCol="0">
-            <a:spAutoFit/>
-          </a:bodyPr>
-          <a:p>
-            <a:pPr algn="ctr"/>
-            <a:r>
-              <a:rPr lang="zh-CN" altLang="en-US" sz="1200" b="1"/>
-              <a:t>多元</a:t>
-            </a:r>
-            <a:r>
-              <a:rPr lang="zh-CN" altLang="en-US" sz="1200" b="1"/>
-              <a:t>向量</a:t>
-            </a:r>
-            <a:endParaRPr lang="zh-CN" altLang="en-US" sz="1200" b="1"/>
-          </a:p>
-        </p:txBody>
-      </p:sp>
-      <p:sp>
-        <p:nvSpPr>
-          <p:cNvPr id="113" name="椭圆 112"/>
-          <p:cNvSpPr>
-            <a:spLocks noChangeAspect="1"/>
-          </p:cNvSpPr>
-          <p:nvPr/>
-        </p:nvSpPr>
-        <p:spPr>
-          <a:xfrm>
-            <a:off x="9039225" y="4172585"/>
-            <a:ext cx="107289" cy="108000"/>
-          </a:xfrm>
-          <a:prstGeom prst="ellipse">
-            <a:avLst/>
-          </a:prstGeom>
-        </p:spPr>
-        <p:style>
-          <a:lnRef idx="2">
-            <a:schemeClr val="accent1">
-              <a:lumMod val="75000"/>
-            </a:schemeClr>
-          </a:lnRef>
-          <a:fillRef idx="1">
-            <a:schemeClr val="accent1"/>
-          </a:fillRef>
-          <a:effectRef idx="0">
-            <a:srgbClr val="FFFFFF"/>
-          </a:effectRef>
-          <a:fontRef idx="minor">
-            <a:schemeClr val="lt1"/>
-          </a:fontRef>
-        </p:style>
-        <p:txBody>
-          <a:bodyPr rtlCol="0" anchor="ctr"/>
-          <a:p>
-            <a:pPr algn="ctr"/>
-            <a:endParaRPr lang="zh-CN" altLang="en-US"/>
-          </a:p>
-        </p:txBody>
-      </p:sp>
-      <p:sp>
-        <p:nvSpPr>
-          <p:cNvPr id="115" name="椭圆 114"/>
-          <p:cNvSpPr>
-            <a:spLocks noChangeAspect="1"/>
-          </p:cNvSpPr>
-          <p:nvPr/>
-        </p:nvSpPr>
-        <p:spPr>
-          <a:xfrm>
-            <a:off x="9353550" y="4172585"/>
-            <a:ext cx="107289" cy="108000"/>
-          </a:xfrm>
-          <a:prstGeom prst="ellipse">
-            <a:avLst/>
-          </a:prstGeom>
-          <a:solidFill>
-            <a:schemeClr val="accent3">
-              <a:lumMod val="60000"/>
-              <a:lumOff val="40000"/>
-            </a:schemeClr>
-          </a:solidFill>
-        </p:spPr>
-        <p:style>
-          <a:lnRef idx="2">
-            <a:schemeClr val="accent1">
-              <a:lumMod val="75000"/>
-            </a:schemeClr>
-          </a:lnRef>
-          <a:fillRef idx="1">
-            <a:schemeClr val="accent1"/>
-          </a:fillRef>
-          <a:effectRef idx="0">
-            <a:srgbClr val="FFFFFF"/>
-          </a:effectRef>
-          <a:fontRef idx="minor">
-            <a:schemeClr val="lt1"/>
-          </a:fontRef>
-        </p:style>
-        <p:txBody>
-          <a:bodyPr rtlCol="0" anchor="ctr"/>
-          <a:p>
-            <a:pPr algn="ctr"/>
-            <a:endParaRPr lang="zh-CN" altLang="en-US"/>
-          </a:p>
-        </p:txBody>
-      </p:sp>
-      <p:sp>
-        <p:nvSpPr>
-          <p:cNvPr id="116" name="椭圆 115"/>
-          <p:cNvSpPr>
-            <a:spLocks noChangeAspect="1"/>
-          </p:cNvSpPr>
-          <p:nvPr/>
-        </p:nvSpPr>
-        <p:spPr>
-          <a:xfrm>
-            <a:off x="9039225" y="4364673"/>
-            <a:ext cx="107289" cy="108000"/>
-          </a:xfrm>
-          <a:prstGeom prst="ellipse">
-            <a:avLst/>
-          </a:prstGeom>
-          <a:solidFill>
-            <a:schemeClr val="accent4">
-              <a:lumMod val="60000"/>
-              <a:lumOff val="40000"/>
-            </a:schemeClr>
-          </a:solidFill>
-        </p:spPr>
-        <p:style>
-          <a:lnRef idx="2">
-            <a:schemeClr val="accent1">
-              <a:lumMod val="75000"/>
-            </a:schemeClr>
-          </a:lnRef>
-          <a:fillRef idx="1">
-            <a:schemeClr val="accent1"/>
-          </a:fillRef>
-          <a:effectRef idx="0">
-            <a:srgbClr val="FFFFFF"/>
-          </a:effectRef>
-          <a:fontRef idx="minor">
-            <a:schemeClr val="lt1"/>
-          </a:fontRef>
-        </p:style>
-        <p:txBody>
-          <a:bodyPr rtlCol="0" anchor="ctr"/>
-          <a:p>
-            <a:pPr algn="ctr"/>
-            <a:endParaRPr lang="zh-CN" altLang="en-US"/>
-          </a:p>
-        </p:txBody>
-      </p:sp>
-      <p:sp>
-        <p:nvSpPr>
-          <p:cNvPr id="117" name="椭圆 116"/>
-          <p:cNvSpPr>
-            <a:spLocks noChangeAspect="1"/>
-          </p:cNvSpPr>
-          <p:nvPr/>
-        </p:nvSpPr>
-        <p:spPr>
-          <a:xfrm>
-            <a:off x="9353550" y="4364673"/>
-            <a:ext cx="107289" cy="108000"/>
-          </a:xfrm>
-          <a:prstGeom prst="ellipse">
-            <a:avLst/>
-          </a:prstGeom>
-          <a:solidFill>
-            <a:schemeClr val="accent5">
-              <a:lumMod val="60000"/>
-              <a:lumOff val="40000"/>
-            </a:schemeClr>
-          </a:solidFill>
-        </p:spPr>
-        <p:style>
-          <a:lnRef idx="2">
-            <a:schemeClr val="accent1">
-              <a:lumMod val="75000"/>
-            </a:schemeClr>
-          </a:lnRef>
-          <a:fillRef idx="1">
-            <a:schemeClr val="accent1"/>
-          </a:fillRef>
-          <a:effectRef idx="0">
-            <a:srgbClr val="FFFFFF"/>
-          </a:effectRef>
-          <a:fontRef idx="minor">
-            <a:schemeClr val="lt1"/>
-          </a:fontRef>
-        </p:style>
-        <p:txBody>
-          <a:bodyPr rtlCol="0" anchor="ctr"/>
-          <a:p>
-            <a:pPr algn="ctr"/>
-            <a:endParaRPr lang="zh-CN" altLang="en-US"/>
-          </a:p>
-        </p:txBody>
-      </p:sp>
-      <p:cxnSp>
-        <p:nvCxnSpPr>
-          <p:cNvPr id="118" name="直接箭头连接符 117"/>
-          <p:cNvCxnSpPr/>
-          <p:nvPr/>
-        </p:nvCxnSpPr>
-        <p:spPr>
-          <a:xfrm>
-            <a:off x="9139555" y="4229100"/>
-            <a:ext cx="212090" cy="1905"/>
-          </a:xfrm>
-          <a:prstGeom prst="straightConnector1">
-            <a:avLst/>
-          </a:prstGeom>
-          <a:ln>
-            <a:bevel/>
-            <a:tailEnd type="triangle" w="med" len="sm"/>
-          </a:ln>
-        </p:spPr>
-        <p:style>
-          <a:lnRef idx="2">
-            <a:schemeClr val="accent1"/>
-          </a:lnRef>
-          <a:fillRef idx="0">
-            <a:srgbClr val="FFFFFF"/>
-          </a:fillRef>
-          <a:effectRef idx="0">
-            <a:srgbClr val="FFFFFF"/>
-          </a:effectRef>
-          <a:fontRef idx="minor">
-            <a:schemeClr val="tx1"/>
-          </a:fontRef>
-        </p:style>
-      </p:cxnSp>
-      <p:cxnSp>
-        <p:nvCxnSpPr>
-          <p:cNvPr id="119" name="直接箭头连接符 118"/>
-          <p:cNvCxnSpPr/>
-          <p:nvPr/>
-        </p:nvCxnSpPr>
-        <p:spPr>
-          <a:xfrm>
-            <a:off x="9139555" y="4418965"/>
-            <a:ext cx="215265" cy="2540"/>
-          </a:xfrm>
-          <a:prstGeom prst="straightConnector1">
-            <a:avLst/>
-          </a:prstGeom>
-          <a:ln>
-            <a:bevel/>
-            <a:tailEnd type="triangle" w="med" len="sm"/>
-          </a:ln>
-        </p:spPr>
-        <p:style>
-          <a:lnRef idx="2">
-            <a:schemeClr val="accent1"/>
-          </a:lnRef>
-          <a:fillRef idx="0">
-            <a:srgbClr val="FFFFFF"/>
-          </a:fillRef>
-          <a:effectRef idx="0">
-            <a:srgbClr val="FFFFFF"/>
-          </a:effectRef>
-          <a:fontRef idx="minor">
-            <a:schemeClr val="tx1"/>
-          </a:fontRef>
-        </p:style>
-      </p:cxnSp>
-      <p:cxnSp>
-        <p:nvCxnSpPr>
-          <p:cNvPr id="120" name="直接箭头连接符 119"/>
-          <p:cNvCxnSpPr>
-            <a:endCxn id="117" idx="1"/>
-          </p:cNvCxnSpPr>
-          <p:nvPr/>
-        </p:nvCxnSpPr>
-        <p:spPr>
-          <a:xfrm>
-            <a:off x="9139555" y="4239260"/>
-            <a:ext cx="229870" cy="140970"/>
-          </a:xfrm>
-          <a:prstGeom prst="straightConnector1">
-            <a:avLst/>
-          </a:prstGeom>
-          <a:ln>
-            <a:bevel/>
-            <a:tailEnd type="triangle" w="med" len="sm"/>
-          </a:ln>
-        </p:spPr>
-        <p:style>
-          <a:lnRef idx="2">
-            <a:schemeClr val="accent1"/>
-          </a:lnRef>
-          <a:fillRef idx="0">
-            <a:srgbClr val="FFFFFF"/>
-          </a:fillRef>
-          <a:effectRef idx="0">
-            <a:srgbClr val="FFFFFF"/>
-          </a:effectRef>
-          <a:fontRef idx="minor">
-            <a:schemeClr val="tx1"/>
-          </a:fontRef>
-        </p:style>
-      </p:cxnSp>
-      <p:sp>
-        <p:nvSpPr>
-          <p:cNvPr id="121" name="文本框 120"/>
-          <p:cNvSpPr txBox="1"/>
-          <p:nvPr/>
-        </p:nvSpPr>
-        <p:spPr>
-          <a:xfrm>
-            <a:off x="9120038" y="4433515"/>
-            <a:ext cx="232074" cy="283163"/>
-          </a:xfrm>
-          <a:prstGeom prst="rect">
-            <a:avLst/>
-          </a:prstGeom>
-          <a:noFill/>
-        </p:spPr>
-        <p:txBody>
-          <a:bodyPr wrap="square" rtlCol="0">
-            <a:spAutoFit/>
-          </a:bodyPr>
-          <a:p>
-            <a:pPr indent="0" algn="ctr" fontAlgn="auto">
-              <a:lnSpc>
-                <a:spcPts val="500"/>
-              </a:lnSpc>
-            </a:pPr>
-            <a:r>
-              <a:rPr lang="en-US" altLang="zh-CN"/>
-              <a:t>.</a:t>
-            </a:r>
-            <a:endParaRPr lang="en-US" altLang="zh-CN"/>
-          </a:p>
-          <a:p>
-            <a:pPr indent="0" algn="ctr" fontAlgn="auto">
-              <a:lnSpc>
-                <a:spcPts val="500"/>
-              </a:lnSpc>
-            </a:pPr>
-            <a:r>
-              <a:rPr lang="en-US" altLang="zh-CN"/>
-              <a:t>.</a:t>
-            </a:r>
-            <a:endParaRPr lang="en-US" altLang="zh-CN"/>
-          </a:p>
-          <a:p>
-            <a:pPr indent="0" algn="ctr" fontAlgn="auto">
-              <a:lnSpc>
-                <a:spcPts val="500"/>
-              </a:lnSpc>
-            </a:pPr>
-            <a:r>
-              <a:rPr lang="en-US" altLang="zh-CN"/>
-              <a:t>.</a:t>
-            </a:r>
-            <a:endParaRPr lang="en-US" altLang="zh-CN"/>
-          </a:p>
-        </p:txBody>
-      </p:sp>
-      <p:sp>
-        <p:nvSpPr>
-          <p:cNvPr id="122" name="下箭头 121"/>
-          <p:cNvSpPr/>
-          <p:nvPr/>
-        </p:nvSpPr>
-        <p:spPr>
-          <a:xfrm rot="16200000">
-            <a:off x="9776865" y="4215030"/>
-            <a:ext cx="108000" cy="324000"/>
-          </a:xfrm>
-          <a:prstGeom prst="downArrow">
-            <a:avLst>
-              <a:gd name="adj1" fmla="val 31764"/>
-              <a:gd name="adj2" fmla="val 80588"/>
-            </a:avLst>
-          </a:prstGeom>
-          <a:solidFill>
-            <a:schemeClr val="tx1"/>
-          </a:solidFill>
-          <a:ln>
-            <a:solidFill>
-              <a:schemeClr val="tx1"/>
-            </a:solidFill>
-          </a:ln>
-        </p:spPr>
-        <p:style>
-          <a:lnRef idx="2">
-            <a:schemeClr val="accent1">
-              <a:lumMod val="75000"/>
-            </a:schemeClr>
-          </a:lnRef>
-          <a:fillRef idx="1">
-            <a:schemeClr val="accent1"/>
-          </a:fillRef>
-          <a:effectRef idx="0">
-            <a:srgbClr val="FFFFFF"/>
-          </a:effectRef>
-          <a:fontRef idx="minor">
-            <a:schemeClr val="lt1"/>
-          </a:fontRef>
-        </p:style>
-        <p:txBody>
-          <a:bodyPr rtlCol="0" anchor="ctr"/>
-          <a:p>
-            <a:pPr algn="ctr"/>
-            <a:endParaRPr lang="zh-CN" altLang="en-US"/>
-          </a:p>
-        </p:txBody>
-      </p:sp>
-      <p:sp>
-        <p:nvSpPr>
-          <p:cNvPr id="125" name="下箭头 124"/>
-          <p:cNvSpPr/>
-          <p:nvPr/>
-        </p:nvSpPr>
-        <p:spPr>
-          <a:xfrm>
-            <a:off x="6939673" y="4997450"/>
-            <a:ext cx="107950" cy="270000"/>
-          </a:xfrm>
-          <a:prstGeom prst="downArrow">
-            <a:avLst>
-              <a:gd name="adj1" fmla="val 31764"/>
-              <a:gd name="adj2" fmla="val 80588"/>
-            </a:avLst>
-          </a:prstGeom>
-          <a:solidFill>
-            <a:srgbClr val="2E54A1"/>
-          </a:solidFill>
-          <a:ln>
-            <a:solidFill>
-              <a:srgbClr val="2E54A1"/>
-            </a:solidFill>
-          </a:ln>
-        </p:spPr>
-        <p:style>
-          <a:lnRef idx="2">
-            <a:schemeClr val="accent1">
-              <a:lumMod val="75000"/>
-            </a:schemeClr>
-          </a:lnRef>
-          <a:fillRef idx="1">
-            <a:schemeClr val="accent1"/>
-          </a:fillRef>
-          <a:effectRef idx="0">
-            <a:srgbClr val="FFFFFF"/>
-          </a:effectRef>
-          <a:fontRef idx="minor">
-            <a:schemeClr val="lt1"/>
-          </a:fontRef>
-        </p:style>
-        <p:txBody>
-          <a:bodyPr rtlCol="0" anchor="ctr"/>
-          <a:p>
-            <a:pPr algn="ctr"/>
-            <a:endParaRPr lang="zh-CN" altLang="en-US"/>
-          </a:p>
-        </p:txBody>
-      </p:sp>
-      <p:sp>
-        <p:nvSpPr>
-          <p:cNvPr id="126" name="下箭头 125"/>
-          <p:cNvSpPr/>
-          <p:nvPr/>
-        </p:nvSpPr>
-        <p:spPr>
-          <a:xfrm>
-            <a:off x="9751453" y="4997450"/>
-            <a:ext cx="107950" cy="270000"/>
-          </a:xfrm>
-          <a:prstGeom prst="downArrow">
-            <a:avLst>
-              <a:gd name="adj1" fmla="val 31764"/>
-              <a:gd name="adj2" fmla="val 80588"/>
-            </a:avLst>
-          </a:prstGeom>
-          <a:solidFill>
-            <a:srgbClr val="C00000"/>
-          </a:solidFill>
-          <a:ln>
-            <a:solidFill>
-              <a:srgbClr val="C00000"/>
-            </a:solidFill>
-          </a:ln>
-        </p:spPr>
-        <p:style>
-          <a:lnRef idx="2">
-            <a:schemeClr val="accent1">
-              <a:lumMod val="75000"/>
-            </a:schemeClr>
-          </a:lnRef>
-          <a:fillRef idx="1">
-            <a:schemeClr val="accent1"/>
-          </a:fillRef>
-          <a:effectRef idx="0">
-            <a:srgbClr val="FFFFFF"/>
-          </a:effectRef>
-          <a:fontRef idx="minor">
-            <a:schemeClr val="lt1"/>
-          </a:fontRef>
-        </p:style>
-        <p:txBody>
-          <a:bodyPr rtlCol="0" anchor="ctr"/>
-          <a:p>
-            <a:pPr algn="ctr"/>
-            <a:endParaRPr lang="zh-CN" altLang="en-US"/>
-          </a:p>
-        </p:txBody>
-      </p:sp>
-      <p:sp>
-        <p:nvSpPr>
-          <p:cNvPr id="127" name="文本框 126"/>
-          <p:cNvSpPr txBox="1"/>
-          <p:nvPr/>
-        </p:nvSpPr>
-        <p:spPr>
-          <a:xfrm>
-            <a:off x="3580803" y="3362960"/>
-            <a:ext cx="1202055" cy="275590"/>
-          </a:xfrm>
-          <a:prstGeom prst="rect">
-            <a:avLst/>
-          </a:prstGeom>
-          <a:noFill/>
-        </p:spPr>
-        <p:txBody>
-          <a:bodyPr wrap="square" rtlCol="0">
-            <a:spAutoFit/>
-          </a:bodyPr>
-          <a:p>
-            <a:pPr algn="ctr"/>
-            <a:r>
-              <a:rPr lang="zh-CN" altLang="en-US" sz="1200" b="1"/>
-              <a:t>事件</a:t>
-            </a:r>
-            <a:r>
-              <a:rPr lang="en-US" altLang="zh-CN" sz="1200" b="1"/>
-              <a:t>   </a:t>
-            </a:r>
-            <a:r>
-              <a:rPr lang="zh-CN" altLang="en-US" sz="1200" b="1"/>
-              <a:t>触发</a:t>
-            </a:r>
-            <a:endParaRPr lang="zh-CN" altLang="en-US" sz="1200" b="1"/>
-          </a:p>
-        </p:txBody>
-      </p:sp>
-      <p:sp>
-        <p:nvSpPr>
-          <p:cNvPr id="128" name="文本框 127"/>
-          <p:cNvSpPr txBox="1"/>
-          <p:nvPr/>
-        </p:nvSpPr>
-        <p:spPr>
-          <a:xfrm>
-            <a:off x="6392620" y="3362960"/>
-            <a:ext cx="1202055" cy="275590"/>
-          </a:xfrm>
-          <a:prstGeom prst="rect">
-            <a:avLst/>
-          </a:prstGeom>
-          <a:noFill/>
-        </p:spPr>
-        <p:txBody>
-          <a:bodyPr wrap="square" rtlCol="0">
-            <a:spAutoFit/>
-          </a:bodyPr>
-          <a:p>
-            <a:pPr algn="ctr"/>
-            <a:r>
-              <a:rPr lang="zh-CN" altLang="en-US" sz="1200" b="1"/>
-              <a:t>候选</a:t>
-            </a:r>
-            <a:r>
-              <a:rPr lang="en-US" altLang="zh-CN" sz="1200" b="1"/>
-              <a:t>   </a:t>
-            </a:r>
-            <a:r>
-              <a:rPr lang="zh-CN" altLang="en-US" sz="1200" b="1"/>
-              <a:t>排序</a:t>
-            </a:r>
-            <a:endParaRPr lang="zh-CN" altLang="en-US" sz="1200" b="1"/>
-          </a:p>
-        </p:txBody>
-      </p:sp>
-      <p:sp>
-        <p:nvSpPr>
-          <p:cNvPr id="129" name="文本框 128"/>
-          <p:cNvSpPr txBox="1"/>
-          <p:nvPr/>
-        </p:nvSpPr>
-        <p:spPr>
-          <a:xfrm>
-            <a:off x="9204400" y="3386455"/>
-            <a:ext cx="1202055" cy="275590"/>
-          </a:xfrm>
-          <a:prstGeom prst="rect">
-            <a:avLst/>
-          </a:prstGeom>
-          <a:noFill/>
-        </p:spPr>
-        <p:txBody>
-          <a:bodyPr wrap="square" rtlCol="0">
-            <a:spAutoFit/>
-          </a:bodyPr>
-          <a:p>
-            <a:pPr algn="ctr"/>
-            <a:r>
-              <a:rPr lang="zh-CN" altLang="en-US" sz="1200" b="1"/>
-              <a:t>优化</a:t>
-            </a:r>
-            <a:r>
-              <a:rPr lang="en-US" altLang="zh-CN" sz="1200" b="1"/>
-              <a:t>   </a:t>
-            </a:r>
-            <a:r>
-              <a:rPr lang="zh-CN" altLang="en-US" sz="1200" b="1"/>
-              <a:t>求解</a:t>
-            </a:r>
-            <a:endParaRPr lang="zh-CN" altLang="en-US" sz="1200" b="1"/>
-          </a:p>
-        </p:txBody>
-      </p:sp>
       <p:sp>
         <p:nvSpPr>
           <p:cNvPr id="130" name="箭头: 燕尾形 1071"/>
@@ -8235,8 +6304,8 @@
         </p:nvSpPr>
         <p:spPr>
           <a:xfrm>
-            <a:off x="5393690" y="1269365"/>
-            <a:ext cx="375920" cy="443230"/>
+            <a:off x="5429885" y="2196465"/>
+            <a:ext cx="506095" cy="443230"/>
           </a:xfrm>
           <a:prstGeom prst="notchedRightArrow">
             <a:avLst>
@@ -8284,16 +6353,341 @@
           </a:p>
         </p:txBody>
       </p:sp>
-      <p:sp>
-        <p:nvSpPr>
-          <p:cNvPr id="131" name="箭头: 燕尾形 1071"/>
+      <p:pic>
+        <p:nvPicPr>
+          <p:cNvPr id="44" name="图片 43"/>
+          <p:cNvPicPr>
+            <a:picLocks noChangeAspect="1"/>
+          </p:cNvPicPr>
+          <p:nvPr/>
+        </p:nvPicPr>
+        <p:blipFill>
+          <a:blip r:embed="rId13"/>
+          <a:stretch>
+            <a:fillRect/>
+          </a:stretch>
+        </p:blipFill>
+        <p:spPr>
+          <a:xfrm>
+            <a:off x="8843010" y="2125345"/>
+            <a:ext cx="540000" cy="540000"/>
+          </a:xfrm>
+          <a:prstGeom prst="rect">
+            <a:avLst/>
+          </a:prstGeom>
+        </p:spPr>
+      </p:pic>
+      <p:sp>
+        <p:nvSpPr>
+          <p:cNvPr id="114" name="文本框 113"/>
+          <p:cNvSpPr txBox="1"/>
+          <p:nvPr/>
+        </p:nvSpPr>
+        <p:spPr>
+          <a:xfrm>
+            <a:off x="3030220" y="1438275"/>
+            <a:ext cx="2555875" cy="337185"/>
+          </a:xfrm>
+          <a:prstGeom prst="rect">
+            <a:avLst/>
+          </a:prstGeom>
+          <a:noFill/>
+        </p:spPr>
+        <p:txBody>
+          <a:bodyPr wrap="square" rtlCol="0">
+            <a:spAutoFit/>
+          </a:bodyPr>
+          <a:p>
+            <a:pPr algn="ctr"/>
+            <a:r>
+              <a:rPr lang="zh-CN" altLang="en-US" sz="1600" b="1">
+                <a:solidFill>
+                  <a:srgbClr val="C00000"/>
+                </a:solidFill>
+              </a:rPr>
+              <a:t>事件窗口构建</a:t>
+            </a:r>
+            <a:endParaRPr lang="zh-CN" altLang="en-US" sz="1600" b="1">
+              <a:solidFill>
+                <a:srgbClr val="C00000"/>
+              </a:solidFill>
+            </a:endParaRPr>
+          </a:p>
+        </p:txBody>
+      </p:sp>
+      <p:sp>
+        <p:nvSpPr>
+          <p:cNvPr id="123" name="文本框 122"/>
+          <p:cNvSpPr txBox="1"/>
+          <p:nvPr/>
+        </p:nvSpPr>
+        <p:spPr>
+          <a:xfrm>
+            <a:off x="6639243" y="1443990"/>
+            <a:ext cx="2555875" cy="337185"/>
+          </a:xfrm>
+          <a:prstGeom prst="rect">
+            <a:avLst/>
+          </a:prstGeom>
+          <a:noFill/>
+        </p:spPr>
+        <p:txBody>
+          <a:bodyPr wrap="square" rtlCol="0">
+            <a:spAutoFit/>
+          </a:bodyPr>
+          <a:p>
+            <a:pPr algn="ctr"/>
+            <a:r>
+              <a:rPr lang="zh-CN" altLang="en-US" sz="1600" b="1">
+                <a:solidFill>
+                  <a:schemeClr val="tx1"/>
+                </a:solidFill>
+              </a:rPr>
+              <a:t>存储价值</a:t>
+            </a:r>
+            <a:r>
+              <a:rPr lang="zh-CN" altLang="en-US" sz="1600" b="1">
+                <a:solidFill>
+                  <a:schemeClr val="tx1"/>
+                </a:solidFill>
+              </a:rPr>
+              <a:t>评估</a:t>
+            </a:r>
+            <a:endParaRPr lang="zh-CN" altLang="en-US" sz="1600" b="1">
+              <a:solidFill>
+                <a:schemeClr val="tx1"/>
+              </a:solidFill>
+            </a:endParaRPr>
+          </a:p>
+        </p:txBody>
+      </p:sp>
+      <p:sp>
+        <p:nvSpPr>
+          <p:cNvPr id="134" name="文本框 133"/>
+          <p:cNvSpPr txBox="1"/>
+          <p:nvPr/>
+        </p:nvSpPr>
+        <p:spPr>
+          <a:xfrm>
+            <a:off x="6639243" y="3810635"/>
+            <a:ext cx="2555875" cy="337185"/>
+          </a:xfrm>
+          <a:prstGeom prst="rect">
+            <a:avLst/>
+          </a:prstGeom>
+          <a:noFill/>
+        </p:spPr>
+        <p:txBody>
+          <a:bodyPr wrap="square" rtlCol="0">
+            <a:spAutoFit/>
+          </a:bodyPr>
+          <a:p>
+            <a:pPr algn="ctr"/>
+            <a:r>
+              <a:rPr lang="zh-CN" altLang="en-US" sz="1600" b="1">
+                <a:solidFill>
+                  <a:schemeClr val="tx1"/>
+                </a:solidFill>
+              </a:rPr>
+              <a:t>识别价值</a:t>
+            </a:r>
+            <a:r>
+              <a:rPr lang="zh-CN" altLang="en-US" sz="1600" b="1">
+                <a:solidFill>
+                  <a:schemeClr val="tx1"/>
+                </a:solidFill>
+              </a:rPr>
+              <a:t>评估</a:t>
+            </a:r>
+            <a:endParaRPr lang="zh-CN" altLang="en-US" sz="1600" b="1">
+              <a:solidFill>
+                <a:schemeClr val="tx1"/>
+              </a:solidFill>
+            </a:endParaRPr>
+          </a:p>
+        </p:txBody>
+      </p:sp>
+      <p:sp>
+        <p:nvSpPr>
+          <p:cNvPr id="138" name="箭头: 燕尾形 1071"/>
           <p:cNvSpPr/>
           <p:nvPr/>
         </p:nvSpPr>
         <p:spPr>
           <a:xfrm>
-            <a:off x="8216265" y="1269365"/>
-            <a:ext cx="375920" cy="443230"/>
+            <a:off x="9530715" y="4508500"/>
+            <a:ext cx="957580" cy="443230"/>
+          </a:xfrm>
+          <a:prstGeom prst="notchedRightArrow">
+            <a:avLst>
+              <a:gd name="adj1" fmla="val 33809"/>
+              <a:gd name="adj2" fmla="val 52390"/>
+            </a:avLst>
+          </a:prstGeom>
+          <a:gradFill>
+            <a:gsLst>
+              <a:gs pos="0">
+                <a:schemeClr val="accent1">
+                  <a:lumMod val="5000"/>
+                  <a:lumOff val="95000"/>
+                  <a:alpha val="0"/>
+                </a:schemeClr>
+              </a:gs>
+              <a:gs pos="74000">
+                <a:srgbClr val="2E54A1"/>
+              </a:gs>
+              <a:gs pos="100000">
+                <a:srgbClr val="2E54A1"/>
+              </a:gs>
+            </a:gsLst>
+            <a:lin ang="0" scaled="0"/>
+          </a:gradFill>
+          <a:ln>
+            <a:noFill/>
+          </a:ln>
+        </p:spPr>
+        <p:style>
+          <a:lnRef idx="2">
+            <a:schemeClr val="accent1">
+              <a:lumMod val="75000"/>
+            </a:schemeClr>
+          </a:lnRef>
+          <a:fillRef idx="1">
+            <a:schemeClr val="accent1"/>
+          </a:fillRef>
+          <a:effectRef idx="0">
+            <a:srgbClr val="FFFFFF"/>
+          </a:effectRef>
+          <a:fontRef idx="minor">
+            <a:schemeClr val="lt1"/>
+          </a:fontRef>
+        </p:style>
+        <p:txBody>
+          <a:bodyPr rtlCol="0" anchor="ctr"/>
+          <a:lstStyle/>
+          <a:p>
+            <a:pPr algn="ctr"/>
+            <a:endParaRPr lang="zh-CN" altLang="en-US"/>
+          </a:p>
+        </p:txBody>
+      </p:sp>
+      <p:sp>
+        <p:nvSpPr>
+          <p:cNvPr id="139" name="箭头: 燕尾形 1071"/>
+          <p:cNvSpPr/>
+          <p:nvPr/>
+        </p:nvSpPr>
+        <p:spPr>
+          <a:xfrm>
+            <a:off x="9530080" y="2155825"/>
+            <a:ext cx="958215" cy="443230"/>
+          </a:xfrm>
+          <a:prstGeom prst="notchedRightArrow">
+            <a:avLst>
+              <a:gd name="adj1" fmla="val 33809"/>
+              <a:gd name="adj2" fmla="val 52390"/>
+            </a:avLst>
+          </a:prstGeom>
+          <a:gradFill>
+            <a:gsLst>
+              <a:gs pos="0">
+                <a:schemeClr val="accent1">
+                  <a:lumMod val="5000"/>
+                  <a:lumOff val="95000"/>
+                  <a:alpha val="0"/>
+                </a:schemeClr>
+              </a:gs>
+              <a:gs pos="74000">
+                <a:srgbClr val="2E54A1"/>
+              </a:gs>
+              <a:gs pos="100000">
+                <a:srgbClr val="2E54A1"/>
+              </a:gs>
+            </a:gsLst>
+            <a:lin ang="0" scaled="0"/>
+          </a:gradFill>
+          <a:ln>
+            <a:noFill/>
+          </a:ln>
+        </p:spPr>
+        <p:style>
+          <a:lnRef idx="2">
+            <a:schemeClr val="accent1">
+              <a:lumMod val="75000"/>
+            </a:schemeClr>
+          </a:lnRef>
+          <a:fillRef idx="1">
+            <a:schemeClr val="accent1"/>
+          </a:fillRef>
+          <a:effectRef idx="0">
+            <a:srgbClr val="FFFFFF"/>
+          </a:effectRef>
+          <a:fontRef idx="minor">
+            <a:schemeClr val="lt1"/>
+          </a:fontRef>
+        </p:style>
+        <p:txBody>
+          <a:bodyPr rtlCol="0" anchor="ctr"/>
+          <a:lstStyle/>
+          <a:p>
+            <a:pPr algn="ctr"/>
+            <a:endParaRPr lang="zh-CN" altLang="en-US"/>
+          </a:p>
+        </p:txBody>
+      </p:sp>
+      <p:sp>
+        <p:nvSpPr>
+          <p:cNvPr id="140" name="文本框 139"/>
+          <p:cNvSpPr txBox="1"/>
+          <p:nvPr/>
+        </p:nvSpPr>
+        <p:spPr>
+          <a:xfrm>
+            <a:off x="9822815" y="1845945"/>
+            <a:ext cx="567055" cy="1014730"/>
+          </a:xfrm>
+          <a:prstGeom prst="rect">
+            <a:avLst/>
+          </a:prstGeom>
+          <a:noFill/>
+        </p:spPr>
+        <p:txBody>
+          <a:bodyPr wrap="square" rtlCol="0">
+            <a:spAutoFit/>
+          </a:bodyPr>
+          <a:p>
+            <a:r>
+              <a:rPr lang="zh-CN" altLang="en-US" sz="1200" b="1"/>
+              <a:t>存储</a:t>
+            </a:r>
+            <a:r>
+              <a:rPr lang="zh-CN" altLang="en-US" sz="1200" b="1"/>
+              <a:t>利用</a:t>
+            </a:r>
+            <a:endParaRPr lang="zh-CN" altLang="en-US" sz="1200" b="1"/>
+          </a:p>
+          <a:p>
+            <a:endParaRPr lang="zh-CN" altLang="en-US" sz="1200" b="1"/>
+          </a:p>
+          <a:p>
+            <a:r>
+              <a:rPr lang="zh-CN" altLang="en-US" sz="1200" b="1"/>
+              <a:t>证据窗口</a:t>
+            </a:r>
+            <a:endParaRPr lang="zh-CN" altLang="en-US" sz="1200" b="1"/>
+          </a:p>
+        </p:txBody>
+      </p:sp>
+      <p:sp>
+        <p:nvSpPr>
+          <p:cNvPr id="141" name="箭头: 燕尾形 1071"/>
+          <p:cNvSpPr/>
+          <p:nvPr/>
+        </p:nvSpPr>
+        <p:spPr>
+          <a:xfrm>
+            <a:off x="5429885" y="4589145"/>
+            <a:ext cx="515620" cy="443230"/>
           </a:xfrm>
           <a:prstGeom prst="notchedRightArrow">
             <a:avLst>
@@ -8341,24 +6735,207 @@
           </a:p>
         </p:txBody>
       </p:sp>
+      <p:sp>
+        <p:nvSpPr>
+          <p:cNvPr id="142" name="文本框 141"/>
+          <p:cNvSpPr txBox="1"/>
+          <p:nvPr/>
+        </p:nvSpPr>
+        <p:spPr>
+          <a:xfrm>
+            <a:off x="5525453" y="1835785"/>
+            <a:ext cx="567055" cy="460375"/>
+          </a:xfrm>
+          <a:prstGeom prst="rect">
+            <a:avLst/>
+          </a:prstGeom>
+          <a:noFill/>
+        </p:spPr>
+        <p:txBody>
+          <a:bodyPr wrap="square" rtlCol="0">
+            <a:spAutoFit/>
+          </a:bodyPr>
+          <a:p>
+            <a:r>
+              <a:rPr lang="zh-CN" altLang="en-US" sz="1200" b="1"/>
+              <a:t>证据窗口</a:t>
+            </a:r>
+            <a:endParaRPr lang="zh-CN" altLang="en-US" sz="1200" b="1"/>
+          </a:p>
+        </p:txBody>
+      </p:sp>
+      <p:sp>
+        <p:nvSpPr>
+          <p:cNvPr id="143" name="文本框 142"/>
+          <p:cNvSpPr txBox="1"/>
+          <p:nvPr/>
+        </p:nvSpPr>
+        <p:spPr>
+          <a:xfrm>
+            <a:off x="5525453" y="4205605"/>
+            <a:ext cx="567055" cy="460375"/>
+          </a:xfrm>
+          <a:prstGeom prst="rect">
+            <a:avLst/>
+          </a:prstGeom>
+          <a:noFill/>
+        </p:spPr>
+        <p:txBody>
+          <a:bodyPr wrap="square" rtlCol="0">
+            <a:spAutoFit/>
+          </a:bodyPr>
+          <a:p>
+            <a:r>
+              <a:rPr lang="zh-CN" altLang="en-US" sz="1200" b="1"/>
+              <a:t>证据窗口</a:t>
+            </a:r>
+            <a:endParaRPr lang="zh-CN" altLang="en-US" sz="1200" b="1"/>
+          </a:p>
+        </p:txBody>
+      </p:sp>
+      <p:grpSp>
+        <p:nvGrpSpPr>
+          <p:cNvPr id="149" name="组合 148"/>
+          <p:cNvGrpSpPr/>
+          <p:nvPr/>
+        </p:nvGrpSpPr>
+        <p:grpSpPr>
+          <a:xfrm>
+            <a:off x="6468110" y="4918075"/>
+            <a:ext cx="543600" cy="504000"/>
+            <a:chOff x="9718" y="7273"/>
+            <a:chExt cx="1058" cy="986"/>
+          </a:xfrm>
+        </p:grpSpPr>
+        <p:pic>
+          <p:nvPicPr>
+            <p:cNvPr id="150" name="图片 149"/>
+            <p:cNvPicPr>
+              <a:picLocks noChangeAspect="1"/>
+            </p:cNvPicPr>
+            <p:nvPr/>
+          </p:nvPicPr>
+          <p:blipFill>
+            <a:blip r:embed="rId9"/>
+            <a:stretch>
+              <a:fillRect/>
+            </a:stretch>
+          </p:blipFill>
+          <p:spPr>
+            <a:xfrm>
+              <a:off x="9718" y="7273"/>
+              <a:ext cx="724" cy="652"/>
+            </a:xfrm>
+            <a:prstGeom prst="rect">
+              <a:avLst/>
+            </a:prstGeom>
+          </p:spPr>
+        </p:pic>
+        <p:pic>
+          <p:nvPicPr>
+            <p:cNvPr id="151" name="图片 150"/>
+            <p:cNvPicPr>
+              <a:picLocks noChangeAspect="1"/>
+            </p:cNvPicPr>
+            <p:nvPr/>
+          </p:nvPicPr>
+          <p:blipFill>
+            <a:blip r:embed="rId9"/>
+            <a:stretch>
+              <a:fillRect/>
+            </a:stretch>
+          </p:blipFill>
+          <p:spPr>
+            <a:xfrm>
+              <a:off x="9885" y="7440"/>
+              <a:ext cx="724" cy="652"/>
+            </a:xfrm>
+            <a:prstGeom prst="rect">
+              <a:avLst/>
+            </a:prstGeom>
+          </p:spPr>
+        </p:pic>
+        <p:pic>
+          <p:nvPicPr>
+            <p:cNvPr id="152" name="图片 151"/>
+            <p:cNvPicPr>
+              <a:picLocks noChangeAspect="1"/>
+            </p:cNvPicPr>
+            <p:nvPr/>
+          </p:nvPicPr>
+          <p:blipFill>
+            <a:blip r:embed="rId9"/>
+            <a:stretch>
+              <a:fillRect/>
+            </a:stretch>
+          </p:blipFill>
+          <p:spPr>
+            <a:xfrm>
+              <a:off x="10052" y="7607"/>
+              <a:ext cx="724" cy="652"/>
+            </a:xfrm>
+            <a:prstGeom prst="rect">
+              <a:avLst/>
+            </a:prstGeom>
+          </p:spPr>
+        </p:pic>
+      </p:grpSp>
+      <p:sp>
+        <p:nvSpPr>
+          <p:cNvPr id="154" name="文本框 153"/>
+          <p:cNvSpPr txBox="1"/>
+          <p:nvPr/>
+        </p:nvSpPr>
+        <p:spPr>
+          <a:xfrm>
+            <a:off x="6001385" y="1896110"/>
+            <a:ext cx="664210" cy="460375"/>
+          </a:xfrm>
+          <a:prstGeom prst="rect">
+            <a:avLst/>
+          </a:prstGeom>
+          <a:noFill/>
+        </p:spPr>
+        <p:txBody>
+          <a:bodyPr wrap="square" rtlCol="0">
+            <a:spAutoFit/>
+          </a:bodyPr>
+          <a:p>
+            <a:pPr algn="ctr"/>
+            <a:r>
+              <a:rPr lang="zh-CN" altLang="en-US" sz="1200" b="1"/>
+              <a:t>证据</a:t>
+            </a:r>
+            <a:endParaRPr lang="zh-CN" altLang="en-US" sz="1200" b="1"/>
+          </a:p>
+          <a:p>
+            <a:pPr algn="ctr"/>
+            <a:r>
+              <a:rPr lang="zh-CN" altLang="en-US" sz="1200" b="1"/>
+              <a:t>窗口</a:t>
+            </a:r>
+            <a:endParaRPr lang="zh-CN" altLang="en-US" sz="1200" b="1"/>
+          </a:p>
+        </p:txBody>
+      </p:sp>
       <p:pic>
         <p:nvPicPr>
-          <p:cNvPr id="44" name="图片 43"/>
+          <p:cNvPr id="155" name="图片 154"/>
           <p:cNvPicPr>
             <a:picLocks noChangeAspect="1"/>
           </p:cNvPicPr>
           <p:nvPr/>
         </p:nvPicPr>
         <p:blipFill>
-          <a:blip r:embed="rId17"/>
+          <a:blip r:embed="rId14"/>
           <a:stretch>
             <a:fillRect/>
           </a:stretch>
         </p:blipFill>
         <p:spPr>
           <a:xfrm>
-            <a:off x="10113010" y="4070985"/>
-            <a:ext cx="576000" cy="576000"/>
+            <a:off x="7757160" y="2105660"/>
+            <a:ext cx="540000" cy="540000"/>
           </a:xfrm>
           <a:prstGeom prst="rect">
             <a:avLst/>
@@ -8367,14 +6944,14 @@
       </p:pic>
       <p:sp>
         <p:nvSpPr>
-          <p:cNvPr id="46" name="文本框 45"/>
+          <p:cNvPr id="156" name="文本框 155"/>
           <p:cNvSpPr txBox="1"/>
           <p:nvPr/>
         </p:nvSpPr>
         <p:spPr>
           <a:xfrm>
-            <a:off x="9838055" y="4702810"/>
-            <a:ext cx="1170305" cy="275590"/>
+            <a:off x="7592060" y="2677160"/>
+            <a:ext cx="876935" cy="275590"/>
           </a:xfrm>
           <a:prstGeom prst="rect">
             <a:avLst/>
@@ -8386,22 +6963,724 @@
             <a:spAutoFit/>
           </a:bodyPr>
           <a:p>
+            <a:r>
+              <a:rPr lang="zh-CN" altLang="en-US" sz="1200" b="1"/>
+              <a:t>覆盖</a:t>
+            </a:r>
+            <a:r>
+              <a:rPr lang="zh-CN" altLang="en-US" sz="1200" b="1"/>
+              <a:t>增益</a:t>
+            </a:r>
+            <a:endParaRPr lang="zh-CN" altLang="en-US" sz="1200" b="1"/>
+          </a:p>
+        </p:txBody>
+      </p:sp>
+      <p:sp>
+        <p:nvSpPr>
+          <p:cNvPr id="159" name="文本框 158"/>
+          <p:cNvSpPr txBox="1"/>
+          <p:nvPr/>
+        </p:nvSpPr>
+        <p:spPr>
+          <a:xfrm>
+            <a:off x="5834380" y="4215130"/>
+            <a:ext cx="1091565" cy="460375"/>
+          </a:xfrm>
+          <a:prstGeom prst="rect">
+            <a:avLst/>
+          </a:prstGeom>
+          <a:noFill/>
+        </p:spPr>
+        <p:txBody>
+          <a:bodyPr wrap="square" rtlCol="0">
+            <a:spAutoFit/>
+          </a:bodyPr>
+          <a:p>
             <a:pPr algn="ctr"/>
             <a:r>
+              <a:rPr lang="en-US" altLang="zh-CN" sz="1200" b="1"/>
+              <a:t>PU</a:t>
+            </a:r>
+            <a:r>
               <a:rPr lang="zh-CN" altLang="en-US" sz="1200" b="1"/>
-              <a:t>索引</a:t>
-            </a:r>
+              <a:t>风险</a:t>
+            </a:r>
+            <a:endParaRPr lang="zh-CN" altLang="en-US" sz="1200" b="1"/>
+          </a:p>
+          <a:p>
+            <a:pPr algn="ctr"/>
             <a:r>
               <a:rPr lang="zh-CN" altLang="en-US" sz="1200" b="1"/>
-              <a:t>子集</a:t>
+              <a:t>学习</a:t>
             </a:r>
             <a:endParaRPr lang="zh-CN" altLang="en-US" sz="1200" b="1"/>
+          </a:p>
+        </p:txBody>
+      </p:sp>
+      <p:sp>
+        <p:nvSpPr>
+          <p:cNvPr id="164" name="文本框 163"/>
+          <p:cNvSpPr txBox="1"/>
+          <p:nvPr/>
+        </p:nvSpPr>
+        <p:spPr>
+          <a:xfrm>
+            <a:off x="8363585" y="4524693"/>
+            <a:ext cx="651510" cy="275590"/>
+          </a:xfrm>
+          <a:prstGeom prst="rect">
+            <a:avLst/>
+          </a:prstGeom>
+          <a:noFill/>
+        </p:spPr>
+        <p:txBody>
+          <a:bodyPr wrap="square" rtlCol="0">
+            <a:spAutoFit/>
+          </a:bodyPr>
+          <a:p>
+            <a:r>
+              <a:rPr lang="zh-CN" altLang="en-US" sz="1200" b="1"/>
+              <a:t>评估</a:t>
+            </a:r>
+            <a:endParaRPr lang="zh-CN" altLang="en-US" sz="1200" b="1"/>
+          </a:p>
+        </p:txBody>
+      </p:sp>
+      <p:sp>
+        <p:nvSpPr>
+          <p:cNvPr id="165" name="下箭头 164"/>
+          <p:cNvSpPr/>
+          <p:nvPr/>
+        </p:nvSpPr>
+        <p:spPr>
+          <a:xfrm rot="16200000">
+            <a:off x="8558910" y="4613020"/>
+            <a:ext cx="90000" cy="360000"/>
+          </a:xfrm>
+          <a:prstGeom prst="downArrow">
+            <a:avLst>
+              <a:gd name="adj1" fmla="val 31764"/>
+              <a:gd name="adj2" fmla="val 153760"/>
+            </a:avLst>
+          </a:prstGeom>
+          <a:solidFill>
+            <a:schemeClr val="tx1"/>
+          </a:solidFill>
+          <a:ln>
+            <a:solidFill>
+              <a:schemeClr val="tx1"/>
+            </a:solidFill>
+          </a:ln>
+        </p:spPr>
+        <p:style>
+          <a:lnRef idx="2">
+            <a:schemeClr val="accent1">
+              <a:lumMod val="75000"/>
+            </a:schemeClr>
+          </a:lnRef>
+          <a:fillRef idx="1">
+            <a:schemeClr val="accent1"/>
+          </a:fillRef>
+          <a:effectRef idx="0">
+            <a:srgbClr val="FFFFFF"/>
+          </a:effectRef>
+          <a:fontRef idx="minor">
+            <a:schemeClr val="lt1"/>
+          </a:fontRef>
+        </p:style>
+        <p:txBody>
+          <a:bodyPr rIns="36195" rtlCol="0" anchor="ctr"/>
+          <a:p>
+            <a:pPr algn="ctr"/>
+            <a:endParaRPr lang="zh-CN" altLang="en-US"/>
+          </a:p>
+        </p:txBody>
+      </p:sp>
+      <p:pic>
+        <p:nvPicPr>
+          <p:cNvPr id="166" name="图片 165"/>
+          <p:cNvPicPr/>
+          <p:nvPr/>
+        </p:nvPicPr>
+        <p:blipFill>
+          <a:blip r:embed="rId15"/>
+          <a:stretch>
+            <a:fillRect/>
+          </a:stretch>
+        </p:blipFill>
+        <p:spPr>
+          <a:xfrm>
+            <a:off x="8849995" y="4368800"/>
+            <a:ext cx="540000" cy="540000"/>
+          </a:xfrm>
+          <a:prstGeom prst="rect">
+            <a:avLst/>
+          </a:prstGeom>
+        </p:spPr>
+      </p:pic>
+      <p:sp>
+        <p:nvSpPr>
+          <p:cNvPr id="167" name="文本框 166"/>
+          <p:cNvSpPr txBox="1"/>
+          <p:nvPr/>
+        </p:nvSpPr>
+        <p:spPr>
+          <a:xfrm>
+            <a:off x="8719820" y="4935855"/>
+            <a:ext cx="876935" cy="275590"/>
+          </a:xfrm>
+          <a:prstGeom prst="rect">
+            <a:avLst/>
+          </a:prstGeom>
+          <a:noFill/>
+        </p:spPr>
+        <p:txBody>
+          <a:bodyPr wrap="square" rtlCol="0">
+            <a:spAutoFit/>
+          </a:bodyPr>
+          <a:p>
+            <a:r>
+              <a:rPr lang="zh-CN" altLang="en-US" sz="1200" b="1"/>
+              <a:t>识别价值</a:t>
+            </a:r>
+            <a:endParaRPr lang="zh-CN" altLang="en-US" sz="1200" b="1"/>
+          </a:p>
+        </p:txBody>
+      </p:sp>
+      <p:sp>
+        <p:nvSpPr>
+          <p:cNvPr id="168" name="矩形 167"/>
+          <p:cNvSpPr/>
+          <p:nvPr/>
+        </p:nvSpPr>
+        <p:spPr>
+          <a:xfrm>
+            <a:off x="7847035" y="4374515"/>
+            <a:ext cx="576000" cy="36000"/>
+          </a:xfrm>
+          <a:prstGeom prst="rect">
+            <a:avLst/>
+          </a:prstGeom>
+          <a:solidFill>
+            <a:schemeClr val="tx1"/>
+          </a:solidFill>
+        </p:spPr>
+        <p:style>
+          <a:lnRef idx="2">
+            <a:schemeClr val="accent1">
+              <a:lumMod val="75000"/>
+            </a:schemeClr>
+          </a:lnRef>
+          <a:fillRef idx="1">
+            <a:schemeClr val="accent1"/>
+          </a:fillRef>
+          <a:effectRef idx="0">
+            <a:srgbClr val="FFFFFF"/>
+          </a:effectRef>
+          <a:fontRef idx="minor">
+            <a:schemeClr val="lt1"/>
+          </a:fontRef>
+        </p:style>
+        <p:txBody>
+          <a:bodyPr rtlCol="0" anchor="ctr"/>
+          <a:p>
+            <a:pPr algn="ctr"/>
+            <a:endParaRPr lang="zh-CN" altLang="en-US"/>
+          </a:p>
+        </p:txBody>
+      </p:sp>
+      <p:sp>
+        <p:nvSpPr>
+          <p:cNvPr id="169" name="矩形 168"/>
+          <p:cNvSpPr/>
+          <p:nvPr/>
+        </p:nvSpPr>
+        <p:spPr>
+          <a:xfrm>
+            <a:off x="8027035" y="5166360"/>
+            <a:ext cx="396000" cy="36000"/>
+          </a:xfrm>
+          <a:prstGeom prst="rect">
+            <a:avLst/>
+          </a:prstGeom>
+          <a:solidFill>
+            <a:schemeClr val="tx1"/>
+          </a:solidFill>
+        </p:spPr>
+        <p:style>
+          <a:lnRef idx="2">
+            <a:schemeClr val="accent1">
+              <a:lumMod val="75000"/>
+            </a:schemeClr>
+          </a:lnRef>
+          <a:fillRef idx="1">
+            <a:schemeClr val="accent1"/>
+          </a:fillRef>
+          <a:effectRef idx="0">
+            <a:srgbClr val="FFFFFF"/>
+          </a:effectRef>
+          <a:fontRef idx="minor">
+            <a:schemeClr val="lt1"/>
+          </a:fontRef>
+        </p:style>
+        <p:txBody>
+          <a:bodyPr rtlCol="0" anchor="ctr"/>
+          <a:p>
+            <a:pPr algn="ctr"/>
+            <a:endParaRPr lang="zh-CN" altLang="en-US"/>
+          </a:p>
+        </p:txBody>
+      </p:sp>
+      <p:sp>
+        <p:nvSpPr>
+          <p:cNvPr id="170" name="矩形 169"/>
+          <p:cNvSpPr/>
+          <p:nvPr/>
+        </p:nvSpPr>
+        <p:spPr>
+          <a:xfrm rot="16200000">
+            <a:off x="8009035" y="4775020"/>
+            <a:ext cx="792000" cy="36000"/>
+          </a:xfrm>
+          <a:prstGeom prst="rect">
+            <a:avLst/>
+          </a:prstGeom>
+          <a:solidFill>
+            <a:schemeClr val="tx1"/>
+          </a:solidFill>
+          <a:ln>
+            <a:solidFill>
+              <a:schemeClr val="tx1"/>
+            </a:solidFill>
+          </a:ln>
+        </p:spPr>
+        <p:style>
+          <a:lnRef idx="2">
+            <a:schemeClr val="accent1">
+              <a:lumMod val="75000"/>
+            </a:schemeClr>
+          </a:lnRef>
+          <a:fillRef idx="1">
+            <a:schemeClr val="accent1"/>
+          </a:fillRef>
+          <a:effectRef idx="0">
+            <a:srgbClr val="FFFFFF"/>
+          </a:effectRef>
+          <a:fontRef idx="minor">
+            <a:schemeClr val="lt1"/>
+          </a:fontRef>
+        </p:style>
+        <p:txBody>
+          <a:bodyPr rtlCol="0" anchor="ctr"/>
+          <a:p>
+            <a:pPr algn="ctr"/>
+            <a:endParaRPr lang="zh-CN" altLang="en-US"/>
+          </a:p>
+        </p:txBody>
+      </p:sp>
+      <p:sp>
+        <p:nvSpPr>
+          <p:cNvPr id="171" name="文本框 170"/>
+          <p:cNvSpPr txBox="1"/>
+          <p:nvPr/>
+        </p:nvSpPr>
+        <p:spPr>
+          <a:xfrm>
+            <a:off x="8606155" y="2677160"/>
+            <a:ext cx="1141730" cy="275590"/>
+          </a:xfrm>
+          <a:prstGeom prst="rect">
+            <a:avLst/>
+          </a:prstGeom>
+          <a:noFill/>
+        </p:spPr>
+        <p:txBody>
+          <a:bodyPr wrap="square" rtlCol="0">
+            <a:spAutoFit/>
+          </a:bodyPr>
+          <a:p>
+            <a:r>
+              <a:rPr lang="zh-CN" altLang="en-US" sz="1200" b="1"/>
+              <a:t>联合约束</a:t>
+            </a:r>
+            <a:r>
+              <a:rPr lang="zh-CN" altLang="en-US" sz="1200" b="1"/>
+              <a:t>优化</a:t>
+            </a:r>
+            <a:endParaRPr lang="zh-CN" altLang="en-US" sz="1200" b="1"/>
+          </a:p>
+        </p:txBody>
+      </p:sp>
+      <p:sp>
+        <p:nvSpPr>
+          <p:cNvPr id="172" name="矩形 171"/>
+          <p:cNvSpPr/>
+          <p:nvPr/>
+        </p:nvSpPr>
+        <p:spPr>
+          <a:xfrm>
+            <a:off x="7216480" y="2075180"/>
+            <a:ext cx="180000" cy="36000"/>
+          </a:xfrm>
+          <a:prstGeom prst="rect">
+            <a:avLst/>
+          </a:prstGeom>
+          <a:solidFill>
+            <a:schemeClr val="tx1"/>
+          </a:solidFill>
+        </p:spPr>
+        <p:style>
+          <a:lnRef idx="2">
+            <a:schemeClr val="accent1">
+              <a:lumMod val="75000"/>
+            </a:schemeClr>
+          </a:lnRef>
+          <a:fillRef idx="1">
+            <a:schemeClr val="accent1"/>
+          </a:fillRef>
+          <a:effectRef idx="0">
+            <a:srgbClr val="FFFFFF"/>
+          </a:effectRef>
+          <a:fontRef idx="minor">
+            <a:schemeClr val="lt1"/>
+          </a:fontRef>
+        </p:style>
+        <p:txBody>
+          <a:bodyPr rtlCol="0" anchor="ctr"/>
+          <a:p>
+            <a:pPr algn="ctr"/>
+            <a:endParaRPr lang="zh-CN" altLang="en-US"/>
+          </a:p>
+        </p:txBody>
+      </p:sp>
+      <p:sp>
+        <p:nvSpPr>
+          <p:cNvPr id="173" name="矩形 172"/>
+          <p:cNvSpPr/>
+          <p:nvPr/>
+        </p:nvSpPr>
+        <p:spPr>
+          <a:xfrm>
+            <a:off x="7216480" y="2927985"/>
+            <a:ext cx="180000" cy="36000"/>
+          </a:xfrm>
+          <a:prstGeom prst="rect">
+            <a:avLst/>
+          </a:prstGeom>
+          <a:solidFill>
+            <a:schemeClr val="tx1"/>
+          </a:solidFill>
+        </p:spPr>
+        <p:style>
+          <a:lnRef idx="2">
+            <a:schemeClr val="accent1">
+              <a:lumMod val="75000"/>
+            </a:schemeClr>
+          </a:lnRef>
+          <a:fillRef idx="1">
+            <a:schemeClr val="accent1"/>
+          </a:fillRef>
+          <a:effectRef idx="0">
+            <a:srgbClr val="FFFFFF"/>
+          </a:effectRef>
+          <a:fontRef idx="minor">
+            <a:schemeClr val="lt1"/>
+          </a:fontRef>
+        </p:style>
+        <p:txBody>
+          <a:bodyPr rtlCol="0" anchor="ctr"/>
+          <a:p>
+            <a:pPr algn="ctr"/>
+            <a:endParaRPr lang="zh-CN" altLang="en-US"/>
+          </a:p>
+        </p:txBody>
+      </p:sp>
+      <p:sp>
+        <p:nvSpPr>
+          <p:cNvPr id="174" name="矩形 173"/>
+          <p:cNvSpPr/>
+          <p:nvPr/>
+        </p:nvSpPr>
+        <p:spPr>
+          <a:xfrm rot="16200000">
+            <a:off x="6964480" y="2485625"/>
+            <a:ext cx="828000" cy="36000"/>
+          </a:xfrm>
+          <a:prstGeom prst="rect">
+            <a:avLst/>
+          </a:prstGeom>
+          <a:solidFill>
+            <a:schemeClr val="tx1"/>
+          </a:solidFill>
+          <a:ln>
+            <a:solidFill>
+              <a:schemeClr val="tx1"/>
+            </a:solidFill>
+          </a:ln>
+        </p:spPr>
+        <p:style>
+          <a:lnRef idx="2">
+            <a:schemeClr val="accent1">
+              <a:lumMod val="75000"/>
+            </a:schemeClr>
+          </a:lnRef>
+          <a:fillRef idx="1">
+            <a:schemeClr val="accent1"/>
+          </a:fillRef>
+          <a:effectRef idx="0">
+            <a:srgbClr val="FFFFFF"/>
+          </a:effectRef>
+          <a:fontRef idx="minor">
+            <a:schemeClr val="lt1"/>
+          </a:fontRef>
+        </p:style>
+        <p:txBody>
+          <a:bodyPr rtlCol="0" anchor="ctr"/>
+          <a:p>
+            <a:pPr algn="ctr"/>
+            <a:endParaRPr lang="zh-CN" altLang="en-US"/>
+          </a:p>
+        </p:txBody>
+      </p:sp>
+      <p:sp>
+        <p:nvSpPr>
+          <p:cNvPr id="177" name="文本框 176"/>
+          <p:cNvSpPr txBox="1"/>
+          <p:nvPr/>
+        </p:nvSpPr>
+        <p:spPr>
+          <a:xfrm>
+            <a:off x="7327265" y="2208848"/>
+            <a:ext cx="651510" cy="275590"/>
+          </a:xfrm>
+          <a:prstGeom prst="rect">
+            <a:avLst/>
+          </a:prstGeom>
+          <a:noFill/>
+        </p:spPr>
+        <p:txBody>
+          <a:bodyPr wrap="square" rtlCol="0">
+            <a:spAutoFit/>
+          </a:bodyPr>
+          <a:p>
+            <a:r>
+              <a:rPr lang="zh-CN" altLang="en-US" sz="1200" b="1"/>
+              <a:t>评估</a:t>
+            </a:r>
+            <a:endParaRPr lang="zh-CN" altLang="en-US" sz="1200" b="1"/>
+          </a:p>
+        </p:txBody>
+      </p:sp>
+      <p:sp>
+        <p:nvSpPr>
+          <p:cNvPr id="178" name="下箭头 177"/>
+          <p:cNvSpPr/>
+          <p:nvPr/>
+        </p:nvSpPr>
+        <p:spPr>
+          <a:xfrm rot="16200000">
+            <a:off x="7536560" y="2323625"/>
+            <a:ext cx="90000" cy="360000"/>
+          </a:xfrm>
+          <a:prstGeom prst="downArrow">
+            <a:avLst>
+              <a:gd name="adj1" fmla="val 31764"/>
+              <a:gd name="adj2" fmla="val 80588"/>
+            </a:avLst>
+          </a:prstGeom>
+          <a:solidFill>
+            <a:schemeClr val="tx1"/>
+          </a:solidFill>
+          <a:ln>
+            <a:solidFill>
+              <a:schemeClr val="tx1"/>
+            </a:solidFill>
+          </a:ln>
+        </p:spPr>
+        <p:style>
+          <a:lnRef idx="2">
+            <a:schemeClr val="accent1">
+              <a:lumMod val="75000"/>
+            </a:schemeClr>
+          </a:lnRef>
+          <a:fillRef idx="1">
+            <a:schemeClr val="accent1"/>
+          </a:fillRef>
+          <a:effectRef idx="0">
+            <a:srgbClr val="FFFFFF"/>
+          </a:effectRef>
+          <a:fontRef idx="minor">
+            <a:schemeClr val="lt1"/>
+          </a:fontRef>
+        </p:style>
+        <p:txBody>
+          <a:bodyPr rIns="36195" rtlCol="0" anchor="ctr"/>
+          <a:p>
+            <a:pPr algn="ctr"/>
+            <a:endParaRPr lang="zh-CN" altLang="en-US"/>
+          </a:p>
+        </p:txBody>
+      </p:sp>
+      <p:sp>
+        <p:nvSpPr>
+          <p:cNvPr id="179" name="下箭头 178"/>
+          <p:cNvSpPr/>
+          <p:nvPr/>
+        </p:nvSpPr>
+        <p:spPr>
+          <a:xfrm rot="16200000">
+            <a:off x="8484615" y="2323625"/>
+            <a:ext cx="90000" cy="360000"/>
+          </a:xfrm>
+          <a:prstGeom prst="downArrow">
+            <a:avLst>
+              <a:gd name="adj1" fmla="val 31764"/>
+              <a:gd name="adj2" fmla="val 136827"/>
+            </a:avLst>
+          </a:prstGeom>
+          <a:solidFill>
+            <a:schemeClr val="tx1"/>
+          </a:solidFill>
+          <a:ln>
+            <a:solidFill>
+              <a:schemeClr val="tx1"/>
+            </a:solidFill>
+          </a:ln>
+        </p:spPr>
+        <p:style>
+          <a:lnRef idx="2">
+            <a:schemeClr val="accent1">
+              <a:lumMod val="75000"/>
+            </a:schemeClr>
+          </a:lnRef>
+          <a:fillRef idx="1">
+            <a:schemeClr val="accent1"/>
+          </a:fillRef>
+          <a:effectRef idx="0">
+            <a:srgbClr val="FFFFFF"/>
+          </a:effectRef>
+          <a:fontRef idx="minor">
+            <a:schemeClr val="lt1"/>
+          </a:fontRef>
+        </p:style>
+        <p:txBody>
+          <a:bodyPr rIns="36195" rtlCol="0" anchor="ctr"/>
+          <a:p>
+            <a:pPr algn="ctr"/>
+            <a:endParaRPr lang="zh-CN" altLang="en-US"/>
+          </a:p>
+        </p:txBody>
+      </p:sp>
+      <p:sp>
+        <p:nvSpPr>
+          <p:cNvPr id="180" name="下箭头 179"/>
+          <p:cNvSpPr/>
+          <p:nvPr/>
+        </p:nvSpPr>
+        <p:spPr>
+          <a:xfrm rot="10800000">
+            <a:off x="9059925" y="3018940"/>
+            <a:ext cx="90000" cy="1296000"/>
+          </a:xfrm>
+          <a:prstGeom prst="downArrow">
+            <a:avLst>
+              <a:gd name="adj1" fmla="val 31764"/>
+              <a:gd name="adj2" fmla="val 251011"/>
+            </a:avLst>
+          </a:prstGeom>
+          <a:solidFill>
+            <a:schemeClr val="tx1"/>
+          </a:solidFill>
+          <a:ln>
+            <a:solidFill>
+              <a:schemeClr val="tx1"/>
+            </a:solidFill>
+          </a:ln>
+        </p:spPr>
+        <p:style>
+          <a:lnRef idx="2">
+            <a:schemeClr val="accent1">
+              <a:lumMod val="75000"/>
+            </a:schemeClr>
+          </a:lnRef>
+          <a:fillRef idx="1">
+            <a:schemeClr val="accent1"/>
+          </a:fillRef>
+          <a:effectRef idx="0">
+            <a:srgbClr val="FFFFFF"/>
+          </a:effectRef>
+          <a:fontRef idx="minor">
+            <a:schemeClr val="lt1"/>
+          </a:fontRef>
+        </p:style>
+        <p:txBody>
+          <a:bodyPr rIns="36195" rtlCol="0" anchor="ctr"/>
+          <a:p>
+            <a:pPr algn="ctr"/>
+            <a:endParaRPr lang="zh-CN" altLang="en-US"/>
+          </a:p>
+        </p:txBody>
+      </p:sp>
+      <p:sp>
+        <p:nvSpPr>
+          <p:cNvPr id="183" name="箭头: 燕尾形 1071"/>
+          <p:cNvSpPr/>
+          <p:nvPr/>
+        </p:nvSpPr>
+        <p:spPr>
+          <a:xfrm rot="5400000">
+            <a:off x="4062095" y="3540125"/>
+            <a:ext cx="548005" cy="443230"/>
+          </a:xfrm>
+          <a:prstGeom prst="notchedRightArrow">
+            <a:avLst>
+              <a:gd name="adj1" fmla="val 33809"/>
+              <a:gd name="adj2" fmla="val 52390"/>
+            </a:avLst>
+          </a:prstGeom>
+          <a:gradFill>
+            <a:gsLst>
+              <a:gs pos="0">
+                <a:schemeClr val="bg1"/>
+              </a:gs>
+              <a:gs pos="99000">
+                <a:srgbClr val="C00000"/>
+              </a:gs>
+            </a:gsLst>
+            <a:lin ang="0" scaled="0"/>
+          </a:gradFill>
+          <a:ln>
+            <a:noFill/>
+          </a:ln>
+        </p:spPr>
+        <p:style>
+          <a:lnRef idx="2">
+            <a:schemeClr val="accent1">
+              <a:lumMod val="75000"/>
+            </a:schemeClr>
+          </a:lnRef>
+          <a:fillRef idx="1">
+            <a:schemeClr val="accent1"/>
+          </a:fillRef>
+          <a:effectRef idx="0">
+            <a:srgbClr val="FFFFFF"/>
+          </a:effectRef>
+          <a:fontRef idx="minor">
+            <a:schemeClr val="lt1"/>
+          </a:fontRef>
+        </p:style>
+        <p:txBody>
+          <a:bodyPr rtlCol="0" anchor="ctr"/>
+          <a:lstStyle/>
+          <a:p>
+            <a:pPr algn="ctr"/>
+            <a:endParaRPr lang="zh-CN" altLang="en-US"/>
           </a:p>
         </p:txBody>
       </p:sp>
     </p:spTree>
     <p:custDataLst>
-      <p:tags r:id="rId18"/>
+      <p:tags r:id="rId16"/>
     </p:custDataLst>
   </p:cSld>
   <p:clrMapOvr>
@@ -9184,18 +8463,11 @@
 
 <file path=ppt/tags/tag63.xml><?xml version="1.0" encoding="utf-8"?>
 <p:tagLst xmlns:p="http://schemas.openxmlformats.org/presentationml/2006/main">
-  <p:tag name="TABLE_ENDDRAG_ORIGIN_RECT" val="53*52"/>
-  <p:tag name="TABLE_ENDDRAG_RECT" val="567*282*53*52"/>
+  <p:tag name="KSO_DOCER_RESOURCE_TRACE_INFO" val="{&quot;id&quot;:&quot;50062581&quot;,&quot;origin&quot;:0,&quot;type&quot;:&quot;icons&quot;,&quot;user&quot;:&quot;402383365&quot;}"/>
 </p:tagLst>
 </file>
 
 <file path=ppt/tags/tag64.xml><?xml version="1.0" encoding="utf-8"?>
-<p:tagLst xmlns:p="http://schemas.openxmlformats.org/presentationml/2006/main">
-  <p:tag name="KSO_DOCER_RESOURCE_TRACE_INFO" val="{&quot;id&quot;:&quot;50062581&quot;,&quot;origin&quot;:0,&quot;type&quot;:&quot;icons&quot;,&quot;user&quot;:&quot;402383365&quot;}"/>
-</p:tagLst>
-</file>
-
-<file path=ppt/tags/tag65.xml><?xml version="1.0" encoding="utf-8"?>
 <p:tagLst xmlns:p="http://schemas.openxmlformats.org/presentationml/2006/main">
   <p:tag name="KSO_WM_BEAUTIFY_FLAG" val="#wm#"/>
   <p:tag name="KSO_WM_TEMPLATE_CATEGORY" val="custom"/>
@@ -9204,7 +8476,7 @@
 </p:tagLst>
 </file>
 
-<file path=ppt/tags/tag66.xml><?xml version="1.0" encoding="utf-8"?>
+<file path=ppt/tags/tag65.xml><?xml version="1.0" encoding="utf-8"?>
 <p:tagLst xmlns:p="http://schemas.openxmlformats.org/presentationml/2006/main">
   <p:tag name="resource_record_key" val="{&quot;10&quot;:[50062581],&quot;65&quot;:[20205081]}"/>
 </p:tagLst>

--- a/军民融合/ppt/2A.pptx
+++ b/军民融合/ppt/2A.pptx
@@ -3378,7 +3378,7 @@
                 <a:ea typeface="微软雅黑" panose="020B0503020204020204" charset="-122"/>
                 <a:cs typeface="微软雅黑" panose="020B0503020204020204" charset="-122"/>
               </a:rPr>
-              <a:t>事件窗口驱动的频谱数据价值评估模型</a:t>
+              <a:t>事件驱动的频谱数据价值评估模型</a:t>
             </a:r>
             <a:endParaRPr lang="zh-CN" altLang="en-US" b="1" i="0" dirty="0">
               <a:effectLst/>
@@ -6489,7 +6489,7 @@
                   <a:schemeClr val="tx1"/>
                 </a:solidFill>
               </a:rPr>
-              <a:t>识别价值</a:t>
+              <a:t>数据价值</a:t>
             </a:r>
             <a:r>
               <a:rPr lang="zh-CN" altLang="en-US" sz="1600" b="1">
@@ -6965,11 +6965,7 @@
           <a:p>
             <a:r>
               <a:rPr lang="zh-CN" altLang="en-US" sz="1200" b="1"/>
-              <a:t>覆盖</a:t>
-            </a:r>
-            <a:r>
-              <a:rPr lang="zh-CN" altLang="en-US" sz="1200" b="1"/>
-              <a:t>增益</a:t>
+              <a:t>证据增益</a:t>
             </a:r>
             <a:endParaRPr lang="zh-CN" altLang="en-US" sz="1200" b="1"/>
           </a:p>
@@ -7141,7 +7137,7 @@
           <a:p>
             <a:r>
               <a:rPr lang="zh-CN" altLang="en-US" sz="1200" b="1"/>
-              <a:t>识别价值</a:t>
+              <a:t>数据价值</a:t>
             </a:r>
             <a:endParaRPr lang="zh-CN" altLang="en-US" sz="1200" b="1"/>
           </a:p>
